--- a/downloads/presentations/modules/lesson-27-public-comment-social-listening-and-community-feedback-analysis.pptx
+++ b/downloads/presentations/modules/lesson-27-public-comment-social-listening-and-community-feedback-analysis.pptx
@@ -25,9 +25,11 @@
     <p:sldId id="273" r:id="rId19"/>
     <p:sldId id="274" r:id="rId20"/>
     <p:sldId id="275" r:id="rId21"/>
+    <p:sldId id="276" r:id="rId22"/>
+    <p:sldId id="277" r:id="rId23"/>
   </p:sldIdLst>
   <p:notesMasterIdLst>
-    <p:notesMasterId r:id="rId22"/>
+    <p:notesMasterId r:id="rId24"/>
   </p:notesMasterIdLst>
   <p:sldSz cx="12192000" cy="6858000"/>
   <p:notesSz cx="6858000" cy="12192000"/>
@@ -610,10 +612,9 @@
           <a:p>
             <a:r>
               <a:rPr lang="en-US" dirty="0"/>
-              <a:t>Risks, Failure Modes, and Guardrails
-A common failure mode is treating the topic as a one-time checklist. AI risks can change when data sources, models, vendors, policies, users, or public expectations change. A guardrail is to define review intervals and change triggers.
-Another failure mode is unclear ownership. When everyone is responsible in general, no one may be responsible in practice. A guardrail is to assign an accountability owner and name escalation pathways.
-A third failure mode is relying on vendor claims or informal staff confidence without documentation. A guardrail is to require evidence artifacts that can be reviewed by governance, leadership, privacy, legal, equity, security, or program teams.</a:t>
+              <a:t>Public Health Example
+A public health agency is preparing to use AI in a workflow related to ethical analysis of public comments, social listening data, and community feedback. The project team initially treats the tool as a helpful efficiency aid, but governance reviewers recognize that the workflow may affect public trust, equity, official records, or public health action.
+The agency responds by creating a clear artifact that defines intended use, prohibited use, responsible roles, review points, documentation expectations, escalation triggers, and monitoring measures. This converts a broad AI idea into a manageable public health practice.</a:t>
             </a:r>
             <a:endParaRPr lang="en-US" dirty="0"/>
           </a:p>
@@ -701,8 +702,10 @@
           <a:p>
             <a:r>
               <a:rPr lang="en-US" dirty="0"/>
-              <a:t>Application to AI-Supported Workflows
-This topic applies across generative AI, predictive analytics, NLP, RAG, automation, and agentic workflows. The more sensitive the data, the more consequential the output, or the more automated the action, the stronger the documentation, review, and monitoring expectations should be.</a:t>
+              <a:t>Topic Deep Dive
+The first step in this topic is to define the decision or workflow clearly. Staff should identify who is affected, what data are used, what AI output is produced, who reviews the output, and what action may follow. This prevents the module from becoming abstract and anchors the work in public health practice.
+The second step is to assign responsibilities. AI-supported workflows often cross program, IT, legal, privacy, communications, procurement, and leadership boundaries. Responsibilities should be named by role rather than assumed. The artifact should specify who prepares materials, who reviews risks, who approves use, who monitors performance, and who can pause or revise the workflow.
+The third step is to define evidence. Responsible AI depends on more than policy statements. Agencies need records that show what was reviewed, what decisions were made, what safeguards were applied, what incidents occurred, and how the workflow changed over time. Evidence also supports audits, public records review, quality improvement, and leadership accountability.</a:t>
             </a:r>
             <a:endParaRPr lang="en-US" dirty="0"/>
           </a:p>
@@ -790,10 +793,10 @@
           <a:p>
             <a:r>
               <a:rPr lang="en-US" dirty="0"/>
-              <a:t>Reflection Questions
-What public health decision or workflow does this topic affect?
-Who has authority to approve or pause the work?
-What evidence would show that the workflow is responsible and effective?</a:t>
+              <a:t>Risks, Failure Modes, and Guardrails
+A common failure mode is treating the topic as a one-time checklist. AI risks can change when data sources, models, vendors, policies, users, or public expectations change. A guardrail is to define review intervals and change triggers.
+Another failure mode is unclear ownership. When everyone is responsible in general, no one may be responsible in practice. A guardrail is to assign an accountability owner and name escalation pathways.
+A third failure mode is relying on vendor claims or informal staff confidence without documentation. A guardrail is to require evidence artifacts that can be reviewed by governance, leadership, privacy, legal, equity, security, or program teams.</a:t>
             </a:r>
             <a:endParaRPr lang="en-US" dirty="0"/>
           </a:p>
@@ -881,9 +884,8 @@
           <a:p>
             <a:r>
               <a:rPr lang="en-US" dirty="0"/>
-              <a:t>Reflection Questions
-What equity, privacy, legal, security, or public trust risks require review?
-How will the agency know when the workflow needs to be revised?</a:t>
+              <a:t>Application to AI-Supported Workflows
+This topic applies across generative AI, predictive analytics, NLP, RAG, automation, and agentic workflows. The more sensitive the data, the more consequential the output, or the more automated the action, the stronger the documentation, review, and monitoring expectations should be.</a:t>
             </a:r>
             <a:endParaRPr lang="en-US" dirty="0"/>
           </a:p>
@@ -971,8 +973,10 @@
           <a:p>
             <a:r>
               <a:rPr lang="en-US" dirty="0"/>
-              <a:t>Practical Exercise
-Create a practical public comment, social listening, and community feedback analysis artifact for one AI-supported public health use case. The artifact should define the use case, affected roles, review criteria, safeguards, documentation expectations, escalation triggers, monitoring indicators, and next review date.</a:t>
+              <a:t>Reflection Questions
+What public health decision or workflow does this topic affect?
+Who has authority to approve or pause the work?
+What evidence would show that the workflow is responsible and effective?</a:t>
             </a:r>
             <a:endParaRPr lang="en-US" dirty="0"/>
           </a:p>
@@ -1060,10 +1064,9 @@
           <a:p>
             <a:r>
               <a:rPr lang="en-US" dirty="0"/>
-              <a:t>Expected Artifact or Evidence
-Public Comment, Social Listening, and Community Feedback Analysis artifact
-Role and responsibility table
-Risk and safeguard summary</a:t>
+              <a:t>Reflection Questions
+What equity, privacy, legal, security, or public trust risks require review?
+How will the agency know when the workflow needs to be revised?</a:t>
             </a:r>
             <a:endParaRPr lang="en-US" dirty="0"/>
           </a:p>
@@ -1151,9 +1154,8 @@
           <a:p>
             <a:r>
               <a:rPr lang="en-US" dirty="0"/>
-              <a:t>Expected Artifact or Evidence
-Escalation and monitoring plan
-Approval or review note</a:t>
+              <a:t>Practical Exercise
+Create a practical public comment, social listening, and community feedback analysis artifact for one AI-supported public health use case. The artifact should define the use case, affected roles, review criteria, safeguards, documentation expectations, escalation triggers, monitoring indicators, and next review date.</a:t>
             </a:r>
             <a:endParaRPr lang="en-US" dirty="0"/>
           </a:p>
@@ -1241,12 +1243,10 @@
           <a:p>
             <a:r>
               <a:rPr lang="en-US" dirty="0"/>
-              <a:t>Expected Assignment
+              <a:t>Expected Artifact or Evidence
 Public Comment, Social Listening, and Community Feedback Analysis artifact
 Role and responsibility table
-Risk and safeguard summary
-Escalation and monitoring plan
-Approval or review note</a:t>
+Risk and safeguard summary</a:t>
             </a:r>
             <a:endParaRPr lang="en-US" dirty="0"/>
           </a:p>
@@ -1334,12 +1334,9 @@
           <a:p>
             <a:r>
               <a:rPr lang="en-US" dirty="0"/>
-              <a:t>Knowledge Check
-1. What is the strongest evidence that public comment, social listening, and community feedback analysis has been applied responsibly?
-2. What is the best reason to assign an accountability owner?
-3. When should an AI-supported workflow be escalated for review?
-4. Which practice best supports public accountability?
-5. What should happen when data sources, policy, vendor configuration, or workflow use changes?</a:t>
+              <a:t>Expected Artifact or Evidence
+Escalation and monitoring plan
+Approval or review note</a:t>
             </a:r>
             <a:endParaRPr lang="en-US" dirty="0"/>
           </a:p>
@@ -1427,12 +1424,12 @@
           <a:p>
             <a:r>
               <a:rPr lang="en-US" dirty="0"/>
-              <a:t>References and Resources
-CDC Public Health Data Strategy and Data Modernization resources: https://www.cdc.gov/public-health-data-strategy/php/about/index.html
-NIST Artificial Intelligence Risk Management Framework and NIST Generative AI Profile: https://www.nist.gov/publications/artificial-intelligence-risk-management-framework-generative-artificial-intelligence
-WHO Ethics and Governance of Artificial Intelligence for Health guidance: https://www.who.int/publications/i/item/9789240029200
-OWASP Top 10 for Large Language Model Applications: https://owasp.org/www-project-top-10-for-large-language-model-applications/
-ONC health IT, interoperability, and information blocking resources: https://www.healthit.gov/</a:t>
+              <a:t>Expected Assignment
+Public Comment, Social Listening, and Community Feedback Analysis artifact
+Role and responsibility table
+Risk and safeguard summary
+Escalation and monitoring plan
+Approval or review note</a:t>
             </a:r>
             <a:endParaRPr lang="en-US" dirty="0"/>
           </a:p>
@@ -1612,8 +1609,12 @@
           <a:p>
             <a:r>
               <a:rPr lang="en-US" dirty="0"/>
-              <a:t>References and Resources
-Agency policies for privacy, public records, cybersecurity, procurement, civil rights, accessibility, language access, and emergency communications</a:t>
+              <a:t>Knowledge Check
+1. What is the strongest evidence that public comment, social listening, and community feedback analysis has been applied responsibly?
+2. What is the best reason to assign an accountability owner?
+3. When should an AI-supported workflow be escalated for review?
+4. Which practice best supports public accountability?
+5. What should happen when data sources, policy, vendor configuration, or workflow use changes?</a:t>
             </a:r>
             <a:endParaRPr lang="en-US" dirty="0"/>
           </a:p>
@@ -1637,6 +1638,188 @@
             <a:fld id="{F7021451-1387-4CA6-816F-3879F97B5CBC}" type="slidenum">
               <a:rPr lang="en-US"/>
               <a:t>20</a:t>
+            </a:fld>
+            <a:endParaRPr lang="en-US"/>
+          </a:p>
+        </p:txBody>
+      </p:sp>
+    </p:spTree>
+    <p:extLst>
+      <p:ext uri="{BB962C8B-B14F-4D97-AF65-F5344CB8AC3E}">
+        <p14:creationId xmlns:p14="http://schemas.microsoft.com/office/powerpoint/2010/main" val="1024086991"/>
+      </p:ext>
+    </p:extLst>
+  </p:cSld>
+  <p:clrMapOvr>
+    <a:masterClrMapping/>
+  </p:clrMapOvr>
+</p:notes>
+</file>
+
+<file path=ppt/notesSlides/notesSlide21.xml><?xml version="1.0" encoding="utf-8"?>
+<p:notes xmlns:a="http://schemas.openxmlformats.org/drawingml/2006/main" xmlns:r="http://schemas.openxmlformats.org/officeDocument/2006/relationships" xmlns:p="http://schemas.openxmlformats.org/presentationml/2006/main">
+  <p:cSld>
+    <p:spTree>
+      <p:nvGrpSpPr>
+        <p:cNvPr id="1" name=""/>
+        <p:cNvGrpSpPr/>
+        <p:nvPr/>
+      </p:nvGrpSpPr>
+      <p:grpSpPr>
+        <a:xfrm>
+          <a:off x="0" y="0"/>
+          <a:ext cx="0" cy="0"/>
+          <a:chOff x="0" y="0"/>
+          <a:chExt cx="0" cy="0"/>
+        </a:xfrm>
+      </p:grpSpPr>
+      <p:sp>
+        <p:nvSpPr>
+          <p:cNvPr id="2" name="Slide Image Placeholder 1"/>
+          <p:cNvSpPr>
+            <a:spLocks noGrp="1" noRot="1" noChangeAspect="1"/>
+          </p:cNvSpPr>
+          <p:nvPr>
+            <p:ph type="sldImg"/>
+          </p:nvPr>
+        </p:nvSpPr>
+        <p:spPr/>
+      </p:sp>
+      <p:sp>
+        <p:nvSpPr>
+          <p:cNvPr id="3" name="Notes Placeholder 2"/>
+          <p:cNvSpPr>
+            <a:spLocks noGrp="1"/>
+          </p:cNvSpPr>
+          <p:nvPr>
+            <p:ph type="body" idx="1"/>
+          </p:nvPr>
+        </p:nvSpPr>
+        <p:spPr/>
+        <p:txBody>
+          <a:bodyPr/>
+          <a:lstStyle/>
+          <a:p>
+            <a:r>
+              <a:rPr lang="en-US" dirty="0"/>
+              <a:t>References and Resources
+CDC Public Health Data Strategy and Data Modernization resources: https://www.cdc.gov/public-health-data-strategy/php/about/index.html
+NIST Artificial Intelligence Risk Management Framework and NIST Generative AI Profile: https://www.nist.gov/publications/artificial-intelligence-risk-management-framework-generative-artificial-intelligence
+WHO Ethics and Governance of Artificial Intelligence for Health guidance: https://www.who.int/publications/i/item/9789240029200
+OWASP Top 10 for Large Language Model Applications: https://owasp.org/www-project-top-10-for-large-language-model-applications/
+ONC health IT, interoperability, and information blocking resources: https://www.healthit.gov/</a:t>
+            </a:r>
+            <a:endParaRPr lang="en-US" dirty="0"/>
+          </a:p>
+        </p:txBody>
+      </p:sp>
+      <p:sp>
+        <p:nvSpPr>
+          <p:cNvPr id="4" name="Slide Number Placeholder 3"/>
+          <p:cNvSpPr>
+            <a:spLocks noGrp="1"/>
+          </p:cNvSpPr>
+          <p:nvPr>
+            <p:ph type="sldNum" sz="quarter" idx="10"/>
+          </p:nvPr>
+        </p:nvSpPr>
+        <p:spPr/>
+        <p:txBody>
+          <a:bodyPr/>
+          <a:lstStyle/>
+          <a:p>
+            <a:fld id="{F7021451-1387-4CA6-816F-3879F97B5CBC}" type="slidenum">
+              <a:rPr lang="en-US"/>
+              <a:t>21</a:t>
+            </a:fld>
+            <a:endParaRPr lang="en-US"/>
+          </a:p>
+        </p:txBody>
+      </p:sp>
+    </p:spTree>
+    <p:extLst>
+      <p:ext uri="{BB962C8B-B14F-4D97-AF65-F5344CB8AC3E}">
+        <p14:creationId xmlns:p14="http://schemas.microsoft.com/office/powerpoint/2010/main" val="1024086991"/>
+      </p:ext>
+    </p:extLst>
+  </p:cSld>
+  <p:clrMapOvr>
+    <a:masterClrMapping/>
+  </p:clrMapOvr>
+</p:notes>
+</file>
+
+<file path=ppt/notesSlides/notesSlide22.xml><?xml version="1.0" encoding="utf-8"?>
+<p:notes xmlns:a="http://schemas.openxmlformats.org/drawingml/2006/main" xmlns:r="http://schemas.openxmlformats.org/officeDocument/2006/relationships" xmlns:p="http://schemas.openxmlformats.org/presentationml/2006/main">
+  <p:cSld>
+    <p:spTree>
+      <p:nvGrpSpPr>
+        <p:cNvPr id="1" name=""/>
+        <p:cNvGrpSpPr/>
+        <p:nvPr/>
+      </p:nvGrpSpPr>
+      <p:grpSpPr>
+        <a:xfrm>
+          <a:off x="0" y="0"/>
+          <a:ext cx="0" cy="0"/>
+          <a:chOff x="0" y="0"/>
+          <a:chExt cx="0" cy="0"/>
+        </a:xfrm>
+      </p:grpSpPr>
+      <p:sp>
+        <p:nvSpPr>
+          <p:cNvPr id="2" name="Slide Image Placeholder 1"/>
+          <p:cNvSpPr>
+            <a:spLocks noGrp="1" noRot="1" noChangeAspect="1"/>
+          </p:cNvSpPr>
+          <p:nvPr>
+            <p:ph type="sldImg"/>
+          </p:nvPr>
+        </p:nvSpPr>
+        <p:spPr/>
+      </p:sp>
+      <p:sp>
+        <p:nvSpPr>
+          <p:cNvPr id="3" name="Notes Placeholder 2"/>
+          <p:cNvSpPr>
+            <a:spLocks noGrp="1"/>
+          </p:cNvSpPr>
+          <p:nvPr>
+            <p:ph type="body" idx="1"/>
+          </p:nvPr>
+        </p:nvSpPr>
+        <p:spPr/>
+        <p:txBody>
+          <a:bodyPr/>
+          <a:lstStyle/>
+          <a:p>
+            <a:r>
+              <a:rPr lang="en-US" dirty="0"/>
+              <a:t>References and Resources
+Agency policies for privacy, public records, cybersecurity, procurement, civil rights, accessibility, language access, and emergency communications</a:t>
+            </a:r>
+            <a:endParaRPr lang="en-US" dirty="0"/>
+          </a:p>
+        </p:txBody>
+      </p:sp>
+      <p:sp>
+        <p:nvSpPr>
+          <p:cNvPr id="4" name="Slide Number Placeholder 3"/>
+          <p:cNvSpPr>
+            <a:spLocks noGrp="1"/>
+          </p:cNvSpPr>
+          <p:nvPr>
+            <p:ph type="sldNum" sz="quarter" idx="10"/>
+          </p:nvPr>
+        </p:nvSpPr>
+        <p:spPr/>
+        <p:txBody>
+          <a:bodyPr/>
+          <a:lstStyle/>
+          <a:p>
+            <a:fld id="{F7021451-1387-4CA6-816F-3879F97B5CBC}" type="slidenum">
+              <a:rPr lang="en-US"/>
+              <a:t>22</a:t>
             </a:fld>
             <a:endParaRPr lang="en-US"/>
           </a:p>
@@ -1701,12 +1884,11 @@
           <a:p>
             <a:r>
               <a:rPr lang="en-US" dirty="0"/>
-              <a:t>Learning Objectives
-Explain the purpose of public comment, social listening, and community feedback analysis in public health AI.
-Identify the roles, decisions, risks, and documentation needed for the topic.
-Apply the topic to a real or realistic public health workflow or decision.
-Recognize equity, privacy, security, legal, operational, and public trust implications.
-Produce a practical artifact that supports readiness, governance, implementation, monitoring, or accountability.</a:t>
+              <a:t>Related Playbook Plays
+Play 1: Vision &amp; Guardrails - This lesson informs Play 1 by helping learners connect the lesson topic to vision &amp; guardrails work in the AI Playbook sequence.
+Play 11: Build and Deploy AI Solutions - This lesson informs Play 11 by helping learners connect the lesson topic to build and deploy ai solutions work in the AI Playbook.
+Play 2: Readiness Assessment - This lesson informs Play 2 by helping learners connect the lesson topic to readiness assessment work in the AI Playbook sequence.
+Play 3: Establish AI Governance - This lesson informs Play 3 by helping learners connect the lesson topic to establish ai governance work in the AI Playbook sequence.</a:t>
             </a:r>
             <a:endParaRPr lang="en-US" dirty="0"/>
           </a:p>
@@ -1794,9 +1976,13 @@
           <a:p>
             <a:r>
               <a:rPr lang="en-US" dirty="0"/>
-              <a:t>Module Overview
-This module focuses on ethical analysis of public comments, social listening data, and community feedback. It is designed for public health staff who must translate responsible AI principles into repeatable decisions, documents, workflows, and oversight practices.
-The module helps learners move beyond general awareness by producing a practical artifact that can be used in governance review, implementation planning, operations, communication, or accountability. It emphasizes paragraph-based reasoning, defined responsibilities, and documentation that can withstand public health, legal, privacy, equity, and leadership review.</a:t>
+              <a:t>Related Toolkit Resources
+Tool 1: AI Vision &amp; Principles Workshop (Workshop) - Use AI Vision &amp; Principles Workshop to translate this lesson into a documented public health AI planning, governance,.
+Tool 4: AI Policy Landscape Scan (Worksheet) - Use AI Policy Landscape Scan to translate this lesson into a documented public health AI planning, governance, implementation,.
+Tool 5: AI Environmental and Resource Impact Review (Checklist) - Use AI Environmental and Resource Impact Review to translate this lesson into a documented public health AI planning,.
+Tool 6: Human-Centered AI Decision Rule Checklist (Checklist) - Use Human-Centered AI Decision Rule Checklist to translate this lesson into a documented public health AI planning, governance,.
+Tool 8: AI Project Charter (Planning) - Use AI Project Charter to translate this lesson into a documented public health AI planning, governance, implementation, or.
+Tool 9: Data Quality Assessment Checklist (Checklist) - Use this tool to complete or strengthen the practical exercise for the module using fictional, de-identified, or generalized.</a:t>
             </a:r>
             <a:endParaRPr lang="en-US" dirty="0"/>
           </a:p>
@@ -1884,12 +2070,12 @@
           <a:p>
             <a:r>
               <a:rPr lang="en-US" dirty="0"/>
-              <a:t>Definitions
-Decision right: The authority to approve, deny, modify, pause, or escalate an AI use case or operational decision.
-Evidence artifact: A document, log, checklist, test result, approval record, or review note that demonstrates responsible AI practice.
-Escalation pathway: A defined route for raising concerns to the appropriate reviewer or decision-maker.
-Accountability owner: The person or role responsible for ensuring that an AI use case is governed, monitored, and corrected when needed.
-Operational safeguard: A procedure, control, or review step that reduces risk during day-to-day use.</a:t>
+              <a:t>Learning Objectives
+Explain the purpose of public comment, social listening, and community feedback analysis in public health AI.
+Identify the roles, decisions, risks, and documentation needed for the topic.
+Apply the topic to a real or realistic public health workflow or decision.
+Recognize equity, privacy, security, legal, operational, and public trust implications.
+Produce a practical artifact that supports readiness, governance, implementation, monitoring, or accountability.</a:t>
             </a:r>
             <a:endParaRPr lang="en-US" dirty="0"/>
           </a:p>
@@ -1977,8 +2163,9 @@
           <a:p>
             <a:r>
               <a:rPr lang="en-US" dirty="0"/>
-              <a:t>Jurisdiction and Agency Policy Note
-This module provides national-level training guidance for public health agencies and partners. It is not legal advice and does not replace review by agency legal counsel, privacy officers, procurement officials, civil rights staff, records officers, or other authorized decision-makers. Requirements may vary by state, locality, territory, Tribe, agency, funding source, data-sharing agreement, emergency authority, and organizational policy. Learners should use this module to identify the issues that require review and should confirm applicable requirements before approving, procuring, deploying, or publicly communicating about AI-supported work.</a:t>
+              <a:t>Module Overview
+This module focuses on ethical analysis of public comments, social listening data, and community feedback. It is designed for public health staff who must translate responsible AI principles into repeatable decisions, documents, workflows, and oversight practices.
+The module helps learners move beyond general awareness by producing a practical artifact that can be used in governance review, implementation planning, operations, communication, or accountability. It emphasizes paragraph-based reasoning, defined responsibilities, and documentation that can withstand public health, legal, privacy, equity, and leadership review.</a:t>
             </a:r>
             <a:endParaRPr lang="en-US" dirty="0"/>
           </a:p>
@@ -2066,9 +2253,12 @@
           <a:p>
             <a:r>
               <a:rPr lang="en-US" dirty="0"/>
-              <a:t>Why This Topic Matters for Public Health AI
-Public Comment, Social Listening, and Community Feedback Analysis matters because AI adoption changes how public health agencies make, document, communicate, and review decisions. Without a structured approach, staff may rely on informal practices, vendor assurances, or one-time approvals that do not match the operational consequences of AI-supported work.
-Public health agencies operate under legal authorities, public accountability, resource constraints, and community trust obligations. A module on this topic helps agencies define repeatable expectations before urgent situations arise. It also helps staff distinguish low-risk administrative support from uses that affect surveillance, public communications, field response, resource allocation, civil rights, privacy, or official records.</a:t>
+              <a:t>Definitions
+Decision right: The authority to approve, deny, modify, pause, or escalate an AI use case or operational decision.
+Evidence artifact: A document, log, checklist, test result, approval record, or review note that demonstrates responsible AI practice.
+Escalation pathway: A defined route for raising concerns to the appropriate reviewer or decision-maker.
+Accountability owner: The person or role responsible for ensuring that an AI use case is governed, monitored, and corrected when needed.
+Operational safeguard: A procedure, control, or review step that reduces risk during day-to-day use.</a:t>
             </a:r>
             <a:endParaRPr lang="en-US" dirty="0"/>
           </a:p>
@@ -2156,9 +2346,8 @@
           <a:p>
             <a:r>
               <a:rPr lang="en-US" dirty="0"/>
-              <a:t>Public Health Example
-A public health agency is preparing to use AI in a workflow related to ethical analysis of public comments, social listening data, and community feedback. The project team initially treats the tool as a helpful efficiency aid, but governance reviewers recognize that the workflow may affect public trust, equity, official records, or public health action.
-The agency responds by creating a clear artifact that defines intended use, prohibited use, responsible roles, review points, documentation expectations, escalation triggers, and monitoring measures. This converts a broad AI idea into a manageable public health practice.</a:t>
+              <a:t>Jurisdiction and Agency Policy Note
+This module provides national-level training guidance for public health agencies and partners. It is not legal advice and does not replace review by agency legal counsel, privacy officers, procurement officials, civil rights staff, records officers, or other authorized decision-makers. Requirements may vary by state, locality, territory, Tribe, agency, funding source, data-sharing agreement, emergency authority, and organizational policy. Learners should use this module to identify the issues that require review and should confirm applicable requirements before approving, procuring, deploying, or publicly communicating about AI-supported work.</a:t>
             </a:r>
             <a:endParaRPr lang="en-US" dirty="0"/>
           </a:p>
@@ -2246,10 +2435,9 @@
           <a:p>
             <a:r>
               <a:rPr lang="en-US" dirty="0"/>
-              <a:t>Topic Deep Dive
-The first step in this topic is to define the decision or workflow clearly. Staff should identify who is affected, what data are used, what AI output is produced, who reviews the output, and what action may follow. This prevents the module from becoming abstract and anchors the work in public health practice.
-The second step is to assign responsibilities. AI-supported workflows often cross program, IT, legal, privacy, communications, procurement, and leadership boundaries. Responsibilities should be named by role rather than assumed. The artifact should specify who prepares materials, who reviews risks, who approves use, who monitors performance, and who can pause or revise the workflow.
-The third step is to define evidence. Responsible AI depends on more than policy statements. Agencies need records that show what was reviewed, what decisions were made, what safeguards were applied, what incidents occurred, and how the workflow changed over time. Evidence also supports audits, public records review, quality improvement, and leadership accountability.</a:t>
+              <a:t>Why This Topic Matters for Public Health AI
+Public Comment, Social Listening, and Community Feedback Analysis matters because AI adoption changes how public health agencies make, document, communicate, and review decisions. Without a structured approach, staff may rely on informal practices, vendor assurances, or one-time approvals that do not match the operational consequences of AI-supported work.
+Public health agencies operate under legal authorities, public accountability, resource constraints, and community trust obligations. A module on this topic helps agencies define repeatable expectations before urgent situations arise. It also helps staff distinguish low-risk administrative support from uses that affect surveillance, public communications, field response, resource allocation, civil rights, privacy, or official records.</a:t>
             </a:r>
             <a:endParaRPr lang="en-US" dirty="0"/>
           </a:p>
@@ -2872,7 +3060,32 @@
       </p:sp>
       <p:sp>
         <p:nvSpPr>
-          <p:cNvPr id="3" name="Text 1"/>
+          <p:cNvPr id="3" name="Shape 1"/>
+          <p:cNvSpPr/>
+          <p:nvPr/>
+        </p:nvSpPr>
+        <p:spPr>
+          <a:xfrm>
+            <a:off x="0" y="164592"/>
+            <a:ext cx="146304" cy="6693408"/>
+          </a:xfrm>
+          <a:prstGeom prst="rect">
+            <a:avLst/>
+          </a:prstGeom>
+          <a:solidFill>
+            <a:srgbClr val="2F8A28"/>
+          </a:solidFill>
+          <a:ln w="12700">
+            <a:solidFill>
+              <a:srgbClr val="2F8A28"/>
+            </a:solidFill>
+            <a:prstDash val="solid"/>
+          </a:ln>
+        </p:spPr>
+      </p:sp>
+      <p:sp>
+        <p:nvSpPr>
+          <p:cNvPr id="4" name="Text 2"/>
           <p:cNvSpPr/>
           <p:nvPr/>
         </p:nvSpPr>
@@ -2911,7 +3124,7 @@
       </p:sp>
       <p:sp>
         <p:nvSpPr>
-          <p:cNvPr id="4" name="Text 2"/>
+          <p:cNvPr id="5" name="Text 3"/>
           <p:cNvSpPr/>
           <p:nvPr/>
         </p:nvSpPr>
@@ -2950,7 +3163,7 @@
       </p:sp>
       <p:sp>
         <p:nvSpPr>
-          <p:cNvPr id="5" name="Text 3"/>
+          <p:cNvPr id="6" name="Text 4"/>
           <p:cNvSpPr/>
           <p:nvPr/>
         </p:nvSpPr>
@@ -2989,13 +3202,77 @@
       </p:sp>
       <p:sp>
         <p:nvSpPr>
-          <p:cNvPr id="6" name="Text 4"/>
+          <p:cNvPr id="7" name="Shape 5"/>
           <p:cNvSpPr/>
           <p:nvPr/>
         </p:nvSpPr>
         <p:spPr>
           <a:xfrm>
             <a:off x="640080" y="658368"/>
+            <a:ext cx="420624" cy="420624"/>
+          </a:xfrm>
+          <a:prstGeom prst="ellipse">
+            <a:avLst/>
+          </a:prstGeom>
+          <a:solidFill>
+            <a:srgbClr val="0068B7"/>
+          </a:solidFill>
+          <a:ln w="12700">
+            <a:solidFill>
+              <a:srgbClr val="0068B7"/>
+            </a:solidFill>
+            <a:prstDash val="solid"/>
+          </a:ln>
+        </p:spPr>
+      </p:sp>
+      <p:sp>
+        <p:nvSpPr>
+          <p:cNvPr id="8" name="Text 6"/>
+          <p:cNvSpPr/>
+          <p:nvPr/>
+        </p:nvSpPr>
+        <p:spPr>
+          <a:xfrm>
+            <a:off x="640080" y="731520"/>
+            <a:ext cx="420624" cy="164592"/>
+          </a:xfrm>
+          <a:prstGeom prst="rect">
+            <a:avLst/>
+          </a:prstGeom>
+          <a:noFill/>
+          <a:ln/>
+        </p:spPr>
+        <p:txBody>
+          <a:bodyPr wrap="square" lIns="0" tIns="0" rIns="0" bIns="0" rtlCol="0" anchor="ctr"/>
+          <a:lstStyle/>
+          <a:p>
+            <a:pPr algn="ctr" indent="0" marL="0">
+              <a:buNone/>
+            </a:pPr>
+            <a:r>
+              <a:rPr lang="en-US" sz="1100" b="1" dirty="0">
+                <a:solidFill>
+                  <a:srgbClr val="FFFFFF"/>
+                </a:solidFill>
+                <a:latin typeface="Aptos" pitchFamily="34" charset="0"/>
+                <a:ea typeface="Aptos" pitchFamily="34" charset="-122"/>
+                <a:cs typeface="Aptos" pitchFamily="34" charset="-120"/>
+              </a:rPr>
+              <a:t>6</a:t>
+            </a:r>
+            <a:endParaRPr lang="en-US" sz="1100" dirty="0"/>
+          </a:p>
+        </p:txBody>
+      </p:sp>
+      <p:sp>
+        <p:nvSpPr>
+          <p:cNvPr id="9" name="Text 7"/>
+          <p:cNvSpPr/>
+          <p:nvPr/>
+        </p:nvSpPr>
+        <p:spPr>
+          <a:xfrm>
+            <a:off x="640080" y="621792"/>
             <a:ext cx="10881360" cy="566928"/>
           </a:xfrm>
           <a:prstGeom prst="rect">
@@ -3022,7 +3299,7 @@
                 <a:ea typeface="Aptos Display" pitchFamily="34" charset="-122"/>
                 <a:cs typeface="Aptos Display" pitchFamily="34" charset="-120"/>
               </a:rPr>
-              <a:t>Risks, Failure Modes, and Guardrails</a:t>
+              <a:t>Public Health Example</a:t>
             </a:r>
             <a:endParaRPr lang="en-US" sz="2700" dirty="0"/>
           </a:p>
@@ -3030,32 +3307,178 @@
       </p:sp>
       <p:sp>
         <p:nvSpPr>
-          <p:cNvPr id="7" name="Text 5"/>
-          <p:cNvSpPr/>
-          <p:nvPr/>
-        </p:nvSpPr>
-        <p:spPr>
-          <a:xfrm>
-            <a:off x="822960" y="1325880"/>
-            <a:ext cx="10378440" cy="4800600"/>
-          </a:xfrm>
-          <a:prstGeom prst="rect">
-            <a:avLst/>
-          </a:prstGeom>
-          <a:noFill/>
-          <a:ln/>
-        </p:spPr>
-        <p:txBody>
-          <a:bodyPr wrap="square" lIns="1016" tIns="1016" rIns="1016" bIns="1016" rtlCol="0" anchor="t">
+          <p:cNvPr id="10" name="Text 8"/>
+          <p:cNvSpPr/>
+          <p:nvPr/>
+        </p:nvSpPr>
+        <p:spPr>
+          <a:xfrm>
+            <a:off x="868680" y="1417320"/>
+            <a:ext cx="6675120" cy="4434840"/>
+          </a:xfrm>
+          <a:prstGeom prst="rect">
+            <a:avLst/>
+          </a:prstGeom>
+          <a:noFill/>
+          <a:ln/>
+        </p:spPr>
+        <p:txBody>
+          <a:bodyPr wrap="square" lIns="635" tIns="635" rIns="635" bIns="635" rtlCol="0" anchor="t">
             <a:normAutofit/>
           </a:bodyPr>
           <a:lstStyle/>
           <a:p>
+            <a:r>
+              <a:rPr lang="en-US" sz="1700" dirty="0">
+                <a:solidFill>
+                  <a:srgbClr val="17364A"/>
+                </a:solidFill>
+                <a:latin typeface="Aptos" pitchFamily="34" charset="0"/>
+                <a:ea typeface="Aptos" pitchFamily="34" charset="-122"/>
+                <a:cs typeface="Aptos" pitchFamily="34" charset="-120"/>
+              </a:rPr>
+              <a:t>A public health agency is preparing to use AI in a workflow related to ethical analysis of public comments, social.</a:t>
+            </a:r>
+            <a:endParaRPr lang="en-US" sz="1700" dirty="0"/>
+          </a:p>
+          <a:p>
+            <a:r>
+              <a:rPr lang="en-US" sz="1700" dirty="0">
+                <a:solidFill>
+                  <a:srgbClr val="17364A"/>
+                </a:solidFill>
+                <a:latin typeface="Aptos" pitchFamily="34" charset="0"/>
+                <a:ea typeface="Aptos" pitchFamily="34" charset="-122"/>
+                <a:cs typeface="Aptos" pitchFamily="34" charset="-120"/>
+              </a:rPr>
+              <a:t>The project team initially treats the tool as a helpful efficiency aid, but governance reviewers recognize that the.</a:t>
+            </a:r>
+            <a:endParaRPr lang="en-US" sz="1700" dirty="0"/>
+          </a:p>
+          <a:p>
+            <a:r>
+              <a:rPr lang="en-US" sz="1700" dirty="0">
+                <a:solidFill>
+                  <a:srgbClr val="17364A"/>
+                </a:solidFill>
+                <a:latin typeface="Aptos" pitchFamily="34" charset="0"/>
+                <a:ea typeface="Aptos" pitchFamily="34" charset="-122"/>
+                <a:cs typeface="Aptos" pitchFamily="34" charset="-120"/>
+              </a:rPr>
+              <a:t>The agency responds by creating a clear artifact that defines intended use, prohibited use, responsible roles, review.</a:t>
+            </a:r>
+            <a:endParaRPr lang="en-US" sz="1700" dirty="0"/>
+          </a:p>
+          <a:p>
+            <a:r>
+              <a:rPr lang="en-US" sz="1700" dirty="0">
+                <a:solidFill>
+                  <a:srgbClr val="17364A"/>
+                </a:solidFill>
+                <a:latin typeface="Aptos" pitchFamily="34" charset="0"/>
+                <a:ea typeface="Aptos" pitchFamily="34" charset="-122"/>
+                <a:cs typeface="Aptos" pitchFamily="34" charset="-120"/>
+              </a:rPr>
+              <a:t>This converts a broad AI idea into a manageable public health practice.</a:t>
+            </a:r>
+            <a:endParaRPr lang="en-US" sz="1700" dirty="0"/>
+          </a:p>
+        </p:txBody>
+      </p:sp>
+      <p:sp>
+        <p:nvSpPr>
+          <p:cNvPr id="11" name="Shape 9"/>
+          <p:cNvSpPr/>
+          <p:nvPr/>
+        </p:nvSpPr>
+        <p:spPr>
+          <a:xfrm>
+            <a:off x="7909560" y="1417320"/>
+            <a:ext cx="3154680" cy="1828800"/>
+          </a:xfrm>
+          <a:prstGeom prst="roundRect">
+            <a:avLst>
+              <a:gd name="adj" fmla="val 6000"/>
+            </a:avLst>
+          </a:prstGeom>
+          <a:solidFill>
+            <a:srgbClr val="EEF8ED"/>
+          </a:solidFill>
+          <a:ln w="12700">
+            <a:solidFill>
+              <a:srgbClr val="B9D7E6"/>
+            </a:solidFill>
+            <a:prstDash val="solid"/>
+          </a:ln>
+        </p:spPr>
+      </p:sp>
+      <p:sp>
+        <p:nvSpPr>
+          <p:cNvPr id="12" name="Text 10"/>
+          <p:cNvSpPr/>
+          <p:nvPr/>
+        </p:nvSpPr>
+        <p:spPr>
+          <a:xfrm>
+            <a:off x="8074152" y="1563624"/>
+            <a:ext cx="2825496" cy="201168"/>
+          </a:xfrm>
+          <a:prstGeom prst="rect">
+            <a:avLst/>
+          </a:prstGeom>
+          <a:noFill/>
+          <a:ln/>
+        </p:spPr>
+        <p:txBody>
+          <a:bodyPr wrap="square" lIns="0" tIns="0" rIns="0" bIns="0" rtlCol="0" anchor="ctr"/>
+          <a:lstStyle/>
+          <a:p>
             <a:pPr indent="0" marL="0">
               <a:buNone/>
             </a:pPr>
             <a:r>
-              <a:rPr lang="en-US" sz="1420" dirty="0">
+              <a:rPr lang="en-US" sz="950" b="1" dirty="0">
+                <a:solidFill>
+                  <a:srgbClr val="0068B7"/>
+                </a:solidFill>
+                <a:latin typeface="Aptos" pitchFamily="34" charset="0"/>
+                <a:ea typeface="Aptos" pitchFamily="34" charset="-122"/>
+                <a:cs typeface="Aptos" pitchFamily="34" charset="-120"/>
+              </a:rPr>
+              <a:t>Key idea</a:t>
+            </a:r>
+            <a:endParaRPr lang="en-US" sz="950" dirty="0"/>
+          </a:p>
+        </p:txBody>
+      </p:sp>
+      <p:sp>
+        <p:nvSpPr>
+          <p:cNvPr id="13" name="Text 11"/>
+          <p:cNvSpPr/>
+          <p:nvPr/>
+        </p:nvSpPr>
+        <p:spPr>
+          <a:xfrm>
+            <a:off x="8074152" y="1856232"/>
+            <a:ext cx="2825496" cy="1261872"/>
+          </a:xfrm>
+          <a:prstGeom prst="rect">
+            <a:avLst/>
+          </a:prstGeom>
+          <a:noFill/>
+          <a:ln/>
+        </p:spPr>
+        <p:txBody>
+          <a:bodyPr wrap="square" lIns="0" tIns="0" rIns="0" bIns="0" rtlCol="0" anchor="t">
+            <a:normAutofit/>
+          </a:bodyPr>
+          <a:lstStyle/>
+          <a:p>
+            <a:pPr indent="0" marL="0">
+              <a:buNone/>
+            </a:pPr>
+            <a:r>
+              <a:rPr lang="en-US" sz="1250" dirty="0">
                 <a:solidFill>
                   <a:srgbClr val="17364A"/>
                 </a:solidFill>
@@ -3063,9 +3486,116 @@
                 <a:ea typeface="Aptos" pitchFamily="34" charset="-122"/>
                 <a:cs typeface="Aptos" pitchFamily="34" charset="-120"/>
               </a:rPr>
-              <a:t>A common failure mode is treating the topic as a one-time checklist. AI risks can change when data sources, models, vendors, policies, users, or public expectations change. A guardrail is to define review intervals and change triggers. Another failure mode is unclear ownership. When everyone is responsible in general, no one may be responsible in practice. A guardrail is to assign an accountability owner and name escalation pathways. A third failure mode is relying on vendor claims or informal staff confidence without documentation. A guardrail is to require evidence artifacts that can be reviewed by governance, leadership, privacy, legal, equity, security, or program teams.</a:t>
-            </a:r>
-            <a:endParaRPr lang="en-US" sz="1420" dirty="0"/>
+              <a:t>A public health agency is preparing to use AI in a workflow related to ethical analysis of public comments, social.</a:t>
+            </a:r>
+            <a:endParaRPr lang="en-US" sz="1250" dirty="0"/>
+          </a:p>
+        </p:txBody>
+      </p:sp>
+      <p:sp>
+        <p:nvSpPr>
+          <p:cNvPr id="14" name="Shape 12"/>
+          <p:cNvSpPr/>
+          <p:nvPr/>
+        </p:nvSpPr>
+        <p:spPr>
+          <a:xfrm>
+            <a:off x="7909560" y="3520440"/>
+            <a:ext cx="3154680" cy="1737360"/>
+          </a:xfrm>
+          <a:prstGeom prst="roundRect">
+            <a:avLst>
+              <a:gd name="adj" fmla="val 6316"/>
+            </a:avLst>
+          </a:prstGeom>
+          <a:solidFill>
+            <a:srgbClr val="EAF6F8"/>
+          </a:solidFill>
+          <a:ln w="12700">
+            <a:solidFill>
+              <a:srgbClr val="B9D7E6"/>
+            </a:solidFill>
+            <a:prstDash val="solid"/>
+          </a:ln>
+        </p:spPr>
+      </p:sp>
+      <p:sp>
+        <p:nvSpPr>
+          <p:cNvPr id="15" name="Text 13"/>
+          <p:cNvSpPr/>
+          <p:nvPr/>
+        </p:nvSpPr>
+        <p:spPr>
+          <a:xfrm>
+            <a:off x="8074152" y="3666744"/>
+            <a:ext cx="2825496" cy="201168"/>
+          </a:xfrm>
+          <a:prstGeom prst="rect">
+            <a:avLst/>
+          </a:prstGeom>
+          <a:noFill/>
+          <a:ln/>
+        </p:spPr>
+        <p:txBody>
+          <a:bodyPr wrap="square" lIns="0" tIns="0" rIns="0" bIns="0" rtlCol="0" anchor="ctr"/>
+          <a:lstStyle/>
+          <a:p>
+            <a:pPr indent="0" marL="0">
+              <a:buNone/>
+            </a:pPr>
+            <a:r>
+              <a:rPr lang="en-US" sz="950" b="1" dirty="0">
+                <a:solidFill>
+                  <a:srgbClr val="0068B7"/>
+                </a:solidFill>
+                <a:latin typeface="Aptos" pitchFamily="34" charset="0"/>
+                <a:ea typeface="Aptos" pitchFamily="34" charset="-122"/>
+                <a:cs typeface="Aptos" pitchFamily="34" charset="-120"/>
+              </a:rPr>
+              <a:t>Use this for</a:t>
+            </a:r>
+            <a:endParaRPr lang="en-US" sz="950" dirty="0"/>
+          </a:p>
+        </p:txBody>
+      </p:sp>
+      <p:sp>
+        <p:nvSpPr>
+          <p:cNvPr id="16" name="Text 14"/>
+          <p:cNvSpPr/>
+          <p:nvPr/>
+        </p:nvSpPr>
+        <p:spPr>
+          <a:xfrm>
+            <a:off x="8074152" y="3959352"/>
+            <a:ext cx="2825496" cy="1170432"/>
+          </a:xfrm>
+          <a:prstGeom prst="rect">
+            <a:avLst/>
+          </a:prstGeom>
+          <a:noFill/>
+          <a:ln/>
+        </p:spPr>
+        <p:txBody>
+          <a:bodyPr wrap="square" lIns="0" tIns="0" rIns="0" bIns="0" rtlCol="0" anchor="t">
+            <a:normAutofit/>
+          </a:bodyPr>
+          <a:lstStyle/>
+          <a:p>
+            <a:pPr indent="0" marL="0">
+              <a:buNone/>
+            </a:pPr>
+            <a:r>
+              <a:rPr lang="en-US" sz="1250" dirty="0">
+                <a:solidFill>
+                  <a:srgbClr val="17364A"/>
+                </a:solidFill>
+                <a:latin typeface="Aptos" pitchFamily="34" charset="0"/>
+                <a:ea typeface="Aptos" pitchFamily="34" charset="-122"/>
+                <a:cs typeface="Aptos" pitchFamily="34" charset="-120"/>
+              </a:rPr>
+              <a:t>Connect the concept to public health decisions, safeguards, documentation, or implementation work.</a:t>
+            </a:r>
+            <a:endParaRPr lang="en-US" sz="1250" dirty="0"/>
           </a:p>
         </p:txBody>
       </p:sp>
@@ -3128,7 +3658,32 @@
       </p:sp>
       <p:sp>
         <p:nvSpPr>
-          <p:cNvPr id="3" name="Text 1"/>
+          <p:cNvPr id="3" name="Shape 1"/>
+          <p:cNvSpPr/>
+          <p:nvPr/>
+        </p:nvSpPr>
+        <p:spPr>
+          <a:xfrm>
+            <a:off x="0" y="164592"/>
+            <a:ext cx="146304" cy="6693408"/>
+          </a:xfrm>
+          <a:prstGeom prst="rect">
+            <a:avLst/>
+          </a:prstGeom>
+          <a:solidFill>
+            <a:srgbClr val="2F8A28"/>
+          </a:solidFill>
+          <a:ln w="12700">
+            <a:solidFill>
+              <a:srgbClr val="2F8A28"/>
+            </a:solidFill>
+            <a:prstDash val="solid"/>
+          </a:ln>
+        </p:spPr>
+      </p:sp>
+      <p:sp>
+        <p:nvSpPr>
+          <p:cNvPr id="4" name="Text 2"/>
           <p:cNvSpPr/>
           <p:nvPr/>
         </p:nvSpPr>
@@ -3167,7 +3722,7 @@
       </p:sp>
       <p:sp>
         <p:nvSpPr>
-          <p:cNvPr id="4" name="Text 2"/>
+          <p:cNvPr id="5" name="Text 3"/>
           <p:cNvSpPr/>
           <p:nvPr/>
         </p:nvSpPr>
@@ -3206,7 +3761,7 @@
       </p:sp>
       <p:sp>
         <p:nvSpPr>
-          <p:cNvPr id="5" name="Text 3"/>
+          <p:cNvPr id="6" name="Text 4"/>
           <p:cNvSpPr/>
           <p:nvPr/>
         </p:nvSpPr>
@@ -3245,13 +3800,77 @@
       </p:sp>
       <p:sp>
         <p:nvSpPr>
-          <p:cNvPr id="6" name="Text 4"/>
+          <p:cNvPr id="7" name="Shape 5"/>
           <p:cNvSpPr/>
           <p:nvPr/>
         </p:nvSpPr>
         <p:spPr>
           <a:xfrm>
             <a:off x="640080" y="658368"/>
+            <a:ext cx="420624" cy="420624"/>
+          </a:xfrm>
+          <a:prstGeom prst="ellipse">
+            <a:avLst/>
+          </a:prstGeom>
+          <a:solidFill>
+            <a:srgbClr val="0068B7"/>
+          </a:solidFill>
+          <a:ln w="12700">
+            <a:solidFill>
+              <a:srgbClr val="0068B7"/>
+            </a:solidFill>
+            <a:prstDash val="solid"/>
+          </a:ln>
+        </p:spPr>
+      </p:sp>
+      <p:sp>
+        <p:nvSpPr>
+          <p:cNvPr id="8" name="Text 6"/>
+          <p:cNvSpPr/>
+          <p:nvPr/>
+        </p:nvSpPr>
+        <p:spPr>
+          <a:xfrm>
+            <a:off x="640080" y="731520"/>
+            <a:ext cx="420624" cy="164592"/>
+          </a:xfrm>
+          <a:prstGeom prst="rect">
+            <a:avLst/>
+          </a:prstGeom>
+          <a:noFill/>
+          <a:ln/>
+        </p:spPr>
+        <p:txBody>
+          <a:bodyPr wrap="square" lIns="0" tIns="0" rIns="0" bIns="0" rtlCol="0" anchor="ctr"/>
+          <a:lstStyle/>
+          <a:p>
+            <a:pPr algn="ctr" indent="0" marL="0">
+              <a:buNone/>
+            </a:pPr>
+            <a:r>
+              <a:rPr lang="en-US" sz="1100" b="1" dirty="0">
+                <a:solidFill>
+                  <a:srgbClr val="FFFFFF"/>
+                </a:solidFill>
+                <a:latin typeface="Aptos" pitchFamily="34" charset="0"/>
+                <a:ea typeface="Aptos" pitchFamily="34" charset="-122"/>
+                <a:cs typeface="Aptos" pitchFamily="34" charset="-120"/>
+              </a:rPr>
+              <a:t>7</a:t>
+            </a:r>
+            <a:endParaRPr lang="en-US" sz="1100" dirty="0"/>
+          </a:p>
+        </p:txBody>
+      </p:sp>
+      <p:sp>
+        <p:nvSpPr>
+          <p:cNvPr id="9" name="Text 7"/>
+          <p:cNvSpPr/>
+          <p:nvPr/>
+        </p:nvSpPr>
+        <p:spPr>
+          <a:xfrm>
+            <a:off x="640080" y="621792"/>
             <a:ext cx="10881360" cy="566928"/>
           </a:xfrm>
           <a:prstGeom prst="rect">
@@ -3278,7 +3897,7 @@
                 <a:ea typeface="Aptos Display" pitchFamily="34" charset="-122"/>
                 <a:cs typeface="Aptos Display" pitchFamily="34" charset="-120"/>
               </a:rPr>
-              <a:t>Application to AI-Supported Workflows</a:t>
+              <a:t>Topic Deep Dive</a:t>
             </a:r>
             <a:endParaRPr lang="en-US" sz="2700" dirty="0"/>
           </a:p>
@@ -3286,32 +3905,178 @@
       </p:sp>
       <p:sp>
         <p:nvSpPr>
-          <p:cNvPr id="7" name="Text 5"/>
-          <p:cNvSpPr/>
-          <p:nvPr/>
-        </p:nvSpPr>
-        <p:spPr>
-          <a:xfrm>
-            <a:off x="822960" y="1325880"/>
-            <a:ext cx="10378440" cy="4800600"/>
-          </a:xfrm>
-          <a:prstGeom prst="rect">
-            <a:avLst/>
-          </a:prstGeom>
-          <a:noFill/>
-          <a:ln/>
-        </p:spPr>
-        <p:txBody>
-          <a:bodyPr wrap="square" lIns="1016" tIns="1016" rIns="1016" bIns="1016" rtlCol="0" anchor="t">
+          <p:cNvPr id="10" name="Text 8"/>
+          <p:cNvSpPr/>
+          <p:nvPr/>
+        </p:nvSpPr>
+        <p:spPr>
+          <a:xfrm>
+            <a:off x="868680" y="1417320"/>
+            <a:ext cx="6675120" cy="4434840"/>
+          </a:xfrm>
+          <a:prstGeom prst="rect">
+            <a:avLst/>
+          </a:prstGeom>
+          <a:noFill/>
+          <a:ln/>
+        </p:spPr>
+        <p:txBody>
+          <a:bodyPr wrap="square" lIns="635" tIns="635" rIns="635" bIns="635" rtlCol="0" anchor="t">
             <a:normAutofit/>
           </a:bodyPr>
           <a:lstStyle/>
           <a:p>
+            <a:r>
+              <a:rPr lang="en-US" sz="1700" dirty="0">
+                <a:solidFill>
+                  <a:srgbClr val="17364A"/>
+                </a:solidFill>
+                <a:latin typeface="Aptos" pitchFamily="34" charset="0"/>
+                <a:ea typeface="Aptos" pitchFamily="34" charset="-122"/>
+                <a:cs typeface="Aptos" pitchFamily="34" charset="-120"/>
+              </a:rPr>
+              <a:t>The first step in this topic is to define the decision or workflow clearly.</a:t>
+            </a:r>
+            <a:endParaRPr lang="en-US" sz="1700" dirty="0"/>
+          </a:p>
+          <a:p>
+            <a:r>
+              <a:rPr lang="en-US" sz="1700" dirty="0">
+                <a:solidFill>
+                  <a:srgbClr val="17364A"/>
+                </a:solidFill>
+                <a:latin typeface="Aptos" pitchFamily="34" charset="0"/>
+                <a:ea typeface="Aptos" pitchFamily="34" charset="-122"/>
+                <a:cs typeface="Aptos" pitchFamily="34" charset="-120"/>
+              </a:rPr>
+              <a:t>Staff should identify who is affected, what data are used, what AI output is produced, who reviews the output, and what.</a:t>
+            </a:r>
+            <a:endParaRPr lang="en-US" sz="1700" dirty="0"/>
+          </a:p>
+          <a:p>
+            <a:r>
+              <a:rPr lang="en-US" sz="1700" dirty="0">
+                <a:solidFill>
+                  <a:srgbClr val="17364A"/>
+                </a:solidFill>
+                <a:latin typeface="Aptos" pitchFamily="34" charset="0"/>
+                <a:ea typeface="Aptos" pitchFamily="34" charset="-122"/>
+                <a:cs typeface="Aptos" pitchFamily="34" charset="-120"/>
+              </a:rPr>
+              <a:t>This prevents the module from becoming abstract and anchors the work in public health practice.</a:t>
+            </a:r>
+            <a:endParaRPr lang="en-US" sz="1700" dirty="0"/>
+          </a:p>
+          <a:p>
+            <a:r>
+              <a:rPr lang="en-US" sz="1700" dirty="0">
+                <a:solidFill>
+                  <a:srgbClr val="17364A"/>
+                </a:solidFill>
+                <a:latin typeface="Aptos" pitchFamily="34" charset="0"/>
+                <a:ea typeface="Aptos" pitchFamily="34" charset="-122"/>
+                <a:cs typeface="Aptos" pitchFamily="34" charset="-120"/>
+              </a:rPr>
+              <a:t>The second step is to assign responsibilities.</a:t>
+            </a:r>
+            <a:endParaRPr lang="en-US" sz="1700" dirty="0"/>
+          </a:p>
+        </p:txBody>
+      </p:sp>
+      <p:sp>
+        <p:nvSpPr>
+          <p:cNvPr id="11" name="Shape 9"/>
+          <p:cNvSpPr/>
+          <p:nvPr/>
+        </p:nvSpPr>
+        <p:spPr>
+          <a:xfrm>
+            <a:off x="7909560" y="1417320"/>
+            <a:ext cx="3154680" cy="1828800"/>
+          </a:xfrm>
+          <a:prstGeom prst="roundRect">
+            <a:avLst>
+              <a:gd name="adj" fmla="val 6000"/>
+            </a:avLst>
+          </a:prstGeom>
+          <a:solidFill>
+            <a:srgbClr val="EEF8ED"/>
+          </a:solidFill>
+          <a:ln w="12700">
+            <a:solidFill>
+              <a:srgbClr val="B9D7E6"/>
+            </a:solidFill>
+            <a:prstDash val="solid"/>
+          </a:ln>
+        </p:spPr>
+      </p:sp>
+      <p:sp>
+        <p:nvSpPr>
+          <p:cNvPr id="12" name="Text 10"/>
+          <p:cNvSpPr/>
+          <p:nvPr/>
+        </p:nvSpPr>
+        <p:spPr>
+          <a:xfrm>
+            <a:off x="8074152" y="1563624"/>
+            <a:ext cx="2825496" cy="201168"/>
+          </a:xfrm>
+          <a:prstGeom prst="rect">
+            <a:avLst/>
+          </a:prstGeom>
+          <a:noFill/>
+          <a:ln/>
+        </p:spPr>
+        <p:txBody>
+          <a:bodyPr wrap="square" lIns="0" tIns="0" rIns="0" bIns="0" rtlCol="0" anchor="ctr"/>
+          <a:lstStyle/>
+          <a:p>
             <a:pPr indent="0" marL="0">
               <a:buNone/>
             </a:pPr>
             <a:r>
-              <a:rPr lang="en-US" sz="1420" dirty="0">
+              <a:rPr lang="en-US" sz="950" b="1" dirty="0">
+                <a:solidFill>
+                  <a:srgbClr val="0068B7"/>
+                </a:solidFill>
+                <a:latin typeface="Aptos" pitchFamily="34" charset="0"/>
+                <a:ea typeface="Aptos" pitchFamily="34" charset="-122"/>
+                <a:cs typeface="Aptos" pitchFamily="34" charset="-120"/>
+              </a:rPr>
+              <a:t>Key idea</a:t>
+            </a:r>
+            <a:endParaRPr lang="en-US" sz="950" dirty="0"/>
+          </a:p>
+        </p:txBody>
+      </p:sp>
+      <p:sp>
+        <p:nvSpPr>
+          <p:cNvPr id="13" name="Text 11"/>
+          <p:cNvSpPr/>
+          <p:nvPr/>
+        </p:nvSpPr>
+        <p:spPr>
+          <a:xfrm>
+            <a:off x="8074152" y="1856232"/>
+            <a:ext cx="2825496" cy="1261872"/>
+          </a:xfrm>
+          <a:prstGeom prst="rect">
+            <a:avLst/>
+          </a:prstGeom>
+          <a:noFill/>
+          <a:ln/>
+        </p:spPr>
+        <p:txBody>
+          <a:bodyPr wrap="square" lIns="0" tIns="0" rIns="0" bIns="0" rtlCol="0" anchor="t">
+            <a:normAutofit/>
+          </a:bodyPr>
+          <a:lstStyle/>
+          <a:p>
+            <a:pPr indent="0" marL="0">
+              <a:buNone/>
+            </a:pPr>
+            <a:r>
+              <a:rPr lang="en-US" sz="1250" dirty="0">
                 <a:solidFill>
                   <a:srgbClr val="17364A"/>
                 </a:solidFill>
@@ -3319,9 +4084,116 @@
                 <a:ea typeface="Aptos" pitchFamily="34" charset="-122"/>
                 <a:cs typeface="Aptos" pitchFamily="34" charset="-120"/>
               </a:rPr>
-              <a:t>This topic applies across generative AI, predictive analytics, NLP, RAG, automation, and agentic workflows. The more sensitive the data, the more consequential the output, or the more automated the action, the stronger the documentation, review, and monitoring expectations should be.</a:t>
-            </a:r>
-            <a:endParaRPr lang="en-US" sz="1420" dirty="0"/>
+              <a:t>The first step in this topic is to define the decision or workflow clearly.</a:t>
+            </a:r>
+            <a:endParaRPr lang="en-US" sz="1250" dirty="0"/>
+          </a:p>
+        </p:txBody>
+      </p:sp>
+      <p:sp>
+        <p:nvSpPr>
+          <p:cNvPr id="14" name="Shape 12"/>
+          <p:cNvSpPr/>
+          <p:nvPr/>
+        </p:nvSpPr>
+        <p:spPr>
+          <a:xfrm>
+            <a:off x="7909560" y="3520440"/>
+            <a:ext cx="3154680" cy="1737360"/>
+          </a:xfrm>
+          <a:prstGeom prst="roundRect">
+            <a:avLst>
+              <a:gd name="adj" fmla="val 6316"/>
+            </a:avLst>
+          </a:prstGeom>
+          <a:solidFill>
+            <a:srgbClr val="EAF6F8"/>
+          </a:solidFill>
+          <a:ln w="12700">
+            <a:solidFill>
+              <a:srgbClr val="B9D7E6"/>
+            </a:solidFill>
+            <a:prstDash val="solid"/>
+          </a:ln>
+        </p:spPr>
+      </p:sp>
+      <p:sp>
+        <p:nvSpPr>
+          <p:cNvPr id="15" name="Text 13"/>
+          <p:cNvSpPr/>
+          <p:nvPr/>
+        </p:nvSpPr>
+        <p:spPr>
+          <a:xfrm>
+            <a:off x="8074152" y="3666744"/>
+            <a:ext cx="2825496" cy="201168"/>
+          </a:xfrm>
+          <a:prstGeom prst="rect">
+            <a:avLst/>
+          </a:prstGeom>
+          <a:noFill/>
+          <a:ln/>
+        </p:spPr>
+        <p:txBody>
+          <a:bodyPr wrap="square" lIns="0" tIns="0" rIns="0" bIns="0" rtlCol="0" anchor="ctr"/>
+          <a:lstStyle/>
+          <a:p>
+            <a:pPr indent="0" marL="0">
+              <a:buNone/>
+            </a:pPr>
+            <a:r>
+              <a:rPr lang="en-US" sz="950" b="1" dirty="0">
+                <a:solidFill>
+                  <a:srgbClr val="0068B7"/>
+                </a:solidFill>
+                <a:latin typeface="Aptos" pitchFamily="34" charset="0"/>
+                <a:ea typeface="Aptos" pitchFamily="34" charset="-122"/>
+                <a:cs typeface="Aptos" pitchFamily="34" charset="-120"/>
+              </a:rPr>
+              <a:t>Use this for</a:t>
+            </a:r>
+            <a:endParaRPr lang="en-US" sz="950" dirty="0"/>
+          </a:p>
+        </p:txBody>
+      </p:sp>
+      <p:sp>
+        <p:nvSpPr>
+          <p:cNvPr id="16" name="Text 14"/>
+          <p:cNvSpPr/>
+          <p:nvPr/>
+        </p:nvSpPr>
+        <p:spPr>
+          <a:xfrm>
+            <a:off x="8074152" y="3959352"/>
+            <a:ext cx="2825496" cy="1170432"/>
+          </a:xfrm>
+          <a:prstGeom prst="rect">
+            <a:avLst/>
+          </a:prstGeom>
+          <a:noFill/>
+          <a:ln/>
+        </p:spPr>
+        <p:txBody>
+          <a:bodyPr wrap="square" lIns="0" tIns="0" rIns="0" bIns="0" rtlCol="0" anchor="t">
+            <a:normAutofit/>
+          </a:bodyPr>
+          <a:lstStyle/>
+          <a:p>
+            <a:pPr indent="0" marL="0">
+              <a:buNone/>
+            </a:pPr>
+            <a:r>
+              <a:rPr lang="en-US" sz="1250" dirty="0">
+                <a:solidFill>
+                  <a:srgbClr val="17364A"/>
+                </a:solidFill>
+                <a:latin typeface="Aptos" pitchFamily="34" charset="0"/>
+                <a:ea typeface="Aptos" pitchFamily="34" charset="-122"/>
+                <a:cs typeface="Aptos" pitchFamily="34" charset="-120"/>
+              </a:rPr>
+              <a:t>Connect the concept to public health decisions, safeguards, documentation, or implementation work.</a:t>
+            </a:r>
+            <a:endParaRPr lang="en-US" sz="1250" dirty="0"/>
           </a:p>
         </p:txBody>
       </p:sp>
@@ -3384,7 +4256,32 @@
       </p:sp>
       <p:sp>
         <p:nvSpPr>
-          <p:cNvPr id="3" name="Text 1"/>
+          <p:cNvPr id="3" name="Shape 1"/>
+          <p:cNvSpPr/>
+          <p:nvPr/>
+        </p:nvSpPr>
+        <p:spPr>
+          <a:xfrm>
+            <a:off x="0" y="164592"/>
+            <a:ext cx="146304" cy="6693408"/>
+          </a:xfrm>
+          <a:prstGeom prst="rect">
+            <a:avLst/>
+          </a:prstGeom>
+          <a:solidFill>
+            <a:srgbClr val="2F8A28"/>
+          </a:solidFill>
+          <a:ln w="12700">
+            <a:solidFill>
+              <a:srgbClr val="2F8A28"/>
+            </a:solidFill>
+            <a:prstDash val="solid"/>
+          </a:ln>
+        </p:spPr>
+      </p:sp>
+      <p:sp>
+        <p:nvSpPr>
+          <p:cNvPr id="4" name="Text 2"/>
           <p:cNvSpPr/>
           <p:nvPr/>
         </p:nvSpPr>
@@ -3423,7 +4320,7 @@
       </p:sp>
       <p:sp>
         <p:nvSpPr>
-          <p:cNvPr id="4" name="Text 2"/>
+          <p:cNvPr id="5" name="Text 3"/>
           <p:cNvSpPr/>
           <p:nvPr/>
         </p:nvSpPr>
@@ -3462,7 +4359,7 @@
       </p:sp>
       <p:sp>
         <p:nvSpPr>
-          <p:cNvPr id="5" name="Text 3"/>
+          <p:cNvPr id="6" name="Text 4"/>
           <p:cNvSpPr/>
           <p:nvPr/>
         </p:nvSpPr>
@@ -3501,13 +4398,77 @@
       </p:sp>
       <p:sp>
         <p:nvSpPr>
-          <p:cNvPr id="6" name="Text 4"/>
+          <p:cNvPr id="7" name="Shape 5"/>
           <p:cNvSpPr/>
           <p:nvPr/>
         </p:nvSpPr>
         <p:spPr>
           <a:xfrm>
             <a:off x="640080" y="658368"/>
+            <a:ext cx="420624" cy="420624"/>
+          </a:xfrm>
+          <a:prstGeom prst="ellipse">
+            <a:avLst/>
+          </a:prstGeom>
+          <a:solidFill>
+            <a:srgbClr val="0068B7"/>
+          </a:solidFill>
+          <a:ln w="12700">
+            <a:solidFill>
+              <a:srgbClr val="0068B7"/>
+            </a:solidFill>
+            <a:prstDash val="solid"/>
+          </a:ln>
+        </p:spPr>
+      </p:sp>
+      <p:sp>
+        <p:nvSpPr>
+          <p:cNvPr id="8" name="Text 6"/>
+          <p:cNvSpPr/>
+          <p:nvPr/>
+        </p:nvSpPr>
+        <p:spPr>
+          <a:xfrm>
+            <a:off x="640080" y="731520"/>
+            <a:ext cx="420624" cy="164592"/>
+          </a:xfrm>
+          <a:prstGeom prst="rect">
+            <a:avLst/>
+          </a:prstGeom>
+          <a:noFill/>
+          <a:ln/>
+        </p:spPr>
+        <p:txBody>
+          <a:bodyPr wrap="square" lIns="0" tIns="0" rIns="0" bIns="0" rtlCol="0" anchor="ctr"/>
+          <a:lstStyle/>
+          <a:p>
+            <a:pPr algn="ctr" indent="0" marL="0">
+              <a:buNone/>
+            </a:pPr>
+            <a:r>
+              <a:rPr lang="en-US" sz="1100" b="1" dirty="0">
+                <a:solidFill>
+                  <a:srgbClr val="FFFFFF"/>
+                </a:solidFill>
+                <a:latin typeface="Aptos" pitchFamily="34" charset="0"/>
+                <a:ea typeface="Aptos" pitchFamily="34" charset="-122"/>
+                <a:cs typeface="Aptos" pitchFamily="34" charset="-120"/>
+              </a:rPr>
+              <a:t>8</a:t>
+            </a:r>
+            <a:endParaRPr lang="en-US" sz="1100" dirty="0"/>
+          </a:p>
+        </p:txBody>
+      </p:sp>
+      <p:sp>
+        <p:nvSpPr>
+          <p:cNvPr id="9" name="Text 7"/>
+          <p:cNvSpPr/>
+          <p:nvPr/>
+        </p:nvSpPr>
+        <p:spPr>
+          <a:xfrm>
+            <a:off x="640080" y="621792"/>
             <a:ext cx="10881360" cy="566928"/>
           </a:xfrm>
           <a:prstGeom prst="rect">
@@ -3534,7 +4495,7 @@
                 <a:ea typeface="Aptos Display" pitchFamily="34" charset="-122"/>
                 <a:cs typeface="Aptos Display" pitchFamily="34" charset="-120"/>
               </a:rPr>
-              <a:t>Reflection Questions</a:t>
+              <a:t>Risks, Failure Modes, and Guardrails</a:t>
             </a:r>
             <a:endParaRPr lang="en-US" sz="2700" dirty="0"/>
           </a:p>
@@ -3542,32 +4503,178 @@
       </p:sp>
       <p:sp>
         <p:nvSpPr>
-          <p:cNvPr id="7" name="Text 5"/>
-          <p:cNvSpPr/>
-          <p:nvPr/>
-        </p:nvSpPr>
-        <p:spPr>
-          <a:xfrm>
-            <a:off x="822960" y="1325880"/>
-            <a:ext cx="10378440" cy="4800600"/>
-          </a:xfrm>
-          <a:prstGeom prst="rect">
-            <a:avLst/>
-          </a:prstGeom>
-          <a:noFill/>
-          <a:ln/>
-        </p:spPr>
-        <p:txBody>
-          <a:bodyPr wrap="square" lIns="1016" tIns="1016" rIns="1016" bIns="1016" rtlCol="0" anchor="t">
+          <p:cNvPr id="10" name="Text 8"/>
+          <p:cNvSpPr/>
+          <p:nvPr/>
+        </p:nvSpPr>
+        <p:spPr>
+          <a:xfrm>
+            <a:off x="868680" y="1417320"/>
+            <a:ext cx="6675120" cy="4434840"/>
+          </a:xfrm>
+          <a:prstGeom prst="rect">
+            <a:avLst/>
+          </a:prstGeom>
+          <a:noFill/>
+          <a:ln/>
+        </p:spPr>
+        <p:txBody>
+          <a:bodyPr wrap="square" lIns="635" tIns="635" rIns="635" bIns="635" rtlCol="0" anchor="t">
             <a:normAutofit/>
           </a:bodyPr>
           <a:lstStyle/>
           <a:p>
+            <a:r>
+              <a:rPr lang="en-US" sz="1700" dirty="0">
+                <a:solidFill>
+                  <a:srgbClr val="17364A"/>
+                </a:solidFill>
+                <a:latin typeface="Aptos" pitchFamily="34" charset="0"/>
+                <a:ea typeface="Aptos" pitchFamily="34" charset="-122"/>
+                <a:cs typeface="Aptos" pitchFamily="34" charset="-120"/>
+              </a:rPr>
+              <a:t>A common failure mode is treating the topic as a one-time checklist.</a:t>
+            </a:r>
+            <a:endParaRPr lang="en-US" sz="1700" dirty="0"/>
+          </a:p>
+          <a:p>
+            <a:r>
+              <a:rPr lang="en-US" sz="1700" dirty="0">
+                <a:solidFill>
+                  <a:srgbClr val="17364A"/>
+                </a:solidFill>
+                <a:latin typeface="Aptos" pitchFamily="34" charset="0"/>
+                <a:ea typeface="Aptos" pitchFamily="34" charset="-122"/>
+                <a:cs typeface="Aptos" pitchFamily="34" charset="-120"/>
+              </a:rPr>
+              <a:t>AI risks can change when data sources, models, vendors, policies, users, or public expectations change.</a:t>
+            </a:r>
+            <a:endParaRPr lang="en-US" sz="1700" dirty="0"/>
+          </a:p>
+          <a:p>
+            <a:r>
+              <a:rPr lang="en-US" sz="1700" dirty="0">
+                <a:solidFill>
+                  <a:srgbClr val="17364A"/>
+                </a:solidFill>
+                <a:latin typeface="Aptos" pitchFamily="34" charset="0"/>
+                <a:ea typeface="Aptos" pitchFamily="34" charset="-122"/>
+                <a:cs typeface="Aptos" pitchFamily="34" charset="-120"/>
+              </a:rPr>
+              <a:t>A guardrail is to define review intervals and change triggers.</a:t>
+            </a:r>
+            <a:endParaRPr lang="en-US" sz="1700" dirty="0"/>
+          </a:p>
+          <a:p>
+            <a:r>
+              <a:rPr lang="en-US" sz="1700" dirty="0">
+                <a:solidFill>
+                  <a:srgbClr val="17364A"/>
+                </a:solidFill>
+                <a:latin typeface="Aptos" pitchFamily="34" charset="0"/>
+                <a:ea typeface="Aptos" pitchFamily="34" charset="-122"/>
+                <a:cs typeface="Aptos" pitchFamily="34" charset="-120"/>
+              </a:rPr>
+              <a:t>Another failure mode is unclear ownership.</a:t>
+            </a:r>
+            <a:endParaRPr lang="en-US" sz="1700" dirty="0"/>
+          </a:p>
+        </p:txBody>
+      </p:sp>
+      <p:sp>
+        <p:nvSpPr>
+          <p:cNvPr id="11" name="Shape 9"/>
+          <p:cNvSpPr/>
+          <p:nvPr/>
+        </p:nvSpPr>
+        <p:spPr>
+          <a:xfrm>
+            <a:off x="7909560" y="1417320"/>
+            <a:ext cx="3154680" cy="1828800"/>
+          </a:xfrm>
+          <a:prstGeom prst="roundRect">
+            <a:avLst>
+              <a:gd name="adj" fmla="val 6000"/>
+            </a:avLst>
+          </a:prstGeom>
+          <a:solidFill>
+            <a:srgbClr val="EEF8ED"/>
+          </a:solidFill>
+          <a:ln w="12700">
+            <a:solidFill>
+              <a:srgbClr val="B9D7E6"/>
+            </a:solidFill>
+            <a:prstDash val="solid"/>
+          </a:ln>
+        </p:spPr>
+      </p:sp>
+      <p:sp>
+        <p:nvSpPr>
+          <p:cNvPr id="12" name="Text 10"/>
+          <p:cNvSpPr/>
+          <p:nvPr/>
+        </p:nvSpPr>
+        <p:spPr>
+          <a:xfrm>
+            <a:off x="8074152" y="1563624"/>
+            <a:ext cx="2825496" cy="201168"/>
+          </a:xfrm>
+          <a:prstGeom prst="rect">
+            <a:avLst/>
+          </a:prstGeom>
+          <a:noFill/>
+          <a:ln/>
+        </p:spPr>
+        <p:txBody>
+          <a:bodyPr wrap="square" lIns="0" tIns="0" rIns="0" bIns="0" rtlCol="0" anchor="ctr"/>
+          <a:lstStyle/>
+          <a:p>
             <a:pPr indent="0" marL="0">
               <a:buNone/>
             </a:pPr>
             <a:r>
-              <a:rPr lang="en-US" sz="1420" dirty="0">
+              <a:rPr lang="en-US" sz="950" b="1" dirty="0">
+                <a:solidFill>
+                  <a:srgbClr val="0068B7"/>
+                </a:solidFill>
+                <a:latin typeface="Aptos" pitchFamily="34" charset="0"/>
+                <a:ea typeface="Aptos" pitchFamily="34" charset="-122"/>
+                <a:cs typeface="Aptos" pitchFamily="34" charset="-120"/>
+              </a:rPr>
+              <a:t>Key idea</a:t>
+            </a:r>
+            <a:endParaRPr lang="en-US" sz="950" dirty="0"/>
+          </a:p>
+        </p:txBody>
+      </p:sp>
+      <p:sp>
+        <p:nvSpPr>
+          <p:cNvPr id="13" name="Text 11"/>
+          <p:cNvSpPr/>
+          <p:nvPr/>
+        </p:nvSpPr>
+        <p:spPr>
+          <a:xfrm>
+            <a:off x="8074152" y="1856232"/>
+            <a:ext cx="2825496" cy="1261872"/>
+          </a:xfrm>
+          <a:prstGeom prst="rect">
+            <a:avLst/>
+          </a:prstGeom>
+          <a:noFill/>
+          <a:ln/>
+        </p:spPr>
+        <p:txBody>
+          <a:bodyPr wrap="square" lIns="0" tIns="0" rIns="0" bIns="0" rtlCol="0" anchor="t">
+            <a:normAutofit/>
+          </a:bodyPr>
+          <a:lstStyle/>
+          <a:p>
+            <a:pPr indent="0" marL="0">
+              <a:buNone/>
+            </a:pPr>
+            <a:r>
+              <a:rPr lang="en-US" sz="1250" dirty="0">
                 <a:solidFill>
                   <a:srgbClr val="17364A"/>
                 </a:solidFill>
@@ -3575,9 +4682,116 @@
                 <a:ea typeface="Aptos" pitchFamily="34" charset="-122"/>
                 <a:cs typeface="Aptos" pitchFamily="34" charset="-120"/>
               </a:rPr>
-              <a:t>What public health decision or workflow does this topic affect? Who has authority to approve or pause the work? What evidence would show that the workflow is responsible and effective?</a:t>
-            </a:r>
-            <a:endParaRPr lang="en-US" sz="1420" dirty="0"/>
+              <a:t>A common failure mode is treating the topic as a one-time checklist.</a:t>
+            </a:r>
+            <a:endParaRPr lang="en-US" sz="1250" dirty="0"/>
+          </a:p>
+        </p:txBody>
+      </p:sp>
+      <p:sp>
+        <p:nvSpPr>
+          <p:cNvPr id="14" name="Shape 12"/>
+          <p:cNvSpPr/>
+          <p:nvPr/>
+        </p:nvSpPr>
+        <p:spPr>
+          <a:xfrm>
+            <a:off x="7909560" y="3520440"/>
+            <a:ext cx="3154680" cy="1737360"/>
+          </a:xfrm>
+          <a:prstGeom prst="roundRect">
+            <a:avLst>
+              <a:gd name="adj" fmla="val 6316"/>
+            </a:avLst>
+          </a:prstGeom>
+          <a:solidFill>
+            <a:srgbClr val="EAF6F8"/>
+          </a:solidFill>
+          <a:ln w="12700">
+            <a:solidFill>
+              <a:srgbClr val="B9D7E6"/>
+            </a:solidFill>
+            <a:prstDash val="solid"/>
+          </a:ln>
+        </p:spPr>
+      </p:sp>
+      <p:sp>
+        <p:nvSpPr>
+          <p:cNvPr id="15" name="Text 13"/>
+          <p:cNvSpPr/>
+          <p:nvPr/>
+        </p:nvSpPr>
+        <p:spPr>
+          <a:xfrm>
+            <a:off x="8074152" y="3666744"/>
+            <a:ext cx="2825496" cy="201168"/>
+          </a:xfrm>
+          <a:prstGeom prst="rect">
+            <a:avLst/>
+          </a:prstGeom>
+          <a:noFill/>
+          <a:ln/>
+        </p:spPr>
+        <p:txBody>
+          <a:bodyPr wrap="square" lIns="0" tIns="0" rIns="0" bIns="0" rtlCol="0" anchor="ctr"/>
+          <a:lstStyle/>
+          <a:p>
+            <a:pPr indent="0" marL="0">
+              <a:buNone/>
+            </a:pPr>
+            <a:r>
+              <a:rPr lang="en-US" sz="950" b="1" dirty="0">
+                <a:solidFill>
+                  <a:srgbClr val="0068B7"/>
+                </a:solidFill>
+                <a:latin typeface="Aptos" pitchFamily="34" charset="0"/>
+                <a:ea typeface="Aptos" pitchFamily="34" charset="-122"/>
+                <a:cs typeface="Aptos" pitchFamily="34" charset="-120"/>
+              </a:rPr>
+              <a:t>Use this for</a:t>
+            </a:r>
+            <a:endParaRPr lang="en-US" sz="950" dirty="0"/>
+          </a:p>
+        </p:txBody>
+      </p:sp>
+      <p:sp>
+        <p:nvSpPr>
+          <p:cNvPr id="16" name="Text 14"/>
+          <p:cNvSpPr/>
+          <p:nvPr/>
+        </p:nvSpPr>
+        <p:spPr>
+          <a:xfrm>
+            <a:off x="8074152" y="3959352"/>
+            <a:ext cx="2825496" cy="1170432"/>
+          </a:xfrm>
+          <a:prstGeom prst="rect">
+            <a:avLst/>
+          </a:prstGeom>
+          <a:noFill/>
+          <a:ln/>
+        </p:spPr>
+        <p:txBody>
+          <a:bodyPr wrap="square" lIns="0" tIns="0" rIns="0" bIns="0" rtlCol="0" anchor="t">
+            <a:normAutofit/>
+          </a:bodyPr>
+          <a:lstStyle/>
+          <a:p>
+            <a:pPr indent="0" marL="0">
+              <a:buNone/>
+            </a:pPr>
+            <a:r>
+              <a:rPr lang="en-US" sz="1250" dirty="0">
+                <a:solidFill>
+                  <a:srgbClr val="17364A"/>
+                </a:solidFill>
+                <a:latin typeface="Aptos" pitchFamily="34" charset="0"/>
+                <a:ea typeface="Aptos" pitchFamily="34" charset="-122"/>
+                <a:cs typeface="Aptos" pitchFamily="34" charset="-120"/>
+              </a:rPr>
+              <a:t>Connect the concept to public health decisions, safeguards, documentation, or implementation work.</a:t>
+            </a:r>
+            <a:endParaRPr lang="en-US" sz="1250" dirty="0"/>
           </a:p>
         </p:txBody>
       </p:sp>
@@ -3640,7 +4854,32 @@
       </p:sp>
       <p:sp>
         <p:nvSpPr>
-          <p:cNvPr id="3" name="Text 1"/>
+          <p:cNvPr id="3" name="Shape 1"/>
+          <p:cNvSpPr/>
+          <p:nvPr/>
+        </p:nvSpPr>
+        <p:spPr>
+          <a:xfrm>
+            <a:off x="0" y="164592"/>
+            <a:ext cx="146304" cy="6693408"/>
+          </a:xfrm>
+          <a:prstGeom prst="rect">
+            <a:avLst/>
+          </a:prstGeom>
+          <a:solidFill>
+            <a:srgbClr val="2F8A28"/>
+          </a:solidFill>
+          <a:ln w="12700">
+            <a:solidFill>
+              <a:srgbClr val="2F8A28"/>
+            </a:solidFill>
+            <a:prstDash val="solid"/>
+          </a:ln>
+        </p:spPr>
+      </p:sp>
+      <p:sp>
+        <p:nvSpPr>
+          <p:cNvPr id="4" name="Text 2"/>
           <p:cNvSpPr/>
           <p:nvPr/>
         </p:nvSpPr>
@@ -3679,7 +4918,7 @@
       </p:sp>
       <p:sp>
         <p:nvSpPr>
-          <p:cNvPr id="4" name="Text 2"/>
+          <p:cNvPr id="5" name="Text 3"/>
           <p:cNvSpPr/>
           <p:nvPr/>
         </p:nvSpPr>
@@ -3718,7 +4957,7 @@
       </p:sp>
       <p:sp>
         <p:nvSpPr>
-          <p:cNvPr id="5" name="Text 3"/>
+          <p:cNvPr id="6" name="Text 4"/>
           <p:cNvSpPr/>
           <p:nvPr/>
         </p:nvSpPr>
@@ -3757,13 +4996,77 @@
       </p:sp>
       <p:sp>
         <p:nvSpPr>
-          <p:cNvPr id="6" name="Text 4"/>
+          <p:cNvPr id="7" name="Shape 5"/>
           <p:cNvSpPr/>
           <p:nvPr/>
         </p:nvSpPr>
         <p:spPr>
           <a:xfrm>
             <a:off x="640080" y="658368"/>
+            <a:ext cx="420624" cy="420624"/>
+          </a:xfrm>
+          <a:prstGeom prst="ellipse">
+            <a:avLst/>
+          </a:prstGeom>
+          <a:solidFill>
+            <a:srgbClr val="0068B7"/>
+          </a:solidFill>
+          <a:ln w="12700">
+            <a:solidFill>
+              <a:srgbClr val="0068B7"/>
+            </a:solidFill>
+            <a:prstDash val="solid"/>
+          </a:ln>
+        </p:spPr>
+      </p:sp>
+      <p:sp>
+        <p:nvSpPr>
+          <p:cNvPr id="8" name="Text 6"/>
+          <p:cNvSpPr/>
+          <p:nvPr/>
+        </p:nvSpPr>
+        <p:spPr>
+          <a:xfrm>
+            <a:off x="640080" y="731520"/>
+            <a:ext cx="420624" cy="164592"/>
+          </a:xfrm>
+          <a:prstGeom prst="rect">
+            <a:avLst/>
+          </a:prstGeom>
+          <a:noFill/>
+          <a:ln/>
+        </p:spPr>
+        <p:txBody>
+          <a:bodyPr wrap="square" lIns="0" tIns="0" rIns="0" bIns="0" rtlCol="0" anchor="ctr"/>
+          <a:lstStyle/>
+          <a:p>
+            <a:pPr algn="ctr" indent="0" marL="0">
+              <a:buNone/>
+            </a:pPr>
+            <a:r>
+              <a:rPr lang="en-US" sz="1100" b="1" dirty="0">
+                <a:solidFill>
+                  <a:srgbClr val="FFFFFF"/>
+                </a:solidFill>
+                <a:latin typeface="Aptos" pitchFamily="34" charset="0"/>
+                <a:ea typeface="Aptos" pitchFamily="34" charset="-122"/>
+                <a:cs typeface="Aptos" pitchFamily="34" charset="-120"/>
+              </a:rPr>
+              <a:t>9</a:t>
+            </a:r>
+            <a:endParaRPr lang="en-US" sz="1100" dirty="0"/>
+          </a:p>
+        </p:txBody>
+      </p:sp>
+      <p:sp>
+        <p:nvSpPr>
+          <p:cNvPr id="9" name="Text 7"/>
+          <p:cNvSpPr/>
+          <p:nvPr/>
+        </p:nvSpPr>
+        <p:spPr>
+          <a:xfrm>
+            <a:off x="640080" y="621792"/>
             <a:ext cx="10881360" cy="566928"/>
           </a:xfrm>
           <a:prstGeom prst="rect">
@@ -3790,7 +5093,7 @@
                 <a:ea typeface="Aptos Display" pitchFamily="34" charset="-122"/>
                 <a:cs typeface="Aptos Display" pitchFamily="34" charset="-120"/>
               </a:rPr>
-              <a:t>Reflection Questions Continued</a:t>
+              <a:t>Application to AI-Supported Workflows</a:t>
             </a:r>
             <a:endParaRPr lang="en-US" sz="2700" dirty="0"/>
           </a:p>
@@ -3798,32 +5101,150 @@
       </p:sp>
       <p:sp>
         <p:nvSpPr>
-          <p:cNvPr id="7" name="Text 5"/>
-          <p:cNvSpPr/>
-          <p:nvPr/>
-        </p:nvSpPr>
-        <p:spPr>
-          <a:xfrm>
-            <a:off x="822960" y="1325880"/>
-            <a:ext cx="10378440" cy="4800600"/>
-          </a:xfrm>
-          <a:prstGeom prst="rect">
-            <a:avLst/>
-          </a:prstGeom>
-          <a:noFill/>
-          <a:ln/>
-        </p:spPr>
-        <p:txBody>
-          <a:bodyPr wrap="square" lIns="1016" tIns="1016" rIns="1016" bIns="1016" rtlCol="0" anchor="t">
+          <p:cNvPr id="10" name="Text 8"/>
+          <p:cNvSpPr/>
+          <p:nvPr/>
+        </p:nvSpPr>
+        <p:spPr>
+          <a:xfrm>
+            <a:off x="868680" y="1417320"/>
+            <a:ext cx="6675120" cy="4434840"/>
+          </a:xfrm>
+          <a:prstGeom prst="rect">
+            <a:avLst/>
+          </a:prstGeom>
+          <a:noFill/>
+          <a:ln/>
+        </p:spPr>
+        <p:txBody>
+          <a:bodyPr wrap="square" lIns="635" tIns="635" rIns="635" bIns="635" rtlCol="0" anchor="t">
             <a:normAutofit/>
           </a:bodyPr>
           <a:lstStyle/>
           <a:p>
+            <a:r>
+              <a:rPr lang="en-US" sz="1700" dirty="0">
+                <a:solidFill>
+                  <a:srgbClr val="17364A"/>
+                </a:solidFill>
+                <a:latin typeface="Aptos" pitchFamily="34" charset="0"/>
+                <a:ea typeface="Aptos" pitchFamily="34" charset="-122"/>
+                <a:cs typeface="Aptos" pitchFamily="34" charset="-120"/>
+              </a:rPr>
+              <a:t>This topic applies across generative AI, predictive analytics, NLP, RAG, automation, and agentic workflows.</a:t>
+            </a:r>
+            <a:endParaRPr lang="en-US" sz="1700" dirty="0"/>
+          </a:p>
+          <a:p>
+            <a:r>
+              <a:rPr lang="en-US" sz="1700" dirty="0">
+                <a:solidFill>
+                  <a:srgbClr val="17364A"/>
+                </a:solidFill>
+                <a:latin typeface="Aptos" pitchFamily="34" charset="0"/>
+                <a:ea typeface="Aptos" pitchFamily="34" charset="-122"/>
+                <a:cs typeface="Aptos" pitchFamily="34" charset="-120"/>
+              </a:rPr>
+              <a:t>The more sensitive the data, the more consequential the output, or the more automated the action, the stronger the.</a:t>
+            </a:r>
+            <a:endParaRPr lang="en-US" sz="1700" dirty="0"/>
+          </a:p>
+        </p:txBody>
+      </p:sp>
+      <p:sp>
+        <p:nvSpPr>
+          <p:cNvPr id="11" name="Shape 9"/>
+          <p:cNvSpPr/>
+          <p:nvPr/>
+        </p:nvSpPr>
+        <p:spPr>
+          <a:xfrm>
+            <a:off x="7909560" y="1417320"/>
+            <a:ext cx="3154680" cy="1828800"/>
+          </a:xfrm>
+          <a:prstGeom prst="roundRect">
+            <a:avLst>
+              <a:gd name="adj" fmla="val 6000"/>
+            </a:avLst>
+          </a:prstGeom>
+          <a:solidFill>
+            <a:srgbClr val="EEF8ED"/>
+          </a:solidFill>
+          <a:ln w="12700">
+            <a:solidFill>
+              <a:srgbClr val="B9D7E6"/>
+            </a:solidFill>
+            <a:prstDash val="solid"/>
+          </a:ln>
+        </p:spPr>
+      </p:sp>
+      <p:sp>
+        <p:nvSpPr>
+          <p:cNvPr id="12" name="Text 10"/>
+          <p:cNvSpPr/>
+          <p:nvPr/>
+        </p:nvSpPr>
+        <p:spPr>
+          <a:xfrm>
+            <a:off x="8074152" y="1563624"/>
+            <a:ext cx="2825496" cy="201168"/>
+          </a:xfrm>
+          <a:prstGeom prst="rect">
+            <a:avLst/>
+          </a:prstGeom>
+          <a:noFill/>
+          <a:ln/>
+        </p:spPr>
+        <p:txBody>
+          <a:bodyPr wrap="square" lIns="0" tIns="0" rIns="0" bIns="0" rtlCol="0" anchor="ctr"/>
+          <a:lstStyle/>
+          <a:p>
             <a:pPr indent="0" marL="0">
               <a:buNone/>
             </a:pPr>
             <a:r>
-              <a:rPr lang="en-US" sz="1420" dirty="0">
+              <a:rPr lang="en-US" sz="950" b="1" dirty="0">
+                <a:solidFill>
+                  <a:srgbClr val="0068B7"/>
+                </a:solidFill>
+                <a:latin typeface="Aptos" pitchFamily="34" charset="0"/>
+                <a:ea typeface="Aptos" pitchFamily="34" charset="-122"/>
+                <a:cs typeface="Aptos" pitchFamily="34" charset="-120"/>
+              </a:rPr>
+              <a:t>Key idea</a:t>
+            </a:r>
+            <a:endParaRPr lang="en-US" sz="950" dirty="0"/>
+          </a:p>
+        </p:txBody>
+      </p:sp>
+      <p:sp>
+        <p:nvSpPr>
+          <p:cNvPr id="13" name="Text 11"/>
+          <p:cNvSpPr/>
+          <p:nvPr/>
+        </p:nvSpPr>
+        <p:spPr>
+          <a:xfrm>
+            <a:off x="8074152" y="1856232"/>
+            <a:ext cx="2825496" cy="1261872"/>
+          </a:xfrm>
+          <a:prstGeom prst="rect">
+            <a:avLst/>
+          </a:prstGeom>
+          <a:noFill/>
+          <a:ln/>
+        </p:spPr>
+        <p:txBody>
+          <a:bodyPr wrap="square" lIns="0" tIns="0" rIns="0" bIns="0" rtlCol="0" anchor="t">
+            <a:normAutofit/>
+          </a:bodyPr>
+          <a:lstStyle/>
+          <a:p>
+            <a:pPr indent="0" marL="0">
+              <a:buNone/>
+            </a:pPr>
+            <a:r>
+              <a:rPr lang="en-US" sz="1250" dirty="0">
                 <a:solidFill>
                   <a:srgbClr val="17364A"/>
                 </a:solidFill>
@@ -3831,9 +5252,116 @@
                 <a:ea typeface="Aptos" pitchFamily="34" charset="-122"/>
                 <a:cs typeface="Aptos" pitchFamily="34" charset="-120"/>
               </a:rPr>
-              <a:t>What equity, privacy, legal, security, or public trust risks require review? How will the agency know when the workflow needs to be revised?</a:t>
-            </a:r>
-            <a:endParaRPr lang="en-US" sz="1420" dirty="0"/>
+              <a:t>This topic applies across generative AI, predictive analytics, NLP, RAG, automation, and agentic workflows.</a:t>
+            </a:r>
+            <a:endParaRPr lang="en-US" sz="1250" dirty="0"/>
+          </a:p>
+        </p:txBody>
+      </p:sp>
+      <p:sp>
+        <p:nvSpPr>
+          <p:cNvPr id="14" name="Shape 12"/>
+          <p:cNvSpPr/>
+          <p:nvPr/>
+        </p:nvSpPr>
+        <p:spPr>
+          <a:xfrm>
+            <a:off x="7909560" y="3520440"/>
+            <a:ext cx="3154680" cy="1737360"/>
+          </a:xfrm>
+          <a:prstGeom prst="roundRect">
+            <a:avLst>
+              <a:gd name="adj" fmla="val 6316"/>
+            </a:avLst>
+          </a:prstGeom>
+          <a:solidFill>
+            <a:srgbClr val="EAF6F8"/>
+          </a:solidFill>
+          <a:ln w="12700">
+            <a:solidFill>
+              <a:srgbClr val="B9D7E6"/>
+            </a:solidFill>
+            <a:prstDash val="solid"/>
+          </a:ln>
+        </p:spPr>
+      </p:sp>
+      <p:sp>
+        <p:nvSpPr>
+          <p:cNvPr id="15" name="Text 13"/>
+          <p:cNvSpPr/>
+          <p:nvPr/>
+        </p:nvSpPr>
+        <p:spPr>
+          <a:xfrm>
+            <a:off x="8074152" y="3666744"/>
+            <a:ext cx="2825496" cy="201168"/>
+          </a:xfrm>
+          <a:prstGeom prst="rect">
+            <a:avLst/>
+          </a:prstGeom>
+          <a:noFill/>
+          <a:ln/>
+        </p:spPr>
+        <p:txBody>
+          <a:bodyPr wrap="square" lIns="0" tIns="0" rIns="0" bIns="0" rtlCol="0" anchor="ctr"/>
+          <a:lstStyle/>
+          <a:p>
+            <a:pPr indent="0" marL="0">
+              <a:buNone/>
+            </a:pPr>
+            <a:r>
+              <a:rPr lang="en-US" sz="950" b="1" dirty="0">
+                <a:solidFill>
+                  <a:srgbClr val="0068B7"/>
+                </a:solidFill>
+                <a:latin typeface="Aptos" pitchFamily="34" charset="0"/>
+                <a:ea typeface="Aptos" pitchFamily="34" charset="-122"/>
+                <a:cs typeface="Aptos" pitchFamily="34" charset="-120"/>
+              </a:rPr>
+              <a:t>Use this for</a:t>
+            </a:r>
+            <a:endParaRPr lang="en-US" sz="950" dirty="0"/>
+          </a:p>
+        </p:txBody>
+      </p:sp>
+      <p:sp>
+        <p:nvSpPr>
+          <p:cNvPr id="16" name="Text 14"/>
+          <p:cNvSpPr/>
+          <p:nvPr/>
+        </p:nvSpPr>
+        <p:spPr>
+          <a:xfrm>
+            <a:off x="8074152" y="3959352"/>
+            <a:ext cx="2825496" cy="1170432"/>
+          </a:xfrm>
+          <a:prstGeom prst="rect">
+            <a:avLst/>
+          </a:prstGeom>
+          <a:noFill/>
+          <a:ln/>
+        </p:spPr>
+        <p:txBody>
+          <a:bodyPr wrap="square" lIns="0" tIns="0" rIns="0" bIns="0" rtlCol="0" anchor="t">
+            <a:normAutofit/>
+          </a:bodyPr>
+          <a:lstStyle/>
+          <a:p>
+            <a:pPr indent="0" marL="0">
+              <a:buNone/>
+            </a:pPr>
+            <a:r>
+              <a:rPr lang="en-US" sz="1250" dirty="0">
+                <a:solidFill>
+                  <a:srgbClr val="17364A"/>
+                </a:solidFill>
+                <a:latin typeface="Aptos" pitchFamily="34" charset="0"/>
+                <a:ea typeface="Aptos" pitchFamily="34" charset="-122"/>
+                <a:cs typeface="Aptos" pitchFamily="34" charset="-120"/>
+              </a:rPr>
+              <a:t>Connect the concept to public health decisions, safeguards, documentation, or implementation work.</a:t>
+            </a:r>
+            <a:endParaRPr lang="en-US" sz="1250" dirty="0"/>
           </a:p>
         </p:txBody>
       </p:sp>
@@ -3896,7 +5424,32 @@
       </p:sp>
       <p:sp>
         <p:nvSpPr>
-          <p:cNvPr id="3" name="Text 1"/>
+          <p:cNvPr id="3" name="Shape 1"/>
+          <p:cNvSpPr/>
+          <p:nvPr/>
+        </p:nvSpPr>
+        <p:spPr>
+          <a:xfrm>
+            <a:off x="0" y="164592"/>
+            <a:ext cx="146304" cy="6693408"/>
+          </a:xfrm>
+          <a:prstGeom prst="rect">
+            <a:avLst/>
+          </a:prstGeom>
+          <a:solidFill>
+            <a:srgbClr val="2F8A28"/>
+          </a:solidFill>
+          <a:ln w="12700">
+            <a:solidFill>
+              <a:srgbClr val="2F8A28"/>
+            </a:solidFill>
+            <a:prstDash val="solid"/>
+          </a:ln>
+        </p:spPr>
+      </p:sp>
+      <p:sp>
+        <p:nvSpPr>
+          <p:cNvPr id="4" name="Text 2"/>
           <p:cNvSpPr/>
           <p:nvPr/>
         </p:nvSpPr>
@@ -3935,7 +5488,7 @@
       </p:sp>
       <p:sp>
         <p:nvSpPr>
-          <p:cNvPr id="4" name="Text 2"/>
+          <p:cNvPr id="5" name="Text 3"/>
           <p:cNvSpPr/>
           <p:nvPr/>
         </p:nvSpPr>
@@ -3974,7 +5527,7 @@
       </p:sp>
       <p:sp>
         <p:nvSpPr>
-          <p:cNvPr id="5" name="Text 3"/>
+          <p:cNvPr id="6" name="Text 4"/>
           <p:cNvSpPr/>
           <p:nvPr/>
         </p:nvSpPr>
@@ -4013,13 +5566,77 @@
       </p:sp>
       <p:sp>
         <p:nvSpPr>
-          <p:cNvPr id="6" name="Text 4"/>
+          <p:cNvPr id="7" name="Shape 5"/>
           <p:cNvSpPr/>
           <p:nvPr/>
         </p:nvSpPr>
         <p:spPr>
           <a:xfrm>
             <a:off x="640080" y="658368"/>
+            <a:ext cx="420624" cy="420624"/>
+          </a:xfrm>
+          <a:prstGeom prst="ellipse">
+            <a:avLst/>
+          </a:prstGeom>
+          <a:solidFill>
+            <a:srgbClr val="0068B7"/>
+          </a:solidFill>
+          <a:ln w="12700">
+            <a:solidFill>
+              <a:srgbClr val="0068B7"/>
+            </a:solidFill>
+            <a:prstDash val="solid"/>
+          </a:ln>
+        </p:spPr>
+      </p:sp>
+      <p:sp>
+        <p:nvSpPr>
+          <p:cNvPr id="8" name="Text 6"/>
+          <p:cNvSpPr/>
+          <p:nvPr/>
+        </p:nvSpPr>
+        <p:spPr>
+          <a:xfrm>
+            <a:off x="640080" y="731520"/>
+            <a:ext cx="420624" cy="164592"/>
+          </a:xfrm>
+          <a:prstGeom prst="rect">
+            <a:avLst/>
+          </a:prstGeom>
+          <a:noFill/>
+          <a:ln/>
+        </p:spPr>
+        <p:txBody>
+          <a:bodyPr wrap="square" lIns="0" tIns="0" rIns="0" bIns="0" rtlCol="0" anchor="ctr"/>
+          <a:lstStyle/>
+          <a:p>
+            <a:pPr algn="ctr" indent="0" marL="0">
+              <a:buNone/>
+            </a:pPr>
+            <a:r>
+              <a:rPr lang="en-US" sz="1100" b="1" dirty="0">
+                <a:solidFill>
+                  <a:srgbClr val="FFFFFF"/>
+                </a:solidFill>
+                <a:latin typeface="Aptos" pitchFamily="34" charset="0"/>
+                <a:ea typeface="Aptos" pitchFamily="34" charset="-122"/>
+                <a:cs typeface="Aptos" pitchFamily="34" charset="-120"/>
+              </a:rPr>
+              <a:t>10</a:t>
+            </a:r>
+            <a:endParaRPr lang="en-US" sz="1100" dirty="0"/>
+          </a:p>
+        </p:txBody>
+      </p:sp>
+      <p:sp>
+        <p:nvSpPr>
+          <p:cNvPr id="9" name="Text 7"/>
+          <p:cNvSpPr/>
+          <p:nvPr/>
+        </p:nvSpPr>
+        <p:spPr>
+          <a:xfrm>
+            <a:off x="640080" y="621792"/>
             <a:ext cx="10881360" cy="566928"/>
           </a:xfrm>
           <a:prstGeom prst="rect">
@@ -4046,7 +5663,7 @@
                 <a:ea typeface="Aptos Display" pitchFamily="34" charset="-122"/>
                 <a:cs typeface="Aptos Display" pitchFamily="34" charset="-120"/>
               </a:rPr>
-              <a:t>Practical Exercise</a:t>
+              <a:t>Reflection Questions</a:t>
             </a:r>
             <a:endParaRPr lang="en-US" sz="2700" dirty="0"/>
           </a:p>
@@ -4054,32 +5671,164 @@
       </p:sp>
       <p:sp>
         <p:nvSpPr>
-          <p:cNvPr id="7" name="Text 5"/>
-          <p:cNvSpPr/>
-          <p:nvPr/>
-        </p:nvSpPr>
-        <p:spPr>
-          <a:xfrm>
-            <a:off x="822960" y="1325880"/>
-            <a:ext cx="10378440" cy="4800600"/>
-          </a:xfrm>
-          <a:prstGeom prst="rect">
-            <a:avLst/>
-          </a:prstGeom>
-          <a:noFill/>
-          <a:ln/>
-        </p:spPr>
-        <p:txBody>
-          <a:bodyPr wrap="square" lIns="1016" tIns="1016" rIns="1016" bIns="1016" rtlCol="0" anchor="t">
+          <p:cNvPr id="10" name="Text 8"/>
+          <p:cNvSpPr/>
+          <p:nvPr/>
+        </p:nvSpPr>
+        <p:spPr>
+          <a:xfrm>
+            <a:off x="868680" y="1417320"/>
+            <a:ext cx="6675120" cy="4434840"/>
+          </a:xfrm>
+          <a:prstGeom prst="rect">
+            <a:avLst/>
+          </a:prstGeom>
+          <a:noFill/>
+          <a:ln/>
+        </p:spPr>
+        <p:txBody>
+          <a:bodyPr wrap="square" lIns="635" tIns="635" rIns="635" bIns="635" rtlCol="0" anchor="t">
             <a:normAutofit/>
           </a:bodyPr>
           <a:lstStyle/>
           <a:p>
+            <a:r>
+              <a:rPr lang="en-US" sz="1700" dirty="0">
+                <a:solidFill>
+                  <a:srgbClr val="17364A"/>
+                </a:solidFill>
+                <a:latin typeface="Aptos" pitchFamily="34" charset="0"/>
+                <a:ea typeface="Aptos" pitchFamily="34" charset="-122"/>
+                <a:cs typeface="Aptos" pitchFamily="34" charset="-120"/>
+              </a:rPr>
+              <a:t>What public health decision or workflow does this topic affect?</a:t>
+            </a:r>
+            <a:endParaRPr lang="en-US" sz="1700" dirty="0"/>
+          </a:p>
+          <a:p>
+            <a:r>
+              <a:rPr lang="en-US" sz="1700" dirty="0">
+                <a:solidFill>
+                  <a:srgbClr val="17364A"/>
+                </a:solidFill>
+                <a:latin typeface="Aptos" pitchFamily="34" charset="0"/>
+                <a:ea typeface="Aptos" pitchFamily="34" charset="-122"/>
+                <a:cs typeface="Aptos" pitchFamily="34" charset="-120"/>
+              </a:rPr>
+              <a:t>Who has authority to approve or pause the work?</a:t>
+            </a:r>
+            <a:endParaRPr lang="en-US" sz="1700" dirty="0"/>
+          </a:p>
+          <a:p>
+            <a:r>
+              <a:rPr lang="en-US" sz="1700" dirty="0">
+                <a:solidFill>
+                  <a:srgbClr val="17364A"/>
+                </a:solidFill>
+                <a:latin typeface="Aptos" pitchFamily="34" charset="0"/>
+                <a:ea typeface="Aptos" pitchFamily="34" charset="-122"/>
+                <a:cs typeface="Aptos" pitchFamily="34" charset="-120"/>
+              </a:rPr>
+              <a:t>What evidence would show that the workflow is responsible and effective?</a:t>
+            </a:r>
+            <a:endParaRPr lang="en-US" sz="1700" dirty="0"/>
+          </a:p>
+        </p:txBody>
+      </p:sp>
+      <p:sp>
+        <p:nvSpPr>
+          <p:cNvPr id="11" name="Shape 9"/>
+          <p:cNvSpPr/>
+          <p:nvPr/>
+        </p:nvSpPr>
+        <p:spPr>
+          <a:xfrm>
+            <a:off x="7909560" y="1417320"/>
+            <a:ext cx="3154680" cy="1828800"/>
+          </a:xfrm>
+          <a:prstGeom prst="roundRect">
+            <a:avLst>
+              <a:gd name="adj" fmla="val 6000"/>
+            </a:avLst>
+          </a:prstGeom>
+          <a:solidFill>
+            <a:srgbClr val="EEF8ED"/>
+          </a:solidFill>
+          <a:ln w="12700">
+            <a:solidFill>
+              <a:srgbClr val="B9D7E6"/>
+            </a:solidFill>
+            <a:prstDash val="solid"/>
+          </a:ln>
+        </p:spPr>
+      </p:sp>
+      <p:sp>
+        <p:nvSpPr>
+          <p:cNvPr id="12" name="Text 10"/>
+          <p:cNvSpPr/>
+          <p:nvPr/>
+        </p:nvSpPr>
+        <p:spPr>
+          <a:xfrm>
+            <a:off x="8074152" y="1563624"/>
+            <a:ext cx="2825496" cy="201168"/>
+          </a:xfrm>
+          <a:prstGeom prst="rect">
+            <a:avLst/>
+          </a:prstGeom>
+          <a:noFill/>
+          <a:ln/>
+        </p:spPr>
+        <p:txBody>
+          <a:bodyPr wrap="square" lIns="0" tIns="0" rIns="0" bIns="0" rtlCol="0" anchor="ctr"/>
+          <a:lstStyle/>
+          <a:p>
             <a:pPr indent="0" marL="0">
               <a:buNone/>
             </a:pPr>
             <a:r>
-              <a:rPr lang="en-US" sz="1420" dirty="0">
+              <a:rPr lang="en-US" sz="950" b="1" dirty="0">
+                <a:solidFill>
+                  <a:srgbClr val="0068B7"/>
+                </a:solidFill>
+                <a:latin typeface="Aptos" pitchFamily="34" charset="0"/>
+                <a:ea typeface="Aptos" pitchFamily="34" charset="-122"/>
+                <a:cs typeface="Aptos" pitchFamily="34" charset="-120"/>
+              </a:rPr>
+              <a:t>Key idea</a:t>
+            </a:r>
+            <a:endParaRPr lang="en-US" sz="950" dirty="0"/>
+          </a:p>
+        </p:txBody>
+      </p:sp>
+      <p:sp>
+        <p:nvSpPr>
+          <p:cNvPr id="13" name="Text 11"/>
+          <p:cNvSpPr/>
+          <p:nvPr/>
+        </p:nvSpPr>
+        <p:spPr>
+          <a:xfrm>
+            <a:off x="8074152" y="1856232"/>
+            <a:ext cx="2825496" cy="1261872"/>
+          </a:xfrm>
+          <a:prstGeom prst="rect">
+            <a:avLst/>
+          </a:prstGeom>
+          <a:noFill/>
+          <a:ln/>
+        </p:spPr>
+        <p:txBody>
+          <a:bodyPr wrap="square" lIns="0" tIns="0" rIns="0" bIns="0" rtlCol="0" anchor="t">
+            <a:normAutofit/>
+          </a:bodyPr>
+          <a:lstStyle/>
+          <a:p>
+            <a:pPr indent="0" marL="0">
+              <a:buNone/>
+            </a:pPr>
+            <a:r>
+              <a:rPr lang="en-US" sz="1250" dirty="0">
                 <a:solidFill>
                   <a:srgbClr val="17364A"/>
                 </a:solidFill>
@@ -4087,9 +5836,116 @@
                 <a:ea typeface="Aptos" pitchFamily="34" charset="-122"/>
                 <a:cs typeface="Aptos" pitchFamily="34" charset="-120"/>
               </a:rPr>
-              <a:t>Create a practical public comment, social listening, and community feedback analysis artifact for one AI-supported public health use case. The artifact should define the use case, affected roles, review criteria, safeguards, documentation expectations, escalation triggers, monitoring indicators, and next review date.</a:t>
-            </a:r>
-            <a:endParaRPr lang="en-US" sz="1420" dirty="0"/>
+              <a:t>What public health decision or workflow does this topic affect?</a:t>
+            </a:r>
+            <a:endParaRPr lang="en-US" sz="1250" dirty="0"/>
+          </a:p>
+        </p:txBody>
+      </p:sp>
+      <p:sp>
+        <p:nvSpPr>
+          <p:cNvPr id="14" name="Shape 12"/>
+          <p:cNvSpPr/>
+          <p:nvPr/>
+        </p:nvSpPr>
+        <p:spPr>
+          <a:xfrm>
+            <a:off x="7909560" y="3520440"/>
+            <a:ext cx="3154680" cy="1737360"/>
+          </a:xfrm>
+          <a:prstGeom prst="roundRect">
+            <a:avLst>
+              <a:gd name="adj" fmla="val 6316"/>
+            </a:avLst>
+          </a:prstGeom>
+          <a:solidFill>
+            <a:srgbClr val="EAF6F8"/>
+          </a:solidFill>
+          <a:ln w="12700">
+            <a:solidFill>
+              <a:srgbClr val="B9D7E6"/>
+            </a:solidFill>
+            <a:prstDash val="solid"/>
+          </a:ln>
+        </p:spPr>
+      </p:sp>
+      <p:sp>
+        <p:nvSpPr>
+          <p:cNvPr id="15" name="Text 13"/>
+          <p:cNvSpPr/>
+          <p:nvPr/>
+        </p:nvSpPr>
+        <p:spPr>
+          <a:xfrm>
+            <a:off x="8074152" y="3666744"/>
+            <a:ext cx="2825496" cy="201168"/>
+          </a:xfrm>
+          <a:prstGeom prst="rect">
+            <a:avLst/>
+          </a:prstGeom>
+          <a:noFill/>
+          <a:ln/>
+        </p:spPr>
+        <p:txBody>
+          <a:bodyPr wrap="square" lIns="0" tIns="0" rIns="0" bIns="0" rtlCol="0" anchor="ctr"/>
+          <a:lstStyle/>
+          <a:p>
+            <a:pPr indent="0" marL="0">
+              <a:buNone/>
+            </a:pPr>
+            <a:r>
+              <a:rPr lang="en-US" sz="950" b="1" dirty="0">
+                <a:solidFill>
+                  <a:srgbClr val="0068B7"/>
+                </a:solidFill>
+                <a:latin typeface="Aptos" pitchFamily="34" charset="0"/>
+                <a:ea typeface="Aptos" pitchFamily="34" charset="-122"/>
+                <a:cs typeface="Aptos" pitchFamily="34" charset="-120"/>
+              </a:rPr>
+              <a:t>Use this for</a:t>
+            </a:r>
+            <a:endParaRPr lang="en-US" sz="950" dirty="0"/>
+          </a:p>
+        </p:txBody>
+      </p:sp>
+      <p:sp>
+        <p:nvSpPr>
+          <p:cNvPr id="16" name="Text 14"/>
+          <p:cNvSpPr/>
+          <p:nvPr/>
+        </p:nvSpPr>
+        <p:spPr>
+          <a:xfrm>
+            <a:off x="8074152" y="3959352"/>
+            <a:ext cx="2825496" cy="1170432"/>
+          </a:xfrm>
+          <a:prstGeom prst="rect">
+            <a:avLst/>
+          </a:prstGeom>
+          <a:noFill/>
+          <a:ln/>
+        </p:spPr>
+        <p:txBody>
+          <a:bodyPr wrap="square" lIns="0" tIns="0" rIns="0" bIns="0" rtlCol="0" anchor="t">
+            <a:normAutofit/>
+          </a:bodyPr>
+          <a:lstStyle/>
+          <a:p>
+            <a:pPr indent="0" marL="0">
+              <a:buNone/>
+            </a:pPr>
+            <a:r>
+              <a:rPr lang="en-US" sz="1250" dirty="0">
+                <a:solidFill>
+                  <a:srgbClr val="17364A"/>
+                </a:solidFill>
+                <a:latin typeface="Aptos" pitchFamily="34" charset="0"/>
+                <a:ea typeface="Aptos" pitchFamily="34" charset="-122"/>
+                <a:cs typeface="Aptos" pitchFamily="34" charset="-120"/>
+              </a:rPr>
+              <a:t>Connect the concept to public health decisions, safeguards, documentation, or implementation work.</a:t>
+            </a:r>
+            <a:endParaRPr lang="en-US" sz="1250" dirty="0"/>
           </a:p>
         </p:txBody>
       </p:sp>
@@ -4152,7 +6008,32 @@
       </p:sp>
       <p:sp>
         <p:nvSpPr>
-          <p:cNvPr id="3" name="Text 1"/>
+          <p:cNvPr id="3" name="Shape 1"/>
+          <p:cNvSpPr/>
+          <p:nvPr/>
+        </p:nvSpPr>
+        <p:spPr>
+          <a:xfrm>
+            <a:off x="0" y="164592"/>
+            <a:ext cx="146304" cy="6693408"/>
+          </a:xfrm>
+          <a:prstGeom prst="rect">
+            <a:avLst/>
+          </a:prstGeom>
+          <a:solidFill>
+            <a:srgbClr val="2F8A28"/>
+          </a:solidFill>
+          <a:ln w="12700">
+            <a:solidFill>
+              <a:srgbClr val="2F8A28"/>
+            </a:solidFill>
+            <a:prstDash val="solid"/>
+          </a:ln>
+        </p:spPr>
+      </p:sp>
+      <p:sp>
+        <p:nvSpPr>
+          <p:cNvPr id="4" name="Text 2"/>
           <p:cNvSpPr/>
           <p:nvPr/>
         </p:nvSpPr>
@@ -4191,7 +6072,7 @@
       </p:sp>
       <p:sp>
         <p:nvSpPr>
-          <p:cNvPr id="4" name="Text 2"/>
+          <p:cNvPr id="5" name="Text 3"/>
           <p:cNvSpPr/>
           <p:nvPr/>
         </p:nvSpPr>
@@ -4230,7 +6111,7 @@
       </p:sp>
       <p:sp>
         <p:nvSpPr>
-          <p:cNvPr id="5" name="Text 3"/>
+          <p:cNvPr id="6" name="Text 4"/>
           <p:cNvSpPr/>
           <p:nvPr/>
         </p:nvSpPr>
@@ -4269,7 +6150,7 @@
       </p:sp>
       <p:sp>
         <p:nvSpPr>
-          <p:cNvPr id="6" name="Text 4"/>
+          <p:cNvPr id="7" name="Text 5"/>
           <p:cNvSpPr/>
           <p:nvPr/>
         </p:nvSpPr>
@@ -4302,7 +6183,7 @@
                 <a:ea typeface="Aptos Display" pitchFamily="34" charset="-122"/>
                 <a:cs typeface="Aptos Display" pitchFamily="34" charset="-120"/>
               </a:rPr>
-              <a:t>Expected Artifact or Evidence</a:t>
+              <a:t>Reflection Questions Continued</a:t>
             </a:r>
             <a:endParaRPr lang="en-US" sz="2700" dirty="0"/>
           </a:p>
@@ -4310,32 +6191,150 @@
       </p:sp>
       <p:sp>
         <p:nvSpPr>
-          <p:cNvPr id="7" name="Text 5"/>
-          <p:cNvSpPr/>
-          <p:nvPr/>
-        </p:nvSpPr>
-        <p:spPr>
-          <a:xfrm>
-            <a:off x="822960" y="1325880"/>
-            <a:ext cx="10378440" cy="4800600"/>
-          </a:xfrm>
-          <a:prstGeom prst="rect">
-            <a:avLst/>
-          </a:prstGeom>
-          <a:noFill/>
-          <a:ln/>
-        </p:spPr>
-        <p:txBody>
-          <a:bodyPr wrap="square" lIns="1016" tIns="1016" rIns="1016" bIns="1016" rtlCol="0" anchor="t">
+          <p:cNvPr id="8" name="Text 6"/>
+          <p:cNvSpPr/>
+          <p:nvPr/>
+        </p:nvSpPr>
+        <p:spPr>
+          <a:xfrm>
+            <a:off x="868680" y="1417320"/>
+            <a:ext cx="6675120" cy="4434840"/>
+          </a:xfrm>
+          <a:prstGeom prst="rect">
+            <a:avLst/>
+          </a:prstGeom>
+          <a:noFill/>
+          <a:ln/>
+        </p:spPr>
+        <p:txBody>
+          <a:bodyPr wrap="square" lIns="635" tIns="635" rIns="635" bIns="635" rtlCol="0" anchor="t">
             <a:normAutofit/>
           </a:bodyPr>
           <a:lstStyle/>
           <a:p>
+            <a:r>
+              <a:rPr lang="en-US" sz="1700" dirty="0">
+                <a:solidFill>
+                  <a:srgbClr val="17364A"/>
+                </a:solidFill>
+                <a:latin typeface="Aptos" pitchFamily="34" charset="0"/>
+                <a:ea typeface="Aptos" pitchFamily="34" charset="-122"/>
+                <a:cs typeface="Aptos" pitchFamily="34" charset="-120"/>
+              </a:rPr>
+              <a:t>What equity, privacy, legal, security, or public trust risks require review?</a:t>
+            </a:r>
+            <a:endParaRPr lang="en-US" sz="1700" dirty="0"/>
+          </a:p>
+          <a:p>
+            <a:r>
+              <a:rPr lang="en-US" sz="1700" dirty="0">
+                <a:solidFill>
+                  <a:srgbClr val="17364A"/>
+                </a:solidFill>
+                <a:latin typeface="Aptos" pitchFamily="34" charset="0"/>
+                <a:ea typeface="Aptos" pitchFamily="34" charset="-122"/>
+                <a:cs typeface="Aptos" pitchFamily="34" charset="-120"/>
+              </a:rPr>
+              <a:t>How will the agency know when the workflow needs to be revised?</a:t>
+            </a:r>
+            <a:endParaRPr lang="en-US" sz="1700" dirty="0"/>
+          </a:p>
+        </p:txBody>
+      </p:sp>
+      <p:sp>
+        <p:nvSpPr>
+          <p:cNvPr id="9" name="Shape 7"/>
+          <p:cNvSpPr/>
+          <p:nvPr/>
+        </p:nvSpPr>
+        <p:spPr>
+          <a:xfrm>
+            <a:off x="7909560" y="1417320"/>
+            <a:ext cx="3154680" cy="1828800"/>
+          </a:xfrm>
+          <a:prstGeom prst="roundRect">
+            <a:avLst>
+              <a:gd name="adj" fmla="val 6000"/>
+            </a:avLst>
+          </a:prstGeom>
+          <a:solidFill>
+            <a:srgbClr val="EEF8ED"/>
+          </a:solidFill>
+          <a:ln w="12700">
+            <a:solidFill>
+              <a:srgbClr val="B9D7E6"/>
+            </a:solidFill>
+            <a:prstDash val="solid"/>
+          </a:ln>
+        </p:spPr>
+      </p:sp>
+      <p:sp>
+        <p:nvSpPr>
+          <p:cNvPr id="10" name="Text 8"/>
+          <p:cNvSpPr/>
+          <p:nvPr/>
+        </p:nvSpPr>
+        <p:spPr>
+          <a:xfrm>
+            <a:off x="8074152" y="1563624"/>
+            <a:ext cx="2825496" cy="201168"/>
+          </a:xfrm>
+          <a:prstGeom prst="rect">
+            <a:avLst/>
+          </a:prstGeom>
+          <a:noFill/>
+          <a:ln/>
+        </p:spPr>
+        <p:txBody>
+          <a:bodyPr wrap="square" lIns="0" tIns="0" rIns="0" bIns="0" rtlCol="0" anchor="ctr"/>
+          <a:lstStyle/>
+          <a:p>
             <a:pPr indent="0" marL="0">
               <a:buNone/>
             </a:pPr>
             <a:r>
-              <a:rPr lang="en-US" sz="1420" dirty="0">
+              <a:rPr lang="en-US" sz="950" b="1" dirty="0">
+                <a:solidFill>
+                  <a:srgbClr val="0068B7"/>
+                </a:solidFill>
+                <a:latin typeface="Aptos" pitchFamily="34" charset="0"/>
+                <a:ea typeface="Aptos" pitchFamily="34" charset="-122"/>
+                <a:cs typeface="Aptos" pitchFamily="34" charset="-120"/>
+              </a:rPr>
+              <a:t>Key idea</a:t>
+            </a:r>
+            <a:endParaRPr lang="en-US" sz="950" dirty="0"/>
+          </a:p>
+        </p:txBody>
+      </p:sp>
+      <p:sp>
+        <p:nvSpPr>
+          <p:cNvPr id="11" name="Text 9"/>
+          <p:cNvSpPr/>
+          <p:nvPr/>
+        </p:nvSpPr>
+        <p:spPr>
+          <a:xfrm>
+            <a:off x="8074152" y="1856232"/>
+            <a:ext cx="2825496" cy="1261872"/>
+          </a:xfrm>
+          <a:prstGeom prst="rect">
+            <a:avLst/>
+          </a:prstGeom>
+          <a:noFill/>
+          <a:ln/>
+        </p:spPr>
+        <p:txBody>
+          <a:bodyPr wrap="square" lIns="0" tIns="0" rIns="0" bIns="0" rtlCol="0" anchor="t">
+            <a:normAutofit/>
+          </a:bodyPr>
+          <a:lstStyle/>
+          <a:p>
+            <a:pPr indent="0" marL="0">
+              <a:buNone/>
+            </a:pPr>
+            <a:r>
+              <a:rPr lang="en-US" sz="1250" dirty="0">
                 <a:solidFill>
                   <a:srgbClr val="17364A"/>
                 </a:solidFill>
@@ -4343,9 +6342,116 @@
                 <a:ea typeface="Aptos" pitchFamily="34" charset="-122"/>
                 <a:cs typeface="Aptos" pitchFamily="34" charset="-120"/>
               </a:rPr>
-              <a:t>Public Comment, Social Listening, and Community Feedback Analysis artifact Role and responsibility table Risk and safeguard summary</a:t>
-            </a:r>
-            <a:endParaRPr lang="en-US" sz="1420" dirty="0"/>
+              <a:t>What equity, privacy, legal, security, or public trust risks require review?</a:t>
+            </a:r>
+            <a:endParaRPr lang="en-US" sz="1250" dirty="0"/>
+          </a:p>
+        </p:txBody>
+      </p:sp>
+      <p:sp>
+        <p:nvSpPr>
+          <p:cNvPr id="12" name="Shape 10"/>
+          <p:cNvSpPr/>
+          <p:nvPr/>
+        </p:nvSpPr>
+        <p:spPr>
+          <a:xfrm>
+            <a:off x="7909560" y="3520440"/>
+            <a:ext cx="3154680" cy="1737360"/>
+          </a:xfrm>
+          <a:prstGeom prst="roundRect">
+            <a:avLst>
+              <a:gd name="adj" fmla="val 6316"/>
+            </a:avLst>
+          </a:prstGeom>
+          <a:solidFill>
+            <a:srgbClr val="EAF6F8"/>
+          </a:solidFill>
+          <a:ln w="12700">
+            <a:solidFill>
+              <a:srgbClr val="B9D7E6"/>
+            </a:solidFill>
+            <a:prstDash val="solid"/>
+          </a:ln>
+        </p:spPr>
+      </p:sp>
+      <p:sp>
+        <p:nvSpPr>
+          <p:cNvPr id="13" name="Text 11"/>
+          <p:cNvSpPr/>
+          <p:nvPr/>
+        </p:nvSpPr>
+        <p:spPr>
+          <a:xfrm>
+            <a:off x="8074152" y="3666744"/>
+            <a:ext cx="2825496" cy="201168"/>
+          </a:xfrm>
+          <a:prstGeom prst="rect">
+            <a:avLst/>
+          </a:prstGeom>
+          <a:noFill/>
+          <a:ln/>
+        </p:spPr>
+        <p:txBody>
+          <a:bodyPr wrap="square" lIns="0" tIns="0" rIns="0" bIns="0" rtlCol="0" anchor="ctr"/>
+          <a:lstStyle/>
+          <a:p>
+            <a:pPr indent="0" marL="0">
+              <a:buNone/>
+            </a:pPr>
+            <a:r>
+              <a:rPr lang="en-US" sz="950" b="1" dirty="0">
+                <a:solidFill>
+                  <a:srgbClr val="0068B7"/>
+                </a:solidFill>
+                <a:latin typeface="Aptos" pitchFamily="34" charset="0"/>
+                <a:ea typeface="Aptos" pitchFamily="34" charset="-122"/>
+                <a:cs typeface="Aptos" pitchFamily="34" charset="-120"/>
+              </a:rPr>
+              <a:t>Use this for</a:t>
+            </a:r>
+            <a:endParaRPr lang="en-US" sz="950" dirty="0"/>
+          </a:p>
+        </p:txBody>
+      </p:sp>
+      <p:sp>
+        <p:nvSpPr>
+          <p:cNvPr id="14" name="Text 12"/>
+          <p:cNvSpPr/>
+          <p:nvPr/>
+        </p:nvSpPr>
+        <p:spPr>
+          <a:xfrm>
+            <a:off x="8074152" y="3959352"/>
+            <a:ext cx="2825496" cy="1170432"/>
+          </a:xfrm>
+          <a:prstGeom prst="rect">
+            <a:avLst/>
+          </a:prstGeom>
+          <a:noFill/>
+          <a:ln/>
+        </p:spPr>
+        <p:txBody>
+          <a:bodyPr wrap="square" lIns="0" tIns="0" rIns="0" bIns="0" rtlCol="0" anchor="t">
+            <a:normAutofit/>
+          </a:bodyPr>
+          <a:lstStyle/>
+          <a:p>
+            <a:pPr indent="0" marL="0">
+              <a:buNone/>
+            </a:pPr>
+            <a:r>
+              <a:rPr lang="en-US" sz="1250" dirty="0">
+                <a:solidFill>
+                  <a:srgbClr val="17364A"/>
+                </a:solidFill>
+                <a:latin typeface="Aptos" pitchFamily="34" charset="0"/>
+                <a:ea typeface="Aptos" pitchFamily="34" charset="-122"/>
+                <a:cs typeface="Aptos" pitchFamily="34" charset="-120"/>
+              </a:rPr>
+              <a:t>Connect the concept to public health decisions, safeguards, documentation, or implementation work.</a:t>
+            </a:r>
+            <a:endParaRPr lang="en-US" sz="1250" dirty="0"/>
           </a:p>
         </p:txBody>
       </p:sp>
@@ -4408,7 +6514,32 @@
       </p:sp>
       <p:sp>
         <p:nvSpPr>
-          <p:cNvPr id="3" name="Text 1"/>
+          <p:cNvPr id="3" name="Shape 1"/>
+          <p:cNvSpPr/>
+          <p:nvPr/>
+        </p:nvSpPr>
+        <p:spPr>
+          <a:xfrm>
+            <a:off x="0" y="164592"/>
+            <a:ext cx="146304" cy="6693408"/>
+          </a:xfrm>
+          <a:prstGeom prst="rect">
+            <a:avLst/>
+          </a:prstGeom>
+          <a:solidFill>
+            <a:srgbClr val="2F8A28"/>
+          </a:solidFill>
+          <a:ln w="12700">
+            <a:solidFill>
+              <a:srgbClr val="2F8A28"/>
+            </a:solidFill>
+            <a:prstDash val="solid"/>
+          </a:ln>
+        </p:spPr>
+      </p:sp>
+      <p:sp>
+        <p:nvSpPr>
+          <p:cNvPr id="4" name="Text 2"/>
           <p:cNvSpPr/>
           <p:nvPr/>
         </p:nvSpPr>
@@ -4447,7 +6578,7 @@
       </p:sp>
       <p:sp>
         <p:nvSpPr>
-          <p:cNvPr id="4" name="Text 2"/>
+          <p:cNvPr id="5" name="Text 3"/>
           <p:cNvSpPr/>
           <p:nvPr/>
         </p:nvSpPr>
@@ -4486,7 +6617,7 @@
       </p:sp>
       <p:sp>
         <p:nvSpPr>
-          <p:cNvPr id="5" name="Text 3"/>
+          <p:cNvPr id="6" name="Text 4"/>
           <p:cNvSpPr/>
           <p:nvPr/>
         </p:nvSpPr>
@@ -4525,13 +6656,77 @@
       </p:sp>
       <p:sp>
         <p:nvSpPr>
-          <p:cNvPr id="6" name="Text 4"/>
+          <p:cNvPr id="7" name="Shape 5"/>
           <p:cNvSpPr/>
           <p:nvPr/>
         </p:nvSpPr>
         <p:spPr>
           <a:xfrm>
             <a:off x="640080" y="658368"/>
+            <a:ext cx="420624" cy="420624"/>
+          </a:xfrm>
+          <a:prstGeom prst="ellipse">
+            <a:avLst/>
+          </a:prstGeom>
+          <a:solidFill>
+            <a:srgbClr val="0068B7"/>
+          </a:solidFill>
+          <a:ln w="12700">
+            <a:solidFill>
+              <a:srgbClr val="0068B7"/>
+            </a:solidFill>
+            <a:prstDash val="solid"/>
+          </a:ln>
+        </p:spPr>
+      </p:sp>
+      <p:sp>
+        <p:nvSpPr>
+          <p:cNvPr id="8" name="Text 6"/>
+          <p:cNvSpPr/>
+          <p:nvPr/>
+        </p:nvSpPr>
+        <p:spPr>
+          <a:xfrm>
+            <a:off x="640080" y="731520"/>
+            <a:ext cx="420624" cy="164592"/>
+          </a:xfrm>
+          <a:prstGeom prst="rect">
+            <a:avLst/>
+          </a:prstGeom>
+          <a:noFill/>
+          <a:ln/>
+        </p:spPr>
+        <p:txBody>
+          <a:bodyPr wrap="square" lIns="0" tIns="0" rIns="0" bIns="0" rtlCol="0" anchor="ctr"/>
+          <a:lstStyle/>
+          <a:p>
+            <a:pPr algn="ctr" indent="0" marL="0">
+              <a:buNone/>
+            </a:pPr>
+            <a:r>
+              <a:rPr lang="en-US" sz="1100" b="1" dirty="0">
+                <a:solidFill>
+                  <a:srgbClr val="FFFFFF"/>
+                </a:solidFill>
+                <a:latin typeface="Aptos" pitchFamily="34" charset="0"/>
+                <a:ea typeface="Aptos" pitchFamily="34" charset="-122"/>
+                <a:cs typeface="Aptos" pitchFamily="34" charset="-120"/>
+              </a:rPr>
+              <a:t>11</a:t>
+            </a:r>
+            <a:endParaRPr lang="en-US" sz="1100" dirty="0"/>
+          </a:p>
+        </p:txBody>
+      </p:sp>
+      <p:sp>
+        <p:nvSpPr>
+          <p:cNvPr id="9" name="Text 7"/>
+          <p:cNvSpPr/>
+          <p:nvPr/>
+        </p:nvSpPr>
+        <p:spPr>
+          <a:xfrm>
+            <a:off x="640080" y="621792"/>
             <a:ext cx="10881360" cy="566928"/>
           </a:xfrm>
           <a:prstGeom prst="rect">
@@ -4558,7 +6753,7 @@
                 <a:ea typeface="Aptos Display" pitchFamily="34" charset="-122"/>
                 <a:cs typeface="Aptos Display" pitchFamily="34" charset="-120"/>
               </a:rPr>
-              <a:t>Expected Artifact or Evidence Continued</a:t>
+              <a:t>Practical Exercise</a:t>
             </a:r>
             <a:endParaRPr lang="en-US" sz="2700" dirty="0"/>
           </a:p>
@@ -4566,32 +6761,150 @@
       </p:sp>
       <p:sp>
         <p:nvSpPr>
-          <p:cNvPr id="7" name="Text 5"/>
-          <p:cNvSpPr/>
-          <p:nvPr/>
-        </p:nvSpPr>
-        <p:spPr>
-          <a:xfrm>
-            <a:off x="822960" y="1325880"/>
-            <a:ext cx="10378440" cy="4800600"/>
-          </a:xfrm>
-          <a:prstGeom prst="rect">
-            <a:avLst/>
-          </a:prstGeom>
-          <a:noFill/>
-          <a:ln/>
-        </p:spPr>
-        <p:txBody>
-          <a:bodyPr wrap="square" lIns="1016" tIns="1016" rIns="1016" bIns="1016" rtlCol="0" anchor="t">
+          <p:cNvPr id="10" name="Text 8"/>
+          <p:cNvSpPr/>
+          <p:nvPr/>
+        </p:nvSpPr>
+        <p:spPr>
+          <a:xfrm>
+            <a:off x="868680" y="1417320"/>
+            <a:ext cx="6675120" cy="4434840"/>
+          </a:xfrm>
+          <a:prstGeom prst="rect">
+            <a:avLst/>
+          </a:prstGeom>
+          <a:noFill/>
+          <a:ln/>
+        </p:spPr>
+        <p:txBody>
+          <a:bodyPr wrap="square" lIns="635" tIns="635" rIns="635" bIns="635" rtlCol="0" anchor="t">
             <a:normAutofit/>
           </a:bodyPr>
           <a:lstStyle/>
           <a:p>
+            <a:r>
+              <a:rPr lang="en-US" sz="1700" dirty="0">
+                <a:solidFill>
+                  <a:srgbClr val="17364A"/>
+                </a:solidFill>
+                <a:latin typeface="Aptos" pitchFamily="34" charset="0"/>
+                <a:ea typeface="Aptos" pitchFamily="34" charset="-122"/>
+                <a:cs typeface="Aptos" pitchFamily="34" charset="-120"/>
+              </a:rPr>
+              <a:t>Create a practical public comment, social listening, and community feedback analysis artifact for one AI-supported public.</a:t>
+            </a:r>
+            <a:endParaRPr lang="en-US" sz="1700" dirty="0"/>
+          </a:p>
+          <a:p>
+            <a:r>
+              <a:rPr lang="en-US" sz="1700" dirty="0">
+                <a:solidFill>
+                  <a:srgbClr val="17364A"/>
+                </a:solidFill>
+                <a:latin typeface="Aptos" pitchFamily="34" charset="0"/>
+                <a:ea typeface="Aptos" pitchFamily="34" charset="-122"/>
+                <a:cs typeface="Aptos" pitchFamily="34" charset="-120"/>
+              </a:rPr>
+              <a:t>The artifact should define the use case, affected roles, review criteria, safeguards, documentation expectations,.</a:t>
+            </a:r>
+            <a:endParaRPr lang="en-US" sz="1700" dirty="0"/>
+          </a:p>
+        </p:txBody>
+      </p:sp>
+      <p:sp>
+        <p:nvSpPr>
+          <p:cNvPr id="11" name="Shape 9"/>
+          <p:cNvSpPr/>
+          <p:nvPr/>
+        </p:nvSpPr>
+        <p:spPr>
+          <a:xfrm>
+            <a:off x="7909560" y="1417320"/>
+            <a:ext cx="3154680" cy="1828800"/>
+          </a:xfrm>
+          <a:prstGeom prst="roundRect">
+            <a:avLst>
+              <a:gd name="adj" fmla="val 6000"/>
+            </a:avLst>
+          </a:prstGeom>
+          <a:solidFill>
+            <a:srgbClr val="EEF8ED"/>
+          </a:solidFill>
+          <a:ln w="12700">
+            <a:solidFill>
+              <a:srgbClr val="B9D7E6"/>
+            </a:solidFill>
+            <a:prstDash val="solid"/>
+          </a:ln>
+        </p:spPr>
+      </p:sp>
+      <p:sp>
+        <p:nvSpPr>
+          <p:cNvPr id="12" name="Text 10"/>
+          <p:cNvSpPr/>
+          <p:nvPr/>
+        </p:nvSpPr>
+        <p:spPr>
+          <a:xfrm>
+            <a:off x="8074152" y="1563624"/>
+            <a:ext cx="2825496" cy="201168"/>
+          </a:xfrm>
+          <a:prstGeom prst="rect">
+            <a:avLst/>
+          </a:prstGeom>
+          <a:noFill/>
+          <a:ln/>
+        </p:spPr>
+        <p:txBody>
+          <a:bodyPr wrap="square" lIns="0" tIns="0" rIns="0" bIns="0" rtlCol="0" anchor="ctr"/>
+          <a:lstStyle/>
+          <a:p>
             <a:pPr indent="0" marL="0">
               <a:buNone/>
             </a:pPr>
             <a:r>
-              <a:rPr lang="en-US" sz="1420" dirty="0">
+              <a:rPr lang="en-US" sz="950" b="1" dirty="0">
+                <a:solidFill>
+                  <a:srgbClr val="0068B7"/>
+                </a:solidFill>
+                <a:latin typeface="Aptos" pitchFamily="34" charset="0"/>
+                <a:ea typeface="Aptos" pitchFamily="34" charset="-122"/>
+                <a:cs typeface="Aptos" pitchFamily="34" charset="-120"/>
+              </a:rPr>
+              <a:t>Key idea</a:t>
+            </a:r>
+            <a:endParaRPr lang="en-US" sz="950" dirty="0"/>
+          </a:p>
+        </p:txBody>
+      </p:sp>
+      <p:sp>
+        <p:nvSpPr>
+          <p:cNvPr id="13" name="Text 11"/>
+          <p:cNvSpPr/>
+          <p:nvPr/>
+        </p:nvSpPr>
+        <p:spPr>
+          <a:xfrm>
+            <a:off x="8074152" y="1856232"/>
+            <a:ext cx="2825496" cy="1261872"/>
+          </a:xfrm>
+          <a:prstGeom prst="rect">
+            <a:avLst/>
+          </a:prstGeom>
+          <a:noFill/>
+          <a:ln/>
+        </p:spPr>
+        <p:txBody>
+          <a:bodyPr wrap="square" lIns="0" tIns="0" rIns="0" bIns="0" rtlCol="0" anchor="t">
+            <a:normAutofit/>
+          </a:bodyPr>
+          <a:lstStyle/>
+          <a:p>
+            <a:pPr indent="0" marL="0">
+              <a:buNone/>
+            </a:pPr>
+            <a:r>
+              <a:rPr lang="en-US" sz="1250" dirty="0">
                 <a:solidFill>
                   <a:srgbClr val="17364A"/>
                 </a:solidFill>
@@ -4599,9 +6912,116 @@
                 <a:ea typeface="Aptos" pitchFamily="34" charset="-122"/>
                 <a:cs typeface="Aptos" pitchFamily="34" charset="-120"/>
               </a:rPr>
-              <a:t>Escalation and monitoring plan Approval or review note</a:t>
-            </a:r>
-            <a:endParaRPr lang="en-US" sz="1420" dirty="0"/>
+              <a:t>Create a practical public comment, social listening, and community feedback analysis artifact for one AI-supported public.</a:t>
+            </a:r>
+            <a:endParaRPr lang="en-US" sz="1250" dirty="0"/>
+          </a:p>
+        </p:txBody>
+      </p:sp>
+      <p:sp>
+        <p:nvSpPr>
+          <p:cNvPr id="14" name="Shape 12"/>
+          <p:cNvSpPr/>
+          <p:nvPr/>
+        </p:nvSpPr>
+        <p:spPr>
+          <a:xfrm>
+            <a:off x="7909560" y="3520440"/>
+            <a:ext cx="3154680" cy="1737360"/>
+          </a:xfrm>
+          <a:prstGeom prst="roundRect">
+            <a:avLst>
+              <a:gd name="adj" fmla="val 6316"/>
+            </a:avLst>
+          </a:prstGeom>
+          <a:solidFill>
+            <a:srgbClr val="EAF6F8"/>
+          </a:solidFill>
+          <a:ln w="12700">
+            <a:solidFill>
+              <a:srgbClr val="B9D7E6"/>
+            </a:solidFill>
+            <a:prstDash val="solid"/>
+          </a:ln>
+        </p:spPr>
+      </p:sp>
+      <p:sp>
+        <p:nvSpPr>
+          <p:cNvPr id="15" name="Text 13"/>
+          <p:cNvSpPr/>
+          <p:nvPr/>
+        </p:nvSpPr>
+        <p:spPr>
+          <a:xfrm>
+            <a:off x="8074152" y="3666744"/>
+            <a:ext cx="2825496" cy="201168"/>
+          </a:xfrm>
+          <a:prstGeom prst="rect">
+            <a:avLst/>
+          </a:prstGeom>
+          <a:noFill/>
+          <a:ln/>
+        </p:spPr>
+        <p:txBody>
+          <a:bodyPr wrap="square" lIns="0" tIns="0" rIns="0" bIns="0" rtlCol="0" anchor="ctr"/>
+          <a:lstStyle/>
+          <a:p>
+            <a:pPr indent="0" marL="0">
+              <a:buNone/>
+            </a:pPr>
+            <a:r>
+              <a:rPr lang="en-US" sz="950" b="1" dirty="0">
+                <a:solidFill>
+                  <a:srgbClr val="0068B7"/>
+                </a:solidFill>
+                <a:latin typeface="Aptos" pitchFamily="34" charset="0"/>
+                <a:ea typeface="Aptos" pitchFamily="34" charset="-122"/>
+                <a:cs typeface="Aptos" pitchFamily="34" charset="-120"/>
+              </a:rPr>
+              <a:t>Use this for</a:t>
+            </a:r>
+            <a:endParaRPr lang="en-US" sz="950" dirty="0"/>
+          </a:p>
+        </p:txBody>
+      </p:sp>
+      <p:sp>
+        <p:nvSpPr>
+          <p:cNvPr id="16" name="Text 14"/>
+          <p:cNvSpPr/>
+          <p:nvPr/>
+        </p:nvSpPr>
+        <p:spPr>
+          <a:xfrm>
+            <a:off x="8074152" y="3959352"/>
+            <a:ext cx="2825496" cy="1170432"/>
+          </a:xfrm>
+          <a:prstGeom prst="rect">
+            <a:avLst/>
+          </a:prstGeom>
+          <a:noFill/>
+          <a:ln/>
+        </p:spPr>
+        <p:txBody>
+          <a:bodyPr wrap="square" lIns="0" tIns="0" rIns="0" bIns="0" rtlCol="0" anchor="t">
+            <a:normAutofit/>
+          </a:bodyPr>
+          <a:lstStyle/>
+          <a:p>
+            <a:pPr indent="0" marL="0">
+              <a:buNone/>
+            </a:pPr>
+            <a:r>
+              <a:rPr lang="en-US" sz="1250" dirty="0">
+                <a:solidFill>
+                  <a:srgbClr val="17364A"/>
+                </a:solidFill>
+                <a:latin typeface="Aptos" pitchFamily="34" charset="0"/>
+                <a:ea typeface="Aptos" pitchFamily="34" charset="-122"/>
+                <a:cs typeface="Aptos" pitchFamily="34" charset="-120"/>
+              </a:rPr>
+              <a:t>Connect the concept to public health decisions, safeguards, documentation, or implementation work.</a:t>
+            </a:r>
+            <a:endParaRPr lang="en-US" sz="1250" dirty="0"/>
           </a:p>
         </p:txBody>
       </p:sp>
@@ -4664,7 +7084,32 @@
       </p:sp>
       <p:sp>
         <p:nvSpPr>
-          <p:cNvPr id="3" name="Text 1"/>
+          <p:cNvPr id="3" name="Shape 1"/>
+          <p:cNvSpPr/>
+          <p:nvPr/>
+        </p:nvSpPr>
+        <p:spPr>
+          <a:xfrm>
+            <a:off x="0" y="164592"/>
+            <a:ext cx="146304" cy="6693408"/>
+          </a:xfrm>
+          <a:prstGeom prst="rect">
+            <a:avLst/>
+          </a:prstGeom>
+          <a:solidFill>
+            <a:srgbClr val="2F8A28"/>
+          </a:solidFill>
+          <a:ln w="12700">
+            <a:solidFill>
+              <a:srgbClr val="2F8A28"/>
+            </a:solidFill>
+            <a:prstDash val="solid"/>
+          </a:ln>
+        </p:spPr>
+      </p:sp>
+      <p:sp>
+        <p:nvSpPr>
+          <p:cNvPr id="4" name="Text 2"/>
           <p:cNvSpPr/>
           <p:nvPr/>
         </p:nvSpPr>
@@ -4703,7 +7148,7 @@
       </p:sp>
       <p:sp>
         <p:nvSpPr>
-          <p:cNvPr id="4" name="Text 2"/>
+          <p:cNvPr id="5" name="Text 3"/>
           <p:cNvSpPr/>
           <p:nvPr/>
         </p:nvSpPr>
@@ -4742,7 +7187,7 @@
       </p:sp>
       <p:sp>
         <p:nvSpPr>
-          <p:cNvPr id="5" name="Text 3"/>
+          <p:cNvPr id="6" name="Text 4"/>
           <p:cNvSpPr/>
           <p:nvPr/>
         </p:nvSpPr>
@@ -4781,13 +7226,77 @@
       </p:sp>
       <p:sp>
         <p:nvSpPr>
-          <p:cNvPr id="6" name="Text 4"/>
+          <p:cNvPr id="7" name="Shape 5"/>
           <p:cNvSpPr/>
           <p:nvPr/>
         </p:nvSpPr>
         <p:spPr>
           <a:xfrm>
             <a:off x="640080" y="658368"/>
+            <a:ext cx="420624" cy="420624"/>
+          </a:xfrm>
+          <a:prstGeom prst="ellipse">
+            <a:avLst/>
+          </a:prstGeom>
+          <a:solidFill>
+            <a:srgbClr val="0068B7"/>
+          </a:solidFill>
+          <a:ln w="12700">
+            <a:solidFill>
+              <a:srgbClr val="0068B7"/>
+            </a:solidFill>
+            <a:prstDash val="solid"/>
+          </a:ln>
+        </p:spPr>
+      </p:sp>
+      <p:sp>
+        <p:nvSpPr>
+          <p:cNvPr id="8" name="Text 6"/>
+          <p:cNvSpPr/>
+          <p:nvPr/>
+        </p:nvSpPr>
+        <p:spPr>
+          <a:xfrm>
+            <a:off x="640080" y="731520"/>
+            <a:ext cx="420624" cy="164592"/>
+          </a:xfrm>
+          <a:prstGeom prst="rect">
+            <a:avLst/>
+          </a:prstGeom>
+          <a:noFill/>
+          <a:ln/>
+        </p:spPr>
+        <p:txBody>
+          <a:bodyPr wrap="square" lIns="0" tIns="0" rIns="0" bIns="0" rtlCol="0" anchor="ctr"/>
+          <a:lstStyle/>
+          <a:p>
+            <a:pPr algn="ctr" indent="0" marL="0">
+              <a:buNone/>
+            </a:pPr>
+            <a:r>
+              <a:rPr lang="en-US" sz="1100" b="1" dirty="0">
+                <a:solidFill>
+                  <a:srgbClr val="FFFFFF"/>
+                </a:solidFill>
+                <a:latin typeface="Aptos" pitchFamily="34" charset="0"/>
+                <a:ea typeface="Aptos" pitchFamily="34" charset="-122"/>
+                <a:cs typeface="Aptos" pitchFamily="34" charset="-120"/>
+              </a:rPr>
+              <a:t>12</a:t>
+            </a:r>
+            <a:endParaRPr lang="en-US" sz="1100" dirty="0"/>
+          </a:p>
+        </p:txBody>
+      </p:sp>
+      <p:sp>
+        <p:nvSpPr>
+          <p:cNvPr id="9" name="Text 7"/>
+          <p:cNvSpPr/>
+          <p:nvPr/>
+        </p:nvSpPr>
+        <p:spPr>
+          <a:xfrm>
+            <a:off x="640080" y="621792"/>
             <a:ext cx="10881360" cy="566928"/>
           </a:xfrm>
           <a:prstGeom prst="rect">
@@ -4814,7 +7323,7 @@
                 <a:ea typeface="Aptos Display" pitchFamily="34" charset="-122"/>
                 <a:cs typeface="Aptos Display" pitchFamily="34" charset="-120"/>
               </a:rPr>
-              <a:t>Expected Assignment</a:t>
+              <a:t>Expected Artifact or Evidence</a:t>
             </a:r>
             <a:endParaRPr lang="en-US" sz="2700" dirty="0"/>
           </a:p>
@@ -4822,14 +7331,14 @@
       </p:sp>
       <p:sp>
         <p:nvSpPr>
-          <p:cNvPr id="7" name="Text 5"/>
-          <p:cNvSpPr/>
-          <p:nvPr/>
-        </p:nvSpPr>
-        <p:spPr>
-          <a:xfrm>
-            <a:off x="822960" y="1325880"/>
-            <a:ext cx="10378440" cy="4800600"/>
+          <p:cNvPr id="10" name="Text 8"/>
+          <p:cNvSpPr/>
+          <p:nvPr/>
+        </p:nvSpPr>
+        <p:spPr>
+          <a:xfrm>
+            <a:off x="868680" y="1417320"/>
+            <a:ext cx="6675120" cy="4434840"/>
           </a:xfrm>
           <a:prstGeom prst="rect">
             <a:avLst/>
@@ -4844,7 +7353,7 @@
           <a:lstStyle/>
           <a:p>
             <a:r>
-              <a:rPr lang="en-US" sz="1450" dirty="0">
+              <a:rPr lang="en-US" sz="1700" dirty="0">
                 <a:solidFill>
                   <a:srgbClr val="17364A"/>
                 </a:solidFill>
@@ -4854,11 +7363,11 @@
               </a:rPr>
               <a:t>Public Comment, Social Listening, and Community Feedback Analysis artifact</a:t>
             </a:r>
-            <a:endParaRPr lang="en-US" sz="1450" dirty="0"/>
-          </a:p>
-          <a:p>
-            <a:r>
-              <a:rPr lang="en-US" sz="1450" dirty="0">
+            <a:endParaRPr lang="en-US" sz="1700" dirty="0"/>
+          </a:p>
+          <a:p>
+            <a:r>
+              <a:rPr lang="en-US" sz="1700" dirty="0">
                 <a:solidFill>
                   <a:srgbClr val="17364A"/>
                 </a:solidFill>
@@ -4868,11 +7377,11 @@
               </a:rPr>
               <a:t>Role and responsibility table</a:t>
             </a:r>
-            <a:endParaRPr lang="en-US" sz="1450" dirty="0"/>
-          </a:p>
-          <a:p>
-            <a:r>
-              <a:rPr lang="en-US" sz="1450" dirty="0">
+            <a:endParaRPr lang="en-US" sz="1700" dirty="0"/>
+          </a:p>
+          <a:p>
+            <a:r>
+              <a:rPr lang="en-US" sz="1700" dirty="0">
                 <a:solidFill>
                   <a:srgbClr val="17364A"/>
                 </a:solidFill>
@@ -4882,11 +7391,104 @@
               </a:rPr>
               <a:t>Risk and safeguard summary</a:t>
             </a:r>
-            <a:endParaRPr lang="en-US" sz="1450" dirty="0"/>
-          </a:p>
-          <a:p>
-            <a:r>
-              <a:rPr lang="en-US" sz="1450" dirty="0">
+            <a:endParaRPr lang="en-US" sz="1700" dirty="0"/>
+          </a:p>
+        </p:txBody>
+      </p:sp>
+      <p:sp>
+        <p:nvSpPr>
+          <p:cNvPr id="11" name="Shape 9"/>
+          <p:cNvSpPr/>
+          <p:nvPr/>
+        </p:nvSpPr>
+        <p:spPr>
+          <a:xfrm>
+            <a:off x="7909560" y="1417320"/>
+            <a:ext cx="3154680" cy="1828800"/>
+          </a:xfrm>
+          <a:prstGeom prst="roundRect">
+            <a:avLst>
+              <a:gd name="adj" fmla="val 6000"/>
+            </a:avLst>
+          </a:prstGeom>
+          <a:solidFill>
+            <a:srgbClr val="EEF8ED"/>
+          </a:solidFill>
+          <a:ln w="12700">
+            <a:solidFill>
+              <a:srgbClr val="B9D7E6"/>
+            </a:solidFill>
+            <a:prstDash val="solid"/>
+          </a:ln>
+        </p:spPr>
+      </p:sp>
+      <p:sp>
+        <p:nvSpPr>
+          <p:cNvPr id="12" name="Text 10"/>
+          <p:cNvSpPr/>
+          <p:nvPr/>
+        </p:nvSpPr>
+        <p:spPr>
+          <a:xfrm>
+            <a:off x="8074152" y="1563624"/>
+            <a:ext cx="2825496" cy="201168"/>
+          </a:xfrm>
+          <a:prstGeom prst="rect">
+            <a:avLst/>
+          </a:prstGeom>
+          <a:noFill/>
+          <a:ln/>
+        </p:spPr>
+        <p:txBody>
+          <a:bodyPr wrap="square" lIns="0" tIns="0" rIns="0" bIns="0" rtlCol="0" anchor="ctr"/>
+          <a:lstStyle/>
+          <a:p>
+            <a:pPr indent="0" marL="0">
+              <a:buNone/>
+            </a:pPr>
+            <a:r>
+              <a:rPr lang="en-US" sz="950" b="1" dirty="0">
+                <a:solidFill>
+                  <a:srgbClr val="0068B7"/>
+                </a:solidFill>
+                <a:latin typeface="Aptos" pitchFamily="34" charset="0"/>
+                <a:ea typeface="Aptos" pitchFamily="34" charset="-122"/>
+                <a:cs typeface="Aptos" pitchFamily="34" charset="-120"/>
+              </a:rPr>
+              <a:t>Key idea</a:t>
+            </a:r>
+            <a:endParaRPr lang="en-US" sz="950" dirty="0"/>
+          </a:p>
+        </p:txBody>
+      </p:sp>
+      <p:sp>
+        <p:nvSpPr>
+          <p:cNvPr id="13" name="Text 11"/>
+          <p:cNvSpPr/>
+          <p:nvPr/>
+        </p:nvSpPr>
+        <p:spPr>
+          <a:xfrm>
+            <a:off x="8074152" y="1856232"/>
+            <a:ext cx="2825496" cy="1261872"/>
+          </a:xfrm>
+          <a:prstGeom prst="rect">
+            <a:avLst/>
+          </a:prstGeom>
+          <a:noFill/>
+          <a:ln/>
+        </p:spPr>
+        <p:txBody>
+          <a:bodyPr wrap="square" lIns="0" tIns="0" rIns="0" bIns="0" rtlCol="0" anchor="t">
+            <a:normAutofit/>
+          </a:bodyPr>
+          <a:lstStyle/>
+          <a:p>
+            <a:pPr indent="0" marL="0">
+              <a:buNone/>
+            </a:pPr>
+            <a:r>
+              <a:rPr lang="en-US" sz="1250" dirty="0">
                 <a:solidFill>
                   <a:srgbClr val="17364A"/>
                 </a:solidFill>
@@ -4894,13 +7496,106 @@
                 <a:ea typeface="Aptos" pitchFamily="34" charset="-122"/>
                 <a:cs typeface="Aptos" pitchFamily="34" charset="-120"/>
               </a:rPr>
-              <a:t>Escalation and monitoring plan</a:t>
-            </a:r>
-            <a:endParaRPr lang="en-US" sz="1450" dirty="0"/>
-          </a:p>
-          <a:p>
-            <a:r>
-              <a:rPr lang="en-US" sz="1450" dirty="0">
+              <a:t>Public Comment, Social Listening, and Community Feedback Analysis artifact</a:t>
+            </a:r>
+            <a:endParaRPr lang="en-US" sz="1250" dirty="0"/>
+          </a:p>
+        </p:txBody>
+      </p:sp>
+      <p:sp>
+        <p:nvSpPr>
+          <p:cNvPr id="14" name="Shape 12"/>
+          <p:cNvSpPr/>
+          <p:nvPr/>
+        </p:nvSpPr>
+        <p:spPr>
+          <a:xfrm>
+            <a:off x="7909560" y="3520440"/>
+            <a:ext cx="3154680" cy="1737360"/>
+          </a:xfrm>
+          <a:prstGeom prst="roundRect">
+            <a:avLst>
+              <a:gd name="adj" fmla="val 6316"/>
+            </a:avLst>
+          </a:prstGeom>
+          <a:solidFill>
+            <a:srgbClr val="EAF6F8"/>
+          </a:solidFill>
+          <a:ln w="12700">
+            <a:solidFill>
+              <a:srgbClr val="B9D7E6"/>
+            </a:solidFill>
+            <a:prstDash val="solid"/>
+          </a:ln>
+        </p:spPr>
+      </p:sp>
+      <p:sp>
+        <p:nvSpPr>
+          <p:cNvPr id="15" name="Text 13"/>
+          <p:cNvSpPr/>
+          <p:nvPr/>
+        </p:nvSpPr>
+        <p:spPr>
+          <a:xfrm>
+            <a:off x="8074152" y="3666744"/>
+            <a:ext cx="2825496" cy="201168"/>
+          </a:xfrm>
+          <a:prstGeom prst="rect">
+            <a:avLst/>
+          </a:prstGeom>
+          <a:noFill/>
+          <a:ln/>
+        </p:spPr>
+        <p:txBody>
+          <a:bodyPr wrap="square" lIns="0" tIns="0" rIns="0" bIns="0" rtlCol="0" anchor="ctr"/>
+          <a:lstStyle/>
+          <a:p>
+            <a:pPr indent="0" marL="0">
+              <a:buNone/>
+            </a:pPr>
+            <a:r>
+              <a:rPr lang="en-US" sz="950" b="1" dirty="0">
+                <a:solidFill>
+                  <a:srgbClr val="0068B7"/>
+                </a:solidFill>
+                <a:latin typeface="Aptos" pitchFamily="34" charset="0"/>
+                <a:ea typeface="Aptos" pitchFamily="34" charset="-122"/>
+                <a:cs typeface="Aptos" pitchFamily="34" charset="-120"/>
+              </a:rPr>
+              <a:t>Use this for</a:t>
+            </a:r>
+            <a:endParaRPr lang="en-US" sz="950" dirty="0"/>
+          </a:p>
+        </p:txBody>
+      </p:sp>
+      <p:sp>
+        <p:nvSpPr>
+          <p:cNvPr id="16" name="Text 14"/>
+          <p:cNvSpPr/>
+          <p:nvPr/>
+        </p:nvSpPr>
+        <p:spPr>
+          <a:xfrm>
+            <a:off x="8074152" y="3959352"/>
+            <a:ext cx="2825496" cy="1170432"/>
+          </a:xfrm>
+          <a:prstGeom prst="rect">
+            <a:avLst/>
+          </a:prstGeom>
+          <a:noFill/>
+          <a:ln/>
+        </p:spPr>
+        <p:txBody>
+          <a:bodyPr wrap="square" lIns="0" tIns="0" rIns="0" bIns="0" rtlCol="0" anchor="t">
+            <a:normAutofit/>
+          </a:bodyPr>
+          <a:lstStyle/>
+          <a:p>
+            <a:pPr indent="0" marL="0">
+              <a:buNone/>
+            </a:pPr>
+            <a:r>
+              <a:rPr lang="en-US" sz="1250" dirty="0">
                 <a:solidFill>
                   <a:srgbClr val="17364A"/>
                 </a:solidFill>
@@ -4908,9 +7603,9 @@
                 <a:ea typeface="Aptos" pitchFamily="34" charset="-122"/>
                 <a:cs typeface="Aptos" pitchFamily="34" charset="-120"/>
               </a:rPr>
-              <a:t>Approval or review note</a:t>
-            </a:r>
-            <a:endParaRPr lang="en-US" sz="1450" dirty="0"/>
+              <a:t>Connect the concept to public health decisions, safeguards, documentation, or implementation work.</a:t>
+            </a:r>
+            <a:endParaRPr lang="en-US" sz="1250" dirty="0"/>
           </a:p>
         </p:txBody>
       </p:sp>
@@ -4973,7 +7668,32 @@
       </p:sp>
       <p:sp>
         <p:nvSpPr>
-          <p:cNvPr id="3" name="Text 1"/>
+          <p:cNvPr id="3" name="Shape 1"/>
+          <p:cNvSpPr/>
+          <p:nvPr/>
+        </p:nvSpPr>
+        <p:spPr>
+          <a:xfrm>
+            <a:off x="0" y="164592"/>
+            <a:ext cx="146304" cy="6693408"/>
+          </a:xfrm>
+          <a:prstGeom prst="rect">
+            <a:avLst/>
+          </a:prstGeom>
+          <a:solidFill>
+            <a:srgbClr val="2F8A28"/>
+          </a:solidFill>
+          <a:ln w="12700">
+            <a:solidFill>
+              <a:srgbClr val="2F8A28"/>
+            </a:solidFill>
+            <a:prstDash val="solid"/>
+          </a:ln>
+        </p:spPr>
+      </p:sp>
+      <p:sp>
+        <p:nvSpPr>
+          <p:cNvPr id="4" name="Text 2"/>
           <p:cNvSpPr/>
           <p:nvPr/>
         </p:nvSpPr>
@@ -5012,7 +7732,7 @@
       </p:sp>
       <p:sp>
         <p:nvSpPr>
-          <p:cNvPr id="4" name="Text 2"/>
+          <p:cNvPr id="5" name="Text 3"/>
           <p:cNvSpPr/>
           <p:nvPr/>
         </p:nvSpPr>
@@ -5051,7 +7771,7 @@
       </p:sp>
       <p:sp>
         <p:nvSpPr>
-          <p:cNvPr id="5" name="Text 3"/>
+          <p:cNvPr id="6" name="Text 4"/>
           <p:cNvSpPr/>
           <p:nvPr/>
         </p:nvSpPr>
@@ -5090,7 +7810,7 @@
       </p:sp>
       <p:sp>
         <p:nvSpPr>
-          <p:cNvPr id="6" name="Text 4"/>
+          <p:cNvPr id="7" name="Text 5"/>
           <p:cNvSpPr/>
           <p:nvPr/>
         </p:nvSpPr>
@@ -5123,7 +7843,7 @@
                 <a:ea typeface="Aptos Display" pitchFamily="34" charset="-122"/>
                 <a:cs typeface="Aptos Display" pitchFamily="34" charset="-120"/>
               </a:rPr>
-              <a:t>Knowledge Check</a:t>
+              <a:t>Expected Artifact or Evidence Continued</a:t>
             </a:r>
             <a:endParaRPr lang="en-US" sz="2700" dirty="0"/>
           </a:p>
@@ -5131,14 +7851,14 @@
       </p:sp>
       <p:sp>
         <p:nvSpPr>
-          <p:cNvPr id="7" name="Text 5"/>
-          <p:cNvSpPr/>
-          <p:nvPr/>
-        </p:nvSpPr>
-        <p:spPr>
-          <a:xfrm>
-            <a:off x="822960" y="1325880"/>
-            <a:ext cx="10378440" cy="4800600"/>
+          <p:cNvPr id="8" name="Text 6"/>
+          <p:cNvSpPr/>
+          <p:nvPr/>
+        </p:nvSpPr>
+        <p:spPr>
+          <a:xfrm>
+            <a:off x="868680" y="1417320"/>
+            <a:ext cx="6675120" cy="4434840"/>
           </a:xfrm>
           <a:prstGeom prst="rect">
             <a:avLst/>
@@ -5153,7 +7873,7 @@
           <a:lstStyle/>
           <a:p>
             <a:r>
-              <a:rPr lang="en-US" sz="1450" dirty="0">
+              <a:rPr lang="en-US" sz="1700" dirty="0">
                 <a:solidFill>
                   <a:srgbClr val="17364A"/>
                 </a:solidFill>
@@ -5161,13 +7881,13 @@
                 <a:ea typeface="Aptos" pitchFamily="34" charset="-122"/>
                 <a:cs typeface="Aptos" pitchFamily="34" charset="-120"/>
               </a:rPr>
-              <a:t>1. What is the strongest evidence that public comment, social listening, and community feedback analysis has been applied responsibly?</a:t>
-            </a:r>
-            <a:endParaRPr lang="en-US" sz="1450" dirty="0"/>
-          </a:p>
-          <a:p>
-            <a:r>
-              <a:rPr lang="en-US" sz="1450" dirty="0">
+              <a:t>Escalation and monitoring plan</a:t>
+            </a:r>
+            <a:endParaRPr lang="en-US" sz="1700" dirty="0"/>
+          </a:p>
+          <a:p>
+            <a:r>
+              <a:rPr lang="en-US" sz="1700" dirty="0">
                 <a:solidFill>
                   <a:srgbClr val="17364A"/>
                 </a:solidFill>
@@ -5175,13 +7895,106 @@
                 <a:ea typeface="Aptos" pitchFamily="34" charset="-122"/>
                 <a:cs typeface="Aptos" pitchFamily="34" charset="-120"/>
               </a:rPr>
-              <a:t>2. What is the best reason to assign an accountability owner?</a:t>
-            </a:r>
-            <a:endParaRPr lang="en-US" sz="1450" dirty="0"/>
-          </a:p>
-          <a:p>
-            <a:r>
-              <a:rPr lang="en-US" sz="1450" dirty="0">
+              <a:t>Approval or review note</a:t>
+            </a:r>
+            <a:endParaRPr lang="en-US" sz="1700" dirty="0"/>
+          </a:p>
+        </p:txBody>
+      </p:sp>
+      <p:sp>
+        <p:nvSpPr>
+          <p:cNvPr id="9" name="Shape 7"/>
+          <p:cNvSpPr/>
+          <p:nvPr/>
+        </p:nvSpPr>
+        <p:spPr>
+          <a:xfrm>
+            <a:off x="7909560" y="1417320"/>
+            <a:ext cx="3154680" cy="1828800"/>
+          </a:xfrm>
+          <a:prstGeom prst="roundRect">
+            <a:avLst>
+              <a:gd name="adj" fmla="val 6000"/>
+            </a:avLst>
+          </a:prstGeom>
+          <a:solidFill>
+            <a:srgbClr val="EEF8ED"/>
+          </a:solidFill>
+          <a:ln w="12700">
+            <a:solidFill>
+              <a:srgbClr val="B9D7E6"/>
+            </a:solidFill>
+            <a:prstDash val="solid"/>
+          </a:ln>
+        </p:spPr>
+      </p:sp>
+      <p:sp>
+        <p:nvSpPr>
+          <p:cNvPr id="10" name="Text 8"/>
+          <p:cNvSpPr/>
+          <p:nvPr/>
+        </p:nvSpPr>
+        <p:spPr>
+          <a:xfrm>
+            <a:off x="8074152" y="1563624"/>
+            <a:ext cx="2825496" cy="201168"/>
+          </a:xfrm>
+          <a:prstGeom prst="rect">
+            <a:avLst/>
+          </a:prstGeom>
+          <a:noFill/>
+          <a:ln/>
+        </p:spPr>
+        <p:txBody>
+          <a:bodyPr wrap="square" lIns="0" tIns="0" rIns="0" bIns="0" rtlCol="0" anchor="ctr"/>
+          <a:lstStyle/>
+          <a:p>
+            <a:pPr indent="0" marL="0">
+              <a:buNone/>
+            </a:pPr>
+            <a:r>
+              <a:rPr lang="en-US" sz="950" b="1" dirty="0">
+                <a:solidFill>
+                  <a:srgbClr val="0068B7"/>
+                </a:solidFill>
+                <a:latin typeface="Aptos" pitchFamily="34" charset="0"/>
+                <a:ea typeface="Aptos" pitchFamily="34" charset="-122"/>
+                <a:cs typeface="Aptos" pitchFamily="34" charset="-120"/>
+              </a:rPr>
+              <a:t>Key idea</a:t>
+            </a:r>
+            <a:endParaRPr lang="en-US" sz="950" dirty="0"/>
+          </a:p>
+        </p:txBody>
+      </p:sp>
+      <p:sp>
+        <p:nvSpPr>
+          <p:cNvPr id="11" name="Text 9"/>
+          <p:cNvSpPr/>
+          <p:nvPr/>
+        </p:nvSpPr>
+        <p:spPr>
+          <a:xfrm>
+            <a:off x="8074152" y="1856232"/>
+            <a:ext cx="2825496" cy="1261872"/>
+          </a:xfrm>
+          <a:prstGeom prst="rect">
+            <a:avLst/>
+          </a:prstGeom>
+          <a:noFill/>
+          <a:ln/>
+        </p:spPr>
+        <p:txBody>
+          <a:bodyPr wrap="square" lIns="0" tIns="0" rIns="0" bIns="0" rtlCol="0" anchor="t">
+            <a:normAutofit/>
+          </a:bodyPr>
+          <a:lstStyle/>
+          <a:p>
+            <a:pPr indent="0" marL="0">
+              <a:buNone/>
+            </a:pPr>
+            <a:r>
+              <a:rPr lang="en-US" sz="1250" dirty="0">
                 <a:solidFill>
                   <a:srgbClr val="17364A"/>
                 </a:solidFill>
@@ -5189,13 +8002,106 @@
                 <a:ea typeface="Aptos" pitchFamily="34" charset="-122"/>
                 <a:cs typeface="Aptos" pitchFamily="34" charset="-120"/>
               </a:rPr>
-              <a:t>3. When should an AI-supported workflow be escalated for review?</a:t>
-            </a:r>
-            <a:endParaRPr lang="en-US" sz="1450" dirty="0"/>
-          </a:p>
-          <a:p>
-            <a:r>
-              <a:rPr lang="en-US" sz="1450" dirty="0">
+              <a:t>Escalation and monitoring plan</a:t>
+            </a:r>
+            <a:endParaRPr lang="en-US" sz="1250" dirty="0"/>
+          </a:p>
+        </p:txBody>
+      </p:sp>
+      <p:sp>
+        <p:nvSpPr>
+          <p:cNvPr id="12" name="Shape 10"/>
+          <p:cNvSpPr/>
+          <p:nvPr/>
+        </p:nvSpPr>
+        <p:spPr>
+          <a:xfrm>
+            <a:off x="7909560" y="3520440"/>
+            <a:ext cx="3154680" cy="1737360"/>
+          </a:xfrm>
+          <a:prstGeom prst="roundRect">
+            <a:avLst>
+              <a:gd name="adj" fmla="val 6316"/>
+            </a:avLst>
+          </a:prstGeom>
+          <a:solidFill>
+            <a:srgbClr val="EAF6F8"/>
+          </a:solidFill>
+          <a:ln w="12700">
+            <a:solidFill>
+              <a:srgbClr val="B9D7E6"/>
+            </a:solidFill>
+            <a:prstDash val="solid"/>
+          </a:ln>
+        </p:spPr>
+      </p:sp>
+      <p:sp>
+        <p:nvSpPr>
+          <p:cNvPr id="13" name="Text 11"/>
+          <p:cNvSpPr/>
+          <p:nvPr/>
+        </p:nvSpPr>
+        <p:spPr>
+          <a:xfrm>
+            <a:off x="8074152" y="3666744"/>
+            <a:ext cx="2825496" cy="201168"/>
+          </a:xfrm>
+          <a:prstGeom prst="rect">
+            <a:avLst/>
+          </a:prstGeom>
+          <a:noFill/>
+          <a:ln/>
+        </p:spPr>
+        <p:txBody>
+          <a:bodyPr wrap="square" lIns="0" tIns="0" rIns="0" bIns="0" rtlCol="0" anchor="ctr"/>
+          <a:lstStyle/>
+          <a:p>
+            <a:pPr indent="0" marL="0">
+              <a:buNone/>
+            </a:pPr>
+            <a:r>
+              <a:rPr lang="en-US" sz="950" b="1" dirty="0">
+                <a:solidFill>
+                  <a:srgbClr val="0068B7"/>
+                </a:solidFill>
+                <a:latin typeface="Aptos" pitchFamily="34" charset="0"/>
+                <a:ea typeface="Aptos" pitchFamily="34" charset="-122"/>
+                <a:cs typeface="Aptos" pitchFamily="34" charset="-120"/>
+              </a:rPr>
+              <a:t>Use this for</a:t>
+            </a:r>
+            <a:endParaRPr lang="en-US" sz="950" dirty="0"/>
+          </a:p>
+        </p:txBody>
+      </p:sp>
+      <p:sp>
+        <p:nvSpPr>
+          <p:cNvPr id="14" name="Text 12"/>
+          <p:cNvSpPr/>
+          <p:nvPr/>
+        </p:nvSpPr>
+        <p:spPr>
+          <a:xfrm>
+            <a:off x="8074152" y="3959352"/>
+            <a:ext cx="2825496" cy="1170432"/>
+          </a:xfrm>
+          <a:prstGeom prst="rect">
+            <a:avLst/>
+          </a:prstGeom>
+          <a:noFill/>
+          <a:ln/>
+        </p:spPr>
+        <p:txBody>
+          <a:bodyPr wrap="square" lIns="0" tIns="0" rIns="0" bIns="0" rtlCol="0" anchor="t">
+            <a:normAutofit/>
+          </a:bodyPr>
+          <a:lstStyle/>
+          <a:p>
+            <a:pPr indent="0" marL="0">
+              <a:buNone/>
+            </a:pPr>
+            <a:r>
+              <a:rPr lang="en-US" sz="1250" dirty="0">
                 <a:solidFill>
                   <a:srgbClr val="17364A"/>
                 </a:solidFill>
@@ -5203,23 +8109,9 @@
                 <a:ea typeface="Aptos" pitchFamily="34" charset="-122"/>
                 <a:cs typeface="Aptos" pitchFamily="34" charset="-120"/>
               </a:rPr>
-              <a:t>4. Which practice best supports public accountability?</a:t>
-            </a:r>
-            <a:endParaRPr lang="en-US" sz="1450" dirty="0"/>
-          </a:p>
-          <a:p>
-            <a:r>
-              <a:rPr lang="en-US" sz="1450" dirty="0">
-                <a:solidFill>
-                  <a:srgbClr val="17364A"/>
-                </a:solidFill>
-                <a:latin typeface="Aptos" pitchFamily="34" charset="0"/>
-                <a:ea typeface="Aptos" pitchFamily="34" charset="-122"/>
-                <a:cs typeface="Aptos" pitchFamily="34" charset="-120"/>
-              </a:rPr>
-              <a:t>5. What should happen when data sources, policy, vendor configuration, or workflow use changes?</a:t>
-            </a:r>
-            <a:endParaRPr lang="en-US" sz="1450" dirty="0"/>
+              <a:t>Connect the concept to public health decisions, safeguards, documentation, or implementation work.</a:t>
+            </a:r>
+            <a:endParaRPr lang="en-US" sz="1250" dirty="0"/>
           </a:p>
         </p:txBody>
       </p:sp>
@@ -5282,7 +8174,32 @@
       </p:sp>
       <p:sp>
         <p:nvSpPr>
-          <p:cNvPr id="3" name="Text 1"/>
+          <p:cNvPr id="3" name="Shape 1"/>
+          <p:cNvSpPr/>
+          <p:nvPr/>
+        </p:nvSpPr>
+        <p:spPr>
+          <a:xfrm>
+            <a:off x="0" y="164592"/>
+            <a:ext cx="146304" cy="6693408"/>
+          </a:xfrm>
+          <a:prstGeom prst="rect">
+            <a:avLst/>
+          </a:prstGeom>
+          <a:solidFill>
+            <a:srgbClr val="2F8A28"/>
+          </a:solidFill>
+          <a:ln w="12700">
+            <a:solidFill>
+              <a:srgbClr val="2F8A28"/>
+            </a:solidFill>
+            <a:prstDash val="solid"/>
+          </a:ln>
+        </p:spPr>
+      </p:sp>
+      <p:sp>
+        <p:nvSpPr>
+          <p:cNvPr id="4" name="Text 2"/>
           <p:cNvSpPr/>
           <p:nvPr/>
         </p:nvSpPr>
@@ -5321,7 +8238,7 @@
       </p:sp>
       <p:sp>
         <p:nvSpPr>
-          <p:cNvPr id="4" name="Text 2"/>
+          <p:cNvPr id="5" name="Text 3"/>
           <p:cNvSpPr/>
           <p:nvPr/>
         </p:nvSpPr>
@@ -5360,7 +8277,7 @@
       </p:sp>
       <p:sp>
         <p:nvSpPr>
-          <p:cNvPr id="5" name="Text 3"/>
+          <p:cNvPr id="6" name="Text 4"/>
           <p:cNvSpPr/>
           <p:nvPr/>
         </p:nvSpPr>
@@ -5399,13 +8316,77 @@
       </p:sp>
       <p:sp>
         <p:nvSpPr>
-          <p:cNvPr id="6" name="Text 4"/>
+          <p:cNvPr id="7" name="Shape 5"/>
           <p:cNvSpPr/>
           <p:nvPr/>
         </p:nvSpPr>
         <p:spPr>
           <a:xfrm>
             <a:off x="640080" y="658368"/>
+            <a:ext cx="420624" cy="420624"/>
+          </a:xfrm>
+          <a:prstGeom prst="ellipse">
+            <a:avLst/>
+          </a:prstGeom>
+          <a:solidFill>
+            <a:srgbClr val="0068B7"/>
+          </a:solidFill>
+          <a:ln w="12700">
+            <a:solidFill>
+              <a:srgbClr val="0068B7"/>
+            </a:solidFill>
+            <a:prstDash val="solid"/>
+          </a:ln>
+        </p:spPr>
+      </p:sp>
+      <p:sp>
+        <p:nvSpPr>
+          <p:cNvPr id="8" name="Text 6"/>
+          <p:cNvSpPr/>
+          <p:nvPr/>
+        </p:nvSpPr>
+        <p:spPr>
+          <a:xfrm>
+            <a:off x="640080" y="731520"/>
+            <a:ext cx="420624" cy="164592"/>
+          </a:xfrm>
+          <a:prstGeom prst="rect">
+            <a:avLst/>
+          </a:prstGeom>
+          <a:noFill/>
+          <a:ln/>
+        </p:spPr>
+        <p:txBody>
+          <a:bodyPr wrap="square" lIns="0" tIns="0" rIns="0" bIns="0" rtlCol="0" anchor="ctr"/>
+          <a:lstStyle/>
+          <a:p>
+            <a:pPr algn="ctr" indent="0" marL="0">
+              <a:buNone/>
+            </a:pPr>
+            <a:r>
+              <a:rPr lang="en-US" sz="1100" b="1" dirty="0">
+                <a:solidFill>
+                  <a:srgbClr val="FFFFFF"/>
+                </a:solidFill>
+                <a:latin typeface="Aptos" pitchFamily="34" charset="0"/>
+                <a:ea typeface="Aptos" pitchFamily="34" charset="-122"/>
+                <a:cs typeface="Aptos" pitchFamily="34" charset="-120"/>
+              </a:rPr>
+              <a:t>13</a:t>
+            </a:r>
+            <a:endParaRPr lang="en-US" sz="1100" dirty="0"/>
+          </a:p>
+        </p:txBody>
+      </p:sp>
+      <p:sp>
+        <p:nvSpPr>
+          <p:cNvPr id="9" name="Text 7"/>
+          <p:cNvSpPr/>
+          <p:nvPr/>
+        </p:nvSpPr>
+        <p:spPr>
+          <a:xfrm>
+            <a:off x="640080" y="621792"/>
             <a:ext cx="10881360" cy="566928"/>
           </a:xfrm>
           <a:prstGeom prst="rect">
@@ -5432,7 +8413,7 @@
                 <a:ea typeface="Aptos Display" pitchFamily="34" charset="-122"/>
                 <a:cs typeface="Aptos Display" pitchFamily="34" charset="-120"/>
               </a:rPr>
-              <a:t>References and Resources</a:t>
+              <a:t>Expected Assignment</a:t>
             </a:r>
             <a:endParaRPr lang="en-US" sz="2700" dirty="0"/>
           </a:p>
@@ -5440,14 +8421,14 @@
       </p:sp>
       <p:sp>
         <p:nvSpPr>
-          <p:cNvPr id="7" name="Text 5"/>
-          <p:cNvSpPr/>
-          <p:nvPr/>
-        </p:nvSpPr>
-        <p:spPr>
-          <a:xfrm>
-            <a:off x="822960" y="1325880"/>
-            <a:ext cx="10378440" cy="4800600"/>
+          <p:cNvPr id="10" name="Text 8"/>
+          <p:cNvSpPr/>
+          <p:nvPr/>
+        </p:nvSpPr>
+        <p:spPr>
+          <a:xfrm>
+            <a:off x="868680" y="1417320"/>
+            <a:ext cx="6675120" cy="4434840"/>
           </a:xfrm>
           <a:prstGeom prst="rect">
             <a:avLst/>
@@ -5462,7 +8443,7 @@
           <a:lstStyle/>
           <a:p>
             <a:r>
-              <a:rPr lang="en-US" sz="1450" dirty="0">
+              <a:rPr lang="en-US" sz="1700" dirty="0">
                 <a:solidFill>
                   <a:srgbClr val="17364A"/>
                 </a:solidFill>
@@ -5470,13 +8451,13 @@
                 <a:ea typeface="Aptos" pitchFamily="34" charset="-122"/>
                 <a:cs typeface="Aptos" pitchFamily="34" charset="-120"/>
               </a:rPr>
-              <a:t>CDC Public Health Data Strategy and Data Modernization resources: https://www.cdc.gov/public-health-data-strategy/php/about/index.html</a:t>
-            </a:r>
-            <a:endParaRPr lang="en-US" sz="1450" dirty="0"/>
-          </a:p>
-          <a:p>
-            <a:r>
-              <a:rPr lang="en-US" sz="1450" dirty="0">
+              <a:t>Public Comment, Social Listening, and Community Feedback Analysis artifact</a:t>
+            </a:r>
+            <a:endParaRPr lang="en-US" sz="1700" dirty="0"/>
+          </a:p>
+          <a:p>
+            <a:r>
+              <a:rPr lang="en-US" sz="1700" dirty="0">
                 <a:solidFill>
                   <a:srgbClr val="17364A"/>
                 </a:solidFill>
@@ -5484,13 +8465,13 @@
                 <a:ea typeface="Aptos" pitchFamily="34" charset="-122"/>
                 <a:cs typeface="Aptos" pitchFamily="34" charset="-120"/>
               </a:rPr>
-              <a:t>NIST Artificial Intelligence Risk Management Framework and NIST Generative AI Profile: https://www.nist.gov/publications/artificial-intelligence-risk-management-framework-generative-artificial-intelligence</a:t>
-            </a:r>
-            <a:endParaRPr lang="en-US" sz="1450" dirty="0"/>
-          </a:p>
-          <a:p>
-            <a:r>
-              <a:rPr lang="en-US" sz="1450" dirty="0">
+              <a:t>Role and responsibility table</a:t>
+            </a:r>
+            <a:endParaRPr lang="en-US" sz="1700" dirty="0"/>
+          </a:p>
+          <a:p>
+            <a:r>
+              <a:rPr lang="en-US" sz="1700" dirty="0">
                 <a:solidFill>
                   <a:srgbClr val="17364A"/>
                 </a:solidFill>
@@ -5498,13 +8479,13 @@
                 <a:ea typeface="Aptos" pitchFamily="34" charset="-122"/>
                 <a:cs typeface="Aptos" pitchFamily="34" charset="-120"/>
               </a:rPr>
-              <a:t>WHO Ethics and Governance of Artificial Intelligence for Health guidance: https://www.who.int/publications/i/item/9789240029200</a:t>
-            </a:r>
-            <a:endParaRPr lang="en-US" sz="1450" dirty="0"/>
-          </a:p>
-          <a:p>
-            <a:r>
-              <a:rPr lang="en-US" sz="1450" dirty="0">
+              <a:t>Risk and safeguard summary</a:t>
+            </a:r>
+            <a:endParaRPr lang="en-US" sz="1700" dirty="0"/>
+          </a:p>
+          <a:p>
+            <a:r>
+              <a:rPr lang="en-US" sz="1700" dirty="0">
                 <a:solidFill>
                   <a:srgbClr val="17364A"/>
                 </a:solidFill>
@@ -5512,13 +8493,106 @@
                 <a:ea typeface="Aptos" pitchFamily="34" charset="-122"/>
                 <a:cs typeface="Aptos" pitchFamily="34" charset="-120"/>
               </a:rPr>
-              <a:t>OWASP Top 10 for Large Language Model Applications: https://owasp.org/www-project-top-10-for-large-language-model-applications/</a:t>
-            </a:r>
-            <a:endParaRPr lang="en-US" sz="1450" dirty="0"/>
-          </a:p>
-          <a:p>
-            <a:r>
-              <a:rPr lang="en-US" sz="1450" dirty="0">
+              <a:t>Escalation and monitoring plan</a:t>
+            </a:r>
+            <a:endParaRPr lang="en-US" sz="1700" dirty="0"/>
+          </a:p>
+        </p:txBody>
+      </p:sp>
+      <p:sp>
+        <p:nvSpPr>
+          <p:cNvPr id="11" name="Shape 9"/>
+          <p:cNvSpPr/>
+          <p:nvPr/>
+        </p:nvSpPr>
+        <p:spPr>
+          <a:xfrm>
+            <a:off x="7909560" y="1417320"/>
+            <a:ext cx="3154680" cy="1828800"/>
+          </a:xfrm>
+          <a:prstGeom prst="roundRect">
+            <a:avLst>
+              <a:gd name="adj" fmla="val 6000"/>
+            </a:avLst>
+          </a:prstGeom>
+          <a:solidFill>
+            <a:srgbClr val="EEF8ED"/>
+          </a:solidFill>
+          <a:ln w="12700">
+            <a:solidFill>
+              <a:srgbClr val="B9D7E6"/>
+            </a:solidFill>
+            <a:prstDash val="solid"/>
+          </a:ln>
+        </p:spPr>
+      </p:sp>
+      <p:sp>
+        <p:nvSpPr>
+          <p:cNvPr id="12" name="Text 10"/>
+          <p:cNvSpPr/>
+          <p:nvPr/>
+        </p:nvSpPr>
+        <p:spPr>
+          <a:xfrm>
+            <a:off x="8074152" y="1563624"/>
+            <a:ext cx="2825496" cy="201168"/>
+          </a:xfrm>
+          <a:prstGeom prst="rect">
+            <a:avLst/>
+          </a:prstGeom>
+          <a:noFill/>
+          <a:ln/>
+        </p:spPr>
+        <p:txBody>
+          <a:bodyPr wrap="square" lIns="0" tIns="0" rIns="0" bIns="0" rtlCol="0" anchor="ctr"/>
+          <a:lstStyle/>
+          <a:p>
+            <a:pPr indent="0" marL="0">
+              <a:buNone/>
+            </a:pPr>
+            <a:r>
+              <a:rPr lang="en-US" sz="950" b="1" dirty="0">
+                <a:solidFill>
+                  <a:srgbClr val="0068B7"/>
+                </a:solidFill>
+                <a:latin typeface="Aptos" pitchFamily="34" charset="0"/>
+                <a:ea typeface="Aptos" pitchFamily="34" charset="-122"/>
+                <a:cs typeface="Aptos" pitchFamily="34" charset="-120"/>
+              </a:rPr>
+              <a:t>Key idea</a:t>
+            </a:r>
+            <a:endParaRPr lang="en-US" sz="950" dirty="0"/>
+          </a:p>
+        </p:txBody>
+      </p:sp>
+      <p:sp>
+        <p:nvSpPr>
+          <p:cNvPr id="13" name="Text 11"/>
+          <p:cNvSpPr/>
+          <p:nvPr/>
+        </p:nvSpPr>
+        <p:spPr>
+          <a:xfrm>
+            <a:off x="8074152" y="1856232"/>
+            <a:ext cx="2825496" cy="1261872"/>
+          </a:xfrm>
+          <a:prstGeom prst="rect">
+            <a:avLst/>
+          </a:prstGeom>
+          <a:noFill/>
+          <a:ln/>
+        </p:spPr>
+        <p:txBody>
+          <a:bodyPr wrap="square" lIns="0" tIns="0" rIns="0" bIns="0" rtlCol="0" anchor="t">
+            <a:normAutofit/>
+          </a:bodyPr>
+          <a:lstStyle/>
+          <a:p>
+            <a:pPr indent="0" marL="0">
+              <a:buNone/>
+            </a:pPr>
+            <a:r>
+              <a:rPr lang="en-US" sz="1250" dirty="0">
                 <a:solidFill>
                   <a:srgbClr val="17364A"/>
                 </a:solidFill>
@@ -5526,9 +8600,116 @@
                 <a:ea typeface="Aptos" pitchFamily="34" charset="-122"/>
                 <a:cs typeface="Aptos" pitchFamily="34" charset="-120"/>
               </a:rPr>
-              <a:t>ONC health IT, interoperability, and information blocking resources: https://www.healthit.gov/</a:t>
-            </a:r>
-            <a:endParaRPr lang="en-US" sz="1450" dirty="0"/>
+              <a:t>Public Comment, Social Listening, and Community Feedback Analysis artifact</a:t>
+            </a:r>
+            <a:endParaRPr lang="en-US" sz="1250" dirty="0"/>
+          </a:p>
+        </p:txBody>
+      </p:sp>
+      <p:sp>
+        <p:nvSpPr>
+          <p:cNvPr id="14" name="Shape 12"/>
+          <p:cNvSpPr/>
+          <p:nvPr/>
+        </p:nvSpPr>
+        <p:spPr>
+          <a:xfrm>
+            <a:off x="7909560" y="3520440"/>
+            <a:ext cx="3154680" cy="1737360"/>
+          </a:xfrm>
+          <a:prstGeom prst="roundRect">
+            <a:avLst>
+              <a:gd name="adj" fmla="val 6316"/>
+            </a:avLst>
+          </a:prstGeom>
+          <a:solidFill>
+            <a:srgbClr val="EAF6F8"/>
+          </a:solidFill>
+          <a:ln w="12700">
+            <a:solidFill>
+              <a:srgbClr val="B9D7E6"/>
+            </a:solidFill>
+            <a:prstDash val="solid"/>
+          </a:ln>
+        </p:spPr>
+      </p:sp>
+      <p:sp>
+        <p:nvSpPr>
+          <p:cNvPr id="15" name="Text 13"/>
+          <p:cNvSpPr/>
+          <p:nvPr/>
+        </p:nvSpPr>
+        <p:spPr>
+          <a:xfrm>
+            <a:off x="8074152" y="3666744"/>
+            <a:ext cx="2825496" cy="201168"/>
+          </a:xfrm>
+          <a:prstGeom prst="rect">
+            <a:avLst/>
+          </a:prstGeom>
+          <a:noFill/>
+          <a:ln/>
+        </p:spPr>
+        <p:txBody>
+          <a:bodyPr wrap="square" lIns="0" tIns="0" rIns="0" bIns="0" rtlCol="0" anchor="ctr"/>
+          <a:lstStyle/>
+          <a:p>
+            <a:pPr indent="0" marL="0">
+              <a:buNone/>
+            </a:pPr>
+            <a:r>
+              <a:rPr lang="en-US" sz="950" b="1" dirty="0">
+                <a:solidFill>
+                  <a:srgbClr val="0068B7"/>
+                </a:solidFill>
+                <a:latin typeface="Aptos" pitchFamily="34" charset="0"/>
+                <a:ea typeface="Aptos" pitchFamily="34" charset="-122"/>
+                <a:cs typeface="Aptos" pitchFamily="34" charset="-120"/>
+              </a:rPr>
+              <a:t>Use this for</a:t>
+            </a:r>
+            <a:endParaRPr lang="en-US" sz="950" dirty="0"/>
+          </a:p>
+        </p:txBody>
+      </p:sp>
+      <p:sp>
+        <p:nvSpPr>
+          <p:cNvPr id="16" name="Text 14"/>
+          <p:cNvSpPr/>
+          <p:nvPr/>
+        </p:nvSpPr>
+        <p:spPr>
+          <a:xfrm>
+            <a:off x="8074152" y="3959352"/>
+            <a:ext cx="2825496" cy="1170432"/>
+          </a:xfrm>
+          <a:prstGeom prst="rect">
+            <a:avLst/>
+          </a:prstGeom>
+          <a:noFill/>
+          <a:ln/>
+        </p:spPr>
+        <p:txBody>
+          <a:bodyPr wrap="square" lIns="0" tIns="0" rIns="0" bIns="0" rtlCol="0" anchor="t">
+            <a:normAutofit/>
+          </a:bodyPr>
+          <a:lstStyle/>
+          <a:p>
+            <a:pPr indent="0" marL="0">
+              <a:buNone/>
+            </a:pPr>
+            <a:r>
+              <a:rPr lang="en-US" sz="1250" dirty="0">
+                <a:solidFill>
+                  <a:srgbClr val="17364A"/>
+                </a:solidFill>
+                <a:latin typeface="Aptos" pitchFamily="34" charset="0"/>
+                <a:ea typeface="Aptos" pitchFamily="34" charset="-122"/>
+                <a:cs typeface="Aptos" pitchFamily="34" charset="-120"/>
+              </a:rPr>
+              <a:t>Connect the concept to public health decisions, safeguards, documentation, or implementation work.</a:t>
+            </a:r>
+            <a:endParaRPr lang="en-US" sz="1250" dirty="0"/>
           </a:p>
         </p:txBody>
       </p:sp>
@@ -5591,7 +8772,32 @@
       </p:sp>
       <p:sp>
         <p:nvSpPr>
-          <p:cNvPr id="3" name="Text 1"/>
+          <p:cNvPr id="3" name="Shape 1"/>
+          <p:cNvSpPr/>
+          <p:nvPr/>
+        </p:nvSpPr>
+        <p:spPr>
+          <a:xfrm>
+            <a:off x="0" y="164592"/>
+            <a:ext cx="146304" cy="6693408"/>
+          </a:xfrm>
+          <a:prstGeom prst="rect">
+            <a:avLst/>
+          </a:prstGeom>
+          <a:solidFill>
+            <a:srgbClr val="2F8A28"/>
+          </a:solidFill>
+          <a:ln w="12700">
+            <a:solidFill>
+              <a:srgbClr val="2F8A28"/>
+            </a:solidFill>
+            <a:prstDash val="solid"/>
+          </a:ln>
+        </p:spPr>
+      </p:sp>
+      <p:sp>
+        <p:nvSpPr>
+          <p:cNvPr id="4" name="Text 2"/>
           <p:cNvSpPr/>
           <p:nvPr/>
         </p:nvSpPr>
@@ -5630,7 +8836,7 @@
       </p:sp>
       <p:sp>
         <p:nvSpPr>
-          <p:cNvPr id="4" name="Text 2"/>
+          <p:cNvPr id="5" name="Text 3"/>
           <p:cNvSpPr/>
           <p:nvPr/>
         </p:nvSpPr>
@@ -5669,7 +8875,7 @@
       </p:sp>
       <p:sp>
         <p:nvSpPr>
-          <p:cNvPr id="5" name="Text 3"/>
+          <p:cNvPr id="6" name="Text 4"/>
           <p:cNvSpPr/>
           <p:nvPr/>
         </p:nvSpPr>
@@ -5708,7 +8914,7 @@
       </p:sp>
       <p:sp>
         <p:nvSpPr>
-          <p:cNvPr id="6" name="Text 4"/>
+          <p:cNvPr id="7" name="Text 5"/>
           <p:cNvSpPr/>
           <p:nvPr/>
         </p:nvSpPr>
@@ -5741,7 +8947,7 @@
                 <a:ea typeface="Aptos Display" pitchFamily="34" charset="-122"/>
                 <a:cs typeface="Aptos Display" pitchFamily="34" charset="-120"/>
               </a:rPr>
-              <a:t>Module Context</a:t>
+              <a:t>What this module helps you do</a:t>
             </a:r>
             <a:endParaRPr lang="en-US" sz="2700" dirty="0"/>
           </a:p>
@@ -5749,14 +8955,14 @@
       </p:sp>
       <p:sp>
         <p:nvSpPr>
-          <p:cNvPr id="7" name="Text 5"/>
-          <p:cNvSpPr/>
-          <p:nvPr/>
-        </p:nvSpPr>
-        <p:spPr>
-          <a:xfrm>
-            <a:off x="822960" y="1325880"/>
-            <a:ext cx="10378440" cy="1371600"/>
+          <p:cNvPr id="8" name="Text 6"/>
+          <p:cNvSpPr/>
+          <p:nvPr/>
+        </p:nvSpPr>
+        <p:spPr>
+          <a:xfrm>
+            <a:off x="868680" y="1417320"/>
+            <a:ext cx="6675120" cy="3291840"/>
           </a:xfrm>
           <a:prstGeom prst="rect">
             <a:avLst/>
@@ -5771,7 +8977,7 @@
           <a:lstStyle/>
           <a:p>
             <a:r>
-              <a:rPr lang="en-US" sz="1600" dirty="0">
+              <a:rPr lang="en-US" sz="1700" dirty="0">
                 <a:solidFill>
                   <a:srgbClr val="17364A"/>
                 </a:solidFill>
@@ -5779,13 +8985,13 @@
                 <a:ea typeface="Aptos" pitchFamily="34" charset="-122"/>
                 <a:cs typeface="Aptos" pitchFamily="34" charset="-120"/>
               </a:rPr>
-              <a:t>Level: applied/foundational</a:t>
-            </a:r>
-            <a:endParaRPr lang="en-US" sz="1600" dirty="0"/>
-          </a:p>
-          <a:p>
-            <a:r>
-              <a:rPr lang="en-US" sz="1600" dirty="0">
+              <a:t>This module focuses on ethical analysis of public comments, social listening data, and community feedback.</a:t>
+            </a:r>
+            <a:endParaRPr lang="en-US" sz="1700" dirty="0"/>
+          </a:p>
+          <a:p>
+            <a:r>
+              <a:rPr lang="en-US" sz="1700" dirty="0">
                 <a:solidFill>
                   <a:srgbClr val="17364A"/>
                 </a:solidFill>
@@ -5793,13 +8999,13 @@
                 <a:ea typeface="Aptos" pitchFamily="34" charset="-122"/>
                 <a:cs typeface="Aptos" pitchFamily="34" charset="-120"/>
               </a:rPr>
-              <a:t>Primary track: Communications Role-Based Track</a:t>
-            </a:r>
-            <a:endParaRPr lang="en-US" sz="1600" dirty="0"/>
-          </a:p>
-          <a:p>
-            <a:r>
-              <a:rPr lang="en-US" sz="1600" dirty="0">
+              <a:t>It is designed for public health staff who must translate responsible AI principles into repeatable decisions, documents, workflows, and oversight.</a:t>
+            </a:r>
+            <a:endParaRPr lang="en-US" sz="1700" dirty="0"/>
+          </a:p>
+          <a:p>
+            <a:r>
+              <a:rPr lang="en-US" sz="1700" dirty="0">
                 <a:solidFill>
                   <a:srgbClr val="17364A"/>
                 </a:solidFill>
@@ -5807,31 +9013,111 @@
                 <a:ea typeface="Aptos" pitchFamily="34" charset="-122"/>
                 <a:cs typeface="Aptos" pitchFamily="34" charset="-120"/>
               </a:rPr>
-              <a:t>Appears in tracks: communications, policy, ai-for-social-good, governance-security</a:t>
-            </a:r>
-            <a:endParaRPr lang="en-US" sz="1600" dirty="0"/>
-          </a:p>
-        </p:txBody>
-      </p:sp>
-      <p:sp>
-        <p:nvSpPr>
-          <p:cNvPr id="8" name="Text 6"/>
-          <p:cNvSpPr/>
-          <p:nvPr/>
-        </p:nvSpPr>
-        <p:spPr>
-          <a:xfrm>
-            <a:off x="822960" y="2743200"/>
-            <a:ext cx="10378440" cy="2834640"/>
-          </a:xfrm>
-          <a:prstGeom prst="rect">
-            <a:avLst/>
-          </a:prstGeom>
-          <a:noFill/>
-          <a:ln/>
-        </p:spPr>
-        <p:txBody>
-          <a:bodyPr wrap="square" lIns="1016" tIns="1016" rIns="1016" bIns="1016" rtlCol="0" anchor="t">
+              <a:t>The module helps learners move beyond general awareness by producing a practical artifact that can be used in governance review, implementation.</a:t>
+            </a:r>
+            <a:endParaRPr lang="en-US" sz="1700" dirty="0"/>
+          </a:p>
+          <a:p>
+            <a:r>
+              <a:rPr lang="en-US" sz="1700" dirty="0">
+                <a:solidFill>
+                  <a:srgbClr val="17364A"/>
+                </a:solidFill>
+                <a:latin typeface="Aptos" pitchFamily="34" charset="0"/>
+                <a:ea typeface="Aptos" pitchFamily="34" charset="-122"/>
+                <a:cs typeface="Aptos" pitchFamily="34" charset="-120"/>
+              </a:rPr>
+              <a:t>It emphasizes paragraph-based reasoning, defined responsibilities, and documentation that can withstand public health, legal, privacy, equity, and.</a:t>
+            </a:r>
+            <a:endParaRPr lang="en-US" sz="1700" dirty="0"/>
+          </a:p>
+        </p:txBody>
+      </p:sp>
+      <p:sp>
+        <p:nvSpPr>
+          <p:cNvPr id="9" name="Shape 7"/>
+          <p:cNvSpPr/>
+          <p:nvPr/>
+        </p:nvSpPr>
+        <p:spPr>
+          <a:xfrm>
+            <a:off x="7909560" y="1417320"/>
+            <a:ext cx="3154680" cy="1920240"/>
+          </a:xfrm>
+          <a:prstGeom prst="roundRect">
+            <a:avLst>
+              <a:gd name="adj" fmla="val 5714"/>
+            </a:avLst>
+          </a:prstGeom>
+          <a:solidFill>
+            <a:srgbClr val="EAF6F8"/>
+          </a:solidFill>
+          <a:ln w="12700">
+            <a:solidFill>
+              <a:srgbClr val="B9D7E6"/>
+            </a:solidFill>
+            <a:prstDash val="solid"/>
+          </a:ln>
+        </p:spPr>
+      </p:sp>
+      <p:sp>
+        <p:nvSpPr>
+          <p:cNvPr id="10" name="Text 8"/>
+          <p:cNvSpPr/>
+          <p:nvPr/>
+        </p:nvSpPr>
+        <p:spPr>
+          <a:xfrm>
+            <a:off x="8074152" y="1563624"/>
+            <a:ext cx="2825496" cy="201168"/>
+          </a:xfrm>
+          <a:prstGeom prst="rect">
+            <a:avLst/>
+          </a:prstGeom>
+          <a:noFill/>
+          <a:ln/>
+        </p:spPr>
+        <p:txBody>
+          <a:bodyPr wrap="square" lIns="0" tIns="0" rIns="0" bIns="0" rtlCol="0" anchor="ctr"/>
+          <a:lstStyle/>
+          <a:p>
+            <a:pPr indent="0" marL="0">
+              <a:buNone/>
+            </a:pPr>
+            <a:r>
+              <a:rPr lang="en-US" sz="950" b="1" dirty="0">
+                <a:solidFill>
+                  <a:srgbClr val="0068B7"/>
+                </a:solidFill>
+                <a:latin typeface="Aptos" pitchFamily="34" charset="0"/>
+                <a:ea typeface="Aptos" pitchFamily="34" charset="-122"/>
+                <a:cs typeface="Aptos" pitchFamily="34" charset="-120"/>
+              </a:rPr>
+              <a:t>Module details</a:t>
+            </a:r>
+            <a:endParaRPr lang="en-US" sz="950" dirty="0"/>
+          </a:p>
+        </p:txBody>
+      </p:sp>
+      <p:sp>
+        <p:nvSpPr>
+          <p:cNvPr id="11" name="Text 9"/>
+          <p:cNvSpPr/>
+          <p:nvPr/>
+        </p:nvSpPr>
+        <p:spPr>
+          <a:xfrm>
+            <a:off x="8074152" y="1856232"/>
+            <a:ext cx="2825496" cy="1353312"/>
+          </a:xfrm>
+          <a:prstGeom prst="rect">
+            <a:avLst/>
+          </a:prstGeom>
+          <a:noFill/>
+          <a:ln/>
+        </p:spPr>
+        <p:txBody>
+          <a:bodyPr wrap="square" lIns="0" tIns="0" rIns="0" bIns="0" rtlCol="0" anchor="t">
             <a:normAutofit/>
           </a:bodyPr>
           <a:lstStyle/>
@@ -5840,7 +9126,7 @@
               <a:buNone/>
             </a:pPr>
             <a:r>
-              <a:rPr lang="en-US" sz="1400" dirty="0">
+              <a:rPr lang="en-US" sz="1250" dirty="0">
                 <a:solidFill>
                   <a:srgbClr val="17364A"/>
                 </a:solidFill>
@@ -5848,9 +9134,150 @@
                 <a:ea typeface="Aptos" pitchFamily="34" charset="-122"/>
                 <a:cs typeface="Aptos" pitchFamily="34" charset="-120"/>
               </a:rPr>
-              <a:t>This module focuses on ethical analysis of public comments, social listening data, and community feedback. It is designed for public health staff who must translate responsible AI principles into repeatable decisions, documents, workflows, and oversight practices. The module helps learners move beyond general awareness by producing a practical artifact that can be used in governance review, implementation planning, operations, communication, or accountability. It emphasizes paragraph-based reasoning, defined responsibilities, and documentation that can withstand public health, legal, privacy, equity, and leadership review.</a:t>
-            </a:r>
-            <a:endParaRPr lang="en-US" sz="1400" dirty="0"/>
+              <a:t>Level: applied/foundational</a:t>
+            </a:r>
+            <a:endParaRPr lang="en-US" sz="1250" dirty="0"/>
+          </a:p>
+          <a:p>
+            <a:pPr indent="0" marL="0">
+              <a:buNone/>
+            </a:pPr>
+            <a:r>
+              <a:rPr lang="en-US" sz="1250" dirty="0">
+                <a:solidFill>
+                  <a:srgbClr val="17364A"/>
+                </a:solidFill>
+                <a:latin typeface="Aptos" pitchFamily="34" charset="0"/>
+                <a:ea typeface="Aptos" pitchFamily="34" charset="-122"/>
+                <a:cs typeface="Aptos" pitchFamily="34" charset="-120"/>
+              </a:rPr>
+              <a:t>Primary track: Communications Role-Based Track</a:t>
+            </a:r>
+            <a:endParaRPr lang="en-US" sz="1250" dirty="0"/>
+          </a:p>
+          <a:p>
+            <a:pPr indent="0" marL="0">
+              <a:buNone/>
+            </a:pPr>
+            <a:r>
+              <a:rPr lang="en-US" sz="1250" dirty="0">
+                <a:solidFill>
+                  <a:srgbClr val="17364A"/>
+                </a:solidFill>
+                <a:latin typeface="Aptos" pitchFamily="34" charset="0"/>
+                <a:ea typeface="Aptos" pitchFamily="34" charset="-122"/>
+                <a:cs typeface="Aptos" pitchFamily="34" charset="-120"/>
+              </a:rPr>
+              <a:t>Appears in tracks: communications, policy, ai-for-social-good, governance-security</a:t>
+            </a:r>
+            <a:endParaRPr lang="en-US" sz="1250" dirty="0"/>
+          </a:p>
+        </p:txBody>
+      </p:sp>
+      <p:sp>
+        <p:nvSpPr>
+          <p:cNvPr id="12" name="Shape 10"/>
+          <p:cNvSpPr/>
+          <p:nvPr/>
+        </p:nvSpPr>
+        <p:spPr>
+          <a:xfrm>
+            <a:off x="7909560" y="3611880"/>
+            <a:ext cx="3154680" cy="1783080"/>
+          </a:xfrm>
+          <a:prstGeom prst="roundRect">
+            <a:avLst>
+              <a:gd name="adj" fmla="val 6154"/>
+            </a:avLst>
+          </a:prstGeom>
+          <a:solidFill>
+            <a:srgbClr val="EEF8ED"/>
+          </a:solidFill>
+          <a:ln w="12700">
+            <a:solidFill>
+              <a:srgbClr val="B9D7E6"/>
+            </a:solidFill>
+            <a:prstDash val="solid"/>
+          </a:ln>
+        </p:spPr>
+      </p:sp>
+      <p:sp>
+        <p:nvSpPr>
+          <p:cNvPr id="13" name="Text 11"/>
+          <p:cNvSpPr/>
+          <p:nvPr/>
+        </p:nvSpPr>
+        <p:spPr>
+          <a:xfrm>
+            <a:off x="8074152" y="3758184"/>
+            <a:ext cx="2825496" cy="201168"/>
+          </a:xfrm>
+          <a:prstGeom prst="rect">
+            <a:avLst/>
+          </a:prstGeom>
+          <a:noFill/>
+          <a:ln/>
+        </p:spPr>
+        <p:txBody>
+          <a:bodyPr wrap="square" lIns="0" tIns="0" rIns="0" bIns="0" rtlCol="0" anchor="ctr"/>
+          <a:lstStyle/>
+          <a:p>
+            <a:pPr indent="0" marL="0">
+              <a:buNone/>
+            </a:pPr>
+            <a:r>
+              <a:rPr lang="en-US" sz="950" b="1" dirty="0">
+                <a:solidFill>
+                  <a:srgbClr val="0068B7"/>
+                </a:solidFill>
+                <a:latin typeface="Aptos" pitchFamily="34" charset="0"/>
+                <a:ea typeface="Aptos" pitchFamily="34" charset="-122"/>
+                <a:cs typeface="Aptos" pitchFamily="34" charset="-120"/>
+              </a:rPr>
+              <a:t>Learning approach</a:t>
+            </a:r>
+            <a:endParaRPr lang="en-US" sz="950" dirty="0"/>
+          </a:p>
+        </p:txBody>
+      </p:sp>
+      <p:sp>
+        <p:nvSpPr>
+          <p:cNvPr id="14" name="Text 12"/>
+          <p:cNvSpPr/>
+          <p:nvPr/>
+        </p:nvSpPr>
+        <p:spPr>
+          <a:xfrm>
+            <a:off x="8074152" y="4050792"/>
+            <a:ext cx="2825496" cy="1216152"/>
+          </a:xfrm>
+          <a:prstGeom prst="rect">
+            <a:avLst/>
+          </a:prstGeom>
+          <a:noFill/>
+          <a:ln/>
+        </p:spPr>
+        <p:txBody>
+          <a:bodyPr wrap="square" lIns="0" tIns="0" rIns="0" bIns="0" rtlCol="0" anchor="t">
+            <a:normAutofit/>
+          </a:bodyPr>
+          <a:lstStyle/>
+          <a:p>
+            <a:pPr indent="0" marL="0">
+              <a:buNone/>
+            </a:pPr>
+            <a:r>
+              <a:rPr lang="en-US" sz="1250" dirty="0">
+                <a:solidFill>
+                  <a:srgbClr val="17364A"/>
+                </a:solidFill>
+                <a:latin typeface="Aptos" pitchFamily="34" charset="0"/>
+                <a:ea typeface="Aptos" pitchFamily="34" charset="-122"/>
+                <a:cs typeface="Aptos" pitchFamily="34" charset="-120"/>
+              </a:rPr>
+              <a:t>Review the core ideas, complete the practical exercise, check your understanding, and use the related plays and tools to apply the lesson.</a:t>
+            </a:r>
+            <a:endParaRPr lang="en-US" sz="1250" dirty="0"/>
           </a:p>
         </p:txBody>
       </p:sp>
@@ -5913,7 +9340,32 @@
       </p:sp>
       <p:sp>
         <p:nvSpPr>
-          <p:cNvPr id="3" name="Text 1"/>
+          <p:cNvPr id="3" name="Shape 1"/>
+          <p:cNvSpPr/>
+          <p:nvPr/>
+        </p:nvSpPr>
+        <p:spPr>
+          <a:xfrm>
+            <a:off x="0" y="164592"/>
+            <a:ext cx="146304" cy="6693408"/>
+          </a:xfrm>
+          <a:prstGeom prst="rect">
+            <a:avLst/>
+          </a:prstGeom>
+          <a:solidFill>
+            <a:srgbClr val="2F8A28"/>
+          </a:solidFill>
+          <a:ln w="12700">
+            <a:solidFill>
+              <a:srgbClr val="2F8A28"/>
+            </a:solidFill>
+            <a:prstDash val="solid"/>
+          </a:ln>
+        </p:spPr>
+      </p:sp>
+      <p:sp>
+        <p:nvSpPr>
+          <p:cNvPr id="4" name="Text 2"/>
           <p:cNvSpPr/>
           <p:nvPr/>
         </p:nvSpPr>
@@ -5952,7 +9404,7 @@
       </p:sp>
       <p:sp>
         <p:nvSpPr>
-          <p:cNvPr id="4" name="Text 2"/>
+          <p:cNvPr id="5" name="Text 3"/>
           <p:cNvSpPr/>
           <p:nvPr/>
         </p:nvSpPr>
@@ -5991,7 +9443,7 @@
       </p:sp>
       <p:sp>
         <p:nvSpPr>
-          <p:cNvPr id="5" name="Text 3"/>
+          <p:cNvPr id="6" name="Text 4"/>
           <p:cNvSpPr/>
           <p:nvPr/>
         </p:nvSpPr>
@@ -6030,13 +9482,77 @@
       </p:sp>
       <p:sp>
         <p:nvSpPr>
-          <p:cNvPr id="6" name="Text 4"/>
+          <p:cNvPr id="7" name="Shape 5"/>
           <p:cNvSpPr/>
           <p:nvPr/>
         </p:nvSpPr>
         <p:spPr>
           <a:xfrm>
             <a:off x="640080" y="658368"/>
+            <a:ext cx="420624" cy="420624"/>
+          </a:xfrm>
+          <a:prstGeom prst="ellipse">
+            <a:avLst/>
+          </a:prstGeom>
+          <a:solidFill>
+            <a:srgbClr val="0068B7"/>
+          </a:solidFill>
+          <a:ln w="12700">
+            <a:solidFill>
+              <a:srgbClr val="0068B7"/>
+            </a:solidFill>
+            <a:prstDash val="solid"/>
+          </a:ln>
+        </p:spPr>
+      </p:sp>
+      <p:sp>
+        <p:nvSpPr>
+          <p:cNvPr id="8" name="Text 6"/>
+          <p:cNvSpPr/>
+          <p:nvPr/>
+        </p:nvSpPr>
+        <p:spPr>
+          <a:xfrm>
+            <a:off x="640080" y="731520"/>
+            <a:ext cx="420624" cy="164592"/>
+          </a:xfrm>
+          <a:prstGeom prst="rect">
+            <a:avLst/>
+          </a:prstGeom>
+          <a:noFill/>
+          <a:ln/>
+        </p:spPr>
+        <p:txBody>
+          <a:bodyPr wrap="square" lIns="0" tIns="0" rIns="0" bIns="0" rtlCol="0" anchor="ctr"/>
+          <a:lstStyle/>
+          <a:p>
+            <a:pPr algn="ctr" indent="0" marL="0">
+              <a:buNone/>
+            </a:pPr>
+            <a:r>
+              <a:rPr lang="en-US" sz="1100" b="1" dirty="0">
+                <a:solidFill>
+                  <a:srgbClr val="FFFFFF"/>
+                </a:solidFill>
+                <a:latin typeface="Aptos" pitchFamily="34" charset="0"/>
+                <a:ea typeface="Aptos" pitchFamily="34" charset="-122"/>
+                <a:cs typeface="Aptos" pitchFamily="34" charset="-120"/>
+              </a:rPr>
+              <a:t>14</a:t>
+            </a:r>
+            <a:endParaRPr lang="en-US" sz="1100" dirty="0"/>
+          </a:p>
+        </p:txBody>
+      </p:sp>
+      <p:sp>
+        <p:nvSpPr>
+          <p:cNvPr id="9" name="Text 7"/>
+          <p:cNvSpPr/>
+          <p:nvPr/>
+        </p:nvSpPr>
+        <p:spPr>
+          <a:xfrm>
+            <a:off x="640080" y="621792"/>
             <a:ext cx="10881360" cy="566928"/>
           </a:xfrm>
           <a:prstGeom prst="rect">
@@ -6063,7 +9579,7 @@
                 <a:ea typeface="Aptos Display" pitchFamily="34" charset="-122"/>
                 <a:cs typeface="Aptos Display" pitchFamily="34" charset="-120"/>
               </a:rPr>
-              <a:t>References and Resources Continued</a:t>
+              <a:t>Knowledge Check</a:t>
             </a:r>
             <a:endParaRPr lang="en-US" sz="2700" dirty="0"/>
           </a:p>
@@ -6071,14 +9587,14 @@
       </p:sp>
       <p:sp>
         <p:nvSpPr>
-          <p:cNvPr id="7" name="Text 5"/>
-          <p:cNvSpPr/>
-          <p:nvPr/>
-        </p:nvSpPr>
-        <p:spPr>
-          <a:xfrm>
-            <a:off x="822960" y="1325880"/>
-            <a:ext cx="10378440" cy="4800600"/>
+          <p:cNvPr id="10" name="Text 8"/>
+          <p:cNvSpPr/>
+          <p:nvPr/>
+        </p:nvSpPr>
+        <p:spPr>
+          <a:xfrm>
+            <a:off x="868680" y="1417320"/>
+            <a:ext cx="6675120" cy="4434840"/>
           </a:xfrm>
           <a:prstGeom prst="rect">
             <a:avLst/>
@@ -6093,7 +9609,7 @@
           <a:lstStyle/>
           <a:p>
             <a:r>
-              <a:rPr lang="en-US" sz="1450" dirty="0">
+              <a:rPr lang="en-US" sz="1700" dirty="0">
                 <a:solidFill>
                   <a:srgbClr val="17364A"/>
                 </a:solidFill>
@@ -6101,9 +9617,1355 @@
                 <a:ea typeface="Aptos" pitchFamily="34" charset="-122"/>
                 <a:cs typeface="Aptos" pitchFamily="34" charset="-120"/>
               </a:rPr>
-              <a:t>Agency policies for privacy, public records, cybersecurity, procurement, civil rights, accessibility, language access, and emergency communications</a:t>
-            </a:r>
-            <a:endParaRPr lang="en-US" sz="1450" dirty="0"/>
+              <a:t>1. What is the strongest evidence that public comment, social listening, and community feedback analysis has been applied.</a:t>
+            </a:r>
+            <a:endParaRPr lang="en-US" sz="1700" dirty="0"/>
+          </a:p>
+          <a:p>
+            <a:r>
+              <a:rPr lang="en-US" sz="1700" dirty="0">
+                <a:solidFill>
+                  <a:srgbClr val="17364A"/>
+                </a:solidFill>
+                <a:latin typeface="Aptos" pitchFamily="34" charset="0"/>
+                <a:ea typeface="Aptos" pitchFamily="34" charset="-122"/>
+                <a:cs typeface="Aptos" pitchFamily="34" charset="-120"/>
+              </a:rPr>
+              <a:t>2. What is the best reason to assign an accountability owner?</a:t>
+            </a:r>
+            <a:endParaRPr lang="en-US" sz="1700" dirty="0"/>
+          </a:p>
+          <a:p>
+            <a:r>
+              <a:rPr lang="en-US" sz="1700" dirty="0">
+                <a:solidFill>
+                  <a:srgbClr val="17364A"/>
+                </a:solidFill>
+                <a:latin typeface="Aptos" pitchFamily="34" charset="0"/>
+                <a:ea typeface="Aptos" pitchFamily="34" charset="-122"/>
+                <a:cs typeface="Aptos" pitchFamily="34" charset="-120"/>
+              </a:rPr>
+              <a:t>3. When should an AI-supported workflow be escalated for review?</a:t>
+            </a:r>
+            <a:endParaRPr lang="en-US" sz="1700" dirty="0"/>
+          </a:p>
+          <a:p>
+            <a:r>
+              <a:rPr lang="en-US" sz="1700" dirty="0">
+                <a:solidFill>
+                  <a:srgbClr val="17364A"/>
+                </a:solidFill>
+                <a:latin typeface="Aptos" pitchFamily="34" charset="0"/>
+                <a:ea typeface="Aptos" pitchFamily="34" charset="-122"/>
+                <a:cs typeface="Aptos" pitchFamily="34" charset="-120"/>
+              </a:rPr>
+              <a:t>4. Which practice best supports public accountability?</a:t>
+            </a:r>
+            <a:endParaRPr lang="en-US" sz="1700" dirty="0"/>
+          </a:p>
+        </p:txBody>
+      </p:sp>
+      <p:sp>
+        <p:nvSpPr>
+          <p:cNvPr id="11" name="Shape 9"/>
+          <p:cNvSpPr/>
+          <p:nvPr/>
+        </p:nvSpPr>
+        <p:spPr>
+          <a:xfrm>
+            <a:off x="7909560" y="1417320"/>
+            <a:ext cx="3154680" cy="1828800"/>
+          </a:xfrm>
+          <a:prstGeom prst="roundRect">
+            <a:avLst>
+              <a:gd name="adj" fmla="val 6000"/>
+            </a:avLst>
+          </a:prstGeom>
+          <a:solidFill>
+            <a:srgbClr val="EEF8ED"/>
+          </a:solidFill>
+          <a:ln w="12700">
+            <a:solidFill>
+              <a:srgbClr val="B9D7E6"/>
+            </a:solidFill>
+            <a:prstDash val="solid"/>
+          </a:ln>
+        </p:spPr>
+      </p:sp>
+      <p:sp>
+        <p:nvSpPr>
+          <p:cNvPr id="12" name="Text 10"/>
+          <p:cNvSpPr/>
+          <p:nvPr/>
+        </p:nvSpPr>
+        <p:spPr>
+          <a:xfrm>
+            <a:off x="8074152" y="1563624"/>
+            <a:ext cx="2825496" cy="201168"/>
+          </a:xfrm>
+          <a:prstGeom prst="rect">
+            <a:avLst/>
+          </a:prstGeom>
+          <a:noFill/>
+          <a:ln/>
+        </p:spPr>
+        <p:txBody>
+          <a:bodyPr wrap="square" lIns="0" tIns="0" rIns="0" bIns="0" rtlCol="0" anchor="ctr"/>
+          <a:lstStyle/>
+          <a:p>
+            <a:pPr indent="0" marL="0">
+              <a:buNone/>
+            </a:pPr>
+            <a:r>
+              <a:rPr lang="en-US" sz="950" b="1" dirty="0">
+                <a:solidFill>
+                  <a:srgbClr val="0068B7"/>
+                </a:solidFill>
+                <a:latin typeface="Aptos" pitchFamily="34" charset="0"/>
+                <a:ea typeface="Aptos" pitchFamily="34" charset="-122"/>
+                <a:cs typeface="Aptos" pitchFamily="34" charset="-120"/>
+              </a:rPr>
+              <a:t>Key idea</a:t>
+            </a:r>
+            <a:endParaRPr lang="en-US" sz="950" dirty="0"/>
+          </a:p>
+        </p:txBody>
+      </p:sp>
+      <p:sp>
+        <p:nvSpPr>
+          <p:cNvPr id="13" name="Text 11"/>
+          <p:cNvSpPr/>
+          <p:nvPr/>
+        </p:nvSpPr>
+        <p:spPr>
+          <a:xfrm>
+            <a:off x="8074152" y="1856232"/>
+            <a:ext cx="2825496" cy="1261872"/>
+          </a:xfrm>
+          <a:prstGeom prst="rect">
+            <a:avLst/>
+          </a:prstGeom>
+          <a:noFill/>
+          <a:ln/>
+        </p:spPr>
+        <p:txBody>
+          <a:bodyPr wrap="square" lIns="0" tIns="0" rIns="0" bIns="0" rtlCol="0" anchor="t">
+            <a:normAutofit/>
+          </a:bodyPr>
+          <a:lstStyle/>
+          <a:p>
+            <a:pPr indent="0" marL="0">
+              <a:buNone/>
+            </a:pPr>
+            <a:r>
+              <a:rPr lang="en-US" sz="1250" dirty="0">
+                <a:solidFill>
+                  <a:srgbClr val="17364A"/>
+                </a:solidFill>
+                <a:latin typeface="Aptos" pitchFamily="34" charset="0"/>
+                <a:ea typeface="Aptos" pitchFamily="34" charset="-122"/>
+                <a:cs typeface="Aptos" pitchFamily="34" charset="-120"/>
+              </a:rPr>
+              <a:t>1. What is the strongest evidence that public comment, social listening, and community feedback analysis has been applied.</a:t>
+            </a:r>
+            <a:endParaRPr lang="en-US" sz="1250" dirty="0"/>
+          </a:p>
+        </p:txBody>
+      </p:sp>
+      <p:sp>
+        <p:nvSpPr>
+          <p:cNvPr id="14" name="Shape 12"/>
+          <p:cNvSpPr/>
+          <p:nvPr/>
+        </p:nvSpPr>
+        <p:spPr>
+          <a:xfrm>
+            <a:off x="7909560" y="3520440"/>
+            <a:ext cx="3154680" cy="1737360"/>
+          </a:xfrm>
+          <a:prstGeom prst="roundRect">
+            <a:avLst>
+              <a:gd name="adj" fmla="val 6316"/>
+            </a:avLst>
+          </a:prstGeom>
+          <a:solidFill>
+            <a:srgbClr val="EAF6F8"/>
+          </a:solidFill>
+          <a:ln w="12700">
+            <a:solidFill>
+              <a:srgbClr val="B9D7E6"/>
+            </a:solidFill>
+            <a:prstDash val="solid"/>
+          </a:ln>
+        </p:spPr>
+      </p:sp>
+      <p:sp>
+        <p:nvSpPr>
+          <p:cNvPr id="15" name="Text 13"/>
+          <p:cNvSpPr/>
+          <p:nvPr/>
+        </p:nvSpPr>
+        <p:spPr>
+          <a:xfrm>
+            <a:off x="8074152" y="3666744"/>
+            <a:ext cx="2825496" cy="201168"/>
+          </a:xfrm>
+          <a:prstGeom prst="rect">
+            <a:avLst/>
+          </a:prstGeom>
+          <a:noFill/>
+          <a:ln/>
+        </p:spPr>
+        <p:txBody>
+          <a:bodyPr wrap="square" lIns="0" tIns="0" rIns="0" bIns="0" rtlCol="0" anchor="ctr"/>
+          <a:lstStyle/>
+          <a:p>
+            <a:pPr indent="0" marL="0">
+              <a:buNone/>
+            </a:pPr>
+            <a:r>
+              <a:rPr lang="en-US" sz="950" b="1" dirty="0">
+                <a:solidFill>
+                  <a:srgbClr val="0068B7"/>
+                </a:solidFill>
+                <a:latin typeface="Aptos" pitchFamily="34" charset="0"/>
+                <a:ea typeface="Aptos" pitchFamily="34" charset="-122"/>
+                <a:cs typeface="Aptos" pitchFamily="34" charset="-120"/>
+              </a:rPr>
+              <a:t>Use this for</a:t>
+            </a:r>
+            <a:endParaRPr lang="en-US" sz="950" dirty="0"/>
+          </a:p>
+        </p:txBody>
+      </p:sp>
+      <p:sp>
+        <p:nvSpPr>
+          <p:cNvPr id="16" name="Text 14"/>
+          <p:cNvSpPr/>
+          <p:nvPr/>
+        </p:nvSpPr>
+        <p:spPr>
+          <a:xfrm>
+            <a:off x="8074152" y="3959352"/>
+            <a:ext cx="2825496" cy="1170432"/>
+          </a:xfrm>
+          <a:prstGeom prst="rect">
+            <a:avLst/>
+          </a:prstGeom>
+          <a:noFill/>
+          <a:ln/>
+        </p:spPr>
+        <p:txBody>
+          <a:bodyPr wrap="square" lIns="0" tIns="0" rIns="0" bIns="0" rtlCol="0" anchor="t">
+            <a:normAutofit/>
+          </a:bodyPr>
+          <a:lstStyle/>
+          <a:p>
+            <a:pPr indent="0" marL="0">
+              <a:buNone/>
+            </a:pPr>
+            <a:r>
+              <a:rPr lang="en-US" sz="1250" dirty="0">
+                <a:solidFill>
+                  <a:srgbClr val="17364A"/>
+                </a:solidFill>
+                <a:latin typeface="Aptos" pitchFamily="34" charset="0"/>
+                <a:ea typeface="Aptos" pitchFamily="34" charset="-122"/>
+                <a:cs typeface="Aptos" pitchFamily="34" charset="-120"/>
+              </a:rPr>
+              <a:t>Connect the concept to public health decisions, safeguards, documentation, or implementation work.</a:t>
+            </a:r>
+            <a:endParaRPr lang="en-US" sz="1250" dirty="0"/>
+          </a:p>
+        </p:txBody>
+      </p:sp>
+    </p:spTree>
+  </p:cSld>
+  <p:clrMapOvr>
+    <a:masterClrMapping/>
+  </p:clrMapOvr>
+</p:sld>
+</file>
+
+<file path=ppt/slides/slide21.xml><?xml version="1.0" encoding="utf-8"?>
+<p:sld xmlns:a="http://schemas.openxmlformats.org/drawingml/2006/main" xmlns:r="http://schemas.openxmlformats.org/officeDocument/2006/relationships" xmlns:p="http://schemas.openxmlformats.org/presentationml/2006/main">
+  <p:cSld name="Slide 21">
+    <p:bg>
+      <p:bgPr>
+        <a:solidFill>
+          <a:srgbClr val="F7FBFD"/>
+        </a:solidFill>
+      </p:bgPr>
+    </p:bg>
+    <p:spTree>
+      <p:nvGrpSpPr>
+        <p:cNvPr id="1" name=""/>
+        <p:cNvGrpSpPr/>
+        <p:nvPr/>
+      </p:nvGrpSpPr>
+      <p:grpSpPr>
+        <a:xfrm>
+          <a:off x="0" y="0"/>
+          <a:ext cx="0" cy="0"/>
+          <a:chOff x="0" y="0"/>
+          <a:chExt cx="0" cy="0"/>
+        </a:xfrm>
+      </p:grpSpPr>
+      <p:sp>
+        <p:nvSpPr>
+          <p:cNvPr id="2" name="Shape 0"/>
+          <p:cNvSpPr/>
+          <p:nvPr/>
+        </p:nvSpPr>
+        <p:spPr>
+          <a:xfrm>
+            <a:off x="0" y="0"/>
+            <a:ext cx="12191695" cy="164592"/>
+          </a:xfrm>
+          <a:prstGeom prst="rect">
+            <a:avLst/>
+          </a:prstGeom>
+          <a:solidFill>
+            <a:srgbClr val="0068B7"/>
+          </a:solidFill>
+          <a:ln w="12700">
+            <a:solidFill>
+              <a:srgbClr val="0068B7"/>
+            </a:solidFill>
+            <a:prstDash val="solid"/>
+          </a:ln>
+        </p:spPr>
+      </p:sp>
+      <p:sp>
+        <p:nvSpPr>
+          <p:cNvPr id="3" name="Shape 1"/>
+          <p:cNvSpPr/>
+          <p:nvPr/>
+        </p:nvSpPr>
+        <p:spPr>
+          <a:xfrm>
+            <a:off x="0" y="164592"/>
+            <a:ext cx="146304" cy="6693408"/>
+          </a:xfrm>
+          <a:prstGeom prst="rect">
+            <a:avLst/>
+          </a:prstGeom>
+          <a:solidFill>
+            <a:srgbClr val="2F8A28"/>
+          </a:solidFill>
+          <a:ln w="12700">
+            <a:solidFill>
+              <a:srgbClr val="2F8A28"/>
+            </a:solidFill>
+            <a:prstDash val="solid"/>
+          </a:ln>
+        </p:spPr>
+      </p:sp>
+      <p:sp>
+        <p:nvSpPr>
+          <p:cNvPr id="4" name="Text 2"/>
+          <p:cNvSpPr/>
+          <p:nvPr/>
+        </p:nvSpPr>
+        <p:spPr>
+          <a:xfrm>
+            <a:off x="502920" y="292608"/>
+            <a:ext cx="10149840" cy="256032"/>
+          </a:xfrm>
+          <a:prstGeom prst="rect">
+            <a:avLst/>
+          </a:prstGeom>
+          <a:noFill/>
+          <a:ln/>
+        </p:spPr>
+        <p:txBody>
+          <a:bodyPr wrap="square" lIns="0" tIns="0" rIns="0" bIns="0" rtlCol="0" anchor="ctr"/>
+          <a:lstStyle/>
+          <a:p>
+            <a:pPr indent="0" marL="0">
+              <a:buNone/>
+            </a:pPr>
+            <a:r>
+              <a:rPr lang="en-US" sz="900" b="1" dirty="0">
+                <a:solidFill>
+                  <a:srgbClr val="5F7181"/>
+                </a:solidFill>
+                <a:latin typeface="Aptos" pitchFamily="34" charset="0"/>
+                <a:ea typeface="Aptos" pitchFamily="34" charset="-122"/>
+                <a:cs typeface="Aptos" pitchFamily="34" charset="-120"/>
+              </a:rPr>
+              <a:t>Public Comment, Social Listening, and Community Feedback Analysis</a:t>
+            </a:r>
+            <a:endParaRPr lang="en-US" sz="900" dirty="0"/>
+          </a:p>
+        </p:txBody>
+      </p:sp>
+      <p:sp>
+        <p:nvSpPr>
+          <p:cNvPr id="5" name="Text 3"/>
+          <p:cNvSpPr/>
+          <p:nvPr/>
+        </p:nvSpPr>
+        <p:spPr>
+          <a:xfrm>
+            <a:off x="502920" y="6537960"/>
+            <a:ext cx="7772400" cy="201168"/>
+          </a:xfrm>
+          <a:prstGeom prst="rect">
+            <a:avLst/>
+          </a:prstGeom>
+          <a:noFill/>
+          <a:ln/>
+        </p:spPr>
+        <p:txBody>
+          <a:bodyPr wrap="square" lIns="0" tIns="0" rIns="0" bIns="0" rtlCol="0" anchor="ctr"/>
+          <a:lstStyle/>
+          <a:p>
+            <a:pPr indent="0" marL="0">
+              <a:buNone/>
+            </a:pPr>
+            <a:r>
+              <a:rPr lang="en-US" sz="800" dirty="0">
+                <a:solidFill>
+                  <a:srgbClr val="5F7181"/>
+                </a:solidFill>
+                <a:latin typeface="Aptos" pitchFamily="34" charset="0"/>
+                <a:ea typeface="Aptos" pitchFamily="34" charset="-122"/>
+                <a:cs typeface="Aptos" pitchFamily="34" charset="-120"/>
+              </a:rPr>
+              <a:t>AI Playbook and Toolkit for Public Health Departments</a:t>
+            </a:r>
+            <a:endParaRPr lang="en-US" sz="800" dirty="0"/>
+          </a:p>
+        </p:txBody>
+      </p:sp>
+      <p:sp>
+        <p:nvSpPr>
+          <p:cNvPr id="6" name="Text 4"/>
+          <p:cNvSpPr/>
+          <p:nvPr/>
+        </p:nvSpPr>
+        <p:spPr>
+          <a:xfrm>
+            <a:off x="9966960" y="6537960"/>
+            <a:ext cx="1645920" cy="201168"/>
+          </a:xfrm>
+          <a:prstGeom prst="rect">
+            <a:avLst/>
+          </a:prstGeom>
+          <a:noFill/>
+          <a:ln/>
+        </p:spPr>
+        <p:txBody>
+          <a:bodyPr wrap="square" lIns="0" tIns="0" rIns="0" bIns="0" rtlCol="0" anchor="ctr"/>
+          <a:lstStyle/>
+          <a:p>
+            <a:pPr algn="r" indent="0" marL="0">
+              <a:buNone/>
+            </a:pPr>
+            <a:r>
+              <a:rPr lang="en-US" sz="800" dirty="0">
+                <a:solidFill>
+                  <a:srgbClr val="5F7181"/>
+                </a:solidFill>
+                <a:latin typeface="Aptos" pitchFamily="34" charset="0"/>
+                <a:ea typeface="Aptos" pitchFamily="34" charset="-122"/>
+                <a:cs typeface="Aptos" pitchFamily="34" charset="-120"/>
+              </a:rPr>
+              <a:t>© Paula Soper</a:t>
+            </a:r>
+            <a:endParaRPr lang="en-US" sz="800" dirty="0"/>
+          </a:p>
+        </p:txBody>
+      </p:sp>
+      <p:sp>
+        <p:nvSpPr>
+          <p:cNvPr id="7" name="Shape 5"/>
+          <p:cNvSpPr/>
+          <p:nvPr/>
+        </p:nvSpPr>
+        <p:spPr>
+          <a:xfrm>
+            <a:off x="640080" y="658368"/>
+            <a:ext cx="420624" cy="420624"/>
+          </a:xfrm>
+          <a:prstGeom prst="ellipse">
+            <a:avLst/>
+          </a:prstGeom>
+          <a:solidFill>
+            <a:srgbClr val="0068B7"/>
+          </a:solidFill>
+          <a:ln w="12700">
+            <a:solidFill>
+              <a:srgbClr val="0068B7"/>
+            </a:solidFill>
+            <a:prstDash val="solid"/>
+          </a:ln>
+        </p:spPr>
+      </p:sp>
+      <p:sp>
+        <p:nvSpPr>
+          <p:cNvPr id="8" name="Text 6"/>
+          <p:cNvSpPr/>
+          <p:nvPr/>
+        </p:nvSpPr>
+        <p:spPr>
+          <a:xfrm>
+            <a:off x="640080" y="731520"/>
+            <a:ext cx="420624" cy="164592"/>
+          </a:xfrm>
+          <a:prstGeom prst="rect">
+            <a:avLst/>
+          </a:prstGeom>
+          <a:noFill/>
+          <a:ln/>
+        </p:spPr>
+        <p:txBody>
+          <a:bodyPr wrap="square" lIns="0" tIns="0" rIns="0" bIns="0" rtlCol="0" anchor="ctr"/>
+          <a:lstStyle/>
+          <a:p>
+            <a:pPr algn="ctr" indent="0" marL="0">
+              <a:buNone/>
+            </a:pPr>
+            <a:r>
+              <a:rPr lang="en-US" sz="1100" b="1" dirty="0">
+                <a:solidFill>
+                  <a:srgbClr val="FFFFFF"/>
+                </a:solidFill>
+                <a:latin typeface="Aptos" pitchFamily="34" charset="0"/>
+                <a:ea typeface="Aptos" pitchFamily="34" charset="-122"/>
+                <a:cs typeface="Aptos" pitchFamily="34" charset="-120"/>
+              </a:rPr>
+              <a:t>15</a:t>
+            </a:r>
+            <a:endParaRPr lang="en-US" sz="1100" dirty="0"/>
+          </a:p>
+        </p:txBody>
+      </p:sp>
+      <p:sp>
+        <p:nvSpPr>
+          <p:cNvPr id="9" name="Text 7"/>
+          <p:cNvSpPr/>
+          <p:nvPr/>
+        </p:nvSpPr>
+        <p:spPr>
+          <a:xfrm>
+            <a:off x="640080" y="621792"/>
+            <a:ext cx="10881360" cy="566928"/>
+          </a:xfrm>
+          <a:prstGeom prst="rect">
+            <a:avLst/>
+          </a:prstGeom>
+          <a:noFill/>
+          <a:ln/>
+        </p:spPr>
+        <p:txBody>
+          <a:bodyPr wrap="square" lIns="0" tIns="0" rIns="0" bIns="0" rtlCol="0" anchor="ctr">
+            <a:normAutofit/>
+          </a:bodyPr>
+          <a:lstStyle/>
+          <a:p>
+            <a:pPr indent="0" marL="0">
+              <a:buNone/>
+            </a:pPr>
+            <a:r>
+              <a:rPr lang="en-US" sz="2700" b="1" dirty="0">
+                <a:solidFill>
+                  <a:srgbClr val="003A63"/>
+                </a:solidFill>
+                <a:latin typeface="Aptos Display" pitchFamily="34" charset="0"/>
+                <a:ea typeface="Aptos Display" pitchFamily="34" charset="-122"/>
+                <a:cs typeface="Aptos Display" pitchFamily="34" charset="-120"/>
+              </a:rPr>
+              <a:t>References and Resources</a:t>
+            </a:r>
+            <a:endParaRPr lang="en-US" sz="2700" dirty="0"/>
+          </a:p>
+        </p:txBody>
+      </p:sp>
+      <p:sp>
+        <p:nvSpPr>
+          <p:cNvPr id="10" name="Text 8"/>
+          <p:cNvSpPr/>
+          <p:nvPr/>
+        </p:nvSpPr>
+        <p:spPr>
+          <a:xfrm>
+            <a:off x="868680" y="1417320"/>
+            <a:ext cx="6675120" cy="4434840"/>
+          </a:xfrm>
+          <a:prstGeom prst="rect">
+            <a:avLst/>
+          </a:prstGeom>
+          <a:noFill/>
+          <a:ln/>
+        </p:spPr>
+        <p:txBody>
+          <a:bodyPr wrap="square" lIns="635" tIns="635" rIns="635" bIns="635" rtlCol="0" anchor="t">
+            <a:normAutofit/>
+          </a:bodyPr>
+          <a:lstStyle/>
+          <a:p>
+            <a:r>
+              <a:rPr lang="en-US" sz="1700" dirty="0">
+                <a:solidFill>
+                  <a:srgbClr val="17364A"/>
+                </a:solidFill>
+                <a:latin typeface="Aptos" pitchFamily="34" charset="0"/>
+                <a:ea typeface="Aptos" pitchFamily="34" charset="-122"/>
+                <a:cs typeface="Aptos" pitchFamily="34" charset="-120"/>
+              </a:rPr>
+              <a:t>CDC Public Health Data Strategy and Data Modernization resources:.</a:t>
+            </a:r>
+            <a:endParaRPr lang="en-US" sz="1700" dirty="0"/>
+          </a:p>
+          <a:p>
+            <a:r>
+              <a:rPr lang="en-US" sz="1700" dirty="0">
+                <a:solidFill>
+                  <a:srgbClr val="17364A"/>
+                </a:solidFill>
+                <a:latin typeface="Aptos" pitchFamily="34" charset="0"/>
+                <a:ea typeface="Aptos" pitchFamily="34" charset="-122"/>
+                <a:cs typeface="Aptos" pitchFamily="34" charset="-120"/>
+              </a:rPr>
+              <a:t>NIST Artificial Intelligence Risk Management Framework and NIST Generative AI Profile:.</a:t>
+            </a:r>
+            <a:endParaRPr lang="en-US" sz="1700" dirty="0"/>
+          </a:p>
+          <a:p>
+            <a:r>
+              <a:rPr lang="en-US" sz="1700" dirty="0">
+                <a:solidFill>
+                  <a:srgbClr val="17364A"/>
+                </a:solidFill>
+                <a:latin typeface="Aptos" pitchFamily="34" charset="0"/>
+                <a:ea typeface="Aptos" pitchFamily="34" charset="-122"/>
+                <a:cs typeface="Aptos" pitchFamily="34" charset="-120"/>
+              </a:rPr>
+              <a:t>WHO Ethics and Governance of Artificial Intelligence for Health guidance: https://www.who.int/publications/i/item/9789240029200</a:t>
+            </a:r>
+            <a:endParaRPr lang="en-US" sz="1700" dirty="0"/>
+          </a:p>
+          <a:p>
+            <a:r>
+              <a:rPr lang="en-US" sz="1700" dirty="0">
+                <a:solidFill>
+                  <a:srgbClr val="17364A"/>
+                </a:solidFill>
+                <a:latin typeface="Aptos" pitchFamily="34" charset="0"/>
+                <a:ea typeface="Aptos" pitchFamily="34" charset="-122"/>
+                <a:cs typeface="Aptos" pitchFamily="34" charset="-120"/>
+              </a:rPr>
+              <a:t>OWASP Top 10 for Large Language Model Applications: https://owasp.org/www-project-top-10-for-large-language-model-applications/</a:t>
+            </a:r>
+            <a:endParaRPr lang="en-US" sz="1700" dirty="0"/>
+          </a:p>
+        </p:txBody>
+      </p:sp>
+      <p:sp>
+        <p:nvSpPr>
+          <p:cNvPr id="11" name="Shape 9"/>
+          <p:cNvSpPr/>
+          <p:nvPr/>
+        </p:nvSpPr>
+        <p:spPr>
+          <a:xfrm>
+            <a:off x="7909560" y="1417320"/>
+            <a:ext cx="3154680" cy="1828800"/>
+          </a:xfrm>
+          <a:prstGeom prst="roundRect">
+            <a:avLst>
+              <a:gd name="adj" fmla="val 6000"/>
+            </a:avLst>
+          </a:prstGeom>
+          <a:solidFill>
+            <a:srgbClr val="EEF8ED"/>
+          </a:solidFill>
+          <a:ln w="12700">
+            <a:solidFill>
+              <a:srgbClr val="B9D7E6"/>
+            </a:solidFill>
+            <a:prstDash val="solid"/>
+          </a:ln>
+        </p:spPr>
+      </p:sp>
+      <p:sp>
+        <p:nvSpPr>
+          <p:cNvPr id="12" name="Text 10"/>
+          <p:cNvSpPr/>
+          <p:nvPr/>
+        </p:nvSpPr>
+        <p:spPr>
+          <a:xfrm>
+            <a:off x="8074152" y="1563624"/>
+            <a:ext cx="2825496" cy="201168"/>
+          </a:xfrm>
+          <a:prstGeom prst="rect">
+            <a:avLst/>
+          </a:prstGeom>
+          <a:noFill/>
+          <a:ln/>
+        </p:spPr>
+        <p:txBody>
+          <a:bodyPr wrap="square" lIns="0" tIns="0" rIns="0" bIns="0" rtlCol="0" anchor="ctr"/>
+          <a:lstStyle/>
+          <a:p>
+            <a:pPr indent="0" marL="0">
+              <a:buNone/>
+            </a:pPr>
+            <a:r>
+              <a:rPr lang="en-US" sz="950" b="1" dirty="0">
+                <a:solidFill>
+                  <a:srgbClr val="0068B7"/>
+                </a:solidFill>
+                <a:latin typeface="Aptos" pitchFamily="34" charset="0"/>
+                <a:ea typeface="Aptos" pitchFamily="34" charset="-122"/>
+                <a:cs typeface="Aptos" pitchFamily="34" charset="-120"/>
+              </a:rPr>
+              <a:t>Key idea</a:t>
+            </a:r>
+            <a:endParaRPr lang="en-US" sz="950" dirty="0"/>
+          </a:p>
+        </p:txBody>
+      </p:sp>
+      <p:sp>
+        <p:nvSpPr>
+          <p:cNvPr id="13" name="Text 11"/>
+          <p:cNvSpPr/>
+          <p:nvPr/>
+        </p:nvSpPr>
+        <p:spPr>
+          <a:xfrm>
+            <a:off x="8074152" y="1856232"/>
+            <a:ext cx="2825496" cy="1261872"/>
+          </a:xfrm>
+          <a:prstGeom prst="rect">
+            <a:avLst/>
+          </a:prstGeom>
+          <a:noFill/>
+          <a:ln/>
+        </p:spPr>
+        <p:txBody>
+          <a:bodyPr wrap="square" lIns="0" tIns="0" rIns="0" bIns="0" rtlCol="0" anchor="t">
+            <a:normAutofit/>
+          </a:bodyPr>
+          <a:lstStyle/>
+          <a:p>
+            <a:pPr indent="0" marL="0">
+              <a:buNone/>
+            </a:pPr>
+            <a:r>
+              <a:rPr lang="en-US" sz="1250" dirty="0">
+                <a:solidFill>
+                  <a:srgbClr val="17364A"/>
+                </a:solidFill>
+                <a:latin typeface="Aptos" pitchFamily="34" charset="0"/>
+                <a:ea typeface="Aptos" pitchFamily="34" charset="-122"/>
+                <a:cs typeface="Aptos" pitchFamily="34" charset="-120"/>
+              </a:rPr>
+              <a:t>CDC Public Health Data Strategy and Data Modernization resources:.</a:t>
+            </a:r>
+            <a:endParaRPr lang="en-US" sz="1250" dirty="0"/>
+          </a:p>
+        </p:txBody>
+      </p:sp>
+      <p:sp>
+        <p:nvSpPr>
+          <p:cNvPr id="14" name="Shape 12"/>
+          <p:cNvSpPr/>
+          <p:nvPr/>
+        </p:nvSpPr>
+        <p:spPr>
+          <a:xfrm>
+            <a:off x="7909560" y="3520440"/>
+            <a:ext cx="3154680" cy="1737360"/>
+          </a:xfrm>
+          <a:prstGeom prst="roundRect">
+            <a:avLst>
+              <a:gd name="adj" fmla="val 6316"/>
+            </a:avLst>
+          </a:prstGeom>
+          <a:solidFill>
+            <a:srgbClr val="EAF6F8"/>
+          </a:solidFill>
+          <a:ln w="12700">
+            <a:solidFill>
+              <a:srgbClr val="B9D7E6"/>
+            </a:solidFill>
+            <a:prstDash val="solid"/>
+          </a:ln>
+        </p:spPr>
+      </p:sp>
+      <p:sp>
+        <p:nvSpPr>
+          <p:cNvPr id="15" name="Text 13"/>
+          <p:cNvSpPr/>
+          <p:nvPr/>
+        </p:nvSpPr>
+        <p:spPr>
+          <a:xfrm>
+            <a:off x="8074152" y="3666744"/>
+            <a:ext cx="2825496" cy="201168"/>
+          </a:xfrm>
+          <a:prstGeom prst="rect">
+            <a:avLst/>
+          </a:prstGeom>
+          <a:noFill/>
+          <a:ln/>
+        </p:spPr>
+        <p:txBody>
+          <a:bodyPr wrap="square" lIns="0" tIns="0" rIns="0" bIns="0" rtlCol="0" anchor="ctr"/>
+          <a:lstStyle/>
+          <a:p>
+            <a:pPr indent="0" marL="0">
+              <a:buNone/>
+            </a:pPr>
+            <a:r>
+              <a:rPr lang="en-US" sz="950" b="1" dirty="0">
+                <a:solidFill>
+                  <a:srgbClr val="0068B7"/>
+                </a:solidFill>
+                <a:latin typeface="Aptos" pitchFamily="34" charset="0"/>
+                <a:ea typeface="Aptos" pitchFamily="34" charset="-122"/>
+                <a:cs typeface="Aptos" pitchFamily="34" charset="-120"/>
+              </a:rPr>
+              <a:t>Use this for</a:t>
+            </a:r>
+            <a:endParaRPr lang="en-US" sz="950" dirty="0"/>
+          </a:p>
+        </p:txBody>
+      </p:sp>
+      <p:sp>
+        <p:nvSpPr>
+          <p:cNvPr id="16" name="Text 14"/>
+          <p:cNvSpPr/>
+          <p:nvPr/>
+        </p:nvSpPr>
+        <p:spPr>
+          <a:xfrm>
+            <a:off x="8074152" y="3959352"/>
+            <a:ext cx="2825496" cy="1170432"/>
+          </a:xfrm>
+          <a:prstGeom prst="rect">
+            <a:avLst/>
+          </a:prstGeom>
+          <a:noFill/>
+          <a:ln/>
+        </p:spPr>
+        <p:txBody>
+          <a:bodyPr wrap="square" lIns="0" tIns="0" rIns="0" bIns="0" rtlCol="0" anchor="t">
+            <a:normAutofit/>
+          </a:bodyPr>
+          <a:lstStyle/>
+          <a:p>
+            <a:pPr indent="0" marL="0">
+              <a:buNone/>
+            </a:pPr>
+            <a:r>
+              <a:rPr lang="en-US" sz="1250" dirty="0">
+                <a:solidFill>
+                  <a:srgbClr val="17364A"/>
+                </a:solidFill>
+                <a:latin typeface="Aptos" pitchFamily="34" charset="0"/>
+                <a:ea typeface="Aptos" pitchFamily="34" charset="-122"/>
+                <a:cs typeface="Aptos" pitchFamily="34" charset="-120"/>
+              </a:rPr>
+              <a:t>Connect the concept to public health decisions, safeguards, documentation, or implementation work.</a:t>
+            </a:r>
+            <a:endParaRPr lang="en-US" sz="1250" dirty="0"/>
+          </a:p>
+        </p:txBody>
+      </p:sp>
+    </p:spTree>
+  </p:cSld>
+  <p:clrMapOvr>
+    <a:masterClrMapping/>
+  </p:clrMapOvr>
+</p:sld>
+</file>
+
+<file path=ppt/slides/slide22.xml><?xml version="1.0" encoding="utf-8"?>
+<p:sld xmlns:a="http://schemas.openxmlformats.org/drawingml/2006/main" xmlns:r="http://schemas.openxmlformats.org/officeDocument/2006/relationships" xmlns:p="http://schemas.openxmlformats.org/presentationml/2006/main">
+  <p:cSld name="Slide 22">
+    <p:bg>
+      <p:bgPr>
+        <a:solidFill>
+          <a:srgbClr val="F7FBFD"/>
+        </a:solidFill>
+      </p:bgPr>
+    </p:bg>
+    <p:spTree>
+      <p:nvGrpSpPr>
+        <p:cNvPr id="1" name=""/>
+        <p:cNvGrpSpPr/>
+        <p:nvPr/>
+      </p:nvGrpSpPr>
+      <p:grpSpPr>
+        <a:xfrm>
+          <a:off x="0" y="0"/>
+          <a:ext cx="0" cy="0"/>
+          <a:chOff x="0" y="0"/>
+          <a:chExt cx="0" cy="0"/>
+        </a:xfrm>
+      </p:grpSpPr>
+      <p:sp>
+        <p:nvSpPr>
+          <p:cNvPr id="2" name="Shape 0"/>
+          <p:cNvSpPr/>
+          <p:nvPr/>
+        </p:nvSpPr>
+        <p:spPr>
+          <a:xfrm>
+            <a:off x="0" y="0"/>
+            <a:ext cx="12191695" cy="164592"/>
+          </a:xfrm>
+          <a:prstGeom prst="rect">
+            <a:avLst/>
+          </a:prstGeom>
+          <a:solidFill>
+            <a:srgbClr val="0068B7"/>
+          </a:solidFill>
+          <a:ln w="12700">
+            <a:solidFill>
+              <a:srgbClr val="0068B7"/>
+            </a:solidFill>
+            <a:prstDash val="solid"/>
+          </a:ln>
+        </p:spPr>
+      </p:sp>
+      <p:sp>
+        <p:nvSpPr>
+          <p:cNvPr id="3" name="Shape 1"/>
+          <p:cNvSpPr/>
+          <p:nvPr/>
+        </p:nvSpPr>
+        <p:spPr>
+          <a:xfrm>
+            <a:off x="0" y="164592"/>
+            <a:ext cx="146304" cy="6693408"/>
+          </a:xfrm>
+          <a:prstGeom prst="rect">
+            <a:avLst/>
+          </a:prstGeom>
+          <a:solidFill>
+            <a:srgbClr val="2F8A28"/>
+          </a:solidFill>
+          <a:ln w="12700">
+            <a:solidFill>
+              <a:srgbClr val="2F8A28"/>
+            </a:solidFill>
+            <a:prstDash val="solid"/>
+          </a:ln>
+        </p:spPr>
+      </p:sp>
+      <p:sp>
+        <p:nvSpPr>
+          <p:cNvPr id="4" name="Text 2"/>
+          <p:cNvSpPr/>
+          <p:nvPr/>
+        </p:nvSpPr>
+        <p:spPr>
+          <a:xfrm>
+            <a:off x="502920" y="292608"/>
+            <a:ext cx="10149840" cy="256032"/>
+          </a:xfrm>
+          <a:prstGeom prst="rect">
+            <a:avLst/>
+          </a:prstGeom>
+          <a:noFill/>
+          <a:ln/>
+        </p:spPr>
+        <p:txBody>
+          <a:bodyPr wrap="square" lIns="0" tIns="0" rIns="0" bIns="0" rtlCol="0" anchor="ctr"/>
+          <a:lstStyle/>
+          <a:p>
+            <a:pPr indent="0" marL="0">
+              <a:buNone/>
+            </a:pPr>
+            <a:r>
+              <a:rPr lang="en-US" sz="900" b="1" dirty="0">
+                <a:solidFill>
+                  <a:srgbClr val="5F7181"/>
+                </a:solidFill>
+                <a:latin typeface="Aptos" pitchFamily="34" charset="0"/>
+                <a:ea typeface="Aptos" pitchFamily="34" charset="-122"/>
+                <a:cs typeface="Aptos" pitchFamily="34" charset="-120"/>
+              </a:rPr>
+              <a:t>Public Comment, Social Listening, and Community Feedback Analysis</a:t>
+            </a:r>
+            <a:endParaRPr lang="en-US" sz="900" dirty="0"/>
+          </a:p>
+        </p:txBody>
+      </p:sp>
+      <p:sp>
+        <p:nvSpPr>
+          <p:cNvPr id="5" name="Text 3"/>
+          <p:cNvSpPr/>
+          <p:nvPr/>
+        </p:nvSpPr>
+        <p:spPr>
+          <a:xfrm>
+            <a:off x="502920" y="6537960"/>
+            <a:ext cx="7772400" cy="201168"/>
+          </a:xfrm>
+          <a:prstGeom prst="rect">
+            <a:avLst/>
+          </a:prstGeom>
+          <a:noFill/>
+          <a:ln/>
+        </p:spPr>
+        <p:txBody>
+          <a:bodyPr wrap="square" lIns="0" tIns="0" rIns="0" bIns="0" rtlCol="0" anchor="ctr"/>
+          <a:lstStyle/>
+          <a:p>
+            <a:pPr indent="0" marL="0">
+              <a:buNone/>
+            </a:pPr>
+            <a:r>
+              <a:rPr lang="en-US" sz="800" dirty="0">
+                <a:solidFill>
+                  <a:srgbClr val="5F7181"/>
+                </a:solidFill>
+                <a:latin typeface="Aptos" pitchFamily="34" charset="0"/>
+                <a:ea typeface="Aptos" pitchFamily="34" charset="-122"/>
+                <a:cs typeface="Aptos" pitchFamily="34" charset="-120"/>
+              </a:rPr>
+              <a:t>AI Playbook and Toolkit for Public Health Departments</a:t>
+            </a:r>
+            <a:endParaRPr lang="en-US" sz="800" dirty="0"/>
+          </a:p>
+        </p:txBody>
+      </p:sp>
+      <p:sp>
+        <p:nvSpPr>
+          <p:cNvPr id="6" name="Text 4"/>
+          <p:cNvSpPr/>
+          <p:nvPr/>
+        </p:nvSpPr>
+        <p:spPr>
+          <a:xfrm>
+            <a:off x="9966960" y="6537960"/>
+            <a:ext cx="1645920" cy="201168"/>
+          </a:xfrm>
+          <a:prstGeom prst="rect">
+            <a:avLst/>
+          </a:prstGeom>
+          <a:noFill/>
+          <a:ln/>
+        </p:spPr>
+        <p:txBody>
+          <a:bodyPr wrap="square" lIns="0" tIns="0" rIns="0" bIns="0" rtlCol="0" anchor="ctr"/>
+          <a:lstStyle/>
+          <a:p>
+            <a:pPr algn="r" indent="0" marL="0">
+              <a:buNone/>
+            </a:pPr>
+            <a:r>
+              <a:rPr lang="en-US" sz="800" dirty="0">
+                <a:solidFill>
+                  <a:srgbClr val="5F7181"/>
+                </a:solidFill>
+                <a:latin typeface="Aptos" pitchFamily="34" charset="0"/>
+                <a:ea typeface="Aptos" pitchFamily="34" charset="-122"/>
+                <a:cs typeface="Aptos" pitchFamily="34" charset="-120"/>
+              </a:rPr>
+              <a:t>© Paula Soper</a:t>
+            </a:r>
+            <a:endParaRPr lang="en-US" sz="800" dirty="0"/>
+          </a:p>
+        </p:txBody>
+      </p:sp>
+      <p:sp>
+        <p:nvSpPr>
+          <p:cNvPr id="7" name="Text 5"/>
+          <p:cNvSpPr/>
+          <p:nvPr/>
+        </p:nvSpPr>
+        <p:spPr>
+          <a:xfrm>
+            <a:off x="640080" y="658368"/>
+            <a:ext cx="10881360" cy="566928"/>
+          </a:xfrm>
+          <a:prstGeom prst="rect">
+            <a:avLst/>
+          </a:prstGeom>
+          <a:noFill/>
+          <a:ln/>
+        </p:spPr>
+        <p:txBody>
+          <a:bodyPr wrap="square" lIns="0" tIns="0" rIns="0" bIns="0" rtlCol="0" anchor="ctr">
+            <a:normAutofit/>
+          </a:bodyPr>
+          <a:lstStyle/>
+          <a:p>
+            <a:pPr indent="0" marL="0">
+              <a:buNone/>
+            </a:pPr>
+            <a:r>
+              <a:rPr lang="en-US" sz="2700" b="1" dirty="0">
+                <a:solidFill>
+                  <a:srgbClr val="003A63"/>
+                </a:solidFill>
+                <a:latin typeface="Aptos Display" pitchFamily="34" charset="0"/>
+                <a:ea typeface="Aptos Display" pitchFamily="34" charset="-122"/>
+                <a:cs typeface="Aptos Display" pitchFamily="34" charset="-120"/>
+              </a:rPr>
+              <a:t>References and Resources Continued</a:t>
+            </a:r>
+            <a:endParaRPr lang="en-US" sz="2700" dirty="0"/>
+          </a:p>
+        </p:txBody>
+      </p:sp>
+      <p:sp>
+        <p:nvSpPr>
+          <p:cNvPr id="8" name="Text 6"/>
+          <p:cNvSpPr/>
+          <p:nvPr/>
+        </p:nvSpPr>
+        <p:spPr>
+          <a:xfrm>
+            <a:off x="868680" y="1417320"/>
+            <a:ext cx="6675120" cy="4434840"/>
+          </a:xfrm>
+          <a:prstGeom prst="rect">
+            <a:avLst/>
+          </a:prstGeom>
+          <a:noFill/>
+          <a:ln/>
+        </p:spPr>
+        <p:txBody>
+          <a:bodyPr wrap="square" lIns="635" tIns="635" rIns="635" bIns="635" rtlCol="0" anchor="t">
+            <a:normAutofit/>
+          </a:bodyPr>
+          <a:lstStyle/>
+          <a:p>
+            <a:r>
+              <a:rPr lang="en-US" sz="1700" dirty="0">
+                <a:solidFill>
+                  <a:srgbClr val="17364A"/>
+                </a:solidFill>
+                <a:latin typeface="Aptos" pitchFamily="34" charset="0"/>
+                <a:ea typeface="Aptos" pitchFamily="34" charset="-122"/>
+                <a:cs typeface="Aptos" pitchFamily="34" charset="-120"/>
+              </a:rPr>
+              <a:t>Agency policies for privacy, public records, cybersecurity, procurement, civil rights, accessibility, language access, and.</a:t>
+            </a:r>
+            <a:endParaRPr lang="en-US" sz="1700" dirty="0"/>
+          </a:p>
+        </p:txBody>
+      </p:sp>
+      <p:sp>
+        <p:nvSpPr>
+          <p:cNvPr id="9" name="Shape 7"/>
+          <p:cNvSpPr/>
+          <p:nvPr/>
+        </p:nvSpPr>
+        <p:spPr>
+          <a:xfrm>
+            <a:off x="7909560" y="1417320"/>
+            <a:ext cx="3154680" cy="1828800"/>
+          </a:xfrm>
+          <a:prstGeom prst="roundRect">
+            <a:avLst>
+              <a:gd name="adj" fmla="val 6000"/>
+            </a:avLst>
+          </a:prstGeom>
+          <a:solidFill>
+            <a:srgbClr val="EEF8ED"/>
+          </a:solidFill>
+          <a:ln w="12700">
+            <a:solidFill>
+              <a:srgbClr val="B9D7E6"/>
+            </a:solidFill>
+            <a:prstDash val="solid"/>
+          </a:ln>
+        </p:spPr>
+      </p:sp>
+      <p:sp>
+        <p:nvSpPr>
+          <p:cNvPr id="10" name="Text 8"/>
+          <p:cNvSpPr/>
+          <p:nvPr/>
+        </p:nvSpPr>
+        <p:spPr>
+          <a:xfrm>
+            <a:off x="8074152" y="1563624"/>
+            <a:ext cx="2825496" cy="201168"/>
+          </a:xfrm>
+          <a:prstGeom prst="rect">
+            <a:avLst/>
+          </a:prstGeom>
+          <a:noFill/>
+          <a:ln/>
+        </p:spPr>
+        <p:txBody>
+          <a:bodyPr wrap="square" lIns="0" tIns="0" rIns="0" bIns="0" rtlCol="0" anchor="ctr"/>
+          <a:lstStyle/>
+          <a:p>
+            <a:pPr indent="0" marL="0">
+              <a:buNone/>
+            </a:pPr>
+            <a:r>
+              <a:rPr lang="en-US" sz="950" b="1" dirty="0">
+                <a:solidFill>
+                  <a:srgbClr val="0068B7"/>
+                </a:solidFill>
+                <a:latin typeface="Aptos" pitchFamily="34" charset="0"/>
+                <a:ea typeface="Aptos" pitchFamily="34" charset="-122"/>
+                <a:cs typeface="Aptos" pitchFamily="34" charset="-120"/>
+              </a:rPr>
+              <a:t>Key idea</a:t>
+            </a:r>
+            <a:endParaRPr lang="en-US" sz="950" dirty="0"/>
+          </a:p>
+        </p:txBody>
+      </p:sp>
+      <p:sp>
+        <p:nvSpPr>
+          <p:cNvPr id="11" name="Text 9"/>
+          <p:cNvSpPr/>
+          <p:nvPr/>
+        </p:nvSpPr>
+        <p:spPr>
+          <a:xfrm>
+            <a:off x="8074152" y="1856232"/>
+            <a:ext cx="2825496" cy="1261872"/>
+          </a:xfrm>
+          <a:prstGeom prst="rect">
+            <a:avLst/>
+          </a:prstGeom>
+          <a:noFill/>
+          <a:ln/>
+        </p:spPr>
+        <p:txBody>
+          <a:bodyPr wrap="square" lIns="0" tIns="0" rIns="0" bIns="0" rtlCol="0" anchor="t">
+            <a:normAutofit/>
+          </a:bodyPr>
+          <a:lstStyle/>
+          <a:p>
+            <a:pPr indent="0" marL="0">
+              <a:buNone/>
+            </a:pPr>
+            <a:r>
+              <a:rPr lang="en-US" sz="1250" dirty="0">
+                <a:solidFill>
+                  <a:srgbClr val="17364A"/>
+                </a:solidFill>
+                <a:latin typeface="Aptos" pitchFamily="34" charset="0"/>
+                <a:ea typeface="Aptos" pitchFamily="34" charset="-122"/>
+                <a:cs typeface="Aptos" pitchFamily="34" charset="-120"/>
+              </a:rPr>
+              <a:t>Agency policies for privacy, public records, cybersecurity, procurement, civil rights, accessibility, language access, and.</a:t>
+            </a:r>
+            <a:endParaRPr lang="en-US" sz="1250" dirty="0"/>
+          </a:p>
+        </p:txBody>
+      </p:sp>
+      <p:sp>
+        <p:nvSpPr>
+          <p:cNvPr id="12" name="Shape 10"/>
+          <p:cNvSpPr/>
+          <p:nvPr/>
+        </p:nvSpPr>
+        <p:spPr>
+          <a:xfrm>
+            <a:off x="7909560" y="3520440"/>
+            <a:ext cx="3154680" cy="1737360"/>
+          </a:xfrm>
+          <a:prstGeom prst="roundRect">
+            <a:avLst>
+              <a:gd name="adj" fmla="val 6316"/>
+            </a:avLst>
+          </a:prstGeom>
+          <a:solidFill>
+            <a:srgbClr val="EAF6F8"/>
+          </a:solidFill>
+          <a:ln w="12700">
+            <a:solidFill>
+              <a:srgbClr val="B9D7E6"/>
+            </a:solidFill>
+            <a:prstDash val="solid"/>
+          </a:ln>
+        </p:spPr>
+      </p:sp>
+      <p:sp>
+        <p:nvSpPr>
+          <p:cNvPr id="13" name="Text 11"/>
+          <p:cNvSpPr/>
+          <p:nvPr/>
+        </p:nvSpPr>
+        <p:spPr>
+          <a:xfrm>
+            <a:off x="8074152" y="3666744"/>
+            <a:ext cx="2825496" cy="201168"/>
+          </a:xfrm>
+          <a:prstGeom prst="rect">
+            <a:avLst/>
+          </a:prstGeom>
+          <a:noFill/>
+          <a:ln/>
+        </p:spPr>
+        <p:txBody>
+          <a:bodyPr wrap="square" lIns="0" tIns="0" rIns="0" bIns="0" rtlCol="0" anchor="ctr"/>
+          <a:lstStyle/>
+          <a:p>
+            <a:pPr indent="0" marL="0">
+              <a:buNone/>
+            </a:pPr>
+            <a:r>
+              <a:rPr lang="en-US" sz="950" b="1" dirty="0">
+                <a:solidFill>
+                  <a:srgbClr val="0068B7"/>
+                </a:solidFill>
+                <a:latin typeface="Aptos" pitchFamily="34" charset="0"/>
+                <a:ea typeface="Aptos" pitchFamily="34" charset="-122"/>
+                <a:cs typeface="Aptos" pitchFamily="34" charset="-120"/>
+              </a:rPr>
+              <a:t>Use this for</a:t>
+            </a:r>
+            <a:endParaRPr lang="en-US" sz="950" dirty="0"/>
+          </a:p>
+        </p:txBody>
+      </p:sp>
+      <p:sp>
+        <p:nvSpPr>
+          <p:cNvPr id="14" name="Text 12"/>
+          <p:cNvSpPr/>
+          <p:nvPr/>
+        </p:nvSpPr>
+        <p:spPr>
+          <a:xfrm>
+            <a:off x="8074152" y="3959352"/>
+            <a:ext cx="2825496" cy="1170432"/>
+          </a:xfrm>
+          <a:prstGeom prst="rect">
+            <a:avLst/>
+          </a:prstGeom>
+          <a:noFill/>
+          <a:ln/>
+        </p:spPr>
+        <p:txBody>
+          <a:bodyPr wrap="square" lIns="0" tIns="0" rIns="0" bIns="0" rtlCol="0" anchor="t">
+            <a:normAutofit/>
+          </a:bodyPr>
+          <a:lstStyle/>
+          <a:p>
+            <a:pPr indent="0" marL="0">
+              <a:buNone/>
+            </a:pPr>
+            <a:r>
+              <a:rPr lang="en-US" sz="1250" dirty="0">
+                <a:solidFill>
+                  <a:srgbClr val="17364A"/>
+                </a:solidFill>
+                <a:latin typeface="Aptos" pitchFamily="34" charset="0"/>
+                <a:ea typeface="Aptos" pitchFamily="34" charset="-122"/>
+                <a:cs typeface="Aptos" pitchFamily="34" charset="-120"/>
+              </a:rPr>
+              <a:t>Connect the concept to public health decisions, safeguards, documentation, or implementation work.</a:t>
+            </a:r>
+            <a:endParaRPr lang="en-US" sz="1250" dirty="0"/>
           </a:p>
         </p:txBody>
       </p:sp>
@@ -6166,7 +11028,32 @@
       </p:sp>
       <p:sp>
         <p:nvSpPr>
-          <p:cNvPr id="3" name="Text 1"/>
+          <p:cNvPr id="3" name="Shape 1"/>
+          <p:cNvSpPr/>
+          <p:nvPr/>
+        </p:nvSpPr>
+        <p:spPr>
+          <a:xfrm>
+            <a:off x="0" y="164592"/>
+            <a:ext cx="146304" cy="6693408"/>
+          </a:xfrm>
+          <a:prstGeom prst="rect">
+            <a:avLst/>
+          </a:prstGeom>
+          <a:solidFill>
+            <a:srgbClr val="2F8A28"/>
+          </a:solidFill>
+          <a:ln w="12700">
+            <a:solidFill>
+              <a:srgbClr val="2F8A28"/>
+            </a:solidFill>
+            <a:prstDash val="solid"/>
+          </a:ln>
+        </p:spPr>
+      </p:sp>
+      <p:sp>
+        <p:nvSpPr>
+          <p:cNvPr id="4" name="Text 2"/>
           <p:cNvSpPr/>
           <p:nvPr/>
         </p:nvSpPr>
@@ -6205,7 +11092,7 @@
       </p:sp>
       <p:sp>
         <p:nvSpPr>
-          <p:cNvPr id="4" name="Text 2"/>
+          <p:cNvPr id="5" name="Text 3"/>
           <p:cNvSpPr/>
           <p:nvPr/>
         </p:nvSpPr>
@@ -6244,7 +11131,7 @@
       </p:sp>
       <p:sp>
         <p:nvSpPr>
-          <p:cNvPr id="5" name="Text 3"/>
+          <p:cNvPr id="6" name="Text 4"/>
           <p:cNvSpPr/>
           <p:nvPr/>
         </p:nvSpPr>
@@ -6283,7 +11170,7 @@
       </p:sp>
       <p:sp>
         <p:nvSpPr>
-          <p:cNvPr id="6" name="Text 4"/>
+          <p:cNvPr id="7" name="Text 5"/>
           <p:cNvSpPr/>
           <p:nvPr/>
         </p:nvSpPr>
@@ -6316,7 +11203,7 @@
                 <a:ea typeface="Aptos Display" pitchFamily="34" charset="-122"/>
                 <a:cs typeface="Aptos Display" pitchFamily="34" charset="-120"/>
               </a:rPr>
-              <a:t>Learning Objectives</a:t>
+              <a:t>How this module connects to the playbook</a:t>
             </a:r>
             <a:endParaRPr lang="en-US" sz="2700" dirty="0"/>
           </a:p>
@@ -6324,14 +11211,14 @@
       </p:sp>
       <p:sp>
         <p:nvSpPr>
-          <p:cNvPr id="7" name="Text 5"/>
-          <p:cNvSpPr/>
-          <p:nvPr/>
-        </p:nvSpPr>
-        <p:spPr>
-          <a:xfrm>
-            <a:off x="822960" y="1325880"/>
-            <a:ext cx="10378440" cy="4800600"/>
+          <p:cNvPr id="8" name="Text 6"/>
+          <p:cNvSpPr/>
+          <p:nvPr/>
+        </p:nvSpPr>
+        <p:spPr>
+          <a:xfrm>
+            <a:off x="868680" y="1417320"/>
+            <a:ext cx="6903720" cy="4480560"/>
           </a:xfrm>
           <a:prstGeom prst="rect">
             <a:avLst/>
@@ -6346,7 +11233,7 @@
           <a:lstStyle/>
           <a:p>
             <a:r>
-              <a:rPr lang="en-US" sz="1450" dirty="0">
+              <a:rPr lang="en-US" sz="1540" dirty="0">
                 <a:solidFill>
                   <a:srgbClr val="17364A"/>
                 </a:solidFill>
@@ -6354,13 +11241,13 @@
                 <a:ea typeface="Aptos" pitchFamily="34" charset="-122"/>
                 <a:cs typeface="Aptos" pitchFamily="34" charset="-120"/>
               </a:rPr>
-              <a:t>Explain the purpose of public comment, social listening, and community feedback analysis in public health AI.</a:t>
-            </a:r>
-            <a:endParaRPr lang="en-US" sz="1450" dirty="0"/>
-          </a:p>
-          <a:p>
-            <a:r>
-              <a:rPr lang="en-US" sz="1450" dirty="0">
+              <a:t>Play 1: Vision &amp; Guardrails - This lesson informs Play 1 by helping learners connect the lesson topic to vision &amp; guardrails work in.</a:t>
+            </a:r>
+            <a:endParaRPr lang="en-US" sz="1540" dirty="0"/>
+          </a:p>
+          <a:p>
+            <a:r>
+              <a:rPr lang="en-US" sz="1540" dirty="0">
                 <a:solidFill>
                   <a:srgbClr val="17364A"/>
                 </a:solidFill>
@@ -6368,13 +11255,13 @@
                 <a:ea typeface="Aptos" pitchFamily="34" charset="-122"/>
                 <a:cs typeface="Aptos" pitchFamily="34" charset="-120"/>
               </a:rPr>
-              <a:t>Identify the roles, decisions, risks, and documentation needed for the topic.</a:t>
-            </a:r>
-            <a:endParaRPr lang="en-US" sz="1450" dirty="0"/>
-          </a:p>
-          <a:p>
-            <a:r>
-              <a:rPr lang="en-US" sz="1450" dirty="0">
+              <a:t>Play 11: Build and Deploy AI Solutions - This lesson informs Play 11 by helping learners connect the lesson topic to build and deploy.</a:t>
+            </a:r>
+            <a:endParaRPr lang="en-US" sz="1540" dirty="0"/>
+          </a:p>
+          <a:p>
+            <a:r>
+              <a:rPr lang="en-US" sz="1540" dirty="0">
                 <a:solidFill>
                   <a:srgbClr val="17364A"/>
                 </a:solidFill>
@@ -6382,13 +11269,13 @@
                 <a:ea typeface="Aptos" pitchFamily="34" charset="-122"/>
                 <a:cs typeface="Aptos" pitchFamily="34" charset="-120"/>
               </a:rPr>
-              <a:t>Apply the topic to a real or realistic public health workflow or decision.</a:t>
-            </a:r>
-            <a:endParaRPr lang="en-US" sz="1450" dirty="0"/>
-          </a:p>
-          <a:p>
-            <a:r>
-              <a:rPr lang="en-US" sz="1450" dirty="0">
+              <a:t>Play 2: Readiness Assessment - This lesson informs Play 2 by helping learners connect the lesson topic to readiness assessment work.</a:t>
+            </a:r>
+            <a:endParaRPr lang="en-US" sz="1540" dirty="0"/>
+          </a:p>
+          <a:p>
+            <a:r>
+              <a:rPr lang="en-US" sz="1540" dirty="0">
                 <a:solidFill>
                   <a:srgbClr val="17364A"/>
                 </a:solidFill>
@@ -6396,13 +11283,106 @@
                 <a:ea typeface="Aptos" pitchFamily="34" charset="-122"/>
                 <a:cs typeface="Aptos" pitchFamily="34" charset="-120"/>
               </a:rPr>
-              <a:t>Recognize equity, privacy, security, legal, operational, and public trust implications.</a:t>
-            </a:r>
-            <a:endParaRPr lang="en-US" sz="1450" dirty="0"/>
-          </a:p>
-          <a:p>
-            <a:r>
-              <a:rPr lang="en-US" sz="1450" dirty="0">
+              <a:t>Play 3: Establish AI Governance - This lesson informs Play 3 by helping learners connect the lesson topic to establish ai governance.</a:t>
+            </a:r>
+            <a:endParaRPr lang="en-US" sz="1540" dirty="0"/>
+          </a:p>
+        </p:txBody>
+      </p:sp>
+      <p:sp>
+        <p:nvSpPr>
+          <p:cNvPr id="9" name="Shape 7"/>
+          <p:cNvSpPr/>
+          <p:nvPr/>
+        </p:nvSpPr>
+        <p:spPr>
+          <a:xfrm>
+            <a:off x="8046720" y="1417320"/>
+            <a:ext cx="3063240" cy="2103120"/>
+          </a:xfrm>
+          <a:prstGeom prst="roundRect">
+            <a:avLst>
+              <a:gd name="adj" fmla="val 5217"/>
+            </a:avLst>
+          </a:prstGeom>
+          <a:solidFill>
+            <a:srgbClr val="EEF8ED"/>
+          </a:solidFill>
+          <a:ln w="12700">
+            <a:solidFill>
+              <a:srgbClr val="B9D7E6"/>
+            </a:solidFill>
+            <a:prstDash val="solid"/>
+          </a:ln>
+        </p:spPr>
+      </p:sp>
+      <p:sp>
+        <p:nvSpPr>
+          <p:cNvPr id="10" name="Text 8"/>
+          <p:cNvSpPr/>
+          <p:nvPr/>
+        </p:nvSpPr>
+        <p:spPr>
+          <a:xfrm>
+            <a:off x="8211312" y="1563624"/>
+            <a:ext cx="2734056" cy="201168"/>
+          </a:xfrm>
+          <a:prstGeom prst="rect">
+            <a:avLst/>
+          </a:prstGeom>
+          <a:noFill/>
+          <a:ln/>
+        </p:spPr>
+        <p:txBody>
+          <a:bodyPr wrap="square" lIns="0" tIns="0" rIns="0" bIns="0" rtlCol="0" anchor="ctr"/>
+          <a:lstStyle/>
+          <a:p>
+            <a:pPr indent="0" marL="0">
+              <a:buNone/>
+            </a:pPr>
+            <a:r>
+              <a:rPr lang="en-US" sz="950" b="1" dirty="0">
+                <a:solidFill>
+                  <a:srgbClr val="0068B7"/>
+                </a:solidFill>
+                <a:latin typeface="Aptos" pitchFamily="34" charset="0"/>
+                <a:ea typeface="Aptos" pitchFamily="34" charset="-122"/>
+                <a:cs typeface="Aptos" pitchFamily="34" charset="-120"/>
+              </a:rPr>
+              <a:t>Apply the lesson</a:t>
+            </a:r>
+            <a:endParaRPr lang="en-US" sz="950" dirty="0"/>
+          </a:p>
+        </p:txBody>
+      </p:sp>
+      <p:sp>
+        <p:nvSpPr>
+          <p:cNvPr id="11" name="Text 9"/>
+          <p:cNvSpPr/>
+          <p:nvPr/>
+        </p:nvSpPr>
+        <p:spPr>
+          <a:xfrm>
+            <a:off x="8211312" y="1856232"/>
+            <a:ext cx="2734056" cy="1536192"/>
+          </a:xfrm>
+          <a:prstGeom prst="rect">
+            <a:avLst/>
+          </a:prstGeom>
+          <a:noFill/>
+          <a:ln/>
+        </p:spPr>
+        <p:txBody>
+          <a:bodyPr wrap="square" lIns="0" tIns="0" rIns="0" bIns="0" rtlCol="0" anchor="t">
+            <a:normAutofit/>
+          </a:bodyPr>
+          <a:lstStyle/>
+          <a:p>
+            <a:pPr indent="0" marL="0">
+              <a:buNone/>
+            </a:pPr>
+            <a:r>
+              <a:rPr lang="en-US" sz="1250" dirty="0">
                 <a:solidFill>
                   <a:srgbClr val="17364A"/>
                 </a:solidFill>
@@ -6410,9 +11390,116 @@
                 <a:ea typeface="Aptos" pitchFamily="34" charset="-122"/>
                 <a:cs typeface="Aptos" pitchFamily="34" charset="-120"/>
               </a:rPr>
-              <a:t>Produce a practical artifact that supports readiness, governance, implementation, monitoring, or accountability.</a:t>
-            </a:r>
-            <a:endParaRPr lang="en-US" sz="1450" dirty="0"/>
+              <a:t>Use the related plays to identify decisions, participants, timing, approvals, and documentation needed for responsible implementation.</a:t>
+            </a:r>
+            <a:endParaRPr lang="en-US" sz="1250" dirty="0"/>
+          </a:p>
+        </p:txBody>
+      </p:sp>
+      <p:sp>
+        <p:nvSpPr>
+          <p:cNvPr id="12" name="Shape 10"/>
+          <p:cNvSpPr/>
+          <p:nvPr/>
+        </p:nvSpPr>
+        <p:spPr>
+          <a:xfrm>
+            <a:off x="8046720" y="3794760"/>
+            <a:ext cx="3063240" cy="1508760"/>
+          </a:xfrm>
+          <a:prstGeom prst="roundRect">
+            <a:avLst>
+              <a:gd name="adj" fmla="val 7273"/>
+            </a:avLst>
+          </a:prstGeom>
+          <a:solidFill>
+            <a:srgbClr val="FFF4D9"/>
+          </a:solidFill>
+          <a:ln w="12700">
+            <a:solidFill>
+              <a:srgbClr val="B9D7E6"/>
+            </a:solidFill>
+            <a:prstDash val="solid"/>
+          </a:ln>
+        </p:spPr>
+      </p:sp>
+      <p:sp>
+        <p:nvSpPr>
+          <p:cNvPr id="13" name="Text 11"/>
+          <p:cNvSpPr/>
+          <p:nvPr/>
+        </p:nvSpPr>
+        <p:spPr>
+          <a:xfrm>
+            <a:off x="8211312" y="3941064"/>
+            <a:ext cx="2734056" cy="201168"/>
+          </a:xfrm>
+          <a:prstGeom prst="rect">
+            <a:avLst/>
+          </a:prstGeom>
+          <a:noFill/>
+          <a:ln/>
+        </p:spPr>
+        <p:txBody>
+          <a:bodyPr wrap="square" lIns="0" tIns="0" rIns="0" bIns="0" rtlCol="0" anchor="ctr"/>
+          <a:lstStyle/>
+          <a:p>
+            <a:pPr indent="0" marL="0">
+              <a:buNone/>
+            </a:pPr>
+            <a:r>
+              <a:rPr lang="en-US" sz="950" b="1" dirty="0">
+                <a:solidFill>
+                  <a:srgbClr val="0068B7"/>
+                </a:solidFill>
+                <a:latin typeface="Aptos" pitchFamily="34" charset="0"/>
+                <a:ea typeface="Aptos" pitchFamily="34" charset="-122"/>
+                <a:cs typeface="Aptos" pitchFamily="34" charset="-120"/>
+              </a:rPr>
+              <a:t>Keep in mind</a:t>
+            </a:r>
+            <a:endParaRPr lang="en-US" sz="950" dirty="0"/>
+          </a:p>
+        </p:txBody>
+      </p:sp>
+      <p:sp>
+        <p:nvSpPr>
+          <p:cNvPr id="14" name="Text 12"/>
+          <p:cNvSpPr/>
+          <p:nvPr/>
+        </p:nvSpPr>
+        <p:spPr>
+          <a:xfrm>
+            <a:off x="8211312" y="4233672"/>
+            <a:ext cx="2734056" cy="941832"/>
+          </a:xfrm>
+          <a:prstGeom prst="rect">
+            <a:avLst/>
+          </a:prstGeom>
+          <a:noFill/>
+          <a:ln/>
+        </p:spPr>
+        <p:txBody>
+          <a:bodyPr wrap="square" lIns="0" tIns="0" rIns="0" bIns="0" rtlCol="0" anchor="t">
+            <a:normAutofit/>
+          </a:bodyPr>
+          <a:lstStyle/>
+          <a:p>
+            <a:pPr indent="0" marL="0">
+              <a:buNone/>
+            </a:pPr>
+            <a:r>
+              <a:rPr lang="en-US" sz="1250" dirty="0">
+                <a:solidFill>
+                  <a:srgbClr val="17364A"/>
+                </a:solidFill>
+                <a:latin typeface="Aptos" pitchFamily="34" charset="0"/>
+                <a:ea typeface="Aptos" pitchFamily="34" charset="-122"/>
+                <a:cs typeface="Aptos" pitchFamily="34" charset="-120"/>
+              </a:rPr>
+              <a:t>The playbook connection helps turn training into agency work, not just individual knowledge.</a:t>
+            </a:r>
+            <a:endParaRPr lang="en-US" sz="1250" dirty="0"/>
           </a:p>
         </p:txBody>
       </p:sp>
@@ -6475,7 +11562,32 @@
       </p:sp>
       <p:sp>
         <p:nvSpPr>
-          <p:cNvPr id="3" name="Text 1"/>
+          <p:cNvPr id="3" name="Shape 1"/>
+          <p:cNvSpPr/>
+          <p:nvPr/>
+        </p:nvSpPr>
+        <p:spPr>
+          <a:xfrm>
+            <a:off x="0" y="164592"/>
+            <a:ext cx="146304" cy="6693408"/>
+          </a:xfrm>
+          <a:prstGeom prst="rect">
+            <a:avLst/>
+          </a:prstGeom>
+          <a:solidFill>
+            <a:srgbClr val="2F8A28"/>
+          </a:solidFill>
+          <a:ln w="12700">
+            <a:solidFill>
+              <a:srgbClr val="2F8A28"/>
+            </a:solidFill>
+            <a:prstDash val="solid"/>
+          </a:ln>
+        </p:spPr>
+      </p:sp>
+      <p:sp>
+        <p:nvSpPr>
+          <p:cNvPr id="4" name="Text 2"/>
           <p:cNvSpPr/>
           <p:nvPr/>
         </p:nvSpPr>
@@ -6514,7 +11626,7 @@
       </p:sp>
       <p:sp>
         <p:nvSpPr>
-          <p:cNvPr id="4" name="Text 2"/>
+          <p:cNvPr id="5" name="Text 3"/>
           <p:cNvSpPr/>
           <p:nvPr/>
         </p:nvSpPr>
@@ -6553,7 +11665,7 @@
       </p:sp>
       <p:sp>
         <p:nvSpPr>
-          <p:cNvPr id="5" name="Text 3"/>
+          <p:cNvPr id="6" name="Text 4"/>
           <p:cNvSpPr/>
           <p:nvPr/>
         </p:nvSpPr>
@@ -6592,7 +11704,7 @@
       </p:sp>
       <p:sp>
         <p:nvSpPr>
-          <p:cNvPr id="6" name="Text 4"/>
+          <p:cNvPr id="7" name="Text 5"/>
           <p:cNvSpPr/>
           <p:nvPr/>
         </p:nvSpPr>
@@ -6625,7 +11737,7 @@
                 <a:ea typeface="Aptos Display" pitchFamily="34" charset="-122"/>
                 <a:cs typeface="Aptos Display" pitchFamily="34" charset="-120"/>
               </a:rPr>
-              <a:t>Module Overview</a:t>
+              <a:t>Related toolkit resources</a:t>
             </a:r>
             <a:endParaRPr lang="en-US" sz="2700" dirty="0"/>
           </a:p>
@@ -6633,32 +11745,192 @@
       </p:sp>
       <p:sp>
         <p:nvSpPr>
-          <p:cNvPr id="7" name="Text 5"/>
-          <p:cNvSpPr/>
-          <p:nvPr/>
-        </p:nvSpPr>
-        <p:spPr>
-          <a:xfrm>
-            <a:off x="822960" y="1325880"/>
-            <a:ext cx="10378440" cy="4800600"/>
-          </a:xfrm>
-          <a:prstGeom prst="rect">
-            <a:avLst/>
-          </a:prstGeom>
-          <a:noFill/>
-          <a:ln/>
-        </p:spPr>
-        <p:txBody>
-          <a:bodyPr wrap="square" lIns="1016" tIns="1016" rIns="1016" bIns="1016" rtlCol="0" anchor="t">
+          <p:cNvPr id="8" name="Text 6"/>
+          <p:cNvSpPr/>
+          <p:nvPr/>
+        </p:nvSpPr>
+        <p:spPr>
+          <a:xfrm>
+            <a:off x="868680" y="1417320"/>
+            <a:ext cx="6903720" cy="4480560"/>
+          </a:xfrm>
+          <a:prstGeom prst="rect">
+            <a:avLst/>
+          </a:prstGeom>
+          <a:noFill/>
+          <a:ln/>
+        </p:spPr>
+        <p:txBody>
+          <a:bodyPr wrap="square" lIns="635" tIns="635" rIns="635" bIns="635" rtlCol="0" anchor="t">
             <a:normAutofit/>
           </a:bodyPr>
           <a:lstStyle/>
           <a:p>
+            <a:r>
+              <a:rPr lang="en-US" sz="1460" dirty="0">
+                <a:solidFill>
+                  <a:srgbClr val="17364A"/>
+                </a:solidFill>
+                <a:latin typeface="Aptos" pitchFamily="34" charset="0"/>
+                <a:ea typeface="Aptos" pitchFamily="34" charset="-122"/>
+                <a:cs typeface="Aptos" pitchFamily="34" charset="-120"/>
+              </a:rPr>
+              <a:t>Tool 1: AI Vision &amp; Principles Workshop (Workshop) - Use AI Vision &amp; Principles Workshop to translate this lesson into a documented.</a:t>
+            </a:r>
+            <a:endParaRPr lang="en-US" sz="1460" dirty="0"/>
+          </a:p>
+          <a:p>
+            <a:r>
+              <a:rPr lang="en-US" sz="1460" dirty="0">
+                <a:solidFill>
+                  <a:srgbClr val="17364A"/>
+                </a:solidFill>
+                <a:latin typeface="Aptos" pitchFamily="34" charset="0"/>
+                <a:ea typeface="Aptos" pitchFamily="34" charset="-122"/>
+                <a:cs typeface="Aptos" pitchFamily="34" charset="-120"/>
+              </a:rPr>
+              <a:t>Tool 4: AI Policy Landscape Scan (Worksheet) - Use AI Policy Landscape Scan to translate this lesson into a documented public health.</a:t>
+            </a:r>
+            <a:endParaRPr lang="en-US" sz="1460" dirty="0"/>
+          </a:p>
+          <a:p>
+            <a:r>
+              <a:rPr lang="en-US" sz="1460" dirty="0">
+                <a:solidFill>
+                  <a:srgbClr val="17364A"/>
+                </a:solidFill>
+                <a:latin typeface="Aptos" pitchFamily="34" charset="0"/>
+                <a:ea typeface="Aptos" pitchFamily="34" charset="-122"/>
+                <a:cs typeface="Aptos" pitchFamily="34" charset="-120"/>
+              </a:rPr>
+              <a:t>Tool 5: AI Environmental and Resource Impact Review (Checklist) - Use AI Environmental and Resource Impact Review to translate this.</a:t>
+            </a:r>
+            <a:endParaRPr lang="en-US" sz="1460" dirty="0"/>
+          </a:p>
+          <a:p>
+            <a:r>
+              <a:rPr lang="en-US" sz="1460" dirty="0">
+                <a:solidFill>
+                  <a:srgbClr val="17364A"/>
+                </a:solidFill>
+                <a:latin typeface="Aptos" pitchFamily="34" charset="0"/>
+                <a:ea typeface="Aptos" pitchFamily="34" charset="-122"/>
+                <a:cs typeface="Aptos" pitchFamily="34" charset="-120"/>
+              </a:rPr>
+              <a:t>Tool 6: Human-Centered AI Decision Rule Checklist (Checklist) - Use Human-Centered AI Decision Rule Checklist to translate this.</a:t>
+            </a:r>
+            <a:endParaRPr lang="en-US" sz="1460" dirty="0"/>
+          </a:p>
+          <a:p>
+            <a:r>
+              <a:rPr lang="en-US" sz="1460" dirty="0">
+                <a:solidFill>
+                  <a:srgbClr val="17364A"/>
+                </a:solidFill>
+                <a:latin typeface="Aptos" pitchFamily="34" charset="0"/>
+                <a:ea typeface="Aptos" pitchFamily="34" charset="-122"/>
+                <a:cs typeface="Aptos" pitchFamily="34" charset="-120"/>
+              </a:rPr>
+              <a:t>Tool 8: AI Project Charter (Planning) - Use AI Project Charter to translate this lesson into a documented public health AI planning,.</a:t>
+            </a:r>
+            <a:endParaRPr lang="en-US" sz="1460" dirty="0"/>
+          </a:p>
+        </p:txBody>
+      </p:sp>
+      <p:sp>
+        <p:nvSpPr>
+          <p:cNvPr id="9" name="Shape 7"/>
+          <p:cNvSpPr/>
+          <p:nvPr/>
+        </p:nvSpPr>
+        <p:spPr>
+          <a:xfrm>
+            <a:off x="8046720" y="1417320"/>
+            <a:ext cx="3063240" cy="2103120"/>
+          </a:xfrm>
+          <a:prstGeom prst="roundRect">
+            <a:avLst>
+              <a:gd name="adj" fmla="val 5217"/>
+            </a:avLst>
+          </a:prstGeom>
+          <a:solidFill>
+            <a:srgbClr val="EAF6F8"/>
+          </a:solidFill>
+          <a:ln w="12700">
+            <a:solidFill>
+              <a:srgbClr val="B9D7E6"/>
+            </a:solidFill>
+            <a:prstDash val="solid"/>
+          </a:ln>
+        </p:spPr>
+      </p:sp>
+      <p:sp>
+        <p:nvSpPr>
+          <p:cNvPr id="10" name="Text 8"/>
+          <p:cNvSpPr/>
+          <p:nvPr/>
+        </p:nvSpPr>
+        <p:spPr>
+          <a:xfrm>
+            <a:off x="8211312" y="1563624"/>
+            <a:ext cx="2734056" cy="201168"/>
+          </a:xfrm>
+          <a:prstGeom prst="rect">
+            <a:avLst/>
+          </a:prstGeom>
+          <a:noFill/>
+          <a:ln/>
+        </p:spPr>
+        <p:txBody>
+          <a:bodyPr wrap="square" lIns="0" tIns="0" rIns="0" bIns="0" rtlCol="0" anchor="ctr"/>
+          <a:lstStyle/>
+          <a:p>
             <a:pPr indent="0" marL="0">
               <a:buNone/>
             </a:pPr>
             <a:r>
-              <a:rPr lang="en-US" sz="1420" dirty="0">
+              <a:rPr lang="en-US" sz="950" b="1" dirty="0">
+                <a:solidFill>
+                  <a:srgbClr val="0068B7"/>
+                </a:solidFill>
+                <a:latin typeface="Aptos" pitchFamily="34" charset="0"/>
+                <a:ea typeface="Aptos" pitchFamily="34" charset="-122"/>
+                <a:cs typeface="Aptos" pitchFamily="34" charset="-120"/>
+              </a:rPr>
+              <a:t>Use the tools</a:t>
+            </a:r>
+            <a:endParaRPr lang="en-US" sz="950" dirty="0"/>
+          </a:p>
+        </p:txBody>
+      </p:sp>
+      <p:sp>
+        <p:nvSpPr>
+          <p:cNvPr id="11" name="Text 9"/>
+          <p:cNvSpPr/>
+          <p:nvPr/>
+        </p:nvSpPr>
+        <p:spPr>
+          <a:xfrm>
+            <a:off x="8211312" y="1856232"/>
+            <a:ext cx="2734056" cy="1536192"/>
+          </a:xfrm>
+          <a:prstGeom prst="rect">
+            <a:avLst/>
+          </a:prstGeom>
+          <a:noFill/>
+          <a:ln/>
+        </p:spPr>
+        <p:txBody>
+          <a:bodyPr wrap="square" lIns="0" tIns="0" rIns="0" bIns="0" rtlCol="0" anchor="t">
+            <a:normAutofit/>
+          </a:bodyPr>
+          <a:lstStyle/>
+          <a:p>
+            <a:pPr indent="0" marL="0">
+              <a:buNone/>
+            </a:pPr>
+            <a:r>
+              <a:rPr lang="en-US" sz="1250" dirty="0">
                 <a:solidFill>
                   <a:srgbClr val="17364A"/>
                 </a:solidFill>
@@ -6666,9 +11938,116 @@
                 <a:ea typeface="Aptos" pitchFamily="34" charset="-122"/>
                 <a:cs typeface="Aptos" pitchFamily="34" charset="-120"/>
               </a:rPr>
-              <a:t>This module focuses on ethical analysis of public comments, social listening data, and community feedback. It is designed for public health staff who must translate responsible AI principles into repeatable decisions, documents, workflows, and oversight practices. The module helps learners move beyond general awareness by producing a practical artifact that can be used in governance review, implementation planning, operations, communication, or accountability. It emphasizes paragraph-based reasoning, defined responsibilities, and documentation that can withstand public health, legal, privacy, equity, and leadership review.</a:t>
-            </a:r>
-            <a:endParaRPr lang="en-US" sz="1420" dirty="0"/>
+              <a:t>Use linked tools when your department needs a structured worksheet, template, checklist, review process, or documentation artifact.</a:t>
+            </a:r>
+            <a:endParaRPr lang="en-US" sz="1250" dirty="0"/>
+          </a:p>
+        </p:txBody>
+      </p:sp>
+      <p:sp>
+        <p:nvSpPr>
+          <p:cNvPr id="12" name="Shape 10"/>
+          <p:cNvSpPr/>
+          <p:nvPr/>
+        </p:nvSpPr>
+        <p:spPr>
+          <a:xfrm>
+            <a:off x="8046720" y="3794760"/>
+            <a:ext cx="3063240" cy="1508760"/>
+          </a:xfrm>
+          <a:prstGeom prst="roundRect">
+            <a:avLst>
+              <a:gd name="adj" fmla="val 7273"/>
+            </a:avLst>
+          </a:prstGeom>
+          <a:solidFill>
+            <a:srgbClr val="EEF8ED"/>
+          </a:solidFill>
+          <a:ln w="12700">
+            <a:solidFill>
+              <a:srgbClr val="B9D7E6"/>
+            </a:solidFill>
+            <a:prstDash val="solid"/>
+          </a:ln>
+        </p:spPr>
+      </p:sp>
+      <p:sp>
+        <p:nvSpPr>
+          <p:cNvPr id="13" name="Text 11"/>
+          <p:cNvSpPr/>
+          <p:nvPr/>
+        </p:nvSpPr>
+        <p:spPr>
+          <a:xfrm>
+            <a:off x="8211312" y="3941064"/>
+            <a:ext cx="2734056" cy="201168"/>
+          </a:xfrm>
+          <a:prstGeom prst="rect">
+            <a:avLst/>
+          </a:prstGeom>
+          <a:noFill/>
+          <a:ln/>
+        </p:spPr>
+        <p:txBody>
+          <a:bodyPr wrap="square" lIns="0" tIns="0" rIns="0" bIns="0" rtlCol="0" anchor="ctr"/>
+          <a:lstStyle/>
+          <a:p>
+            <a:pPr indent="0" marL="0">
+              <a:buNone/>
+            </a:pPr>
+            <a:r>
+              <a:rPr lang="en-US" sz="950" b="1" dirty="0">
+                <a:solidFill>
+                  <a:srgbClr val="0068B7"/>
+                </a:solidFill>
+                <a:latin typeface="Aptos" pitchFamily="34" charset="0"/>
+                <a:ea typeface="Aptos" pitchFamily="34" charset="-122"/>
+                <a:cs typeface="Aptos" pitchFamily="34" charset="-120"/>
+              </a:rPr>
+              <a:t>Avoid duplication</a:t>
+            </a:r>
+            <a:endParaRPr lang="en-US" sz="950" dirty="0"/>
+          </a:p>
+        </p:txBody>
+      </p:sp>
+      <p:sp>
+        <p:nvSpPr>
+          <p:cNvPr id="14" name="Text 12"/>
+          <p:cNvSpPr/>
+          <p:nvPr/>
+        </p:nvSpPr>
+        <p:spPr>
+          <a:xfrm>
+            <a:off x="8211312" y="4233672"/>
+            <a:ext cx="2734056" cy="941832"/>
+          </a:xfrm>
+          <a:prstGeom prst="rect">
+            <a:avLst/>
+          </a:prstGeom>
+          <a:noFill/>
+          <a:ln/>
+        </p:spPr>
+        <p:txBody>
+          <a:bodyPr wrap="square" lIns="0" tIns="0" rIns="0" bIns="0" rtlCol="0" anchor="t">
+            <a:normAutofit/>
+          </a:bodyPr>
+          <a:lstStyle/>
+          <a:p>
+            <a:pPr indent="0" marL="0">
+              <a:buNone/>
+            </a:pPr>
+            <a:r>
+              <a:rPr lang="en-US" sz="1250" dirty="0">
+                <a:solidFill>
+                  <a:srgbClr val="17364A"/>
+                </a:solidFill>
+                <a:latin typeface="Aptos" pitchFamily="34" charset="0"/>
+                <a:ea typeface="Aptos" pitchFamily="34" charset="-122"/>
+                <a:cs typeface="Aptos" pitchFamily="34" charset="-120"/>
+              </a:rPr>
+              <a:t>If your department already has a strong equivalent tool, adapt or use the existing process instead of recreating it.</a:t>
+            </a:r>
+            <a:endParaRPr lang="en-US" sz="1250" dirty="0"/>
           </a:p>
         </p:txBody>
       </p:sp>
@@ -6731,7 +12110,32 @@
       </p:sp>
       <p:sp>
         <p:nvSpPr>
-          <p:cNvPr id="3" name="Text 1"/>
+          <p:cNvPr id="3" name="Shape 1"/>
+          <p:cNvSpPr/>
+          <p:nvPr/>
+        </p:nvSpPr>
+        <p:spPr>
+          <a:xfrm>
+            <a:off x="0" y="164592"/>
+            <a:ext cx="146304" cy="6693408"/>
+          </a:xfrm>
+          <a:prstGeom prst="rect">
+            <a:avLst/>
+          </a:prstGeom>
+          <a:solidFill>
+            <a:srgbClr val="2F8A28"/>
+          </a:solidFill>
+          <a:ln w="12700">
+            <a:solidFill>
+              <a:srgbClr val="2F8A28"/>
+            </a:solidFill>
+            <a:prstDash val="solid"/>
+          </a:ln>
+        </p:spPr>
+      </p:sp>
+      <p:sp>
+        <p:nvSpPr>
+          <p:cNvPr id="4" name="Text 2"/>
           <p:cNvSpPr/>
           <p:nvPr/>
         </p:nvSpPr>
@@ -6770,7 +12174,7 @@
       </p:sp>
       <p:sp>
         <p:nvSpPr>
-          <p:cNvPr id="4" name="Text 2"/>
+          <p:cNvPr id="5" name="Text 3"/>
           <p:cNvSpPr/>
           <p:nvPr/>
         </p:nvSpPr>
@@ -6809,7 +12213,7 @@
       </p:sp>
       <p:sp>
         <p:nvSpPr>
-          <p:cNvPr id="5" name="Text 3"/>
+          <p:cNvPr id="6" name="Text 4"/>
           <p:cNvSpPr/>
           <p:nvPr/>
         </p:nvSpPr>
@@ -6848,13 +12252,77 @@
       </p:sp>
       <p:sp>
         <p:nvSpPr>
-          <p:cNvPr id="6" name="Text 4"/>
+          <p:cNvPr id="7" name="Shape 5"/>
           <p:cNvSpPr/>
           <p:nvPr/>
         </p:nvSpPr>
         <p:spPr>
           <a:xfrm>
             <a:off x="640080" y="658368"/>
+            <a:ext cx="420624" cy="420624"/>
+          </a:xfrm>
+          <a:prstGeom prst="ellipse">
+            <a:avLst/>
+          </a:prstGeom>
+          <a:solidFill>
+            <a:srgbClr val="0068B7"/>
+          </a:solidFill>
+          <a:ln w="12700">
+            <a:solidFill>
+              <a:srgbClr val="0068B7"/>
+            </a:solidFill>
+            <a:prstDash val="solid"/>
+          </a:ln>
+        </p:spPr>
+      </p:sp>
+      <p:sp>
+        <p:nvSpPr>
+          <p:cNvPr id="8" name="Text 6"/>
+          <p:cNvSpPr/>
+          <p:nvPr/>
+        </p:nvSpPr>
+        <p:spPr>
+          <a:xfrm>
+            <a:off x="640080" y="731520"/>
+            <a:ext cx="420624" cy="164592"/>
+          </a:xfrm>
+          <a:prstGeom prst="rect">
+            <a:avLst/>
+          </a:prstGeom>
+          <a:noFill/>
+          <a:ln/>
+        </p:spPr>
+        <p:txBody>
+          <a:bodyPr wrap="square" lIns="0" tIns="0" rIns="0" bIns="0" rtlCol="0" anchor="ctr"/>
+          <a:lstStyle/>
+          <a:p>
+            <a:pPr algn="ctr" indent="0" marL="0">
+              <a:buNone/>
+            </a:pPr>
+            <a:r>
+              <a:rPr lang="en-US" sz="1100" b="1" dirty="0">
+                <a:solidFill>
+                  <a:srgbClr val="FFFFFF"/>
+                </a:solidFill>
+                <a:latin typeface="Aptos" pitchFamily="34" charset="0"/>
+                <a:ea typeface="Aptos" pitchFamily="34" charset="-122"/>
+                <a:cs typeface="Aptos" pitchFamily="34" charset="-120"/>
+              </a:rPr>
+              <a:t>1</a:t>
+            </a:r>
+            <a:endParaRPr lang="en-US" sz="1100" dirty="0"/>
+          </a:p>
+        </p:txBody>
+      </p:sp>
+      <p:sp>
+        <p:nvSpPr>
+          <p:cNvPr id="9" name="Text 7"/>
+          <p:cNvSpPr/>
+          <p:nvPr/>
+        </p:nvSpPr>
+        <p:spPr>
+          <a:xfrm>
+            <a:off x="640080" y="621792"/>
             <a:ext cx="10881360" cy="566928"/>
           </a:xfrm>
           <a:prstGeom prst="rect">
@@ -6881,7 +12349,7 @@
                 <a:ea typeface="Aptos Display" pitchFamily="34" charset="-122"/>
                 <a:cs typeface="Aptos Display" pitchFamily="34" charset="-120"/>
               </a:rPr>
-              <a:t>Definitions</a:t>
+              <a:t>Learning Objectives</a:t>
             </a:r>
             <a:endParaRPr lang="en-US" sz="2700" dirty="0"/>
           </a:p>
@@ -6889,14 +12357,14 @@
       </p:sp>
       <p:sp>
         <p:nvSpPr>
-          <p:cNvPr id="7" name="Text 5"/>
-          <p:cNvSpPr/>
-          <p:nvPr/>
-        </p:nvSpPr>
-        <p:spPr>
-          <a:xfrm>
-            <a:off x="822960" y="1325880"/>
-            <a:ext cx="10378440" cy="4800600"/>
+          <p:cNvPr id="10" name="Text 8"/>
+          <p:cNvSpPr/>
+          <p:nvPr/>
+        </p:nvSpPr>
+        <p:spPr>
+          <a:xfrm>
+            <a:off x="868680" y="1417320"/>
+            <a:ext cx="6675120" cy="4434840"/>
           </a:xfrm>
           <a:prstGeom prst="rect">
             <a:avLst/>
@@ -6911,7 +12379,7 @@
           <a:lstStyle/>
           <a:p>
             <a:r>
-              <a:rPr lang="en-US" sz="1450" dirty="0">
+              <a:rPr lang="en-US" sz="1700" dirty="0">
                 <a:solidFill>
                   <a:srgbClr val="17364A"/>
                 </a:solidFill>
@@ -6919,13 +12387,13 @@
                 <a:ea typeface="Aptos" pitchFamily="34" charset="-122"/>
                 <a:cs typeface="Aptos" pitchFamily="34" charset="-120"/>
               </a:rPr>
-              <a:t>Decision right: The authority to approve, deny, modify, pause, or escalate an AI use case or operational decision.</a:t>
-            </a:r>
-            <a:endParaRPr lang="en-US" sz="1450" dirty="0"/>
-          </a:p>
-          <a:p>
-            <a:r>
-              <a:rPr lang="en-US" sz="1450" dirty="0">
+              <a:t>Explain the purpose of public comment, social listening, and community feedback analysis in public health AI.</a:t>
+            </a:r>
+            <a:endParaRPr lang="en-US" sz="1700" dirty="0"/>
+          </a:p>
+          <a:p>
+            <a:r>
+              <a:rPr lang="en-US" sz="1700" dirty="0">
                 <a:solidFill>
                   <a:srgbClr val="17364A"/>
                 </a:solidFill>
@@ -6933,13 +12401,13 @@
                 <a:ea typeface="Aptos" pitchFamily="34" charset="-122"/>
                 <a:cs typeface="Aptos" pitchFamily="34" charset="-120"/>
               </a:rPr>
-              <a:t>Evidence artifact: A document, log, checklist, test result, approval record, or review note that demonstrates responsible AI practice.</a:t>
-            </a:r>
-            <a:endParaRPr lang="en-US" sz="1450" dirty="0"/>
-          </a:p>
-          <a:p>
-            <a:r>
-              <a:rPr lang="en-US" sz="1450" dirty="0">
+              <a:t>Identify the roles, decisions, risks, and documentation needed for the topic.</a:t>
+            </a:r>
+            <a:endParaRPr lang="en-US" sz="1700" dirty="0"/>
+          </a:p>
+          <a:p>
+            <a:r>
+              <a:rPr lang="en-US" sz="1700" dirty="0">
                 <a:solidFill>
                   <a:srgbClr val="17364A"/>
                 </a:solidFill>
@@ -6947,13 +12415,13 @@
                 <a:ea typeface="Aptos" pitchFamily="34" charset="-122"/>
                 <a:cs typeface="Aptos" pitchFamily="34" charset="-120"/>
               </a:rPr>
-              <a:t>Escalation pathway: A defined route for raising concerns to the appropriate reviewer or decision-maker.</a:t>
-            </a:r>
-            <a:endParaRPr lang="en-US" sz="1450" dirty="0"/>
-          </a:p>
-          <a:p>
-            <a:r>
-              <a:rPr lang="en-US" sz="1450" dirty="0">
+              <a:t>Apply the topic to a real or realistic public health workflow or decision.</a:t>
+            </a:r>
+            <a:endParaRPr lang="en-US" sz="1700" dirty="0"/>
+          </a:p>
+          <a:p>
+            <a:r>
+              <a:rPr lang="en-US" sz="1700" dirty="0">
                 <a:solidFill>
                   <a:srgbClr val="17364A"/>
                 </a:solidFill>
@@ -6961,13 +12429,106 @@
                 <a:ea typeface="Aptos" pitchFamily="34" charset="-122"/>
                 <a:cs typeface="Aptos" pitchFamily="34" charset="-120"/>
               </a:rPr>
-              <a:t>Accountability owner: The person or role responsible for ensuring that an AI use case is governed, monitored, and corrected when needed.</a:t>
-            </a:r>
-            <a:endParaRPr lang="en-US" sz="1450" dirty="0"/>
-          </a:p>
-          <a:p>
-            <a:r>
-              <a:rPr lang="en-US" sz="1450" dirty="0">
+              <a:t>Recognize equity, privacy, security, legal, operational, and public trust implications.</a:t>
+            </a:r>
+            <a:endParaRPr lang="en-US" sz="1700" dirty="0"/>
+          </a:p>
+        </p:txBody>
+      </p:sp>
+      <p:sp>
+        <p:nvSpPr>
+          <p:cNvPr id="11" name="Shape 9"/>
+          <p:cNvSpPr/>
+          <p:nvPr/>
+        </p:nvSpPr>
+        <p:spPr>
+          <a:xfrm>
+            <a:off x="7909560" y="1417320"/>
+            <a:ext cx="3154680" cy="1828800"/>
+          </a:xfrm>
+          <a:prstGeom prst="roundRect">
+            <a:avLst>
+              <a:gd name="adj" fmla="val 6000"/>
+            </a:avLst>
+          </a:prstGeom>
+          <a:solidFill>
+            <a:srgbClr val="EEF8ED"/>
+          </a:solidFill>
+          <a:ln w="12700">
+            <a:solidFill>
+              <a:srgbClr val="B9D7E6"/>
+            </a:solidFill>
+            <a:prstDash val="solid"/>
+          </a:ln>
+        </p:spPr>
+      </p:sp>
+      <p:sp>
+        <p:nvSpPr>
+          <p:cNvPr id="12" name="Text 10"/>
+          <p:cNvSpPr/>
+          <p:nvPr/>
+        </p:nvSpPr>
+        <p:spPr>
+          <a:xfrm>
+            <a:off x="8074152" y="1563624"/>
+            <a:ext cx="2825496" cy="201168"/>
+          </a:xfrm>
+          <a:prstGeom prst="rect">
+            <a:avLst/>
+          </a:prstGeom>
+          <a:noFill/>
+          <a:ln/>
+        </p:spPr>
+        <p:txBody>
+          <a:bodyPr wrap="square" lIns="0" tIns="0" rIns="0" bIns="0" rtlCol="0" anchor="ctr"/>
+          <a:lstStyle/>
+          <a:p>
+            <a:pPr indent="0" marL="0">
+              <a:buNone/>
+            </a:pPr>
+            <a:r>
+              <a:rPr lang="en-US" sz="950" b="1" dirty="0">
+                <a:solidFill>
+                  <a:srgbClr val="0068B7"/>
+                </a:solidFill>
+                <a:latin typeface="Aptos" pitchFamily="34" charset="0"/>
+                <a:ea typeface="Aptos" pitchFamily="34" charset="-122"/>
+                <a:cs typeface="Aptos" pitchFamily="34" charset="-120"/>
+              </a:rPr>
+              <a:t>Key idea</a:t>
+            </a:r>
+            <a:endParaRPr lang="en-US" sz="950" dirty="0"/>
+          </a:p>
+        </p:txBody>
+      </p:sp>
+      <p:sp>
+        <p:nvSpPr>
+          <p:cNvPr id="13" name="Text 11"/>
+          <p:cNvSpPr/>
+          <p:nvPr/>
+        </p:nvSpPr>
+        <p:spPr>
+          <a:xfrm>
+            <a:off x="8074152" y="1856232"/>
+            <a:ext cx="2825496" cy="1261872"/>
+          </a:xfrm>
+          <a:prstGeom prst="rect">
+            <a:avLst/>
+          </a:prstGeom>
+          <a:noFill/>
+          <a:ln/>
+        </p:spPr>
+        <p:txBody>
+          <a:bodyPr wrap="square" lIns="0" tIns="0" rIns="0" bIns="0" rtlCol="0" anchor="t">
+            <a:normAutofit/>
+          </a:bodyPr>
+          <a:lstStyle/>
+          <a:p>
+            <a:pPr indent="0" marL="0">
+              <a:buNone/>
+            </a:pPr>
+            <a:r>
+              <a:rPr lang="en-US" sz="1250" dirty="0">
                 <a:solidFill>
                   <a:srgbClr val="17364A"/>
                 </a:solidFill>
@@ -6975,9 +12536,116 @@
                 <a:ea typeface="Aptos" pitchFamily="34" charset="-122"/>
                 <a:cs typeface="Aptos" pitchFamily="34" charset="-120"/>
               </a:rPr>
-              <a:t>Operational safeguard: A procedure, control, or review step that reduces risk during day-to-day use.</a:t>
-            </a:r>
-            <a:endParaRPr lang="en-US" sz="1450" dirty="0"/>
+              <a:t>Explain the purpose of public comment, social listening, and community feedback analysis in public health AI.</a:t>
+            </a:r>
+            <a:endParaRPr lang="en-US" sz="1250" dirty="0"/>
+          </a:p>
+        </p:txBody>
+      </p:sp>
+      <p:sp>
+        <p:nvSpPr>
+          <p:cNvPr id="14" name="Shape 12"/>
+          <p:cNvSpPr/>
+          <p:nvPr/>
+        </p:nvSpPr>
+        <p:spPr>
+          <a:xfrm>
+            <a:off x="7909560" y="3520440"/>
+            <a:ext cx="3154680" cy="1737360"/>
+          </a:xfrm>
+          <a:prstGeom prst="roundRect">
+            <a:avLst>
+              <a:gd name="adj" fmla="val 6316"/>
+            </a:avLst>
+          </a:prstGeom>
+          <a:solidFill>
+            <a:srgbClr val="EAF6F8"/>
+          </a:solidFill>
+          <a:ln w="12700">
+            <a:solidFill>
+              <a:srgbClr val="B9D7E6"/>
+            </a:solidFill>
+            <a:prstDash val="solid"/>
+          </a:ln>
+        </p:spPr>
+      </p:sp>
+      <p:sp>
+        <p:nvSpPr>
+          <p:cNvPr id="15" name="Text 13"/>
+          <p:cNvSpPr/>
+          <p:nvPr/>
+        </p:nvSpPr>
+        <p:spPr>
+          <a:xfrm>
+            <a:off x="8074152" y="3666744"/>
+            <a:ext cx="2825496" cy="201168"/>
+          </a:xfrm>
+          <a:prstGeom prst="rect">
+            <a:avLst/>
+          </a:prstGeom>
+          <a:noFill/>
+          <a:ln/>
+        </p:spPr>
+        <p:txBody>
+          <a:bodyPr wrap="square" lIns="0" tIns="0" rIns="0" bIns="0" rtlCol="0" anchor="ctr"/>
+          <a:lstStyle/>
+          <a:p>
+            <a:pPr indent="0" marL="0">
+              <a:buNone/>
+            </a:pPr>
+            <a:r>
+              <a:rPr lang="en-US" sz="950" b="1" dirty="0">
+                <a:solidFill>
+                  <a:srgbClr val="0068B7"/>
+                </a:solidFill>
+                <a:latin typeface="Aptos" pitchFamily="34" charset="0"/>
+                <a:ea typeface="Aptos" pitchFamily="34" charset="-122"/>
+                <a:cs typeface="Aptos" pitchFamily="34" charset="-120"/>
+              </a:rPr>
+              <a:t>Use this for</a:t>
+            </a:r>
+            <a:endParaRPr lang="en-US" sz="950" dirty="0"/>
+          </a:p>
+        </p:txBody>
+      </p:sp>
+      <p:sp>
+        <p:nvSpPr>
+          <p:cNvPr id="16" name="Text 14"/>
+          <p:cNvSpPr/>
+          <p:nvPr/>
+        </p:nvSpPr>
+        <p:spPr>
+          <a:xfrm>
+            <a:off x="8074152" y="3959352"/>
+            <a:ext cx="2825496" cy="1170432"/>
+          </a:xfrm>
+          <a:prstGeom prst="rect">
+            <a:avLst/>
+          </a:prstGeom>
+          <a:noFill/>
+          <a:ln/>
+        </p:spPr>
+        <p:txBody>
+          <a:bodyPr wrap="square" lIns="0" tIns="0" rIns="0" bIns="0" rtlCol="0" anchor="t">
+            <a:normAutofit/>
+          </a:bodyPr>
+          <a:lstStyle/>
+          <a:p>
+            <a:pPr indent="0" marL="0">
+              <a:buNone/>
+            </a:pPr>
+            <a:r>
+              <a:rPr lang="en-US" sz="1250" dirty="0">
+                <a:solidFill>
+                  <a:srgbClr val="17364A"/>
+                </a:solidFill>
+                <a:latin typeface="Aptos" pitchFamily="34" charset="0"/>
+                <a:ea typeface="Aptos" pitchFamily="34" charset="-122"/>
+                <a:cs typeface="Aptos" pitchFamily="34" charset="-120"/>
+              </a:rPr>
+              <a:t>Connect the concept to public health decisions, safeguards, documentation, or implementation work.</a:t>
+            </a:r>
+            <a:endParaRPr lang="en-US" sz="1250" dirty="0"/>
           </a:p>
         </p:txBody>
       </p:sp>
@@ -7040,7 +12708,32 @@
       </p:sp>
       <p:sp>
         <p:nvSpPr>
-          <p:cNvPr id="3" name="Text 1"/>
+          <p:cNvPr id="3" name="Shape 1"/>
+          <p:cNvSpPr/>
+          <p:nvPr/>
+        </p:nvSpPr>
+        <p:spPr>
+          <a:xfrm>
+            <a:off x="0" y="164592"/>
+            <a:ext cx="146304" cy="6693408"/>
+          </a:xfrm>
+          <a:prstGeom prst="rect">
+            <a:avLst/>
+          </a:prstGeom>
+          <a:solidFill>
+            <a:srgbClr val="2F8A28"/>
+          </a:solidFill>
+          <a:ln w="12700">
+            <a:solidFill>
+              <a:srgbClr val="2F8A28"/>
+            </a:solidFill>
+            <a:prstDash val="solid"/>
+          </a:ln>
+        </p:spPr>
+      </p:sp>
+      <p:sp>
+        <p:nvSpPr>
+          <p:cNvPr id="4" name="Text 2"/>
           <p:cNvSpPr/>
           <p:nvPr/>
         </p:nvSpPr>
@@ -7079,7 +12772,7 @@
       </p:sp>
       <p:sp>
         <p:nvSpPr>
-          <p:cNvPr id="4" name="Text 2"/>
+          <p:cNvPr id="5" name="Text 3"/>
           <p:cNvSpPr/>
           <p:nvPr/>
         </p:nvSpPr>
@@ -7118,7 +12811,7 @@
       </p:sp>
       <p:sp>
         <p:nvSpPr>
-          <p:cNvPr id="5" name="Text 3"/>
+          <p:cNvPr id="6" name="Text 4"/>
           <p:cNvSpPr/>
           <p:nvPr/>
         </p:nvSpPr>
@@ -7157,13 +12850,77 @@
       </p:sp>
       <p:sp>
         <p:nvSpPr>
-          <p:cNvPr id="6" name="Text 4"/>
+          <p:cNvPr id="7" name="Shape 5"/>
           <p:cNvSpPr/>
           <p:nvPr/>
         </p:nvSpPr>
         <p:spPr>
           <a:xfrm>
             <a:off x="640080" y="658368"/>
+            <a:ext cx="420624" cy="420624"/>
+          </a:xfrm>
+          <a:prstGeom prst="ellipse">
+            <a:avLst/>
+          </a:prstGeom>
+          <a:solidFill>
+            <a:srgbClr val="0068B7"/>
+          </a:solidFill>
+          <a:ln w="12700">
+            <a:solidFill>
+              <a:srgbClr val="0068B7"/>
+            </a:solidFill>
+            <a:prstDash val="solid"/>
+          </a:ln>
+        </p:spPr>
+      </p:sp>
+      <p:sp>
+        <p:nvSpPr>
+          <p:cNvPr id="8" name="Text 6"/>
+          <p:cNvSpPr/>
+          <p:nvPr/>
+        </p:nvSpPr>
+        <p:spPr>
+          <a:xfrm>
+            <a:off x="640080" y="731520"/>
+            <a:ext cx="420624" cy="164592"/>
+          </a:xfrm>
+          <a:prstGeom prst="rect">
+            <a:avLst/>
+          </a:prstGeom>
+          <a:noFill/>
+          <a:ln/>
+        </p:spPr>
+        <p:txBody>
+          <a:bodyPr wrap="square" lIns="0" tIns="0" rIns="0" bIns="0" rtlCol="0" anchor="ctr"/>
+          <a:lstStyle/>
+          <a:p>
+            <a:pPr algn="ctr" indent="0" marL="0">
+              <a:buNone/>
+            </a:pPr>
+            <a:r>
+              <a:rPr lang="en-US" sz="1100" b="1" dirty="0">
+                <a:solidFill>
+                  <a:srgbClr val="FFFFFF"/>
+                </a:solidFill>
+                <a:latin typeface="Aptos" pitchFamily="34" charset="0"/>
+                <a:ea typeface="Aptos" pitchFamily="34" charset="-122"/>
+                <a:cs typeface="Aptos" pitchFamily="34" charset="-120"/>
+              </a:rPr>
+              <a:t>2</a:t>
+            </a:r>
+            <a:endParaRPr lang="en-US" sz="1100" dirty="0"/>
+          </a:p>
+        </p:txBody>
+      </p:sp>
+      <p:sp>
+        <p:nvSpPr>
+          <p:cNvPr id="9" name="Text 7"/>
+          <p:cNvSpPr/>
+          <p:nvPr/>
+        </p:nvSpPr>
+        <p:spPr>
+          <a:xfrm>
+            <a:off x="640080" y="621792"/>
             <a:ext cx="10881360" cy="566928"/>
           </a:xfrm>
           <a:prstGeom prst="rect">
@@ -7190,7 +12947,7 @@
                 <a:ea typeface="Aptos Display" pitchFamily="34" charset="-122"/>
                 <a:cs typeface="Aptos Display" pitchFamily="34" charset="-120"/>
               </a:rPr>
-              <a:t>Jurisdiction and Agency Policy Note</a:t>
+              <a:t>Module Overview</a:t>
             </a:r>
             <a:endParaRPr lang="en-US" sz="2700" dirty="0"/>
           </a:p>
@@ -7198,32 +12955,178 @@
       </p:sp>
       <p:sp>
         <p:nvSpPr>
-          <p:cNvPr id="7" name="Text 5"/>
-          <p:cNvSpPr/>
-          <p:nvPr/>
-        </p:nvSpPr>
-        <p:spPr>
-          <a:xfrm>
-            <a:off x="822960" y="1325880"/>
-            <a:ext cx="10378440" cy="4800600"/>
-          </a:xfrm>
-          <a:prstGeom prst="rect">
-            <a:avLst/>
-          </a:prstGeom>
-          <a:noFill/>
-          <a:ln/>
-        </p:spPr>
-        <p:txBody>
-          <a:bodyPr wrap="square" lIns="1016" tIns="1016" rIns="1016" bIns="1016" rtlCol="0" anchor="t">
+          <p:cNvPr id="10" name="Text 8"/>
+          <p:cNvSpPr/>
+          <p:nvPr/>
+        </p:nvSpPr>
+        <p:spPr>
+          <a:xfrm>
+            <a:off x="868680" y="1417320"/>
+            <a:ext cx="6675120" cy="4434840"/>
+          </a:xfrm>
+          <a:prstGeom prst="rect">
+            <a:avLst/>
+          </a:prstGeom>
+          <a:noFill/>
+          <a:ln/>
+        </p:spPr>
+        <p:txBody>
+          <a:bodyPr wrap="square" lIns="635" tIns="635" rIns="635" bIns="635" rtlCol="0" anchor="t">
             <a:normAutofit/>
           </a:bodyPr>
           <a:lstStyle/>
           <a:p>
+            <a:r>
+              <a:rPr lang="en-US" sz="1700" dirty="0">
+                <a:solidFill>
+                  <a:srgbClr val="17364A"/>
+                </a:solidFill>
+                <a:latin typeface="Aptos" pitchFamily="34" charset="0"/>
+                <a:ea typeface="Aptos" pitchFamily="34" charset="-122"/>
+                <a:cs typeface="Aptos" pitchFamily="34" charset="-120"/>
+              </a:rPr>
+              <a:t>This module focuses on ethical analysis of public comments, social listening data, and community feedback.</a:t>
+            </a:r>
+            <a:endParaRPr lang="en-US" sz="1700" dirty="0"/>
+          </a:p>
+          <a:p>
+            <a:r>
+              <a:rPr lang="en-US" sz="1700" dirty="0">
+                <a:solidFill>
+                  <a:srgbClr val="17364A"/>
+                </a:solidFill>
+                <a:latin typeface="Aptos" pitchFamily="34" charset="0"/>
+                <a:ea typeface="Aptos" pitchFamily="34" charset="-122"/>
+                <a:cs typeface="Aptos" pitchFamily="34" charset="-120"/>
+              </a:rPr>
+              <a:t>It is designed for public health staff who must translate responsible AI principles into repeatable decisions, documents,.</a:t>
+            </a:r>
+            <a:endParaRPr lang="en-US" sz="1700" dirty="0"/>
+          </a:p>
+          <a:p>
+            <a:r>
+              <a:rPr lang="en-US" sz="1700" dirty="0">
+                <a:solidFill>
+                  <a:srgbClr val="17364A"/>
+                </a:solidFill>
+                <a:latin typeface="Aptos" pitchFamily="34" charset="0"/>
+                <a:ea typeface="Aptos" pitchFamily="34" charset="-122"/>
+                <a:cs typeface="Aptos" pitchFamily="34" charset="-120"/>
+              </a:rPr>
+              <a:t>The module helps learners move beyond general awareness by producing a practical artifact that can be used in governance.</a:t>
+            </a:r>
+            <a:endParaRPr lang="en-US" sz="1700" dirty="0"/>
+          </a:p>
+          <a:p>
+            <a:r>
+              <a:rPr lang="en-US" sz="1700" dirty="0">
+                <a:solidFill>
+                  <a:srgbClr val="17364A"/>
+                </a:solidFill>
+                <a:latin typeface="Aptos" pitchFamily="34" charset="0"/>
+                <a:ea typeface="Aptos" pitchFamily="34" charset="-122"/>
+                <a:cs typeface="Aptos" pitchFamily="34" charset="-120"/>
+              </a:rPr>
+              <a:t>It emphasizes paragraph-based reasoning, defined responsibilities, and documentation that can withstand public health,.</a:t>
+            </a:r>
+            <a:endParaRPr lang="en-US" sz="1700" dirty="0"/>
+          </a:p>
+        </p:txBody>
+      </p:sp>
+      <p:sp>
+        <p:nvSpPr>
+          <p:cNvPr id="11" name="Shape 9"/>
+          <p:cNvSpPr/>
+          <p:nvPr/>
+        </p:nvSpPr>
+        <p:spPr>
+          <a:xfrm>
+            <a:off x="7909560" y="1417320"/>
+            <a:ext cx="3154680" cy="1828800"/>
+          </a:xfrm>
+          <a:prstGeom prst="roundRect">
+            <a:avLst>
+              <a:gd name="adj" fmla="val 6000"/>
+            </a:avLst>
+          </a:prstGeom>
+          <a:solidFill>
+            <a:srgbClr val="EEF8ED"/>
+          </a:solidFill>
+          <a:ln w="12700">
+            <a:solidFill>
+              <a:srgbClr val="B9D7E6"/>
+            </a:solidFill>
+            <a:prstDash val="solid"/>
+          </a:ln>
+        </p:spPr>
+      </p:sp>
+      <p:sp>
+        <p:nvSpPr>
+          <p:cNvPr id="12" name="Text 10"/>
+          <p:cNvSpPr/>
+          <p:nvPr/>
+        </p:nvSpPr>
+        <p:spPr>
+          <a:xfrm>
+            <a:off x="8074152" y="1563624"/>
+            <a:ext cx="2825496" cy="201168"/>
+          </a:xfrm>
+          <a:prstGeom prst="rect">
+            <a:avLst/>
+          </a:prstGeom>
+          <a:noFill/>
+          <a:ln/>
+        </p:spPr>
+        <p:txBody>
+          <a:bodyPr wrap="square" lIns="0" tIns="0" rIns="0" bIns="0" rtlCol="0" anchor="ctr"/>
+          <a:lstStyle/>
+          <a:p>
             <a:pPr indent="0" marL="0">
               <a:buNone/>
             </a:pPr>
             <a:r>
-              <a:rPr lang="en-US" sz="1420" dirty="0">
+              <a:rPr lang="en-US" sz="950" b="1" dirty="0">
+                <a:solidFill>
+                  <a:srgbClr val="0068B7"/>
+                </a:solidFill>
+                <a:latin typeface="Aptos" pitchFamily="34" charset="0"/>
+                <a:ea typeface="Aptos" pitchFamily="34" charset="-122"/>
+                <a:cs typeface="Aptos" pitchFamily="34" charset="-120"/>
+              </a:rPr>
+              <a:t>Key idea</a:t>
+            </a:r>
+            <a:endParaRPr lang="en-US" sz="950" dirty="0"/>
+          </a:p>
+        </p:txBody>
+      </p:sp>
+      <p:sp>
+        <p:nvSpPr>
+          <p:cNvPr id="13" name="Text 11"/>
+          <p:cNvSpPr/>
+          <p:nvPr/>
+        </p:nvSpPr>
+        <p:spPr>
+          <a:xfrm>
+            <a:off x="8074152" y="1856232"/>
+            <a:ext cx="2825496" cy="1261872"/>
+          </a:xfrm>
+          <a:prstGeom prst="rect">
+            <a:avLst/>
+          </a:prstGeom>
+          <a:noFill/>
+          <a:ln/>
+        </p:spPr>
+        <p:txBody>
+          <a:bodyPr wrap="square" lIns="0" tIns="0" rIns="0" bIns="0" rtlCol="0" anchor="t">
+            <a:normAutofit/>
+          </a:bodyPr>
+          <a:lstStyle/>
+          <a:p>
+            <a:pPr indent="0" marL="0">
+              <a:buNone/>
+            </a:pPr>
+            <a:r>
+              <a:rPr lang="en-US" sz="1250" dirty="0">
                 <a:solidFill>
                   <a:srgbClr val="17364A"/>
                 </a:solidFill>
@@ -7231,9 +13134,116 @@
                 <a:ea typeface="Aptos" pitchFamily="34" charset="-122"/>
                 <a:cs typeface="Aptos" pitchFamily="34" charset="-120"/>
               </a:rPr>
-              <a:t>This module provides national-level training guidance for public health agencies and partners. It is not legal advice and does not replace review by agency legal counsel, privacy officers, procurement officials, civil rights staff, records officers, or other authorized decision-makers. Requirements may vary by state, locality, territory, Tribe, agency, funding source, data-sharing agreement, emergency authority, and organizational policy. Learners should use this module to identify the issues that require review and should confirm applicable requirements before approving, procuring, deploying, or publicly communicating about AI-supported work.</a:t>
-            </a:r>
-            <a:endParaRPr lang="en-US" sz="1420" dirty="0"/>
+              <a:t>This module focuses on ethical analysis of public comments, social listening data, and community feedback.</a:t>
+            </a:r>
+            <a:endParaRPr lang="en-US" sz="1250" dirty="0"/>
+          </a:p>
+        </p:txBody>
+      </p:sp>
+      <p:sp>
+        <p:nvSpPr>
+          <p:cNvPr id="14" name="Shape 12"/>
+          <p:cNvSpPr/>
+          <p:nvPr/>
+        </p:nvSpPr>
+        <p:spPr>
+          <a:xfrm>
+            <a:off x="7909560" y="3520440"/>
+            <a:ext cx="3154680" cy="1737360"/>
+          </a:xfrm>
+          <a:prstGeom prst="roundRect">
+            <a:avLst>
+              <a:gd name="adj" fmla="val 6316"/>
+            </a:avLst>
+          </a:prstGeom>
+          <a:solidFill>
+            <a:srgbClr val="EAF6F8"/>
+          </a:solidFill>
+          <a:ln w="12700">
+            <a:solidFill>
+              <a:srgbClr val="B9D7E6"/>
+            </a:solidFill>
+            <a:prstDash val="solid"/>
+          </a:ln>
+        </p:spPr>
+      </p:sp>
+      <p:sp>
+        <p:nvSpPr>
+          <p:cNvPr id="15" name="Text 13"/>
+          <p:cNvSpPr/>
+          <p:nvPr/>
+        </p:nvSpPr>
+        <p:spPr>
+          <a:xfrm>
+            <a:off x="8074152" y="3666744"/>
+            <a:ext cx="2825496" cy="201168"/>
+          </a:xfrm>
+          <a:prstGeom prst="rect">
+            <a:avLst/>
+          </a:prstGeom>
+          <a:noFill/>
+          <a:ln/>
+        </p:spPr>
+        <p:txBody>
+          <a:bodyPr wrap="square" lIns="0" tIns="0" rIns="0" bIns="0" rtlCol="0" anchor="ctr"/>
+          <a:lstStyle/>
+          <a:p>
+            <a:pPr indent="0" marL="0">
+              <a:buNone/>
+            </a:pPr>
+            <a:r>
+              <a:rPr lang="en-US" sz="950" b="1" dirty="0">
+                <a:solidFill>
+                  <a:srgbClr val="0068B7"/>
+                </a:solidFill>
+                <a:latin typeface="Aptos" pitchFamily="34" charset="0"/>
+                <a:ea typeface="Aptos" pitchFamily="34" charset="-122"/>
+                <a:cs typeface="Aptos" pitchFamily="34" charset="-120"/>
+              </a:rPr>
+              <a:t>Use this for</a:t>
+            </a:r>
+            <a:endParaRPr lang="en-US" sz="950" dirty="0"/>
+          </a:p>
+        </p:txBody>
+      </p:sp>
+      <p:sp>
+        <p:nvSpPr>
+          <p:cNvPr id="16" name="Text 14"/>
+          <p:cNvSpPr/>
+          <p:nvPr/>
+        </p:nvSpPr>
+        <p:spPr>
+          <a:xfrm>
+            <a:off x="8074152" y="3959352"/>
+            <a:ext cx="2825496" cy="1170432"/>
+          </a:xfrm>
+          <a:prstGeom prst="rect">
+            <a:avLst/>
+          </a:prstGeom>
+          <a:noFill/>
+          <a:ln/>
+        </p:spPr>
+        <p:txBody>
+          <a:bodyPr wrap="square" lIns="0" tIns="0" rIns="0" bIns="0" rtlCol="0" anchor="t">
+            <a:normAutofit/>
+          </a:bodyPr>
+          <a:lstStyle/>
+          <a:p>
+            <a:pPr indent="0" marL="0">
+              <a:buNone/>
+            </a:pPr>
+            <a:r>
+              <a:rPr lang="en-US" sz="1250" dirty="0">
+                <a:solidFill>
+                  <a:srgbClr val="17364A"/>
+                </a:solidFill>
+                <a:latin typeface="Aptos" pitchFamily="34" charset="0"/>
+                <a:ea typeface="Aptos" pitchFamily="34" charset="-122"/>
+                <a:cs typeface="Aptos" pitchFamily="34" charset="-120"/>
+              </a:rPr>
+              <a:t>Connect the concept to public health decisions, safeguards, documentation, or implementation work.</a:t>
+            </a:r>
+            <a:endParaRPr lang="en-US" sz="1250" dirty="0"/>
           </a:p>
         </p:txBody>
       </p:sp>
@@ -7296,7 +13306,32 @@
       </p:sp>
       <p:sp>
         <p:nvSpPr>
-          <p:cNvPr id="3" name="Text 1"/>
+          <p:cNvPr id="3" name="Shape 1"/>
+          <p:cNvSpPr/>
+          <p:nvPr/>
+        </p:nvSpPr>
+        <p:spPr>
+          <a:xfrm>
+            <a:off x="0" y="164592"/>
+            <a:ext cx="146304" cy="6693408"/>
+          </a:xfrm>
+          <a:prstGeom prst="rect">
+            <a:avLst/>
+          </a:prstGeom>
+          <a:solidFill>
+            <a:srgbClr val="2F8A28"/>
+          </a:solidFill>
+          <a:ln w="12700">
+            <a:solidFill>
+              <a:srgbClr val="2F8A28"/>
+            </a:solidFill>
+            <a:prstDash val="solid"/>
+          </a:ln>
+        </p:spPr>
+      </p:sp>
+      <p:sp>
+        <p:nvSpPr>
+          <p:cNvPr id="4" name="Text 2"/>
           <p:cNvSpPr/>
           <p:nvPr/>
         </p:nvSpPr>
@@ -7335,7 +13370,7 @@
       </p:sp>
       <p:sp>
         <p:nvSpPr>
-          <p:cNvPr id="4" name="Text 2"/>
+          <p:cNvPr id="5" name="Text 3"/>
           <p:cNvSpPr/>
           <p:nvPr/>
         </p:nvSpPr>
@@ -7374,7 +13409,7 @@
       </p:sp>
       <p:sp>
         <p:nvSpPr>
-          <p:cNvPr id="5" name="Text 3"/>
+          <p:cNvPr id="6" name="Text 4"/>
           <p:cNvSpPr/>
           <p:nvPr/>
         </p:nvSpPr>
@@ -7413,13 +13448,77 @@
       </p:sp>
       <p:sp>
         <p:nvSpPr>
-          <p:cNvPr id="6" name="Text 4"/>
+          <p:cNvPr id="7" name="Shape 5"/>
           <p:cNvSpPr/>
           <p:nvPr/>
         </p:nvSpPr>
         <p:spPr>
           <a:xfrm>
             <a:off x="640080" y="658368"/>
+            <a:ext cx="420624" cy="420624"/>
+          </a:xfrm>
+          <a:prstGeom prst="ellipse">
+            <a:avLst/>
+          </a:prstGeom>
+          <a:solidFill>
+            <a:srgbClr val="0068B7"/>
+          </a:solidFill>
+          <a:ln w="12700">
+            <a:solidFill>
+              <a:srgbClr val="0068B7"/>
+            </a:solidFill>
+            <a:prstDash val="solid"/>
+          </a:ln>
+        </p:spPr>
+      </p:sp>
+      <p:sp>
+        <p:nvSpPr>
+          <p:cNvPr id="8" name="Text 6"/>
+          <p:cNvSpPr/>
+          <p:nvPr/>
+        </p:nvSpPr>
+        <p:spPr>
+          <a:xfrm>
+            <a:off x="640080" y="731520"/>
+            <a:ext cx="420624" cy="164592"/>
+          </a:xfrm>
+          <a:prstGeom prst="rect">
+            <a:avLst/>
+          </a:prstGeom>
+          <a:noFill/>
+          <a:ln/>
+        </p:spPr>
+        <p:txBody>
+          <a:bodyPr wrap="square" lIns="0" tIns="0" rIns="0" bIns="0" rtlCol="0" anchor="ctr"/>
+          <a:lstStyle/>
+          <a:p>
+            <a:pPr algn="ctr" indent="0" marL="0">
+              <a:buNone/>
+            </a:pPr>
+            <a:r>
+              <a:rPr lang="en-US" sz="1100" b="1" dirty="0">
+                <a:solidFill>
+                  <a:srgbClr val="FFFFFF"/>
+                </a:solidFill>
+                <a:latin typeface="Aptos" pitchFamily="34" charset="0"/>
+                <a:ea typeface="Aptos" pitchFamily="34" charset="-122"/>
+                <a:cs typeface="Aptos" pitchFamily="34" charset="-120"/>
+              </a:rPr>
+              <a:t>3</a:t>
+            </a:r>
+            <a:endParaRPr lang="en-US" sz="1100" dirty="0"/>
+          </a:p>
+        </p:txBody>
+      </p:sp>
+      <p:sp>
+        <p:nvSpPr>
+          <p:cNvPr id="9" name="Text 7"/>
+          <p:cNvSpPr/>
+          <p:nvPr/>
+        </p:nvSpPr>
+        <p:spPr>
+          <a:xfrm>
+            <a:off x="640080" y="621792"/>
             <a:ext cx="10881360" cy="566928"/>
           </a:xfrm>
           <a:prstGeom prst="rect">
@@ -7446,7 +13545,7 @@
                 <a:ea typeface="Aptos Display" pitchFamily="34" charset="-122"/>
                 <a:cs typeface="Aptos Display" pitchFamily="34" charset="-120"/>
               </a:rPr>
-              <a:t>Why This Topic Matters for Public Health AI</a:t>
+              <a:t>Definitions</a:t>
             </a:r>
             <a:endParaRPr lang="en-US" sz="2700" dirty="0"/>
           </a:p>
@@ -7454,32 +13553,178 @@
       </p:sp>
       <p:sp>
         <p:nvSpPr>
-          <p:cNvPr id="7" name="Text 5"/>
-          <p:cNvSpPr/>
-          <p:nvPr/>
-        </p:nvSpPr>
-        <p:spPr>
-          <a:xfrm>
-            <a:off x="822960" y="1325880"/>
-            <a:ext cx="10378440" cy="4800600"/>
-          </a:xfrm>
-          <a:prstGeom prst="rect">
-            <a:avLst/>
-          </a:prstGeom>
-          <a:noFill/>
-          <a:ln/>
-        </p:spPr>
-        <p:txBody>
-          <a:bodyPr wrap="square" lIns="1016" tIns="1016" rIns="1016" bIns="1016" rtlCol="0" anchor="t">
+          <p:cNvPr id="10" name="Text 8"/>
+          <p:cNvSpPr/>
+          <p:nvPr/>
+        </p:nvSpPr>
+        <p:spPr>
+          <a:xfrm>
+            <a:off x="868680" y="1417320"/>
+            <a:ext cx="6675120" cy="4434840"/>
+          </a:xfrm>
+          <a:prstGeom prst="rect">
+            <a:avLst/>
+          </a:prstGeom>
+          <a:noFill/>
+          <a:ln/>
+        </p:spPr>
+        <p:txBody>
+          <a:bodyPr wrap="square" lIns="635" tIns="635" rIns="635" bIns="635" rtlCol="0" anchor="t">
             <a:normAutofit/>
           </a:bodyPr>
           <a:lstStyle/>
           <a:p>
+            <a:r>
+              <a:rPr lang="en-US" sz="1700" dirty="0">
+                <a:solidFill>
+                  <a:srgbClr val="17364A"/>
+                </a:solidFill>
+                <a:latin typeface="Aptos" pitchFamily="34" charset="0"/>
+                <a:ea typeface="Aptos" pitchFamily="34" charset="-122"/>
+                <a:cs typeface="Aptos" pitchFamily="34" charset="-120"/>
+              </a:rPr>
+              <a:t>Decision right: The authority to approve, deny, modify, pause, or escalate an AI use case or operational decision.</a:t>
+            </a:r>
+            <a:endParaRPr lang="en-US" sz="1700" dirty="0"/>
+          </a:p>
+          <a:p>
+            <a:r>
+              <a:rPr lang="en-US" sz="1700" dirty="0">
+                <a:solidFill>
+                  <a:srgbClr val="17364A"/>
+                </a:solidFill>
+                <a:latin typeface="Aptos" pitchFamily="34" charset="0"/>
+                <a:ea typeface="Aptos" pitchFamily="34" charset="-122"/>
+                <a:cs typeface="Aptos" pitchFamily="34" charset="-120"/>
+              </a:rPr>
+              <a:t>Evidence artifact: A document, log, checklist, test result, approval record, or review note that demonstrates responsible AI.</a:t>
+            </a:r>
+            <a:endParaRPr lang="en-US" sz="1700" dirty="0"/>
+          </a:p>
+          <a:p>
+            <a:r>
+              <a:rPr lang="en-US" sz="1700" dirty="0">
+                <a:solidFill>
+                  <a:srgbClr val="17364A"/>
+                </a:solidFill>
+                <a:latin typeface="Aptos" pitchFamily="34" charset="0"/>
+                <a:ea typeface="Aptos" pitchFamily="34" charset="-122"/>
+                <a:cs typeface="Aptos" pitchFamily="34" charset="-120"/>
+              </a:rPr>
+              <a:t>Escalation pathway: A defined route for raising concerns to the appropriate reviewer or decision-maker.</a:t>
+            </a:r>
+            <a:endParaRPr lang="en-US" sz="1700" dirty="0"/>
+          </a:p>
+          <a:p>
+            <a:r>
+              <a:rPr lang="en-US" sz="1700" dirty="0">
+                <a:solidFill>
+                  <a:srgbClr val="17364A"/>
+                </a:solidFill>
+                <a:latin typeface="Aptos" pitchFamily="34" charset="0"/>
+                <a:ea typeface="Aptos" pitchFamily="34" charset="-122"/>
+                <a:cs typeface="Aptos" pitchFamily="34" charset="-120"/>
+              </a:rPr>
+              <a:t>Accountability owner: The person or role responsible for ensuring that an AI use case is governed, monitored, and corrected.</a:t>
+            </a:r>
+            <a:endParaRPr lang="en-US" sz="1700" dirty="0"/>
+          </a:p>
+        </p:txBody>
+      </p:sp>
+      <p:sp>
+        <p:nvSpPr>
+          <p:cNvPr id="11" name="Shape 9"/>
+          <p:cNvSpPr/>
+          <p:nvPr/>
+        </p:nvSpPr>
+        <p:spPr>
+          <a:xfrm>
+            <a:off x="7909560" y="1417320"/>
+            <a:ext cx="3154680" cy="1828800"/>
+          </a:xfrm>
+          <a:prstGeom prst="roundRect">
+            <a:avLst>
+              <a:gd name="adj" fmla="val 6000"/>
+            </a:avLst>
+          </a:prstGeom>
+          <a:solidFill>
+            <a:srgbClr val="EEF8ED"/>
+          </a:solidFill>
+          <a:ln w="12700">
+            <a:solidFill>
+              <a:srgbClr val="B9D7E6"/>
+            </a:solidFill>
+            <a:prstDash val="solid"/>
+          </a:ln>
+        </p:spPr>
+      </p:sp>
+      <p:sp>
+        <p:nvSpPr>
+          <p:cNvPr id="12" name="Text 10"/>
+          <p:cNvSpPr/>
+          <p:nvPr/>
+        </p:nvSpPr>
+        <p:spPr>
+          <a:xfrm>
+            <a:off x="8074152" y="1563624"/>
+            <a:ext cx="2825496" cy="201168"/>
+          </a:xfrm>
+          <a:prstGeom prst="rect">
+            <a:avLst/>
+          </a:prstGeom>
+          <a:noFill/>
+          <a:ln/>
+        </p:spPr>
+        <p:txBody>
+          <a:bodyPr wrap="square" lIns="0" tIns="0" rIns="0" bIns="0" rtlCol="0" anchor="ctr"/>
+          <a:lstStyle/>
+          <a:p>
             <a:pPr indent="0" marL="0">
               <a:buNone/>
             </a:pPr>
             <a:r>
-              <a:rPr lang="en-US" sz="1420" dirty="0">
+              <a:rPr lang="en-US" sz="950" b="1" dirty="0">
+                <a:solidFill>
+                  <a:srgbClr val="0068B7"/>
+                </a:solidFill>
+                <a:latin typeface="Aptos" pitchFamily="34" charset="0"/>
+                <a:ea typeface="Aptos" pitchFamily="34" charset="-122"/>
+                <a:cs typeface="Aptos" pitchFamily="34" charset="-120"/>
+              </a:rPr>
+              <a:t>Key idea</a:t>
+            </a:r>
+            <a:endParaRPr lang="en-US" sz="950" dirty="0"/>
+          </a:p>
+        </p:txBody>
+      </p:sp>
+      <p:sp>
+        <p:nvSpPr>
+          <p:cNvPr id="13" name="Text 11"/>
+          <p:cNvSpPr/>
+          <p:nvPr/>
+        </p:nvSpPr>
+        <p:spPr>
+          <a:xfrm>
+            <a:off x="8074152" y="1856232"/>
+            <a:ext cx="2825496" cy="1261872"/>
+          </a:xfrm>
+          <a:prstGeom prst="rect">
+            <a:avLst/>
+          </a:prstGeom>
+          <a:noFill/>
+          <a:ln/>
+        </p:spPr>
+        <p:txBody>
+          <a:bodyPr wrap="square" lIns="0" tIns="0" rIns="0" bIns="0" rtlCol="0" anchor="t">
+            <a:normAutofit/>
+          </a:bodyPr>
+          <a:lstStyle/>
+          <a:p>
+            <a:pPr indent="0" marL="0">
+              <a:buNone/>
+            </a:pPr>
+            <a:r>
+              <a:rPr lang="en-US" sz="1250" dirty="0">
                 <a:solidFill>
                   <a:srgbClr val="17364A"/>
                 </a:solidFill>
@@ -7487,9 +13732,116 @@
                 <a:ea typeface="Aptos" pitchFamily="34" charset="-122"/>
                 <a:cs typeface="Aptos" pitchFamily="34" charset="-120"/>
               </a:rPr>
-              <a:t>Public Comment, Social Listening, and Community Feedback Analysis matters because AI adoption changes how public health agencies make, document, communicate, and review decisions. Without a structured approach, staff may rely on informal practices, vendor assurances, or one-time approvals that do not match the operational consequences of AI-supported work. Public health agencies operate under legal authorities, public accountability, resource constraints, and community trust obligations. A module on this topic helps agencies define repeatable expectations before urgent situations arise. It also helps staff distinguish low-risk administrative support from uses that affect surveillance, public communications, field response, resource allocation, civil rights, privacy, or official records.</a:t>
-            </a:r>
-            <a:endParaRPr lang="en-US" sz="1420" dirty="0"/>
+              <a:t>Decision right: The authority to approve, deny, modify, pause, or escalate an AI use case or operational decision.</a:t>
+            </a:r>
+            <a:endParaRPr lang="en-US" sz="1250" dirty="0"/>
+          </a:p>
+        </p:txBody>
+      </p:sp>
+      <p:sp>
+        <p:nvSpPr>
+          <p:cNvPr id="14" name="Shape 12"/>
+          <p:cNvSpPr/>
+          <p:nvPr/>
+        </p:nvSpPr>
+        <p:spPr>
+          <a:xfrm>
+            <a:off x="7909560" y="3520440"/>
+            <a:ext cx="3154680" cy="1737360"/>
+          </a:xfrm>
+          <a:prstGeom prst="roundRect">
+            <a:avLst>
+              <a:gd name="adj" fmla="val 6316"/>
+            </a:avLst>
+          </a:prstGeom>
+          <a:solidFill>
+            <a:srgbClr val="EAF6F8"/>
+          </a:solidFill>
+          <a:ln w="12700">
+            <a:solidFill>
+              <a:srgbClr val="B9D7E6"/>
+            </a:solidFill>
+            <a:prstDash val="solid"/>
+          </a:ln>
+        </p:spPr>
+      </p:sp>
+      <p:sp>
+        <p:nvSpPr>
+          <p:cNvPr id="15" name="Text 13"/>
+          <p:cNvSpPr/>
+          <p:nvPr/>
+        </p:nvSpPr>
+        <p:spPr>
+          <a:xfrm>
+            <a:off x="8074152" y="3666744"/>
+            <a:ext cx="2825496" cy="201168"/>
+          </a:xfrm>
+          <a:prstGeom prst="rect">
+            <a:avLst/>
+          </a:prstGeom>
+          <a:noFill/>
+          <a:ln/>
+        </p:spPr>
+        <p:txBody>
+          <a:bodyPr wrap="square" lIns="0" tIns="0" rIns="0" bIns="0" rtlCol="0" anchor="ctr"/>
+          <a:lstStyle/>
+          <a:p>
+            <a:pPr indent="0" marL="0">
+              <a:buNone/>
+            </a:pPr>
+            <a:r>
+              <a:rPr lang="en-US" sz="950" b="1" dirty="0">
+                <a:solidFill>
+                  <a:srgbClr val="0068B7"/>
+                </a:solidFill>
+                <a:latin typeface="Aptos" pitchFamily="34" charset="0"/>
+                <a:ea typeface="Aptos" pitchFamily="34" charset="-122"/>
+                <a:cs typeface="Aptos" pitchFamily="34" charset="-120"/>
+              </a:rPr>
+              <a:t>Use this for</a:t>
+            </a:r>
+            <a:endParaRPr lang="en-US" sz="950" dirty="0"/>
+          </a:p>
+        </p:txBody>
+      </p:sp>
+      <p:sp>
+        <p:nvSpPr>
+          <p:cNvPr id="16" name="Text 14"/>
+          <p:cNvSpPr/>
+          <p:nvPr/>
+        </p:nvSpPr>
+        <p:spPr>
+          <a:xfrm>
+            <a:off x="8074152" y="3959352"/>
+            <a:ext cx="2825496" cy="1170432"/>
+          </a:xfrm>
+          <a:prstGeom prst="rect">
+            <a:avLst/>
+          </a:prstGeom>
+          <a:noFill/>
+          <a:ln/>
+        </p:spPr>
+        <p:txBody>
+          <a:bodyPr wrap="square" lIns="0" tIns="0" rIns="0" bIns="0" rtlCol="0" anchor="t">
+            <a:normAutofit/>
+          </a:bodyPr>
+          <a:lstStyle/>
+          <a:p>
+            <a:pPr indent="0" marL="0">
+              <a:buNone/>
+            </a:pPr>
+            <a:r>
+              <a:rPr lang="en-US" sz="1250" dirty="0">
+                <a:solidFill>
+                  <a:srgbClr val="17364A"/>
+                </a:solidFill>
+                <a:latin typeface="Aptos" pitchFamily="34" charset="0"/>
+                <a:ea typeface="Aptos" pitchFamily="34" charset="-122"/>
+                <a:cs typeface="Aptos" pitchFamily="34" charset="-120"/>
+              </a:rPr>
+              <a:t>Connect the concept to public health decisions, safeguards, documentation, or implementation work.</a:t>
+            </a:r>
+            <a:endParaRPr lang="en-US" sz="1250" dirty="0"/>
           </a:p>
         </p:txBody>
       </p:sp>
@@ -7552,7 +13904,32 @@
       </p:sp>
       <p:sp>
         <p:nvSpPr>
-          <p:cNvPr id="3" name="Text 1"/>
+          <p:cNvPr id="3" name="Shape 1"/>
+          <p:cNvSpPr/>
+          <p:nvPr/>
+        </p:nvSpPr>
+        <p:spPr>
+          <a:xfrm>
+            <a:off x="0" y="164592"/>
+            <a:ext cx="146304" cy="6693408"/>
+          </a:xfrm>
+          <a:prstGeom prst="rect">
+            <a:avLst/>
+          </a:prstGeom>
+          <a:solidFill>
+            <a:srgbClr val="2F8A28"/>
+          </a:solidFill>
+          <a:ln w="12700">
+            <a:solidFill>
+              <a:srgbClr val="2F8A28"/>
+            </a:solidFill>
+            <a:prstDash val="solid"/>
+          </a:ln>
+        </p:spPr>
+      </p:sp>
+      <p:sp>
+        <p:nvSpPr>
+          <p:cNvPr id="4" name="Text 2"/>
           <p:cNvSpPr/>
           <p:nvPr/>
         </p:nvSpPr>
@@ -7591,7 +13968,7 @@
       </p:sp>
       <p:sp>
         <p:nvSpPr>
-          <p:cNvPr id="4" name="Text 2"/>
+          <p:cNvPr id="5" name="Text 3"/>
           <p:cNvSpPr/>
           <p:nvPr/>
         </p:nvSpPr>
@@ -7630,7 +14007,7 @@
       </p:sp>
       <p:sp>
         <p:nvSpPr>
-          <p:cNvPr id="5" name="Text 3"/>
+          <p:cNvPr id="6" name="Text 4"/>
           <p:cNvSpPr/>
           <p:nvPr/>
         </p:nvSpPr>
@@ -7669,13 +14046,77 @@
       </p:sp>
       <p:sp>
         <p:nvSpPr>
-          <p:cNvPr id="6" name="Text 4"/>
+          <p:cNvPr id="7" name="Shape 5"/>
           <p:cNvSpPr/>
           <p:nvPr/>
         </p:nvSpPr>
         <p:spPr>
           <a:xfrm>
             <a:off x="640080" y="658368"/>
+            <a:ext cx="420624" cy="420624"/>
+          </a:xfrm>
+          <a:prstGeom prst="ellipse">
+            <a:avLst/>
+          </a:prstGeom>
+          <a:solidFill>
+            <a:srgbClr val="0068B7"/>
+          </a:solidFill>
+          <a:ln w="12700">
+            <a:solidFill>
+              <a:srgbClr val="0068B7"/>
+            </a:solidFill>
+            <a:prstDash val="solid"/>
+          </a:ln>
+        </p:spPr>
+      </p:sp>
+      <p:sp>
+        <p:nvSpPr>
+          <p:cNvPr id="8" name="Text 6"/>
+          <p:cNvSpPr/>
+          <p:nvPr/>
+        </p:nvSpPr>
+        <p:spPr>
+          <a:xfrm>
+            <a:off x="640080" y="731520"/>
+            <a:ext cx="420624" cy="164592"/>
+          </a:xfrm>
+          <a:prstGeom prst="rect">
+            <a:avLst/>
+          </a:prstGeom>
+          <a:noFill/>
+          <a:ln/>
+        </p:spPr>
+        <p:txBody>
+          <a:bodyPr wrap="square" lIns="0" tIns="0" rIns="0" bIns="0" rtlCol="0" anchor="ctr"/>
+          <a:lstStyle/>
+          <a:p>
+            <a:pPr algn="ctr" indent="0" marL="0">
+              <a:buNone/>
+            </a:pPr>
+            <a:r>
+              <a:rPr lang="en-US" sz="1100" b="1" dirty="0">
+                <a:solidFill>
+                  <a:srgbClr val="FFFFFF"/>
+                </a:solidFill>
+                <a:latin typeface="Aptos" pitchFamily="34" charset="0"/>
+                <a:ea typeface="Aptos" pitchFamily="34" charset="-122"/>
+                <a:cs typeface="Aptos" pitchFamily="34" charset="-120"/>
+              </a:rPr>
+              <a:t>4</a:t>
+            </a:r>
+            <a:endParaRPr lang="en-US" sz="1100" dirty="0"/>
+          </a:p>
+        </p:txBody>
+      </p:sp>
+      <p:sp>
+        <p:nvSpPr>
+          <p:cNvPr id="9" name="Text 7"/>
+          <p:cNvSpPr/>
+          <p:nvPr/>
+        </p:nvSpPr>
+        <p:spPr>
+          <a:xfrm>
+            <a:off x="640080" y="621792"/>
             <a:ext cx="10881360" cy="566928"/>
           </a:xfrm>
           <a:prstGeom prst="rect">
@@ -7702,7 +14143,7 @@
                 <a:ea typeface="Aptos Display" pitchFamily="34" charset="-122"/>
                 <a:cs typeface="Aptos Display" pitchFamily="34" charset="-120"/>
               </a:rPr>
-              <a:t>Public Health Example</a:t>
+              <a:t>Jurisdiction and Agency Policy Note</a:t>
             </a:r>
             <a:endParaRPr lang="en-US" sz="2700" dirty="0"/>
           </a:p>
@@ -7710,32 +14151,178 @@
       </p:sp>
       <p:sp>
         <p:nvSpPr>
-          <p:cNvPr id="7" name="Text 5"/>
-          <p:cNvSpPr/>
-          <p:nvPr/>
-        </p:nvSpPr>
-        <p:spPr>
-          <a:xfrm>
-            <a:off x="822960" y="1325880"/>
-            <a:ext cx="10378440" cy="4800600"/>
-          </a:xfrm>
-          <a:prstGeom prst="rect">
-            <a:avLst/>
-          </a:prstGeom>
-          <a:noFill/>
-          <a:ln/>
-        </p:spPr>
-        <p:txBody>
-          <a:bodyPr wrap="square" lIns="1016" tIns="1016" rIns="1016" bIns="1016" rtlCol="0" anchor="t">
+          <p:cNvPr id="10" name="Text 8"/>
+          <p:cNvSpPr/>
+          <p:nvPr/>
+        </p:nvSpPr>
+        <p:spPr>
+          <a:xfrm>
+            <a:off x="868680" y="1417320"/>
+            <a:ext cx="6675120" cy="4434840"/>
+          </a:xfrm>
+          <a:prstGeom prst="rect">
+            <a:avLst/>
+          </a:prstGeom>
+          <a:noFill/>
+          <a:ln/>
+        </p:spPr>
+        <p:txBody>
+          <a:bodyPr wrap="square" lIns="635" tIns="635" rIns="635" bIns="635" rtlCol="0" anchor="t">
             <a:normAutofit/>
           </a:bodyPr>
           <a:lstStyle/>
           <a:p>
+            <a:r>
+              <a:rPr lang="en-US" sz="1700" dirty="0">
+                <a:solidFill>
+                  <a:srgbClr val="17364A"/>
+                </a:solidFill>
+                <a:latin typeface="Aptos" pitchFamily="34" charset="0"/>
+                <a:ea typeface="Aptos" pitchFamily="34" charset="-122"/>
+                <a:cs typeface="Aptos" pitchFamily="34" charset="-120"/>
+              </a:rPr>
+              <a:t>This module provides national-level training guidance for public health agencies and partners.</a:t>
+            </a:r>
+            <a:endParaRPr lang="en-US" sz="1700" dirty="0"/>
+          </a:p>
+          <a:p>
+            <a:r>
+              <a:rPr lang="en-US" sz="1700" dirty="0">
+                <a:solidFill>
+                  <a:srgbClr val="17364A"/>
+                </a:solidFill>
+                <a:latin typeface="Aptos" pitchFamily="34" charset="0"/>
+                <a:ea typeface="Aptos" pitchFamily="34" charset="-122"/>
+                <a:cs typeface="Aptos" pitchFamily="34" charset="-120"/>
+              </a:rPr>
+              <a:t>It is not legal advice and does not replace review by agency legal counsel, privacy officers, procurement officials, civil.</a:t>
+            </a:r>
+            <a:endParaRPr lang="en-US" sz="1700" dirty="0"/>
+          </a:p>
+          <a:p>
+            <a:r>
+              <a:rPr lang="en-US" sz="1700" dirty="0">
+                <a:solidFill>
+                  <a:srgbClr val="17364A"/>
+                </a:solidFill>
+                <a:latin typeface="Aptos" pitchFamily="34" charset="0"/>
+                <a:ea typeface="Aptos" pitchFamily="34" charset="-122"/>
+                <a:cs typeface="Aptos" pitchFamily="34" charset="-120"/>
+              </a:rPr>
+              <a:t>Requirements may vary by state, locality, territory, Tribe, agency, funding source, data-sharing agreement, emergency.</a:t>
+            </a:r>
+            <a:endParaRPr lang="en-US" sz="1700" dirty="0"/>
+          </a:p>
+          <a:p>
+            <a:r>
+              <a:rPr lang="en-US" sz="1700" dirty="0">
+                <a:solidFill>
+                  <a:srgbClr val="17364A"/>
+                </a:solidFill>
+                <a:latin typeface="Aptos" pitchFamily="34" charset="0"/>
+                <a:ea typeface="Aptos" pitchFamily="34" charset="-122"/>
+                <a:cs typeface="Aptos" pitchFamily="34" charset="-120"/>
+              </a:rPr>
+              <a:t>Learners should use this module to identify the issues that require review and should confirm applicable requirements.</a:t>
+            </a:r>
+            <a:endParaRPr lang="en-US" sz="1700" dirty="0"/>
+          </a:p>
+        </p:txBody>
+      </p:sp>
+      <p:sp>
+        <p:nvSpPr>
+          <p:cNvPr id="11" name="Shape 9"/>
+          <p:cNvSpPr/>
+          <p:nvPr/>
+        </p:nvSpPr>
+        <p:spPr>
+          <a:xfrm>
+            <a:off x="7909560" y="1417320"/>
+            <a:ext cx="3154680" cy="1828800"/>
+          </a:xfrm>
+          <a:prstGeom prst="roundRect">
+            <a:avLst>
+              <a:gd name="adj" fmla="val 6000"/>
+            </a:avLst>
+          </a:prstGeom>
+          <a:solidFill>
+            <a:srgbClr val="EEF8ED"/>
+          </a:solidFill>
+          <a:ln w="12700">
+            <a:solidFill>
+              <a:srgbClr val="B9D7E6"/>
+            </a:solidFill>
+            <a:prstDash val="solid"/>
+          </a:ln>
+        </p:spPr>
+      </p:sp>
+      <p:sp>
+        <p:nvSpPr>
+          <p:cNvPr id="12" name="Text 10"/>
+          <p:cNvSpPr/>
+          <p:nvPr/>
+        </p:nvSpPr>
+        <p:spPr>
+          <a:xfrm>
+            <a:off x="8074152" y="1563624"/>
+            <a:ext cx="2825496" cy="201168"/>
+          </a:xfrm>
+          <a:prstGeom prst="rect">
+            <a:avLst/>
+          </a:prstGeom>
+          <a:noFill/>
+          <a:ln/>
+        </p:spPr>
+        <p:txBody>
+          <a:bodyPr wrap="square" lIns="0" tIns="0" rIns="0" bIns="0" rtlCol="0" anchor="ctr"/>
+          <a:lstStyle/>
+          <a:p>
             <a:pPr indent="0" marL="0">
               <a:buNone/>
             </a:pPr>
             <a:r>
-              <a:rPr lang="en-US" sz="1420" dirty="0">
+              <a:rPr lang="en-US" sz="950" b="1" dirty="0">
+                <a:solidFill>
+                  <a:srgbClr val="0068B7"/>
+                </a:solidFill>
+                <a:latin typeface="Aptos" pitchFamily="34" charset="0"/>
+                <a:ea typeface="Aptos" pitchFamily="34" charset="-122"/>
+                <a:cs typeface="Aptos" pitchFamily="34" charset="-120"/>
+              </a:rPr>
+              <a:t>Key idea</a:t>
+            </a:r>
+            <a:endParaRPr lang="en-US" sz="950" dirty="0"/>
+          </a:p>
+        </p:txBody>
+      </p:sp>
+      <p:sp>
+        <p:nvSpPr>
+          <p:cNvPr id="13" name="Text 11"/>
+          <p:cNvSpPr/>
+          <p:nvPr/>
+        </p:nvSpPr>
+        <p:spPr>
+          <a:xfrm>
+            <a:off x="8074152" y="1856232"/>
+            <a:ext cx="2825496" cy="1261872"/>
+          </a:xfrm>
+          <a:prstGeom prst="rect">
+            <a:avLst/>
+          </a:prstGeom>
+          <a:noFill/>
+          <a:ln/>
+        </p:spPr>
+        <p:txBody>
+          <a:bodyPr wrap="square" lIns="0" tIns="0" rIns="0" bIns="0" rtlCol="0" anchor="t">
+            <a:normAutofit/>
+          </a:bodyPr>
+          <a:lstStyle/>
+          <a:p>
+            <a:pPr indent="0" marL="0">
+              <a:buNone/>
+            </a:pPr>
+            <a:r>
+              <a:rPr lang="en-US" sz="1250" dirty="0">
                 <a:solidFill>
                   <a:srgbClr val="17364A"/>
                 </a:solidFill>
@@ -7743,9 +14330,116 @@
                 <a:ea typeface="Aptos" pitchFamily="34" charset="-122"/>
                 <a:cs typeface="Aptos" pitchFamily="34" charset="-120"/>
               </a:rPr>
-              <a:t>A public health agency is preparing to use AI in a workflow related to ethical analysis of public comments, social listening data, and community feedback. The project team initially treats the tool as a helpful efficiency aid, but governance reviewers recognize that the workflow may affect public trust, equity, official records, or public health action. The agency responds by creating a clear artifact that defines intended use, prohibited use, responsible roles, review points, documentation expectations, escalation triggers, and monitoring measures. This converts a broad AI idea into a manageable public health practice.</a:t>
-            </a:r>
-            <a:endParaRPr lang="en-US" sz="1420" dirty="0"/>
+              <a:t>This module provides national-level training guidance for public health agencies and partners.</a:t>
+            </a:r>
+            <a:endParaRPr lang="en-US" sz="1250" dirty="0"/>
+          </a:p>
+        </p:txBody>
+      </p:sp>
+      <p:sp>
+        <p:nvSpPr>
+          <p:cNvPr id="14" name="Shape 12"/>
+          <p:cNvSpPr/>
+          <p:nvPr/>
+        </p:nvSpPr>
+        <p:spPr>
+          <a:xfrm>
+            <a:off x="7909560" y="3520440"/>
+            <a:ext cx="3154680" cy="1737360"/>
+          </a:xfrm>
+          <a:prstGeom prst="roundRect">
+            <a:avLst>
+              <a:gd name="adj" fmla="val 6316"/>
+            </a:avLst>
+          </a:prstGeom>
+          <a:solidFill>
+            <a:srgbClr val="EAF6F8"/>
+          </a:solidFill>
+          <a:ln w="12700">
+            <a:solidFill>
+              <a:srgbClr val="B9D7E6"/>
+            </a:solidFill>
+            <a:prstDash val="solid"/>
+          </a:ln>
+        </p:spPr>
+      </p:sp>
+      <p:sp>
+        <p:nvSpPr>
+          <p:cNvPr id="15" name="Text 13"/>
+          <p:cNvSpPr/>
+          <p:nvPr/>
+        </p:nvSpPr>
+        <p:spPr>
+          <a:xfrm>
+            <a:off x="8074152" y="3666744"/>
+            <a:ext cx="2825496" cy="201168"/>
+          </a:xfrm>
+          <a:prstGeom prst="rect">
+            <a:avLst/>
+          </a:prstGeom>
+          <a:noFill/>
+          <a:ln/>
+        </p:spPr>
+        <p:txBody>
+          <a:bodyPr wrap="square" lIns="0" tIns="0" rIns="0" bIns="0" rtlCol="0" anchor="ctr"/>
+          <a:lstStyle/>
+          <a:p>
+            <a:pPr indent="0" marL="0">
+              <a:buNone/>
+            </a:pPr>
+            <a:r>
+              <a:rPr lang="en-US" sz="950" b="1" dirty="0">
+                <a:solidFill>
+                  <a:srgbClr val="0068B7"/>
+                </a:solidFill>
+                <a:latin typeface="Aptos" pitchFamily="34" charset="0"/>
+                <a:ea typeface="Aptos" pitchFamily="34" charset="-122"/>
+                <a:cs typeface="Aptos" pitchFamily="34" charset="-120"/>
+              </a:rPr>
+              <a:t>Use this for</a:t>
+            </a:r>
+            <a:endParaRPr lang="en-US" sz="950" dirty="0"/>
+          </a:p>
+        </p:txBody>
+      </p:sp>
+      <p:sp>
+        <p:nvSpPr>
+          <p:cNvPr id="16" name="Text 14"/>
+          <p:cNvSpPr/>
+          <p:nvPr/>
+        </p:nvSpPr>
+        <p:spPr>
+          <a:xfrm>
+            <a:off x="8074152" y="3959352"/>
+            <a:ext cx="2825496" cy="1170432"/>
+          </a:xfrm>
+          <a:prstGeom prst="rect">
+            <a:avLst/>
+          </a:prstGeom>
+          <a:noFill/>
+          <a:ln/>
+        </p:spPr>
+        <p:txBody>
+          <a:bodyPr wrap="square" lIns="0" tIns="0" rIns="0" bIns="0" rtlCol="0" anchor="t">
+            <a:normAutofit/>
+          </a:bodyPr>
+          <a:lstStyle/>
+          <a:p>
+            <a:pPr indent="0" marL="0">
+              <a:buNone/>
+            </a:pPr>
+            <a:r>
+              <a:rPr lang="en-US" sz="1250" dirty="0">
+                <a:solidFill>
+                  <a:srgbClr val="17364A"/>
+                </a:solidFill>
+                <a:latin typeface="Aptos" pitchFamily="34" charset="0"/>
+                <a:ea typeface="Aptos" pitchFamily="34" charset="-122"/>
+                <a:cs typeface="Aptos" pitchFamily="34" charset="-120"/>
+              </a:rPr>
+              <a:t>Connect the concept to public health decisions, safeguards, documentation, or implementation work.</a:t>
+            </a:r>
+            <a:endParaRPr lang="en-US" sz="1250" dirty="0"/>
           </a:p>
         </p:txBody>
       </p:sp>
@@ -7808,7 +14502,32 @@
       </p:sp>
       <p:sp>
         <p:nvSpPr>
-          <p:cNvPr id="3" name="Text 1"/>
+          <p:cNvPr id="3" name="Shape 1"/>
+          <p:cNvSpPr/>
+          <p:nvPr/>
+        </p:nvSpPr>
+        <p:spPr>
+          <a:xfrm>
+            <a:off x="0" y="164592"/>
+            <a:ext cx="146304" cy="6693408"/>
+          </a:xfrm>
+          <a:prstGeom prst="rect">
+            <a:avLst/>
+          </a:prstGeom>
+          <a:solidFill>
+            <a:srgbClr val="2F8A28"/>
+          </a:solidFill>
+          <a:ln w="12700">
+            <a:solidFill>
+              <a:srgbClr val="2F8A28"/>
+            </a:solidFill>
+            <a:prstDash val="solid"/>
+          </a:ln>
+        </p:spPr>
+      </p:sp>
+      <p:sp>
+        <p:nvSpPr>
+          <p:cNvPr id="4" name="Text 2"/>
           <p:cNvSpPr/>
           <p:nvPr/>
         </p:nvSpPr>
@@ -7847,7 +14566,7 @@
       </p:sp>
       <p:sp>
         <p:nvSpPr>
-          <p:cNvPr id="4" name="Text 2"/>
+          <p:cNvPr id="5" name="Text 3"/>
           <p:cNvSpPr/>
           <p:nvPr/>
         </p:nvSpPr>
@@ -7886,7 +14605,7 @@
       </p:sp>
       <p:sp>
         <p:nvSpPr>
-          <p:cNvPr id="5" name="Text 3"/>
+          <p:cNvPr id="6" name="Text 4"/>
           <p:cNvSpPr/>
           <p:nvPr/>
         </p:nvSpPr>
@@ -7925,13 +14644,77 @@
       </p:sp>
       <p:sp>
         <p:nvSpPr>
-          <p:cNvPr id="6" name="Text 4"/>
+          <p:cNvPr id="7" name="Shape 5"/>
           <p:cNvSpPr/>
           <p:nvPr/>
         </p:nvSpPr>
         <p:spPr>
           <a:xfrm>
             <a:off x="640080" y="658368"/>
+            <a:ext cx="420624" cy="420624"/>
+          </a:xfrm>
+          <a:prstGeom prst="ellipse">
+            <a:avLst/>
+          </a:prstGeom>
+          <a:solidFill>
+            <a:srgbClr val="0068B7"/>
+          </a:solidFill>
+          <a:ln w="12700">
+            <a:solidFill>
+              <a:srgbClr val="0068B7"/>
+            </a:solidFill>
+            <a:prstDash val="solid"/>
+          </a:ln>
+        </p:spPr>
+      </p:sp>
+      <p:sp>
+        <p:nvSpPr>
+          <p:cNvPr id="8" name="Text 6"/>
+          <p:cNvSpPr/>
+          <p:nvPr/>
+        </p:nvSpPr>
+        <p:spPr>
+          <a:xfrm>
+            <a:off x="640080" y="731520"/>
+            <a:ext cx="420624" cy="164592"/>
+          </a:xfrm>
+          <a:prstGeom prst="rect">
+            <a:avLst/>
+          </a:prstGeom>
+          <a:noFill/>
+          <a:ln/>
+        </p:spPr>
+        <p:txBody>
+          <a:bodyPr wrap="square" lIns="0" tIns="0" rIns="0" bIns="0" rtlCol="0" anchor="ctr"/>
+          <a:lstStyle/>
+          <a:p>
+            <a:pPr algn="ctr" indent="0" marL="0">
+              <a:buNone/>
+            </a:pPr>
+            <a:r>
+              <a:rPr lang="en-US" sz="1100" b="1" dirty="0">
+                <a:solidFill>
+                  <a:srgbClr val="FFFFFF"/>
+                </a:solidFill>
+                <a:latin typeface="Aptos" pitchFamily="34" charset="0"/>
+                <a:ea typeface="Aptos" pitchFamily="34" charset="-122"/>
+                <a:cs typeface="Aptos" pitchFamily="34" charset="-120"/>
+              </a:rPr>
+              <a:t>5</a:t>
+            </a:r>
+            <a:endParaRPr lang="en-US" sz="1100" dirty="0"/>
+          </a:p>
+        </p:txBody>
+      </p:sp>
+      <p:sp>
+        <p:nvSpPr>
+          <p:cNvPr id="9" name="Text 7"/>
+          <p:cNvSpPr/>
+          <p:nvPr/>
+        </p:nvSpPr>
+        <p:spPr>
+          <a:xfrm>
+            <a:off x="640080" y="621792"/>
             <a:ext cx="10881360" cy="566928"/>
           </a:xfrm>
           <a:prstGeom prst="rect">
@@ -7958,7 +14741,7 @@
                 <a:ea typeface="Aptos Display" pitchFamily="34" charset="-122"/>
                 <a:cs typeface="Aptos Display" pitchFamily="34" charset="-120"/>
               </a:rPr>
-              <a:t>Topic Deep Dive</a:t>
+              <a:t>Why This Topic Matters for Public Health AI</a:t>
             </a:r>
             <a:endParaRPr lang="en-US" sz="2700" dirty="0"/>
           </a:p>
@@ -7966,32 +14749,178 @@
       </p:sp>
       <p:sp>
         <p:nvSpPr>
-          <p:cNvPr id="7" name="Text 5"/>
-          <p:cNvSpPr/>
-          <p:nvPr/>
-        </p:nvSpPr>
-        <p:spPr>
-          <a:xfrm>
-            <a:off x="822960" y="1325880"/>
-            <a:ext cx="10378440" cy="4800600"/>
-          </a:xfrm>
-          <a:prstGeom prst="rect">
-            <a:avLst/>
-          </a:prstGeom>
-          <a:noFill/>
-          <a:ln/>
-        </p:spPr>
-        <p:txBody>
-          <a:bodyPr wrap="square" lIns="1016" tIns="1016" rIns="1016" bIns="1016" rtlCol="0" anchor="t">
+          <p:cNvPr id="10" name="Text 8"/>
+          <p:cNvSpPr/>
+          <p:nvPr/>
+        </p:nvSpPr>
+        <p:spPr>
+          <a:xfrm>
+            <a:off x="868680" y="1417320"/>
+            <a:ext cx="6675120" cy="4434840"/>
+          </a:xfrm>
+          <a:prstGeom prst="rect">
+            <a:avLst/>
+          </a:prstGeom>
+          <a:noFill/>
+          <a:ln/>
+        </p:spPr>
+        <p:txBody>
+          <a:bodyPr wrap="square" lIns="635" tIns="635" rIns="635" bIns="635" rtlCol="0" anchor="t">
             <a:normAutofit/>
           </a:bodyPr>
           <a:lstStyle/>
           <a:p>
+            <a:r>
+              <a:rPr lang="en-US" sz="1700" dirty="0">
+                <a:solidFill>
+                  <a:srgbClr val="17364A"/>
+                </a:solidFill>
+                <a:latin typeface="Aptos" pitchFamily="34" charset="0"/>
+                <a:ea typeface="Aptos" pitchFamily="34" charset="-122"/>
+                <a:cs typeface="Aptos" pitchFamily="34" charset="-120"/>
+              </a:rPr>
+              <a:t>Public Comment, Social Listening, and Community Feedback Analysis matters because AI adoption changes how public health.</a:t>
+            </a:r>
+            <a:endParaRPr lang="en-US" sz="1700" dirty="0"/>
+          </a:p>
+          <a:p>
+            <a:r>
+              <a:rPr lang="en-US" sz="1700" dirty="0">
+                <a:solidFill>
+                  <a:srgbClr val="17364A"/>
+                </a:solidFill>
+                <a:latin typeface="Aptos" pitchFamily="34" charset="0"/>
+                <a:ea typeface="Aptos" pitchFamily="34" charset="-122"/>
+                <a:cs typeface="Aptos" pitchFamily="34" charset="-120"/>
+              </a:rPr>
+              <a:t>Without a structured approach, staff may rely on informal practices, vendor assurances, or one-time approvals that do not.</a:t>
+            </a:r>
+            <a:endParaRPr lang="en-US" sz="1700" dirty="0"/>
+          </a:p>
+          <a:p>
+            <a:r>
+              <a:rPr lang="en-US" sz="1700" dirty="0">
+                <a:solidFill>
+                  <a:srgbClr val="17364A"/>
+                </a:solidFill>
+                <a:latin typeface="Aptos" pitchFamily="34" charset="0"/>
+                <a:ea typeface="Aptos" pitchFamily="34" charset="-122"/>
+                <a:cs typeface="Aptos" pitchFamily="34" charset="-120"/>
+              </a:rPr>
+              <a:t>Public health agencies operate under legal authorities, public accountability, resource constraints, and community trust.</a:t>
+            </a:r>
+            <a:endParaRPr lang="en-US" sz="1700" dirty="0"/>
+          </a:p>
+          <a:p>
+            <a:r>
+              <a:rPr lang="en-US" sz="1700" dirty="0">
+                <a:solidFill>
+                  <a:srgbClr val="17364A"/>
+                </a:solidFill>
+                <a:latin typeface="Aptos" pitchFamily="34" charset="0"/>
+                <a:ea typeface="Aptos" pitchFamily="34" charset="-122"/>
+                <a:cs typeface="Aptos" pitchFamily="34" charset="-120"/>
+              </a:rPr>
+              <a:t>A module on this topic helps agencies define repeatable expectations before urgent situations arise.</a:t>
+            </a:r>
+            <a:endParaRPr lang="en-US" sz="1700" dirty="0"/>
+          </a:p>
+        </p:txBody>
+      </p:sp>
+      <p:sp>
+        <p:nvSpPr>
+          <p:cNvPr id="11" name="Shape 9"/>
+          <p:cNvSpPr/>
+          <p:nvPr/>
+        </p:nvSpPr>
+        <p:spPr>
+          <a:xfrm>
+            <a:off x="7909560" y="1417320"/>
+            <a:ext cx="3154680" cy="1828800"/>
+          </a:xfrm>
+          <a:prstGeom prst="roundRect">
+            <a:avLst>
+              <a:gd name="adj" fmla="val 6000"/>
+            </a:avLst>
+          </a:prstGeom>
+          <a:solidFill>
+            <a:srgbClr val="EEF8ED"/>
+          </a:solidFill>
+          <a:ln w="12700">
+            <a:solidFill>
+              <a:srgbClr val="B9D7E6"/>
+            </a:solidFill>
+            <a:prstDash val="solid"/>
+          </a:ln>
+        </p:spPr>
+      </p:sp>
+      <p:sp>
+        <p:nvSpPr>
+          <p:cNvPr id="12" name="Text 10"/>
+          <p:cNvSpPr/>
+          <p:nvPr/>
+        </p:nvSpPr>
+        <p:spPr>
+          <a:xfrm>
+            <a:off x="8074152" y="1563624"/>
+            <a:ext cx="2825496" cy="201168"/>
+          </a:xfrm>
+          <a:prstGeom prst="rect">
+            <a:avLst/>
+          </a:prstGeom>
+          <a:noFill/>
+          <a:ln/>
+        </p:spPr>
+        <p:txBody>
+          <a:bodyPr wrap="square" lIns="0" tIns="0" rIns="0" bIns="0" rtlCol="0" anchor="ctr"/>
+          <a:lstStyle/>
+          <a:p>
             <a:pPr indent="0" marL="0">
               <a:buNone/>
             </a:pPr>
             <a:r>
-              <a:rPr lang="en-US" sz="1420" dirty="0">
+              <a:rPr lang="en-US" sz="950" b="1" dirty="0">
+                <a:solidFill>
+                  <a:srgbClr val="0068B7"/>
+                </a:solidFill>
+                <a:latin typeface="Aptos" pitchFamily="34" charset="0"/>
+                <a:ea typeface="Aptos" pitchFamily="34" charset="-122"/>
+                <a:cs typeface="Aptos" pitchFamily="34" charset="-120"/>
+              </a:rPr>
+              <a:t>Key idea</a:t>
+            </a:r>
+            <a:endParaRPr lang="en-US" sz="950" dirty="0"/>
+          </a:p>
+        </p:txBody>
+      </p:sp>
+      <p:sp>
+        <p:nvSpPr>
+          <p:cNvPr id="13" name="Text 11"/>
+          <p:cNvSpPr/>
+          <p:nvPr/>
+        </p:nvSpPr>
+        <p:spPr>
+          <a:xfrm>
+            <a:off x="8074152" y="1856232"/>
+            <a:ext cx="2825496" cy="1261872"/>
+          </a:xfrm>
+          <a:prstGeom prst="rect">
+            <a:avLst/>
+          </a:prstGeom>
+          <a:noFill/>
+          <a:ln/>
+        </p:spPr>
+        <p:txBody>
+          <a:bodyPr wrap="square" lIns="0" tIns="0" rIns="0" bIns="0" rtlCol="0" anchor="t">
+            <a:normAutofit/>
+          </a:bodyPr>
+          <a:lstStyle/>
+          <a:p>
+            <a:pPr indent="0" marL="0">
+              <a:buNone/>
+            </a:pPr>
+            <a:r>
+              <a:rPr lang="en-US" sz="1250" dirty="0">
                 <a:solidFill>
                   <a:srgbClr val="17364A"/>
                 </a:solidFill>
@@ -7999,9 +14928,116 @@
                 <a:ea typeface="Aptos" pitchFamily="34" charset="-122"/>
                 <a:cs typeface="Aptos" pitchFamily="34" charset="-120"/>
               </a:rPr>
-              <a:t>The first step in this topic is to define the decision or workflow clearly. Staff should identify who is affected, what data are used, what AI output is produced, who reviews the output, and what action may follow. This prevents the module from becoming abstract and anchors the work in public health practice. The second step is to assign responsibilities. AI-supported workflows often cross program, IT, legal, privacy, communications, procurement, and leadership boundaries. Responsibilities should be named by role rather than assumed. The artifact should specify who prepares materials, who reviews risks, who approves use, who monitors performance, and who can pause or revise the workflow. The third step is to define evidence. Responsible AI depends on more than policy statements. Agencies need records that show what was reviewed, what decisions were made, what safeguards were applied, what incidents occurred, and how the workflow changed over time. Evidence also supports audits, public records review, quality improvement, and leadership accountability.</a:t>
-            </a:r>
-            <a:endParaRPr lang="en-US" sz="1420" dirty="0"/>
+              <a:t>Public Comment, Social Listening, and Community Feedback Analysis matters because AI adoption changes how public health.</a:t>
+            </a:r>
+            <a:endParaRPr lang="en-US" sz="1250" dirty="0"/>
+          </a:p>
+        </p:txBody>
+      </p:sp>
+      <p:sp>
+        <p:nvSpPr>
+          <p:cNvPr id="14" name="Shape 12"/>
+          <p:cNvSpPr/>
+          <p:nvPr/>
+        </p:nvSpPr>
+        <p:spPr>
+          <a:xfrm>
+            <a:off x="7909560" y="3520440"/>
+            <a:ext cx="3154680" cy="1737360"/>
+          </a:xfrm>
+          <a:prstGeom prst="roundRect">
+            <a:avLst>
+              <a:gd name="adj" fmla="val 6316"/>
+            </a:avLst>
+          </a:prstGeom>
+          <a:solidFill>
+            <a:srgbClr val="EAF6F8"/>
+          </a:solidFill>
+          <a:ln w="12700">
+            <a:solidFill>
+              <a:srgbClr val="B9D7E6"/>
+            </a:solidFill>
+            <a:prstDash val="solid"/>
+          </a:ln>
+        </p:spPr>
+      </p:sp>
+      <p:sp>
+        <p:nvSpPr>
+          <p:cNvPr id="15" name="Text 13"/>
+          <p:cNvSpPr/>
+          <p:nvPr/>
+        </p:nvSpPr>
+        <p:spPr>
+          <a:xfrm>
+            <a:off x="8074152" y="3666744"/>
+            <a:ext cx="2825496" cy="201168"/>
+          </a:xfrm>
+          <a:prstGeom prst="rect">
+            <a:avLst/>
+          </a:prstGeom>
+          <a:noFill/>
+          <a:ln/>
+        </p:spPr>
+        <p:txBody>
+          <a:bodyPr wrap="square" lIns="0" tIns="0" rIns="0" bIns="0" rtlCol="0" anchor="ctr"/>
+          <a:lstStyle/>
+          <a:p>
+            <a:pPr indent="0" marL="0">
+              <a:buNone/>
+            </a:pPr>
+            <a:r>
+              <a:rPr lang="en-US" sz="950" b="1" dirty="0">
+                <a:solidFill>
+                  <a:srgbClr val="0068B7"/>
+                </a:solidFill>
+                <a:latin typeface="Aptos" pitchFamily="34" charset="0"/>
+                <a:ea typeface="Aptos" pitchFamily="34" charset="-122"/>
+                <a:cs typeface="Aptos" pitchFamily="34" charset="-120"/>
+              </a:rPr>
+              <a:t>Use this for</a:t>
+            </a:r>
+            <a:endParaRPr lang="en-US" sz="950" dirty="0"/>
+          </a:p>
+        </p:txBody>
+      </p:sp>
+      <p:sp>
+        <p:nvSpPr>
+          <p:cNvPr id="16" name="Text 14"/>
+          <p:cNvSpPr/>
+          <p:nvPr/>
+        </p:nvSpPr>
+        <p:spPr>
+          <a:xfrm>
+            <a:off x="8074152" y="3959352"/>
+            <a:ext cx="2825496" cy="1170432"/>
+          </a:xfrm>
+          <a:prstGeom prst="rect">
+            <a:avLst/>
+          </a:prstGeom>
+          <a:noFill/>
+          <a:ln/>
+        </p:spPr>
+        <p:txBody>
+          <a:bodyPr wrap="square" lIns="0" tIns="0" rIns="0" bIns="0" rtlCol="0" anchor="t">
+            <a:normAutofit/>
+          </a:bodyPr>
+          <a:lstStyle/>
+          <a:p>
+            <a:pPr indent="0" marL="0">
+              <a:buNone/>
+            </a:pPr>
+            <a:r>
+              <a:rPr lang="en-US" sz="1250" dirty="0">
+                <a:solidFill>
+                  <a:srgbClr val="17364A"/>
+                </a:solidFill>
+                <a:latin typeface="Aptos" pitchFamily="34" charset="0"/>
+                <a:ea typeface="Aptos" pitchFamily="34" charset="-122"/>
+                <a:cs typeface="Aptos" pitchFamily="34" charset="-120"/>
+              </a:rPr>
+              <a:t>Connect the concept to public health decisions, safeguards, documentation, or implementation work.</a:t>
+            </a:r>
+            <a:endParaRPr lang="en-US" sz="1250" dirty="0"/>
           </a:p>
         </p:txBody>
       </p:sp>

--- a/downloads/presentations/modules/lesson-27-public-comment-social-listening-and-community-feedback-analysis.pptx
+++ b/downloads/presentations/modules/lesson-27-public-comment-social-listening-and-community-feedback-analysis.pptx
@@ -3001,6 +3001,45 @@
           </a:p>
         </p:txBody>
       </p:sp>
+      <p:sp>
+        <p:nvSpPr>
+          <p:cNvPr id="8" name="Text 5"/>
+          <p:cNvSpPr/>
+          <p:nvPr/>
+        </p:nvSpPr>
+        <p:spPr>
+          <a:xfrm>
+            <a:off x="11137392" y="6510528"/>
+            <a:ext cx="411480" cy="201168"/>
+          </a:xfrm>
+          <a:prstGeom prst="rect">
+            <a:avLst/>
+          </a:prstGeom>
+          <a:noFill/>
+          <a:ln/>
+        </p:spPr>
+        <p:txBody>
+          <a:bodyPr wrap="square" lIns="0" tIns="0" rIns="0" bIns="0" rtlCol="0" anchor="ctr"/>
+          <a:lstStyle/>
+          <a:p>
+            <a:pPr algn="r" indent="0" marL="0">
+              <a:buNone/>
+            </a:pPr>
+            <a:r>
+              <a:rPr lang="en-US" sz="900" dirty="0">
+                <a:solidFill>
+                  <a:srgbClr val="5F7181"/>
+                </a:solidFill>
+                <a:latin typeface="Aptos" pitchFamily="34" charset="0"/>
+                <a:ea typeface="Aptos" pitchFamily="34" charset="-122"/>
+                <a:cs typeface="Aptos" pitchFamily="34" charset="-120"/>
+              </a:rPr>
+              <a:t>1</a:t>
+            </a:r>
+            <a:endParaRPr lang="en-US" sz="900" dirty="0"/>
+          </a:p>
+        </p:txBody>
+      </p:sp>
     </p:spTree>
   </p:cSld>
   <p:clrMapOvr>
@@ -3194,7 +3233,7 @@
                 <a:ea typeface="Aptos" pitchFamily="34" charset="-122"/>
                 <a:cs typeface="Aptos" pitchFamily="34" charset="-120"/>
               </a:rPr>
-              <a:t>© Paula Soper</a:t>
+              <a:t>Â© Paula Soper</a:t>
             </a:r>
             <a:endParaRPr lang="en-US" sz="800" dirty="0"/>
           </a:p>
@@ -3202,7 +3241,46 @@
       </p:sp>
       <p:sp>
         <p:nvSpPr>
-          <p:cNvPr id="7" name="Shape 5"/>
+          <p:cNvPr id="7" name="Text 5"/>
+          <p:cNvSpPr/>
+          <p:nvPr/>
+        </p:nvSpPr>
+        <p:spPr>
+          <a:xfrm>
+            <a:off x="11137392" y="6510528"/>
+            <a:ext cx="411480" cy="201168"/>
+          </a:xfrm>
+          <a:prstGeom prst="rect">
+            <a:avLst/>
+          </a:prstGeom>
+          <a:noFill/>
+          <a:ln/>
+        </p:spPr>
+        <p:txBody>
+          <a:bodyPr wrap="square" lIns="0" tIns="0" rIns="0" bIns="0" rtlCol="0" anchor="ctr"/>
+          <a:lstStyle/>
+          <a:p>
+            <a:pPr algn="r" indent="0" marL="0">
+              <a:buNone/>
+            </a:pPr>
+            <a:r>
+              <a:rPr lang="en-US" sz="900" dirty="0">
+                <a:solidFill>
+                  <a:srgbClr val="5F7181"/>
+                </a:solidFill>
+                <a:latin typeface="Aptos" pitchFamily="34" charset="0"/>
+                <a:ea typeface="Aptos" pitchFamily="34" charset="-122"/>
+                <a:cs typeface="Aptos" pitchFamily="34" charset="-120"/>
+              </a:rPr>
+              <a:t>10</a:t>
+            </a:r>
+            <a:endParaRPr lang="en-US" sz="900" dirty="0"/>
+          </a:p>
+        </p:txBody>
+      </p:sp>
+      <p:sp>
+        <p:nvSpPr>
+          <p:cNvPr id="8" name="Shape 6"/>
           <p:cNvSpPr/>
           <p:nvPr/>
         </p:nvSpPr>
@@ -3227,7 +3305,7 @@
       </p:sp>
       <p:sp>
         <p:nvSpPr>
-          <p:cNvPr id="8" name="Text 6"/>
+          <p:cNvPr id="9" name="Text 7"/>
           <p:cNvSpPr/>
           <p:nvPr/>
         </p:nvSpPr>
@@ -3266,14 +3344,14 @@
       </p:sp>
       <p:sp>
         <p:nvSpPr>
-          <p:cNvPr id="9" name="Text 7"/>
+          <p:cNvPr id="10" name="Text 8"/>
           <p:cNvSpPr/>
           <p:nvPr/>
         </p:nvSpPr>
         <p:spPr>
           <a:xfrm>
             <a:off x="640080" y="621792"/>
-            <a:ext cx="10881360" cy="566928"/>
+            <a:ext cx="10881360" cy="713232"/>
           </a:xfrm>
           <a:prstGeom prst="rect">
             <a:avLst/>
@@ -3291,7 +3369,7 @@
               <a:buNone/>
             </a:pPr>
             <a:r>
-              <a:rPr lang="en-US" sz="2700" b="1" dirty="0">
+              <a:rPr lang="en-US" sz="3400" b="1" dirty="0">
                 <a:solidFill>
                   <a:srgbClr val="003A63"/>
                 </a:solidFill>
@@ -3301,20 +3379,20 @@
               </a:rPr>
               <a:t>Public Health Example</a:t>
             </a:r>
-            <a:endParaRPr lang="en-US" sz="2700" dirty="0"/>
-          </a:p>
-        </p:txBody>
-      </p:sp>
-      <p:sp>
-        <p:nvSpPr>
-          <p:cNvPr id="10" name="Text 8"/>
-          <p:cNvSpPr/>
-          <p:nvPr/>
-        </p:nvSpPr>
-        <p:spPr>
-          <a:xfrm>
-            <a:off x="868680" y="1417320"/>
-            <a:ext cx="6675120" cy="4434840"/>
+            <a:endParaRPr lang="en-US" sz="3400" dirty="0"/>
+          </a:p>
+        </p:txBody>
+      </p:sp>
+      <p:sp>
+        <p:nvSpPr>
+          <p:cNvPr id="11" name="Text 9"/>
+          <p:cNvSpPr/>
+          <p:nvPr/>
+        </p:nvSpPr>
+        <p:spPr>
+          <a:xfrm>
+            <a:off x="868680" y="1508760"/>
+            <a:ext cx="6537960" cy="4160520"/>
           </a:xfrm>
           <a:prstGeom prst="rect">
             <a:avLst/>
@@ -3329,7 +3407,7 @@
           <a:lstStyle/>
           <a:p>
             <a:r>
-              <a:rPr lang="en-US" sz="1700" dirty="0">
+              <a:rPr lang="en-US" sz="2100" dirty="0">
                 <a:solidFill>
                   <a:srgbClr val="17364A"/>
                 </a:solidFill>
@@ -3337,13 +3415,13 @@
                 <a:ea typeface="Aptos" pitchFamily="34" charset="-122"/>
                 <a:cs typeface="Aptos" pitchFamily="34" charset="-120"/>
               </a:rPr>
-              <a:t>A public health agency is preparing to use AI in a workflow related to ethical analysis of public comments, social.</a:t>
-            </a:r>
-            <a:endParaRPr lang="en-US" sz="1700" dirty="0"/>
-          </a:p>
-          <a:p>
-            <a:r>
-              <a:rPr lang="en-US" sz="1700" dirty="0">
+              <a:t>A public health agency is preparing to use AI in a workflow related to ethical analysis of public.</a:t>
+            </a:r>
+            <a:endParaRPr lang="en-US" sz="2100" dirty="0"/>
+          </a:p>
+          <a:p>
+            <a:r>
+              <a:rPr lang="en-US" sz="2100" dirty="0">
                 <a:solidFill>
                   <a:srgbClr val="17364A"/>
                 </a:solidFill>
@@ -3351,13 +3429,13 @@
                 <a:ea typeface="Aptos" pitchFamily="34" charset="-122"/>
                 <a:cs typeface="Aptos" pitchFamily="34" charset="-120"/>
               </a:rPr>
-              <a:t>The project team initially treats the tool as a helpful efficiency aid, but governance reviewers recognize that the.</a:t>
-            </a:r>
-            <a:endParaRPr lang="en-US" sz="1700" dirty="0"/>
-          </a:p>
-          <a:p>
-            <a:r>
-              <a:rPr lang="en-US" sz="1700" dirty="0">
+              <a:t>The project team initially treats the tool as a helpful efficiency aid, but governance reviewers.</a:t>
+            </a:r>
+            <a:endParaRPr lang="en-US" sz="2100" dirty="0"/>
+          </a:p>
+          <a:p>
+            <a:r>
+              <a:rPr lang="en-US" sz="2100" dirty="0">
                 <a:solidFill>
                   <a:srgbClr val="17364A"/>
                 </a:solidFill>
@@ -3365,29 +3443,15 @@
                 <a:ea typeface="Aptos" pitchFamily="34" charset="-122"/>
                 <a:cs typeface="Aptos" pitchFamily="34" charset="-120"/>
               </a:rPr>
-              <a:t>The agency responds by creating a clear artifact that defines intended use, prohibited use, responsible roles, review.</a:t>
-            </a:r>
-            <a:endParaRPr lang="en-US" sz="1700" dirty="0"/>
-          </a:p>
-          <a:p>
-            <a:r>
-              <a:rPr lang="en-US" sz="1700" dirty="0">
-                <a:solidFill>
-                  <a:srgbClr val="17364A"/>
-                </a:solidFill>
-                <a:latin typeface="Aptos" pitchFamily="34" charset="0"/>
-                <a:ea typeface="Aptos" pitchFamily="34" charset="-122"/>
-                <a:cs typeface="Aptos" pitchFamily="34" charset="-120"/>
-              </a:rPr>
-              <a:t>This converts a broad AI idea into a manageable public health practice.</a:t>
-            </a:r>
-            <a:endParaRPr lang="en-US" sz="1700" dirty="0"/>
-          </a:p>
-        </p:txBody>
-      </p:sp>
-      <p:sp>
-        <p:nvSpPr>
-          <p:cNvPr id="11" name="Shape 9"/>
+              <a:t>The agency responds by creating a clear artifact that defines intended use, prohibited use, responsible.</a:t>
+            </a:r>
+            <a:endParaRPr lang="en-US" sz="2100" dirty="0"/>
+          </a:p>
+        </p:txBody>
+      </p:sp>
+      <p:sp>
+        <p:nvSpPr>
+          <p:cNvPr id="12" name="Shape 10"/>
           <p:cNvSpPr/>
           <p:nvPr/>
         </p:nvSpPr>
@@ -3414,14 +3478,14 @@
       </p:sp>
       <p:sp>
         <p:nvSpPr>
-          <p:cNvPr id="12" name="Text 10"/>
+          <p:cNvPr id="13" name="Text 11"/>
           <p:cNvSpPr/>
           <p:nvPr/>
         </p:nvSpPr>
         <p:spPr>
           <a:xfrm>
             <a:off x="8074152" y="1563624"/>
-            <a:ext cx="2825496" cy="201168"/>
+            <a:ext cx="2825496" cy="256032"/>
           </a:xfrm>
           <a:prstGeom prst="rect">
             <a:avLst/>
@@ -3437,7 +3501,7 @@
               <a:buNone/>
             </a:pPr>
             <a:r>
-              <a:rPr lang="en-US" sz="950" b="1" dirty="0">
+              <a:rPr lang="en-US" sz="1300" b="1" dirty="0">
                 <a:solidFill>
                   <a:srgbClr val="0068B7"/>
                 </a:solidFill>
@@ -3447,20 +3511,20 @@
               </a:rPr>
               <a:t>Key idea</a:t>
             </a:r>
-            <a:endParaRPr lang="en-US" sz="950" dirty="0"/>
-          </a:p>
-        </p:txBody>
-      </p:sp>
-      <p:sp>
-        <p:nvSpPr>
-          <p:cNvPr id="13" name="Text 11"/>
-          <p:cNvSpPr/>
-          <p:nvPr/>
-        </p:nvSpPr>
-        <p:spPr>
-          <a:xfrm>
-            <a:off x="8074152" y="1856232"/>
-            <a:ext cx="2825496" cy="1261872"/>
+            <a:endParaRPr lang="en-US" sz="1300" dirty="0"/>
+          </a:p>
+        </p:txBody>
+      </p:sp>
+      <p:sp>
+        <p:nvSpPr>
+          <p:cNvPr id="14" name="Text 12"/>
+          <p:cNvSpPr/>
+          <p:nvPr/>
+        </p:nvSpPr>
+        <p:spPr>
+          <a:xfrm>
+            <a:off x="8074152" y="1920240"/>
+            <a:ext cx="2825496" cy="1188720"/>
           </a:xfrm>
           <a:prstGeom prst="rect">
             <a:avLst/>
@@ -3478,7 +3542,7 @@
               <a:buNone/>
             </a:pPr>
             <a:r>
-              <a:rPr lang="en-US" sz="1250" dirty="0">
+              <a:rPr lang="en-US" sz="1550" dirty="0">
                 <a:solidFill>
                   <a:srgbClr val="17364A"/>
                 </a:solidFill>
@@ -3486,15 +3550,15 @@
                 <a:ea typeface="Aptos" pitchFamily="34" charset="-122"/>
                 <a:cs typeface="Aptos" pitchFamily="34" charset="-120"/>
               </a:rPr>
-              <a:t>A public health agency is preparing to use AI in a workflow related to ethical analysis of public comments, social.</a:t>
-            </a:r>
-            <a:endParaRPr lang="en-US" sz="1250" dirty="0"/>
-          </a:p>
-        </p:txBody>
-      </p:sp>
-      <p:sp>
-        <p:nvSpPr>
-          <p:cNvPr id="14" name="Shape 12"/>
+              <a:t>A public health agency is preparing to use AI in a workflow related to ethical analysis of public.</a:t>
+            </a:r>
+            <a:endParaRPr lang="en-US" sz="1550" dirty="0"/>
+          </a:p>
+        </p:txBody>
+      </p:sp>
+      <p:sp>
+        <p:nvSpPr>
+          <p:cNvPr id="15" name="Shape 13"/>
           <p:cNvSpPr/>
           <p:nvPr/>
         </p:nvSpPr>
@@ -3521,14 +3585,14 @@
       </p:sp>
       <p:sp>
         <p:nvSpPr>
-          <p:cNvPr id="15" name="Text 13"/>
+          <p:cNvPr id="16" name="Text 14"/>
           <p:cNvSpPr/>
           <p:nvPr/>
         </p:nvSpPr>
         <p:spPr>
           <a:xfrm>
             <a:off x="8074152" y="3666744"/>
-            <a:ext cx="2825496" cy="201168"/>
+            <a:ext cx="2825496" cy="256032"/>
           </a:xfrm>
           <a:prstGeom prst="rect">
             <a:avLst/>
@@ -3544,7 +3608,7 @@
               <a:buNone/>
             </a:pPr>
             <a:r>
-              <a:rPr lang="en-US" sz="950" b="1" dirty="0">
+              <a:rPr lang="en-US" sz="1300" b="1" dirty="0">
                 <a:solidFill>
                   <a:srgbClr val="0068B7"/>
                 </a:solidFill>
@@ -3554,20 +3618,20 @@
               </a:rPr>
               <a:t>Use this for</a:t>
             </a:r>
-            <a:endParaRPr lang="en-US" sz="950" dirty="0"/>
-          </a:p>
-        </p:txBody>
-      </p:sp>
-      <p:sp>
-        <p:nvSpPr>
-          <p:cNvPr id="16" name="Text 14"/>
-          <p:cNvSpPr/>
-          <p:nvPr/>
-        </p:nvSpPr>
-        <p:spPr>
-          <a:xfrm>
-            <a:off x="8074152" y="3959352"/>
-            <a:ext cx="2825496" cy="1170432"/>
+            <a:endParaRPr lang="en-US" sz="1300" dirty="0"/>
+          </a:p>
+        </p:txBody>
+      </p:sp>
+      <p:sp>
+        <p:nvSpPr>
+          <p:cNvPr id="17" name="Text 15"/>
+          <p:cNvSpPr/>
+          <p:nvPr/>
+        </p:nvSpPr>
+        <p:spPr>
+          <a:xfrm>
+            <a:off x="8074152" y="4023360"/>
+            <a:ext cx="2825496" cy="1097280"/>
           </a:xfrm>
           <a:prstGeom prst="rect">
             <a:avLst/>
@@ -3585,7 +3649,7 @@
               <a:buNone/>
             </a:pPr>
             <a:r>
-              <a:rPr lang="en-US" sz="1250" dirty="0">
+              <a:rPr lang="en-US" sz="1550" dirty="0">
                 <a:solidFill>
                   <a:srgbClr val="17364A"/>
                 </a:solidFill>
@@ -3595,7 +3659,7 @@
               </a:rPr>
               <a:t>Connect the concept to public health decisions, safeguards, documentation, or implementation work.</a:t>
             </a:r>
-            <a:endParaRPr lang="en-US" sz="1250" dirty="0"/>
+            <a:endParaRPr lang="en-US" sz="1550" dirty="0"/>
           </a:p>
         </p:txBody>
       </p:sp>
@@ -3792,7 +3856,7 @@
                 <a:ea typeface="Aptos" pitchFamily="34" charset="-122"/>
                 <a:cs typeface="Aptos" pitchFamily="34" charset="-120"/>
               </a:rPr>
-              <a:t>© Paula Soper</a:t>
+              <a:t>Â© Paula Soper</a:t>
             </a:r>
             <a:endParaRPr lang="en-US" sz="800" dirty="0"/>
           </a:p>
@@ -3800,7 +3864,46 @@
       </p:sp>
       <p:sp>
         <p:nvSpPr>
-          <p:cNvPr id="7" name="Shape 5"/>
+          <p:cNvPr id="7" name="Text 5"/>
+          <p:cNvSpPr/>
+          <p:nvPr/>
+        </p:nvSpPr>
+        <p:spPr>
+          <a:xfrm>
+            <a:off x="11137392" y="6510528"/>
+            <a:ext cx="411480" cy="201168"/>
+          </a:xfrm>
+          <a:prstGeom prst="rect">
+            <a:avLst/>
+          </a:prstGeom>
+          <a:noFill/>
+          <a:ln/>
+        </p:spPr>
+        <p:txBody>
+          <a:bodyPr wrap="square" lIns="0" tIns="0" rIns="0" bIns="0" rtlCol="0" anchor="ctr"/>
+          <a:lstStyle/>
+          <a:p>
+            <a:pPr algn="r" indent="0" marL="0">
+              <a:buNone/>
+            </a:pPr>
+            <a:r>
+              <a:rPr lang="en-US" sz="900" dirty="0">
+                <a:solidFill>
+                  <a:srgbClr val="5F7181"/>
+                </a:solidFill>
+                <a:latin typeface="Aptos" pitchFamily="34" charset="0"/>
+                <a:ea typeface="Aptos" pitchFamily="34" charset="-122"/>
+                <a:cs typeface="Aptos" pitchFamily="34" charset="-120"/>
+              </a:rPr>
+              <a:t>11</a:t>
+            </a:r>
+            <a:endParaRPr lang="en-US" sz="900" dirty="0"/>
+          </a:p>
+        </p:txBody>
+      </p:sp>
+      <p:sp>
+        <p:nvSpPr>
+          <p:cNvPr id="8" name="Shape 6"/>
           <p:cNvSpPr/>
           <p:nvPr/>
         </p:nvSpPr>
@@ -3825,7 +3928,7 @@
       </p:sp>
       <p:sp>
         <p:nvSpPr>
-          <p:cNvPr id="8" name="Text 6"/>
+          <p:cNvPr id="9" name="Text 7"/>
           <p:cNvSpPr/>
           <p:nvPr/>
         </p:nvSpPr>
@@ -3864,14 +3967,14 @@
       </p:sp>
       <p:sp>
         <p:nvSpPr>
-          <p:cNvPr id="9" name="Text 7"/>
+          <p:cNvPr id="10" name="Text 8"/>
           <p:cNvSpPr/>
           <p:nvPr/>
         </p:nvSpPr>
         <p:spPr>
           <a:xfrm>
             <a:off x="640080" y="621792"/>
-            <a:ext cx="10881360" cy="566928"/>
+            <a:ext cx="10881360" cy="713232"/>
           </a:xfrm>
           <a:prstGeom prst="rect">
             <a:avLst/>
@@ -3889,7 +3992,7 @@
               <a:buNone/>
             </a:pPr>
             <a:r>
-              <a:rPr lang="en-US" sz="2700" b="1" dirty="0">
+              <a:rPr lang="en-US" sz="3400" b="1" dirty="0">
                 <a:solidFill>
                   <a:srgbClr val="003A63"/>
                 </a:solidFill>
@@ -3899,20 +4002,20 @@
               </a:rPr>
               <a:t>Topic Deep Dive</a:t>
             </a:r>
-            <a:endParaRPr lang="en-US" sz="2700" dirty="0"/>
-          </a:p>
-        </p:txBody>
-      </p:sp>
-      <p:sp>
-        <p:nvSpPr>
-          <p:cNvPr id="10" name="Text 8"/>
-          <p:cNvSpPr/>
-          <p:nvPr/>
-        </p:nvSpPr>
-        <p:spPr>
-          <a:xfrm>
-            <a:off x="868680" y="1417320"/>
-            <a:ext cx="6675120" cy="4434840"/>
+            <a:endParaRPr lang="en-US" sz="3400" dirty="0"/>
+          </a:p>
+        </p:txBody>
+      </p:sp>
+      <p:sp>
+        <p:nvSpPr>
+          <p:cNvPr id="11" name="Text 9"/>
+          <p:cNvSpPr/>
+          <p:nvPr/>
+        </p:nvSpPr>
+        <p:spPr>
+          <a:xfrm>
+            <a:off x="868680" y="1508760"/>
+            <a:ext cx="6537960" cy="4160520"/>
           </a:xfrm>
           <a:prstGeom prst="rect">
             <a:avLst/>
@@ -3927,7 +4030,7 @@
           <a:lstStyle/>
           <a:p>
             <a:r>
-              <a:rPr lang="en-US" sz="1700" dirty="0">
+              <a:rPr lang="en-US" sz="2100" dirty="0">
                 <a:solidFill>
                   <a:srgbClr val="17364A"/>
                 </a:solidFill>
@@ -3937,11 +4040,11 @@
               </a:rPr>
               <a:t>The first step in this topic is to define the decision or workflow clearly.</a:t>
             </a:r>
-            <a:endParaRPr lang="en-US" sz="1700" dirty="0"/>
-          </a:p>
-          <a:p>
-            <a:r>
-              <a:rPr lang="en-US" sz="1700" dirty="0">
+            <a:endParaRPr lang="en-US" sz="2100" dirty="0"/>
+          </a:p>
+          <a:p>
+            <a:r>
+              <a:rPr lang="en-US" sz="2100" dirty="0">
                 <a:solidFill>
                   <a:srgbClr val="17364A"/>
                 </a:solidFill>
@@ -3949,13 +4052,13 @@
                 <a:ea typeface="Aptos" pitchFamily="34" charset="-122"/>
                 <a:cs typeface="Aptos" pitchFamily="34" charset="-120"/>
               </a:rPr>
-              <a:t>Staff should identify who is affected, what data are used, what AI output is produced, who reviews the output, and what.</a:t>
-            </a:r>
-            <a:endParaRPr lang="en-US" sz="1700" dirty="0"/>
-          </a:p>
-          <a:p>
-            <a:r>
-              <a:rPr lang="en-US" sz="1700" dirty="0">
+              <a:t>Staff should identify who is affected, what data are used, what AI output is produced, who reviews the.</a:t>
+            </a:r>
+            <a:endParaRPr lang="en-US" sz="2100" dirty="0"/>
+          </a:p>
+          <a:p>
+            <a:r>
+              <a:rPr lang="en-US" sz="2100" dirty="0">
                 <a:solidFill>
                   <a:srgbClr val="17364A"/>
                 </a:solidFill>
@@ -3965,27 +4068,13 @@
               </a:rPr>
               <a:t>This prevents the module from becoming abstract and anchors the work in public health practice.</a:t>
             </a:r>
-            <a:endParaRPr lang="en-US" sz="1700" dirty="0"/>
-          </a:p>
-          <a:p>
-            <a:r>
-              <a:rPr lang="en-US" sz="1700" dirty="0">
-                <a:solidFill>
-                  <a:srgbClr val="17364A"/>
-                </a:solidFill>
-                <a:latin typeface="Aptos" pitchFamily="34" charset="0"/>
-                <a:ea typeface="Aptos" pitchFamily="34" charset="-122"/>
-                <a:cs typeface="Aptos" pitchFamily="34" charset="-120"/>
-              </a:rPr>
-              <a:t>The second step is to assign responsibilities.</a:t>
-            </a:r>
-            <a:endParaRPr lang="en-US" sz="1700" dirty="0"/>
-          </a:p>
-        </p:txBody>
-      </p:sp>
-      <p:sp>
-        <p:nvSpPr>
-          <p:cNvPr id="11" name="Shape 9"/>
+            <a:endParaRPr lang="en-US" sz="2100" dirty="0"/>
+          </a:p>
+        </p:txBody>
+      </p:sp>
+      <p:sp>
+        <p:nvSpPr>
+          <p:cNvPr id="12" name="Shape 10"/>
           <p:cNvSpPr/>
           <p:nvPr/>
         </p:nvSpPr>
@@ -4012,14 +4101,14 @@
       </p:sp>
       <p:sp>
         <p:nvSpPr>
-          <p:cNvPr id="12" name="Text 10"/>
+          <p:cNvPr id="13" name="Text 11"/>
           <p:cNvSpPr/>
           <p:nvPr/>
         </p:nvSpPr>
         <p:spPr>
           <a:xfrm>
             <a:off x="8074152" y="1563624"/>
-            <a:ext cx="2825496" cy="201168"/>
+            <a:ext cx="2825496" cy="256032"/>
           </a:xfrm>
           <a:prstGeom prst="rect">
             <a:avLst/>
@@ -4035,7 +4124,7 @@
               <a:buNone/>
             </a:pPr>
             <a:r>
-              <a:rPr lang="en-US" sz="950" b="1" dirty="0">
+              <a:rPr lang="en-US" sz="1300" b="1" dirty="0">
                 <a:solidFill>
                   <a:srgbClr val="0068B7"/>
                 </a:solidFill>
@@ -4045,20 +4134,20 @@
               </a:rPr>
               <a:t>Key idea</a:t>
             </a:r>
-            <a:endParaRPr lang="en-US" sz="950" dirty="0"/>
-          </a:p>
-        </p:txBody>
-      </p:sp>
-      <p:sp>
-        <p:nvSpPr>
-          <p:cNvPr id="13" name="Text 11"/>
-          <p:cNvSpPr/>
-          <p:nvPr/>
-        </p:nvSpPr>
-        <p:spPr>
-          <a:xfrm>
-            <a:off x="8074152" y="1856232"/>
-            <a:ext cx="2825496" cy="1261872"/>
+            <a:endParaRPr lang="en-US" sz="1300" dirty="0"/>
+          </a:p>
+        </p:txBody>
+      </p:sp>
+      <p:sp>
+        <p:nvSpPr>
+          <p:cNvPr id="14" name="Text 12"/>
+          <p:cNvSpPr/>
+          <p:nvPr/>
+        </p:nvSpPr>
+        <p:spPr>
+          <a:xfrm>
+            <a:off x="8074152" y="1920240"/>
+            <a:ext cx="2825496" cy="1188720"/>
           </a:xfrm>
           <a:prstGeom prst="rect">
             <a:avLst/>
@@ -4076,7 +4165,7 @@
               <a:buNone/>
             </a:pPr>
             <a:r>
-              <a:rPr lang="en-US" sz="1250" dirty="0">
+              <a:rPr lang="en-US" sz="1550" dirty="0">
                 <a:solidFill>
                   <a:srgbClr val="17364A"/>
                 </a:solidFill>
@@ -4086,13 +4175,13 @@
               </a:rPr>
               <a:t>The first step in this topic is to define the decision or workflow clearly.</a:t>
             </a:r>
-            <a:endParaRPr lang="en-US" sz="1250" dirty="0"/>
-          </a:p>
-        </p:txBody>
-      </p:sp>
-      <p:sp>
-        <p:nvSpPr>
-          <p:cNvPr id="14" name="Shape 12"/>
+            <a:endParaRPr lang="en-US" sz="1550" dirty="0"/>
+          </a:p>
+        </p:txBody>
+      </p:sp>
+      <p:sp>
+        <p:nvSpPr>
+          <p:cNvPr id="15" name="Shape 13"/>
           <p:cNvSpPr/>
           <p:nvPr/>
         </p:nvSpPr>
@@ -4119,14 +4208,14 @@
       </p:sp>
       <p:sp>
         <p:nvSpPr>
-          <p:cNvPr id="15" name="Text 13"/>
+          <p:cNvPr id="16" name="Text 14"/>
           <p:cNvSpPr/>
           <p:nvPr/>
         </p:nvSpPr>
         <p:spPr>
           <a:xfrm>
             <a:off x="8074152" y="3666744"/>
-            <a:ext cx="2825496" cy="201168"/>
+            <a:ext cx="2825496" cy="256032"/>
           </a:xfrm>
           <a:prstGeom prst="rect">
             <a:avLst/>
@@ -4142,7 +4231,7 @@
               <a:buNone/>
             </a:pPr>
             <a:r>
-              <a:rPr lang="en-US" sz="950" b="1" dirty="0">
+              <a:rPr lang="en-US" sz="1300" b="1" dirty="0">
                 <a:solidFill>
                   <a:srgbClr val="0068B7"/>
                 </a:solidFill>
@@ -4152,20 +4241,20 @@
               </a:rPr>
               <a:t>Use this for</a:t>
             </a:r>
-            <a:endParaRPr lang="en-US" sz="950" dirty="0"/>
-          </a:p>
-        </p:txBody>
-      </p:sp>
-      <p:sp>
-        <p:nvSpPr>
-          <p:cNvPr id="16" name="Text 14"/>
-          <p:cNvSpPr/>
-          <p:nvPr/>
-        </p:nvSpPr>
-        <p:spPr>
-          <a:xfrm>
-            <a:off x="8074152" y="3959352"/>
-            <a:ext cx="2825496" cy="1170432"/>
+            <a:endParaRPr lang="en-US" sz="1300" dirty="0"/>
+          </a:p>
+        </p:txBody>
+      </p:sp>
+      <p:sp>
+        <p:nvSpPr>
+          <p:cNvPr id="17" name="Text 15"/>
+          <p:cNvSpPr/>
+          <p:nvPr/>
+        </p:nvSpPr>
+        <p:spPr>
+          <a:xfrm>
+            <a:off x="8074152" y="4023360"/>
+            <a:ext cx="2825496" cy="1097280"/>
           </a:xfrm>
           <a:prstGeom prst="rect">
             <a:avLst/>
@@ -4183,7 +4272,7 @@
               <a:buNone/>
             </a:pPr>
             <a:r>
-              <a:rPr lang="en-US" sz="1250" dirty="0">
+              <a:rPr lang="en-US" sz="1550" dirty="0">
                 <a:solidFill>
                   <a:srgbClr val="17364A"/>
                 </a:solidFill>
@@ -4193,7 +4282,7 @@
               </a:rPr>
               <a:t>Connect the concept to public health decisions, safeguards, documentation, or implementation work.</a:t>
             </a:r>
-            <a:endParaRPr lang="en-US" sz="1250" dirty="0"/>
+            <a:endParaRPr lang="en-US" sz="1550" dirty="0"/>
           </a:p>
         </p:txBody>
       </p:sp>
@@ -4390,7 +4479,7 @@
                 <a:ea typeface="Aptos" pitchFamily="34" charset="-122"/>
                 <a:cs typeface="Aptos" pitchFamily="34" charset="-120"/>
               </a:rPr>
-              <a:t>© Paula Soper</a:t>
+              <a:t>Â© Paula Soper</a:t>
             </a:r>
             <a:endParaRPr lang="en-US" sz="800" dirty="0"/>
           </a:p>
@@ -4398,7 +4487,46 @@
       </p:sp>
       <p:sp>
         <p:nvSpPr>
-          <p:cNvPr id="7" name="Shape 5"/>
+          <p:cNvPr id="7" name="Text 5"/>
+          <p:cNvSpPr/>
+          <p:nvPr/>
+        </p:nvSpPr>
+        <p:spPr>
+          <a:xfrm>
+            <a:off x="11137392" y="6510528"/>
+            <a:ext cx="411480" cy="201168"/>
+          </a:xfrm>
+          <a:prstGeom prst="rect">
+            <a:avLst/>
+          </a:prstGeom>
+          <a:noFill/>
+          <a:ln/>
+        </p:spPr>
+        <p:txBody>
+          <a:bodyPr wrap="square" lIns="0" tIns="0" rIns="0" bIns="0" rtlCol="0" anchor="ctr"/>
+          <a:lstStyle/>
+          <a:p>
+            <a:pPr algn="r" indent="0" marL="0">
+              <a:buNone/>
+            </a:pPr>
+            <a:r>
+              <a:rPr lang="en-US" sz="900" dirty="0">
+                <a:solidFill>
+                  <a:srgbClr val="5F7181"/>
+                </a:solidFill>
+                <a:latin typeface="Aptos" pitchFamily="34" charset="0"/>
+                <a:ea typeface="Aptos" pitchFamily="34" charset="-122"/>
+                <a:cs typeface="Aptos" pitchFamily="34" charset="-120"/>
+              </a:rPr>
+              <a:t>12</a:t>
+            </a:r>
+            <a:endParaRPr lang="en-US" sz="900" dirty="0"/>
+          </a:p>
+        </p:txBody>
+      </p:sp>
+      <p:sp>
+        <p:nvSpPr>
+          <p:cNvPr id="8" name="Shape 6"/>
           <p:cNvSpPr/>
           <p:nvPr/>
         </p:nvSpPr>
@@ -4423,7 +4551,7 @@
       </p:sp>
       <p:sp>
         <p:nvSpPr>
-          <p:cNvPr id="8" name="Text 6"/>
+          <p:cNvPr id="9" name="Text 7"/>
           <p:cNvSpPr/>
           <p:nvPr/>
         </p:nvSpPr>
@@ -4462,14 +4590,14 @@
       </p:sp>
       <p:sp>
         <p:nvSpPr>
-          <p:cNvPr id="9" name="Text 7"/>
+          <p:cNvPr id="10" name="Text 8"/>
           <p:cNvSpPr/>
           <p:nvPr/>
         </p:nvSpPr>
         <p:spPr>
           <a:xfrm>
             <a:off x="640080" y="621792"/>
-            <a:ext cx="10881360" cy="566928"/>
+            <a:ext cx="10881360" cy="713232"/>
           </a:xfrm>
           <a:prstGeom prst="rect">
             <a:avLst/>
@@ -4487,7 +4615,7 @@
               <a:buNone/>
             </a:pPr>
             <a:r>
-              <a:rPr lang="en-US" sz="2700" b="1" dirty="0">
+              <a:rPr lang="en-US" sz="3400" b="1" dirty="0">
                 <a:solidFill>
                   <a:srgbClr val="003A63"/>
                 </a:solidFill>
@@ -4497,20 +4625,20 @@
               </a:rPr>
               <a:t>Risks, Failure Modes, and Guardrails</a:t>
             </a:r>
-            <a:endParaRPr lang="en-US" sz="2700" dirty="0"/>
-          </a:p>
-        </p:txBody>
-      </p:sp>
-      <p:sp>
-        <p:nvSpPr>
-          <p:cNvPr id="10" name="Text 8"/>
-          <p:cNvSpPr/>
-          <p:nvPr/>
-        </p:nvSpPr>
-        <p:spPr>
-          <a:xfrm>
-            <a:off x="868680" y="1417320"/>
-            <a:ext cx="6675120" cy="4434840"/>
+            <a:endParaRPr lang="en-US" sz="3400" dirty="0"/>
+          </a:p>
+        </p:txBody>
+      </p:sp>
+      <p:sp>
+        <p:nvSpPr>
+          <p:cNvPr id="11" name="Text 9"/>
+          <p:cNvSpPr/>
+          <p:nvPr/>
+        </p:nvSpPr>
+        <p:spPr>
+          <a:xfrm>
+            <a:off x="868680" y="1508760"/>
+            <a:ext cx="6537960" cy="4160520"/>
           </a:xfrm>
           <a:prstGeom prst="rect">
             <a:avLst/>
@@ -4525,7 +4653,7 @@
           <a:lstStyle/>
           <a:p>
             <a:r>
-              <a:rPr lang="en-US" sz="1700" dirty="0">
+              <a:rPr lang="en-US" sz="2100" dirty="0">
                 <a:solidFill>
                   <a:srgbClr val="17364A"/>
                 </a:solidFill>
@@ -4535,11 +4663,11 @@
               </a:rPr>
               <a:t>A common failure mode is treating the topic as a one-time checklist.</a:t>
             </a:r>
-            <a:endParaRPr lang="en-US" sz="1700" dirty="0"/>
-          </a:p>
-          <a:p>
-            <a:r>
-              <a:rPr lang="en-US" sz="1700" dirty="0">
+            <a:endParaRPr lang="en-US" sz="2100" dirty="0"/>
+          </a:p>
+          <a:p>
+            <a:r>
+              <a:rPr lang="en-US" sz="2100" dirty="0">
                 <a:solidFill>
                   <a:srgbClr val="17364A"/>
                 </a:solidFill>
@@ -4549,11 +4677,11 @@
               </a:rPr>
               <a:t>AI risks can change when data sources, models, vendors, policies, users, or public expectations change.</a:t>
             </a:r>
-            <a:endParaRPr lang="en-US" sz="1700" dirty="0"/>
-          </a:p>
-          <a:p>
-            <a:r>
-              <a:rPr lang="en-US" sz="1700" dirty="0">
+            <a:endParaRPr lang="en-US" sz="2100" dirty="0"/>
+          </a:p>
+          <a:p>
+            <a:r>
+              <a:rPr lang="en-US" sz="2100" dirty="0">
                 <a:solidFill>
                   <a:srgbClr val="17364A"/>
                 </a:solidFill>
@@ -4563,27 +4691,13 @@
               </a:rPr>
               <a:t>A guardrail is to define review intervals and change triggers.</a:t>
             </a:r>
-            <a:endParaRPr lang="en-US" sz="1700" dirty="0"/>
-          </a:p>
-          <a:p>
-            <a:r>
-              <a:rPr lang="en-US" sz="1700" dirty="0">
-                <a:solidFill>
-                  <a:srgbClr val="17364A"/>
-                </a:solidFill>
-                <a:latin typeface="Aptos" pitchFamily="34" charset="0"/>
-                <a:ea typeface="Aptos" pitchFamily="34" charset="-122"/>
-                <a:cs typeface="Aptos" pitchFamily="34" charset="-120"/>
-              </a:rPr>
-              <a:t>Another failure mode is unclear ownership.</a:t>
-            </a:r>
-            <a:endParaRPr lang="en-US" sz="1700" dirty="0"/>
-          </a:p>
-        </p:txBody>
-      </p:sp>
-      <p:sp>
-        <p:nvSpPr>
-          <p:cNvPr id="11" name="Shape 9"/>
+            <a:endParaRPr lang="en-US" sz="2100" dirty="0"/>
+          </a:p>
+        </p:txBody>
+      </p:sp>
+      <p:sp>
+        <p:nvSpPr>
+          <p:cNvPr id="12" name="Shape 10"/>
           <p:cNvSpPr/>
           <p:nvPr/>
         </p:nvSpPr>
@@ -4610,14 +4724,14 @@
       </p:sp>
       <p:sp>
         <p:nvSpPr>
-          <p:cNvPr id="12" name="Text 10"/>
+          <p:cNvPr id="13" name="Text 11"/>
           <p:cNvSpPr/>
           <p:nvPr/>
         </p:nvSpPr>
         <p:spPr>
           <a:xfrm>
             <a:off x="8074152" y="1563624"/>
-            <a:ext cx="2825496" cy="201168"/>
+            <a:ext cx="2825496" cy="256032"/>
           </a:xfrm>
           <a:prstGeom prst="rect">
             <a:avLst/>
@@ -4633,7 +4747,7 @@
               <a:buNone/>
             </a:pPr>
             <a:r>
-              <a:rPr lang="en-US" sz="950" b="1" dirty="0">
+              <a:rPr lang="en-US" sz="1300" b="1" dirty="0">
                 <a:solidFill>
                   <a:srgbClr val="0068B7"/>
                 </a:solidFill>
@@ -4643,20 +4757,20 @@
               </a:rPr>
               <a:t>Key idea</a:t>
             </a:r>
-            <a:endParaRPr lang="en-US" sz="950" dirty="0"/>
-          </a:p>
-        </p:txBody>
-      </p:sp>
-      <p:sp>
-        <p:nvSpPr>
-          <p:cNvPr id="13" name="Text 11"/>
-          <p:cNvSpPr/>
-          <p:nvPr/>
-        </p:nvSpPr>
-        <p:spPr>
-          <a:xfrm>
-            <a:off x="8074152" y="1856232"/>
-            <a:ext cx="2825496" cy="1261872"/>
+            <a:endParaRPr lang="en-US" sz="1300" dirty="0"/>
+          </a:p>
+        </p:txBody>
+      </p:sp>
+      <p:sp>
+        <p:nvSpPr>
+          <p:cNvPr id="14" name="Text 12"/>
+          <p:cNvSpPr/>
+          <p:nvPr/>
+        </p:nvSpPr>
+        <p:spPr>
+          <a:xfrm>
+            <a:off x="8074152" y="1920240"/>
+            <a:ext cx="2825496" cy="1188720"/>
           </a:xfrm>
           <a:prstGeom prst="rect">
             <a:avLst/>
@@ -4674,7 +4788,7 @@
               <a:buNone/>
             </a:pPr>
             <a:r>
-              <a:rPr lang="en-US" sz="1250" dirty="0">
+              <a:rPr lang="en-US" sz="1550" dirty="0">
                 <a:solidFill>
                   <a:srgbClr val="17364A"/>
                 </a:solidFill>
@@ -4684,13 +4798,13 @@
               </a:rPr>
               <a:t>A common failure mode is treating the topic as a one-time checklist.</a:t>
             </a:r>
-            <a:endParaRPr lang="en-US" sz="1250" dirty="0"/>
-          </a:p>
-        </p:txBody>
-      </p:sp>
-      <p:sp>
-        <p:nvSpPr>
-          <p:cNvPr id="14" name="Shape 12"/>
+            <a:endParaRPr lang="en-US" sz="1550" dirty="0"/>
+          </a:p>
+        </p:txBody>
+      </p:sp>
+      <p:sp>
+        <p:nvSpPr>
+          <p:cNvPr id="15" name="Shape 13"/>
           <p:cNvSpPr/>
           <p:nvPr/>
         </p:nvSpPr>
@@ -4717,14 +4831,14 @@
       </p:sp>
       <p:sp>
         <p:nvSpPr>
-          <p:cNvPr id="15" name="Text 13"/>
+          <p:cNvPr id="16" name="Text 14"/>
           <p:cNvSpPr/>
           <p:nvPr/>
         </p:nvSpPr>
         <p:spPr>
           <a:xfrm>
             <a:off x="8074152" y="3666744"/>
-            <a:ext cx="2825496" cy="201168"/>
+            <a:ext cx="2825496" cy="256032"/>
           </a:xfrm>
           <a:prstGeom prst="rect">
             <a:avLst/>
@@ -4740,7 +4854,7 @@
               <a:buNone/>
             </a:pPr>
             <a:r>
-              <a:rPr lang="en-US" sz="950" b="1" dirty="0">
+              <a:rPr lang="en-US" sz="1300" b="1" dirty="0">
                 <a:solidFill>
                   <a:srgbClr val="0068B7"/>
                 </a:solidFill>
@@ -4750,20 +4864,20 @@
               </a:rPr>
               <a:t>Use this for</a:t>
             </a:r>
-            <a:endParaRPr lang="en-US" sz="950" dirty="0"/>
-          </a:p>
-        </p:txBody>
-      </p:sp>
-      <p:sp>
-        <p:nvSpPr>
-          <p:cNvPr id="16" name="Text 14"/>
-          <p:cNvSpPr/>
-          <p:nvPr/>
-        </p:nvSpPr>
-        <p:spPr>
-          <a:xfrm>
-            <a:off x="8074152" y="3959352"/>
-            <a:ext cx="2825496" cy="1170432"/>
+            <a:endParaRPr lang="en-US" sz="1300" dirty="0"/>
+          </a:p>
+        </p:txBody>
+      </p:sp>
+      <p:sp>
+        <p:nvSpPr>
+          <p:cNvPr id="17" name="Text 15"/>
+          <p:cNvSpPr/>
+          <p:nvPr/>
+        </p:nvSpPr>
+        <p:spPr>
+          <a:xfrm>
+            <a:off x="8074152" y="4023360"/>
+            <a:ext cx="2825496" cy="1097280"/>
           </a:xfrm>
           <a:prstGeom prst="rect">
             <a:avLst/>
@@ -4781,7 +4895,7 @@
               <a:buNone/>
             </a:pPr>
             <a:r>
-              <a:rPr lang="en-US" sz="1250" dirty="0">
+              <a:rPr lang="en-US" sz="1550" dirty="0">
                 <a:solidFill>
                   <a:srgbClr val="17364A"/>
                 </a:solidFill>
@@ -4791,7 +4905,7 @@
               </a:rPr>
               <a:t>Connect the concept to public health decisions, safeguards, documentation, or implementation work.</a:t>
             </a:r>
-            <a:endParaRPr lang="en-US" sz="1250" dirty="0"/>
+            <a:endParaRPr lang="en-US" sz="1550" dirty="0"/>
           </a:p>
         </p:txBody>
       </p:sp>
@@ -4988,7 +5102,7 @@
                 <a:ea typeface="Aptos" pitchFamily="34" charset="-122"/>
                 <a:cs typeface="Aptos" pitchFamily="34" charset="-120"/>
               </a:rPr>
-              <a:t>© Paula Soper</a:t>
+              <a:t>Â© Paula Soper</a:t>
             </a:r>
             <a:endParaRPr lang="en-US" sz="800" dirty="0"/>
           </a:p>
@@ -4996,7 +5110,46 @@
       </p:sp>
       <p:sp>
         <p:nvSpPr>
-          <p:cNvPr id="7" name="Shape 5"/>
+          <p:cNvPr id="7" name="Text 5"/>
+          <p:cNvSpPr/>
+          <p:nvPr/>
+        </p:nvSpPr>
+        <p:spPr>
+          <a:xfrm>
+            <a:off x="11137392" y="6510528"/>
+            <a:ext cx="411480" cy="201168"/>
+          </a:xfrm>
+          <a:prstGeom prst="rect">
+            <a:avLst/>
+          </a:prstGeom>
+          <a:noFill/>
+          <a:ln/>
+        </p:spPr>
+        <p:txBody>
+          <a:bodyPr wrap="square" lIns="0" tIns="0" rIns="0" bIns="0" rtlCol="0" anchor="ctr"/>
+          <a:lstStyle/>
+          <a:p>
+            <a:pPr algn="r" indent="0" marL="0">
+              <a:buNone/>
+            </a:pPr>
+            <a:r>
+              <a:rPr lang="en-US" sz="900" dirty="0">
+                <a:solidFill>
+                  <a:srgbClr val="5F7181"/>
+                </a:solidFill>
+                <a:latin typeface="Aptos" pitchFamily="34" charset="0"/>
+                <a:ea typeface="Aptos" pitchFamily="34" charset="-122"/>
+                <a:cs typeface="Aptos" pitchFamily="34" charset="-120"/>
+              </a:rPr>
+              <a:t>13</a:t>
+            </a:r>
+            <a:endParaRPr lang="en-US" sz="900" dirty="0"/>
+          </a:p>
+        </p:txBody>
+      </p:sp>
+      <p:sp>
+        <p:nvSpPr>
+          <p:cNvPr id="8" name="Shape 6"/>
           <p:cNvSpPr/>
           <p:nvPr/>
         </p:nvSpPr>
@@ -5021,7 +5174,7 @@
       </p:sp>
       <p:sp>
         <p:nvSpPr>
-          <p:cNvPr id="8" name="Text 6"/>
+          <p:cNvPr id="9" name="Text 7"/>
           <p:cNvSpPr/>
           <p:nvPr/>
         </p:nvSpPr>
@@ -5060,14 +5213,14 @@
       </p:sp>
       <p:sp>
         <p:nvSpPr>
-          <p:cNvPr id="9" name="Text 7"/>
+          <p:cNvPr id="10" name="Text 8"/>
           <p:cNvSpPr/>
           <p:nvPr/>
         </p:nvSpPr>
         <p:spPr>
           <a:xfrm>
             <a:off x="640080" y="621792"/>
-            <a:ext cx="10881360" cy="566928"/>
+            <a:ext cx="10881360" cy="713232"/>
           </a:xfrm>
           <a:prstGeom prst="rect">
             <a:avLst/>
@@ -5085,7 +5238,7 @@
               <a:buNone/>
             </a:pPr>
             <a:r>
-              <a:rPr lang="en-US" sz="2700" b="1" dirty="0">
+              <a:rPr lang="en-US" sz="3400" b="1" dirty="0">
                 <a:solidFill>
                   <a:srgbClr val="003A63"/>
                 </a:solidFill>
@@ -5095,20 +5248,20 @@
               </a:rPr>
               <a:t>Application to AI-Supported Workflows</a:t>
             </a:r>
-            <a:endParaRPr lang="en-US" sz="2700" dirty="0"/>
-          </a:p>
-        </p:txBody>
-      </p:sp>
-      <p:sp>
-        <p:nvSpPr>
-          <p:cNvPr id="10" name="Text 8"/>
-          <p:cNvSpPr/>
-          <p:nvPr/>
-        </p:nvSpPr>
-        <p:spPr>
-          <a:xfrm>
-            <a:off x="868680" y="1417320"/>
-            <a:ext cx="6675120" cy="4434840"/>
+            <a:endParaRPr lang="en-US" sz="3400" dirty="0"/>
+          </a:p>
+        </p:txBody>
+      </p:sp>
+      <p:sp>
+        <p:nvSpPr>
+          <p:cNvPr id="11" name="Text 9"/>
+          <p:cNvSpPr/>
+          <p:nvPr/>
+        </p:nvSpPr>
+        <p:spPr>
+          <a:xfrm>
+            <a:off x="868680" y="1508760"/>
+            <a:ext cx="6537960" cy="4160520"/>
           </a:xfrm>
           <a:prstGeom prst="rect">
             <a:avLst/>
@@ -5123,7 +5276,7 @@
           <a:lstStyle/>
           <a:p>
             <a:r>
-              <a:rPr lang="en-US" sz="1700" dirty="0">
+              <a:rPr lang="en-US" sz="2100" dirty="0">
                 <a:solidFill>
                   <a:srgbClr val="17364A"/>
                 </a:solidFill>
@@ -5131,13 +5284,13 @@
                 <a:ea typeface="Aptos" pitchFamily="34" charset="-122"/>
                 <a:cs typeface="Aptos" pitchFamily="34" charset="-120"/>
               </a:rPr>
-              <a:t>This topic applies across generative AI, predictive analytics, NLP, RAG, automation, and agentic workflows.</a:t>
-            </a:r>
-            <a:endParaRPr lang="en-US" sz="1700" dirty="0"/>
-          </a:p>
-          <a:p>
-            <a:r>
-              <a:rPr lang="en-US" sz="1700" dirty="0">
+              <a:t>This topic applies across generative AI, predictive analytics, NLP, RAG, automation, and agentic.</a:t>
+            </a:r>
+            <a:endParaRPr lang="en-US" sz="2100" dirty="0"/>
+          </a:p>
+          <a:p>
+            <a:r>
+              <a:rPr lang="en-US" sz="2100" dirty="0">
                 <a:solidFill>
                   <a:srgbClr val="17364A"/>
                 </a:solidFill>
@@ -5145,15 +5298,15 @@
                 <a:ea typeface="Aptos" pitchFamily="34" charset="-122"/>
                 <a:cs typeface="Aptos" pitchFamily="34" charset="-120"/>
               </a:rPr>
-              <a:t>The more sensitive the data, the more consequential the output, or the more automated the action, the stronger the.</a:t>
-            </a:r>
-            <a:endParaRPr lang="en-US" sz="1700" dirty="0"/>
-          </a:p>
-        </p:txBody>
-      </p:sp>
-      <p:sp>
-        <p:nvSpPr>
-          <p:cNvPr id="11" name="Shape 9"/>
+              <a:t>The more sensitive the data, the more consequential the output, or the more automated the action, the.</a:t>
+            </a:r>
+            <a:endParaRPr lang="en-US" sz="2100" dirty="0"/>
+          </a:p>
+        </p:txBody>
+      </p:sp>
+      <p:sp>
+        <p:nvSpPr>
+          <p:cNvPr id="12" name="Shape 10"/>
           <p:cNvSpPr/>
           <p:nvPr/>
         </p:nvSpPr>
@@ -5180,14 +5333,14 @@
       </p:sp>
       <p:sp>
         <p:nvSpPr>
-          <p:cNvPr id="12" name="Text 10"/>
+          <p:cNvPr id="13" name="Text 11"/>
           <p:cNvSpPr/>
           <p:nvPr/>
         </p:nvSpPr>
         <p:spPr>
           <a:xfrm>
             <a:off x="8074152" y="1563624"/>
-            <a:ext cx="2825496" cy="201168"/>
+            <a:ext cx="2825496" cy="256032"/>
           </a:xfrm>
           <a:prstGeom prst="rect">
             <a:avLst/>
@@ -5203,7 +5356,7 @@
               <a:buNone/>
             </a:pPr>
             <a:r>
-              <a:rPr lang="en-US" sz="950" b="1" dirty="0">
+              <a:rPr lang="en-US" sz="1300" b="1" dirty="0">
                 <a:solidFill>
                   <a:srgbClr val="0068B7"/>
                 </a:solidFill>
@@ -5213,20 +5366,20 @@
               </a:rPr>
               <a:t>Key idea</a:t>
             </a:r>
-            <a:endParaRPr lang="en-US" sz="950" dirty="0"/>
-          </a:p>
-        </p:txBody>
-      </p:sp>
-      <p:sp>
-        <p:nvSpPr>
-          <p:cNvPr id="13" name="Text 11"/>
-          <p:cNvSpPr/>
-          <p:nvPr/>
-        </p:nvSpPr>
-        <p:spPr>
-          <a:xfrm>
-            <a:off x="8074152" y="1856232"/>
-            <a:ext cx="2825496" cy="1261872"/>
+            <a:endParaRPr lang="en-US" sz="1300" dirty="0"/>
+          </a:p>
+        </p:txBody>
+      </p:sp>
+      <p:sp>
+        <p:nvSpPr>
+          <p:cNvPr id="14" name="Text 12"/>
+          <p:cNvSpPr/>
+          <p:nvPr/>
+        </p:nvSpPr>
+        <p:spPr>
+          <a:xfrm>
+            <a:off x="8074152" y="1920240"/>
+            <a:ext cx="2825496" cy="1188720"/>
           </a:xfrm>
           <a:prstGeom prst="rect">
             <a:avLst/>
@@ -5244,7 +5397,7 @@
               <a:buNone/>
             </a:pPr>
             <a:r>
-              <a:rPr lang="en-US" sz="1250" dirty="0">
+              <a:rPr lang="en-US" sz="1550" dirty="0">
                 <a:solidFill>
                   <a:srgbClr val="17364A"/>
                 </a:solidFill>
@@ -5252,15 +5405,15 @@
                 <a:ea typeface="Aptos" pitchFamily="34" charset="-122"/>
                 <a:cs typeface="Aptos" pitchFamily="34" charset="-120"/>
               </a:rPr>
-              <a:t>This topic applies across generative AI, predictive analytics, NLP, RAG, automation, and agentic workflows.</a:t>
-            </a:r>
-            <a:endParaRPr lang="en-US" sz="1250" dirty="0"/>
-          </a:p>
-        </p:txBody>
-      </p:sp>
-      <p:sp>
-        <p:nvSpPr>
-          <p:cNvPr id="14" name="Shape 12"/>
+              <a:t>This topic applies across generative AI, predictive analytics, NLP, RAG, automation, and agentic.</a:t>
+            </a:r>
+            <a:endParaRPr lang="en-US" sz="1550" dirty="0"/>
+          </a:p>
+        </p:txBody>
+      </p:sp>
+      <p:sp>
+        <p:nvSpPr>
+          <p:cNvPr id="15" name="Shape 13"/>
           <p:cNvSpPr/>
           <p:nvPr/>
         </p:nvSpPr>
@@ -5287,14 +5440,14 @@
       </p:sp>
       <p:sp>
         <p:nvSpPr>
-          <p:cNvPr id="15" name="Text 13"/>
+          <p:cNvPr id="16" name="Text 14"/>
           <p:cNvSpPr/>
           <p:nvPr/>
         </p:nvSpPr>
         <p:spPr>
           <a:xfrm>
             <a:off x="8074152" y="3666744"/>
-            <a:ext cx="2825496" cy="201168"/>
+            <a:ext cx="2825496" cy="256032"/>
           </a:xfrm>
           <a:prstGeom prst="rect">
             <a:avLst/>
@@ -5310,7 +5463,7 @@
               <a:buNone/>
             </a:pPr>
             <a:r>
-              <a:rPr lang="en-US" sz="950" b="1" dirty="0">
+              <a:rPr lang="en-US" sz="1300" b="1" dirty="0">
                 <a:solidFill>
                   <a:srgbClr val="0068B7"/>
                 </a:solidFill>
@@ -5320,20 +5473,20 @@
               </a:rPr>
               <a:t>Use this for</a:t>
             </a:r>
-            <a:endParaRPr lang="en-US" sz="950" dirty="0"/>
-          </a:p>
-        </p:txBody>
-      </p:sp>
-      <p:sp>
-        <p:nvSpPr>
-          <p:cNvPr id="16" name="Text 14"/>
-          <p:cNvSpPr/>
-          <p:nvPr/>
-        </p:nvSpPr>
-        <p:spPr>
-          <a:xfrm>
-            <a:off x="8074152" y="3959352"/>
-            <a:ext cx="2825496" cy="1170432"/>
+            <a:endParaRPr lang="en-US" sz="1300" dirty="0"/>
+          </a:p>
+        </p:txBody>
+      </p:sp>
+      <p:sp>
+        <p:nvSpPr>
+          <p:cNvPr id="17" name="Text 15"/>
+          <p:cNvSpPr/>
+          <p:nvPr/>
+        </p:nvSpPr>
+        <p:spPr>
+          <a:xfrm>
+            <a:off x="8074152" y="4023360"/>
+            <a:ext cx="2825496" cy="1097280"/>
           </a:xfrm>
           <a:prstGeom prst="rect">
             <a:avLst/>
@@ -5351,7 +5504,7 @@
               <a:buNone/>
             </a:pPr>
             <a:r>
-              <a:rPr lang="en-US" sz="1250" dirty="0">
+              <a:rPr lang="en-US" sz="1550" dirty="0">
                 <a:solidFill>
                   <a:srgbClr val="17364A"/>
                 </a:solidFill>
@@ -5361,7 +5514,7 @@
               </a:rPr>
               <a:t>Connect the concept to public health decisions, safeguards, documentation, or implementation work.</a:t>
             </a:r>
-            <a:endParaRPr lang="en-US" sz="1250" dirty="0"/>
+            <a:endParaRPr lang="en-US" sz="1550" dirty="0"/>
           </a:p>
         </p:txBody>
       </p:sp>
@@ -5558,7 +5711,7 @@
                 <a:ea typeface="Aptos" pitchFamily="34" charset="-122"/>
                 <a:cs typeface="Aptos" pitchFamily="34" charset="-120"/>
               </a:rPr>
-              <a:t>© Paula Soper</a:t>
+              <a:t>Â© Paula Soper</a:t>
             </a:r>
             <a:endParaRPr lang="en-US" sz="800" dirty="0"/>
           </a:p>
@@ -5566,7 +5719,46 @@
       </p:sp>
       <p:sp>
         <p:nvSpPr>
-          <p:cNvPr id="7" name="Shape 5"/>
+          <p:cNvPr id="7" name="Text 5"/>
+          <p:cNvSpPr/>
+          <p:nvPr/>
+        </p:nvSpPr>
+        <p:spPr>
+          <a:xfrm>
+            <a:off x="11137392" y="6510528"/>
+            <a:ext cx="411480" cy="201168"/>
+          </a:xfrm>
+          <a:prstGeom prst="rect">
+            <a:avLst/>
+          </a:prstGeom>
+          <a:noFill/>
+          <a:ln/>
+        </p:spPr>
+        <p:txBody>
+          <a:bodyPr wrap="square" lIns="0" tIns="0" rIns="0" bIns="0" rtlCol="0" anchor="ctr"/>
+          <a:lstStyle/>
+          <a:p>
+            <a:pPr algn="r" indent="0" marL="0">
+              <a:buNone/>
+            </a:pPr>
+            <a:r>
+              <a:rPr lang="en-US" sz="900" dirty="0">
+                <a:solidFill>
+                  <a:srgbClr val="5F7181"/>
+                </a:solidFill>
+                <a:latin typeface="Aptos" pitchFamily="34" charset="0"/>
+                <a:ea typeface="Aptos" pitchFamily="34" charset="-122"/>
+                <a:cs typeface="Aptos" pitchFamily="34" charset="-120"/>
+              </a:rPr>
+              <a:t>14</a:t>
+            </a:r>
+            <a:endParaRPr lang="en-US" sz="900" dirty="0"/>
+          </a:p>
+        </p:txBody>
+      </p:sp>
+      <p:sp>
+        <p:nvSpPr>
+          <p:cNvPr id="8" name="Shape 6"/>
           <p:cNvSpPr/>
           <p:nvPr/>
         </p:nvSpPr>
@@ -5591,7 +5783,7 @@
       </p:sp>
       <p:sp>
         <p:nvSpPr>
-          <p:cNvPr id="8" name="Text 6"/>
+          <p:cNvPr id="9" name="Text 7"/>
           <p:cNvSpPr/>
           <p:nvPr/>
         </p:nvSpPr>
@@ -5630,14 +5822,14 @@
       </p:sp>
       <p:sp>
         <p:nvSpPr>
-          <p:cNvPr id="9" name="Text 7"/>
+          <p:cNvPr id="10" name="Text 8"/>
           <p:cNvSpPr/>
           <p:nvPr/>
         </p:nvSpPr>
         <p:spPr>
           <a:xfrm>
             <a:off x="640080" y="621792"/>
-            <a:ext cx="10881360" cy="566928"/>
+            <a:ext cx="10881360" cy="713232"/>
           </a:xfrm>
           <a:prstGeom prst="rect">
             <a:avLst/>
@@ -5655,7 +5847,7 @@
               <a:buNone/>
             </a:pPr>
             <a:r>
-              <a:rPr lang="en-US" sz="2700" b="1" dirty="0">
+              <a:rPr lang="en-US" sz="3400" b="1" dirty="0">
                 <a:solidFill>
                   <a:srgbClr val="003A63"/>
                 </a:solidFill>
@@ -5665,20 +5857,20 @@
               </a:rPr>
               <a:t>Reflection Questions</a:t>
             </a:r>
-            <a:endParaRPr lang="en-US" sz="2700" dirty="0"/>
-          </a:p>
-        </p:txBody>
-      </p:sp>
-      <p:sp>
-        <p:nvSpPr>
-          <p:cNvPr id="10" name="Text 8"/>
-          <p:cNvSpPr/>
-          <p:nvPr/>
-        </p:nvSpPr>
-        <p:spPr>
-          <a:xfrm>
-            <a:off x="868680" y="1417320"/>
-            <a:ext cx="6675120" cy="4434840"/>
+            <a:endParaRPr lang="en-US" sz="3400" dirty="0"/>
+          </a:p>
+        </p:txBody>
+      </p:sp>
+      <p:sp>
+        <p:nvSpPr>
+          <p:cNvPr id="11" name="Text 9"/>
+          <p:cNvSpPr/>
+          <p:nvPr/>
+        </p:nvSpPr>
+        <p:spPr>
+          <a:xfrm>
+            <a:off x="868680" y="1508760"/>
+            <a:ext cx="6537960" cy="4160520"/>
           </a:xfrm>
           <a:prstGeom prst="rect">
             <a:avLst/>
@@ -5693,7 +5885,7 @@
           <a:lstStyle/>
           <a:p>
             <a:r>
-              <a:rPr lang="en-US" sz="1700" dirty="0">
+              <a:rPr lang="en-US" sz="2100" dirty="0">
                 <a:solidFill>
                   <a:srgbClr val="17364A"/>
                 </a:solidFill>
@@ -5703,11 +5895,11 @@
               </a:rPr>
               <a:t>What public health decision or workflow does this topic affect?</a:t>
             </a:r>
-            <a:endParaRPr lang="en-US" sz="1700" dirty="0"/>
-          </a:p>
-          <a:p>
-            <a:r>
-              <a:rPr lang="en-US" sz="1700" dirty="0">
+            <a:endParaRPr lang="en-US" sz="2100" dirty="0"/>
+          </a:p>
+          <a:p>
+            <a:r>
+              <a:rPr lang="en-US" sz="2100" dirty="0">
                 <a:solidFill>
                   <a:srgbClr val="17364A"/>
                 </a:solidFill>
@@ -5717,11 +5909,11 @@
               </a:rPr>
               <a:t>Who has authority to approve or pause the work?</a:t>
             </a:r>
-            <a:endParaRPr lang="en-US" sz="1700" dirty="0"/>
-          </a:p>
-          <a:p>
-            <a:r>
-              <a:rPr lang="en-US" sz="1700" dirty="0">
+            <a:endParaRPr lang="en-US" sz="2100" dirty="0"/>
+          </a:p>
+          <a:p>
+            <a:r>
+              <a:rPr lang="en-US" sz="2100" dirty="0">
                 <a:solidFill>
                   <a:srgbClr val="17364A"/>
                 </a:solidFill>
@@ -5731,13 +5923,13 @@
               </a:rPr>
               <a:t>What evidence would show that the workflow is responsible and effective?</a:t>
             </a:r>
-            <a:endParaRPr lang="en-US" sz="1700" dirty="0"/>
-          </a:p>
-        </p:txBody>
-      </p:sp>
-      <p:sp>
-        <p:nvSpPr>
-          <p:cNvPr id="11" name="Shape 9"/>
+            <a:endParaRPr lang="en-US" sz="2100" dirty="0"/>
+          </a:p>
+        </p:txBody>
+      </p:sp>
+      <p:sp>
+        <p:nvSpPr>
+          <p:cNvPr id="12" name="Shape 10"/>
           <p:cNvSpPr/>
           <p:nvPr/>
         </p:nvSpPr>
@@ -5764,14 +5956,14 @@
       </p:sp>
       <p:sp>
         <p:nvSpPr>
-          <p:cNvPr id="12" name="Text 10"/>
+          <p:cNvPr id="13" name="Text 11"/>
           <p:cNvSpPr/>
           <p:nvPr/>
         </p:nvSpPr>
         <p:spPr>
           <a:xfrm>
             <a:off x="8074152" y="1563624"/>
-            <a:ext cx="2825496" cy="201168"/>
+            <a:ext cx="2825496" cy="256032"/>
           </a:xfrm>
           <a:prstGeom prst="rect">
             <a:avLst/>
@@ -5787,7 +5979,7 @@
               <a:buNone/>
             </a:pPr>
             <a:r>
-              <a:rPr lang="en-US" sz="950" b="1" dirty="0">
+              <a:rPr lang="en-US" sz="1300" b="1" dirty="0">
                 <a:solidFill>
                   <a:srgbClr val="0068B7"/>
                 </a:solidFill>
@@ -5797,20 +5989,20 @@
               </a:rPr>
               <a:t>Key idea</a:t>
             </a:r>
-            <a:endParaRPr lang="en-US" sz="950" dirty="0"/>
-          </a:p>
-        </p:txBody>
-      </p:sp>
-      <p:sp>
-        <p:nvSpPr>
-          <p:cNvPr id="13" name="Text 11"/>
-          <p:cNvSpPr/>
-          <p:nvPr/>
-        </p:nvSpPr>
-        <p:spPr>
-          <a:xfrm>
-            <a:off x="8074152" y="1856232"/>
-            <a:ext cx="2825496" cy="1261872"/>
+            <a:endParaRPr lang="en-US" sz="1300" dirty="0"/>
+          </a:p>
+        </p:txBody>
+      </p:sp>
+      <p:sp>
+        <p:nvSpPr>
+          <p:cNvPr id="14" name="Text 12"/>
+          <p:cNvSpPr/>
+          <p:nvPr/>
+        </p:nvSpPr>
+        <p:spPr>
+          <a:xfrm>
+            <a:off x="8074152" y="1920240"/>
+            <a:ext cx="2825496" cy="1188720"/>
           </a:xfrm>
           <a:prstGeom prst="rect">
             <a:avLst/>
@@ -5828,7 +6020,7 @@
               <a:buNone/>
             </a:pPr>
             <a:r>
-              <a:rPr lang="en-US" sz="1250" dirty="0">
+              <a:rPr lang="en-US" sz="1550" dirty="0">
                 <a:solidFill>
                   <a:srgbClr val="17364A"/>
                 </a:solidFill>
@@ -5838,13 +6030,13 @@
               </a:rPr>
               <a:t>What public health decision or workflow does this topic affect?</a:t>
             </a:r>
-            <a:endParaRPr lang="en-US" sz="1250" dirty="0"/>
-          </a:p>
-        </p:txBody>
-      </p:sp>
-      <p:sp>
-        <p:nvSpPr>
-          <p:cNvPr id="14" name="Shape 12"/>
+            <a:endParaRPr lang="en-US" sz="1550" dirty="0"/>
+          </a:p>
+        </p:txBody>
+      </p:sp>
+      <p:sp>
+        <p:nvSpPr>
+          <p:cNvPr id="15" name="Shape 13"/>
           <p:cNvSpPr/>
           <p:nvPr/>
         </p:nvSpPr>
@@ -5871,14 +6063,14 @@
       </p:sp>
       <p:sp>
         <p:nvSpPr>
-          <p:cNvPr id="15" name="Text 13"/>
+          <p:cNvPr id="16" name="Text 14"/>
           <p:cNvSpPr/>
           <p:nvPr/>
         </p:nvSpPr>
         <p:spPr>
           <a:xfrm>
             <a:off x="8074152" y="3666744"/>
-            <a:ext cx="2825496" cy="201168"/>
+            <a:ext cx="2825496" cy="256032"/>
           </a:xfrm>
           <a:prstGeom prst="rect">
             <a:avLst/>
@@ -5894,7 +6086,7 @@
               <a:buNone/>
             </a:pPr>
             <a:r>
-              <a:rPr lang="en-US" sz="950" b="1" dirty="0">
+              <a:rPr lang="en-US" sz="1300" b="1" dirty="0">
                 <a:solidFill>
                   <a:srgbClr val="0068B7"/>
                 </a:solidFill>
@@ -5904,20 +6096,20 @@
               </a:rPr>
               <a:t>Use this for</a:t>
             </a:r>
-            <a:endParaRPr lang="en-US" sz="950" dirty="0"/>
-          </a:p>
-        </p:txBody>
-      </p:sp>
-      <p:sp>
-        <p:nvSpPr>
-          <p:cNvPr id="16" name="Text 14"/>
-          <p:cNvSpPr/>
-          <p:nvPr/>
-        </p:nvSpPr>
-        <p:spPr>
-          <a:xfrm>
-            <a:off x="8074152" y="3959352"/>
-            <a:ext cx="2825496" cy="1170432"/>
+            <a:endParaRPr lang="en-US" sz="1300" dirty="0"/>
+          </a:p>
+        </p:txBody>
+      </p:sp>
+      <p:sp>
+        <p:nvSpPr>
+          <p:cNvPr id="17" name="Text 15"/>
+          <p:cNvSpPr/>
+          <p:nvPr/>
+        </p:nvSpPr>
+        <p:spPr>
+          <a:xfrm>
+            <a:off x="8074152" y="4023360"/>
+            <a:ext cx="2825496" cy="1097280"/>
           </a:xfrm>
           <a:prstGeom prst="rect">
             <a:avLst/>
@@ -5935,7 +6127,7 @@
               <a:buNone/>
             </a:pPr>
             <a:r>
-              <a:rPr lang="en-US" sz="1250" dirty="0">
+              <a:rPr lang="en-US" sz="1550" dirty="0">
                 <a:solidFill>
                   <a:srgbClr val="17364A"/>
                 </a:solidFill>
@@ -5945,7 +6137,7 @@
               </a:rPr>
               <a:t>Connect the concept to public health decisions, safeguards, documentation, or implementation work.</a:t>
             </a:r>
-            <a:endParaRPr lang="en-US" sz="1250" dirty="0"/>
+            <a:endParaRPr lang="en-US" sz="1550" dirty="0"/>
           </a:p>
         </p:txBody>
       </p:sp>
@@ -6142,7 +6334,7 @@
                 <a:ea typeface="Aptos" pitchFamily="34" charset="-122"/>
                 <a:cs typeface="Aptos" pitchFamily="34" charset="-120"/>
               </a:rPr>
-              <a:t>© Paula Soper</a:t>
+              <a:t>Â© Paula Soper</a:t>
             </a:r>
             <a:endParaRPr lang="en-US" sz="800" dirty="0"/>
           </a:p>
@@ -6156,8 +6348,47 @@
         </p:nvSpPr>
         <p:spPr>
           <a:xfrm>
+            <a:off x="11137392" y="6510528"/>
+            <a:ext cx="411480" cy="201168"/>
+          </a:xfrm>
+          <a:prstGeom prst="rect">
+            <a:avLst/>
+          </a:prstGeom>
+          <a:noFill/>
+          <a:ln/>
+        </p:spPr>
+        <p:txBody>
+          <a:bodyPr wrap="square" lIns="0" tIns="0" rIns="0" bIns="0" rtlCol="0" anchor="ctr"/>
+          <a:lstStyle/>
+          <a:p>
+            <a:pPr algn="r" indent="0" marL="0">
+              <a:buNone/>
+            </a:pPr>
+            <a:r>
+              <a:rPr lang="en-US" sz="900" dirty="0">
+                <a:solidFill>
+                  <a:srgbClr val="5F7181"/>
+                </a:solidFill>
+                <a:latin typeface="Aptos" pitchFamily="34" charset="0"/>
+                <a:ea typeface="Aptos" pitchFamily="34" charset="-122"/>
+                <a:cs typeface="Aptos" pitchFamily="34" charset="-120"/>
+              </a:rPr>
+              <a:t>15</a:t>
+            </a:r>
+            <a:endParaRPr lang="en-US" sz="900" dirty="0"/>
+          </a:p>
+        </p:txBody>
+      </p:sp>
+      <p:sp>
+        <p:nvSpPr>
+          <p:cNvPr id="8" name="Text 6"/>
+          <p:cNvSpPr/>
+          <p:nvPr/>
+        </p:nvSpPr>
+        <p:spPr>
+          <a:xfrm>
             <a:off x="640080" y="658368"/>
-            <a:ext cx="10881360" cy="566928"/>
+            <a:ext cx="10881360" cy="713232"/>
           </a:xfrm>
           <a:prstGeom prst="rect">
             <a:avLst/>
@@ -6175,7 +6406,7 @@
               <a:buNone/>
             </a:pPr>
             <a:r>
-              <a:rPr lang="en-US" sz="2700" b="1" dirty="0">
+              <a:rPr lang="en-US" sz="3400" b="1" dirty="0">
                 <a:solidFill>
                   <a:srgbClr val="003A63"/>
                 </a:solidFill>
@@ -6185,20 +6416,20 @@
               </a:rPr>
               <a:t>Reflection Questions Continued</a:t>
             </a:r>
-            <a:endParaRPr lang="en-US" sz="2700" dirty="0"/>
-          </a:p>
-        </p:txBody>
-      </p:sp>
-      <p:sp>
-        <p:nvSpPr>
-          <p:cNvPr id="8" name="Text 6"/>
-          <p:cNvSpPr/>
-          <p:nvPr/>
-        </p:nvSpPr>
-        <p:spPr>
-          <a:xfrm>
-            <a:off x="868680" y="1417320"/>
-            <a:ext cx="6675120" cy="4434840"/>
+            <a:endParaRPr lang="en-US" sz="3400" dirty="0"/>
+          </a:p>
+        </p:txBody>
+      </p:sp>
+      <p:sp>
+        <p:nvSpPr>
+          <p:cNvPr id="9" name="Text 7"/>
+          <p:cNvSpPr/>
+          <p:nvPr/>
+        </p:nvSpPr>
+        <p:spPr>
+          <a:xfrm>
+            <a:off x="868680" y="1508760"/>
+            <a:ext cx="6537960" cy="4160520"/>
           </a:xfrm>
           <a:prstGeom prst="rect">
             <a:avLst/>
@@ -6213,7 +6444,7 @@
           <a:lstStyle/>
           <a:p>
             <a:r>
-              <a:rPr lang="en-US" sz="1700" dirty="0">
+              <a:rPr lang="en-US" sz="2100" dirty="0">
                 <a:solidFill>
                   <a:srgbClr val="17364A"/>
                 </a:solidFill>
@@ -6223,11 +6454,11 @@
               </a:rPr>
               <a:t>What equity, privacy, legal, security, or public trust risks require review?</a:t>
             </a:r>
-            <a:endParaRPr lang="en-US" sz="1700" dirty="0"/>
-          </a:p>
-          <a:p>
-            <a:r>
-              <a:rPr lang="en-US" sz="1700" dirty="0">
+            <a:endParaRPr lang="en-US" sz="2100" dirty="0"/>
+          </a:p>
+          <a:p>
+            <a:r>
+              <a:rPr lang="en-US" sz="2100" dirty="0">
                 <a:solidFill>
                   <a:srgbClr val="17364A"/>
                 </a:solidFill>
@@ -6237,13 +6468,13 @@
               </a:rPr>
               <a:t>How will the agency know when the workflow needs to be revised?</a:t>
             </a:r>
-            <a:endParaRPr lang="en-US" sz="1700" dirty="0"/>
-          </a:p>
-        </p:txBody>
-      </p:sp>
-      <p:sp>
-        <p:nvSpPr>
-          <p:cNvPr id="9" name="Shape 7"/>
+            <a:endParaRPr lang="en-US" sz="2100" dirty="0"/>
+          </a:p>
+        </p:txBody>
+      </p:sp>
+      <p:sp>
+        <p:nvSpPr>
+          <p:cNvPr id="10" name="Shape 8"/>
           <p:cNvSpPr/>
           <p:nvPr/>
         </p:nvSpPr>
@@ -6270,14 +6501,14 @@
       </p:sp>
       <p:sp>
         <p:nvSpPr>
-          <p:cNvPr id="10" name="Text 8"/>
+          <p:cNvPr id="11" name="Text 9"/>
           <p:cNvSpPr/>
           <p:nvPr/>
         </p:nvSpPr>
         <p:spPr>
           <a:xfrm>
             <a:off x="8074152" y="1563624"/>
-            <a:ext cx="2825496" cy="201168"/>
+            <a:ext cx="2825496" cy="256032"/>
           </a:xfrm>
           <a:prstGeom prst="rect">
             <a:avLst/>
@@ -6293,7 +6524,7 @@
               <a:buNone/>
             </a:pPr>
             <a:r>
-              <a:rPr lang="en-US" sz="950" b="1" dirty="0">
+              <a:rPr lang="en-US" sz="1300" b="1" dirty="0">
                 <a:solidFill>
                   <a:srgbClr val="0068B7"/>
                 </a:solidFill>
@@ -6303,20 +6534,20 @@
               </a:rPr>
               <a:t>Key idea</a:t>
             </a:r>
-            <a:endParaRPr lang="en-US" sz="950" dirty="0"/>
-          </a:p>
-        </p:txBody>
-      </p:sp>
-      <p:sp>
-        <p:nvSpPr>
-          <p:cNvPr id="11" name="Text 9"/>
-          <p:cNvSpPr/>
-          <p:nvPr/>
-        </p:nvSpPr>
-        <p:spPr>
-          <a:xfrm>
-            <a:off x="8074152" y="1856232"/>
-            <a:ext cx="2825496" cy="1261872"/>
+            <a:endParaRPr lang="en-US" sz="1300" dirty="0"/>
+          </a:p>
+        </p:txBody>
+      </p:sp>
+      <p:sp>
+        <p:nvSpPr>
+          <p:cNvPr id="12" name="Text 10"/>
+          <p:cNvSpPr/>
+          <p:nvPr/>
+        </p:nvSpPr>
+        <p:spPr>
+          <a:xfrm>
+            <a:off x="8074152" y="1920240"/>
+            <a:ext cx="2825496" cy="1188720"/>
           </a:xfrm>
           <a:prstGeom prst="rect">
             <a:avLst/>
@@ -6334,7 +6565,7 @@
               <a:buNone/>
             </a:pPr>
             <a:r>
-              <a:rPr lang="en-US" sz="1250" dirty="0">
+              <a:rPr lang="en-US" sz="1550" dirty="0">
                 <a:solidFill>
                   <a:srgbClr val="17364A"/>
                 </a:solidFill>
@@ -6344,13 +6575,13 @@
               </a:rPr>
               <a:t>What equity, privacy, legal, security, or public trust risks require review?</a:t>
             </a:r>
-            <a:endParaRPr lang="en-US" sz="1250" dirty="0"/>
-          </a:p>
-        </p:txBody>
-      </p:sp>
-      <p:sp>
-        <p:nvSpPr>
-          <p:cNvPr id="12" name="Shape 10"/>
+            <a:endParaRPr lang="en-US" sz="1550" dirty="0"/>
+          </a:p>
+        </p:txBody>
+      </p:sp>
+      <p:sp>
+        <p:nvSpPr>
+          <p:cNvPr id="13" name="Shape 11"/>
           <p:cNvSpPr/>
           <p:nvPr/>
         </p:nvSpPr>
@@ -6377,14 +6608,14 @@
       </p:sp>
       <p:sp>
         <p:nvSpPr>
-          <p:cNvPr id="13" name="Text 11"/>
+          <p:cNvPr id="14" name="Text 12"/>
           <p:cNvSpPr/>
           <p:nvPr/>
         </p:nvSpPr>
         <p:spPr>
           <a:xfrm>
             <a:off x="8074152" y="3666744"/>
-            <a:ext cx="2825496" cy="201168"/>
+            <a:ext cx="2825496" cy="256032"/>
           </a:xfrm>
           <a:prstGeom prst="rect">
             <a:avLst/>
@@ -6400,7 +6631,7 @@
               <a:buNone/>
             </a:pPr>
             <a:r>
-              <a:rPr lang="en-US" sz="950" b="1" dirty="0">
+              <a:rPr lang="en-US" sz="1300" b="1" dirty="0">
                 <a:solidFill>
                   <a:srgbClr val="0068B7"/>
                 </a:solidFill>
@@ -6410,20 +6641,20 @@
               </a:rPr>
               <a:t>Use this for</a:t>
             </a:r>
-            <a:endParaRPr lang="en-US" sz="950" dirty="0"/>
-          </a:p>
-        </p:txBody>
-      </p:sp>
-      <p:sp>
-        <p:nvSpPr>
-          <p:cNvPr id="14" name="Text 12"/>
-          <p:cNvSpPr/>
-          <p:nvPr/>
-        </p:nvSpPr>
-        <p:spPr>
-          <a:xfrm>
-            <a:off x="8074152" y="3959352"/>
-            <a:ext cx="2825496" cy="1170432"/>
+            <a:endParaRPr lang="en-US" sz="1300" dirty="0"/>
+          </a:p>
+        </p:txBody>
+      </p:sp>
+      <p:sp>
+        <p:nvSpPr>
+          <p:cNvPr id="15" name="Text 13"/>
+          <p:cNvSpPr/>
+          <p:nvPr/>
+        </p:nvSpPr>
+        <p:spPr>
+          <a:xfrm>
+            <a:off x="8074152" y="4023360"/>
+            <a:ext cx="2825496" cy="1097280"/>
           </a:xfrm>
           <a:prstGeom prst="rect">
             <a:avLst/>
@@ -6441,7 +6672,7 @@
               <a:buNone/>
             </a:pPr>
             <a:r>
-              <a:rPr lang="en-US" sz="1250" dirty="0">
+              <a:rPr lang="en-US" sz="1550" dirty="0">
                 <a:solidFill>
                   <a:srgbClr val="17364A"/>
                 </a:solidFill>
@@ -6451,7 +6682,7 @@
               </a:rPr>
               <a:t>Connect the concept to public health decisions, safeguards, documentation, or implementation work.</a:t>
             </a:r>
-            <a:endParaRPr lang="en-US" sz="1250" dirty="0"/>
+            <a:endParaRPr lang="en-US" sz="1550" dirty="0"/>
           </a:p>
         </p:txBody>
       </p:sp>
@@ -6648,7 +6879,7 @@
                 <a:ea typeface="Aptos" pitchFamily="34" charset="-122"/>
                 <a:cs typeface="Aptos" pitchFamily="34" charset="-120"/>
               </a:rPr>
-              <a:t>© Paula Soper</a:t>
+              <a:t>Â© Paula Soper</a:t>
             </a:r>
             <a:endParaRPr lang="en-US" sz="800" dirty="0"/>
           </a:p>
@@ -6656,7 +6887,46 @@
       </p:sp>
       <p:sp>
         <p:nvSpPr>
-          <p:cNvPr id="7" name="Shape 5"/>
+          <p:cNvPr id="7" name="Text 5"/>
+          <p:cNvSpPr/>
+          <p:nvPr/>
+        </p:nvSpPr>
+        <p:spPr>
+          <a:xfrm>
+            <a:off x="11137392" y="6510528"/>
+            <a:ext cx="411480" cy="201168"/>
+          </a:xfrm>
+          <a:prstGeom prst="rect">
+            <a:avLst/>
+          </a:prstGeom>
+          <a:noFill/>
+          <a:ln/>
+        </p:spPr>
+        <p:txBody>
+          <a:bodyPr wrap="square" lIns="0" tIns="0" rIns="0" bIns="0" rtlCol="0" anchor="ctr"/>
+          <a:lstStyle/>
+          <a:p>
+            <a:pPr algn="r" indent="0" marL="0">
+              <a:buNone/>
+            </a:pPr>
+            <a:r>
+              <a:rPr lang="en-US" sz="900" dirty="0">
+                <a:solidFill>
+                  <a:srgbClr val="5F7181"/>
+                </a:solidFill>
+                <a:latin typeface="Aptos" pitchFamily="34" charset="0"/>
+                <a:ea typeface="Aptos" pitchFamily="34" charset="-122"/>
+                <a:cs typeface="Aptos" pitchFamily="34" charset="-120"/>
+              </a:rPr>
+              <a:t>16</a:t>
+            </a:r>
+            <a:endParaRPr lang="en-US" sz="900" dirty="0"/>
+          </a:p>
+        </p:txBody>
+      </p:sp>
+      <p:sp>
+        <p:nvSpPr>
+          <p:cNvPr id="8" name="Shape 6"/>
           <p:cNvSpPr/>
           <p:nvPr/>
         </p:nvSpPr>
@@ -6681,7 +6951,7 @@
       </p:sp>
       <p:sp>
         <p:nvSpPr>
-          <p:cNvPr id="8" name="Text 6"/>
+          <p:cNvPr id="9" name="Text 7"/>
           <p:cNvSpPr/>
           <p:nvPr/>
         </p:nvSpPr>
@@ -6720,14 +6990,14 @@
       </p:sp>
       <p:sp>
         <p:nvSpPr>
-          <p:cNvPr id="9" name="Text 7"/>
+          <p:cNvPr id="10" name="Text 8"/>
           <p:cNvSpPr/>
           <p:nvPr/>
         </p:nvSpPr>
         <p:spPr>
           <a:xfrm>
             <a:off x="640080" y="621792"/>
-            <a:ext cx="10881360" cy="566928"/>
+            <a:ext cx="10881360" cy="713232"/>
           </a:xfrm>
           <a:prstGeom prst="rect">
             <a:avLst/>
@@ -6745,7 +7015,7 @@
               <a:buNone/>
             </a:pPr>
             <a:r>
-              <a:rPr lang="en-US" sz="2700" b="1" dirty="0">
+              <a:rPr lang="en-US" sz="3400" b="1" dirty="0">
                 <a:solidFill>
                   <a:srgbClr val="003A63"/>
                 </a:solidFill>
@@ -6755,20 +7025,20 @@
               </a:rPr>
               <a:t>Practical Exercise</a:t>
             </a:r>
-            <a:endParaRPr lang="en-US" sz="2700" dirty="0"/>
-          </a:p>
-        </p:txBody>
-      </p:sp>
-      <p:sp>
-        <p:nvSpPr>
-          <p:cNvPr id="10" name="Text 8"/>
-          <p:cNvSpPr/>
-          <p:nvPr/>
-        </p:nvSpPr>
-        <p:spPr>
-          <a:xfrm>
-            <a:off x="868680" y="1417320"/>
-            <a:ext cx="6675120" cy="4434840"/>
+            <a:endParaRPr lang="en-US" sz="3400" dirty="0"/>
+          </a:p>
+        </p:txBody>
+      </p:sp>
+      <p:sp>
+        <p:nvSpPr>
+          <p:cNvPr id="11" name="Text 9"/>
+          <p:cNvSpPr/>
+          <p:nvPr/>
+        </p:nvSpPr>
+        <p:spPr>
+          <a:xfrm>
+            <a:off x="868680" y="1508760"/>
+            <a:ext cx="6537960" cy="4160520"/>
           </a:xfrm>
           <a:prstGeom prst="rect">
             <a:avLst/>
@@ -6783,7 +7053,7 @@
           <a:lstStyle/>
           <a:p>
             <a:r>
-              <a:rPr lang="en-US" sz="1700" dirty="0">
+              <a:rPr lang="en-US" sz="2100" dirty="0">
                 <a:solidFill>
                   <a:srgbClr val="17364A"/>
                 </a:solidFill>
@@ -6791,13 +7061,13 @@
                 <a:ea typeface="Aptos" pitchFamily="34" charset="-122"/>
                 <a:cs typeface="Aptos" pitchFamily="34" charset="-120"/>
               </a:rPr>
-              <a:t>Create a practical public comment, social listening, and community feedback analysis artifact for one AI-supported public.</a:t>
-            </a:r>
-            <a:endParaRPr lang="en-US" sz="1700" dirty="0"/>
-          </a:p>
-          <a:p>
-            <a:r>
-              <a:rPr lang="en-US" sz="1700" dirty="0">
+              <a:t>Create a practical public comment, social listening, and community feedback analysis artifact for one.</a:t>
+            </a:r>
+            <a:endParaRPr lang="en-US" sz="2100" dirty="0"/>
+          </a:p>
+          <a:p>
+            <a:r>
+              <a:rPr lang="en-US" sz="2100" dirty="0">
                 <a:solidFill>
                   <a:srgbClr val="17364A"/>
                 </a:solidFill>
@@ -6805,15 +7075,15 @@
                 <a:ea typeface="Aptos" pitchFamily="34" charset="-122"/>
                 <a:cs typeface="Aptos" pitchFamily="34" charset="-120"/>
               </a:rPr>
-              <a:t>The artifact should define the use case, affected roles, review criteria, safeguards, documentation expectations,.</a:t>
-            </a:r>
-            <a:endParaRPr lang="en-US" sz="1700" dirty="0"/>
-          </a:p>
-        </p:txBody>
-      </p:sp>
-      <p:sp>
-        <p:nvSpPr>
-          <p:cNvPr id="11" name="Shape 9"/>
+              <a:t>The artifact should define the use case, affected roles, review criteria, safeguards, documentation.</a:t>
+            </a:r>
+            <a:endParaRPr lang="en-US" sz="2100" dirty="0"/>
+          </a:p>
+        </p:txBody>
+      </p:sp>
+      <p:sp>
+        <p:nvSpPr>
+          <p:cNvPr id="12" name="Shape 10"/>
           <p:cNvSpPr/>
           <p:nvPr/>
         </p:nvSpPr>
@@ -6840,14 +7110,14 @@
       </p:sp>
       <p:sp>
         <p:nvSpPr>
-          <p:cNvPr id="12" name="Text 10"/>
+          <p:cNvPr id="13" name="Text 11"/>
           <p:cNvSpPr/>
           <p:nvPr/>
         </p:nvSpPr>
         <p:spPr>
           <a:xfrm>
             <a:off x="8074152" y="1563624"/>
-            <a:ext cx="2825496" cy="201168"/>
+            <a:ext cx="2825496" cy="256032"/>
           </a:xfrm>
           <a:prstGeom prst="rect">
             <a:avLst/>
@@ -6863,7 +7133,7 @@
               <a:buNone/>
             </a:pPr>
             <a:r>
-              <a:rPr lang="en-US" sz="950" b="1" dirty="0">
+              <a:rPr lang="en-US" sz="1300" b="1" dirty="0">
                 <a:solidFill>
                   <a:srgbClr val="0068B7"/>
                 </a:solidFill>
@@ -6873,20 +7143,20 @@
               </a:rPr>
               <a:t>Key idea</a:t>
             </a:r>
-            <a:endParaRPr lang="en-US" sz="950" dirty="0"/>
-          </a:p>
-        </p:txBody>
-      </p:sp>
-      <p:sp>
-        <p:nvSpPr>
-          <p:cNvPr id="13" name="Text 11"/>
-          <p:cNvSpPr/>
-          <p:nvPr/>
-        </p:nvSpPr>
-        <p:spPr>
-          <a:xfrm>
-            <a:off x="8074152" y="1856232"/>
-            <a:ext cx="2825496" cy="1261872"/>
+            <a:endParaRPr lang="en-US" sz="1300" dirty="0"/>
+          </a:p>
+        </p:txBody>
+      </p:sp>
+      <p:sp>
+        <p:nvSpPr>
+          <p:cNvPr id="14" name="Text 12"/>
+          <p:cNvSpPr/>
+          <p:nvPr/>
+        </p:nvSpPr>
+        <p:spPr>
+          <a:xfrm>
+            <a:off x="8074152" y="1920240"/>
+            <a:ext cx="2825496" cy="1188720"/>
           </a:xfrm>
           <a:prstGeom prst="rect">
             <a:avLst/>
@@ -6904,7 +7174,7 @@
               <a:buNone/>
             </a:pPr>
             <a:r>
-              <a:rPr lang="en-US" sz="1250" dirty="0">
+              <a:rPr lang="en-US" sz="1550" dirty="0">
                 <a:solidFill>
                   <a:srgbClr val="17364A"/>
                 </a:solidFill>
@@ -6912,15 +7182,15 @@
                 <a:ea typeface="Aptos" pitchFamily="34" charset="-122"/>
                 <a:cs typeface="Aptos" pitchFamily="34" charset="-120"/>
               </a:rPr>
-              <a:t>Create a practical public comment, social listening, and community feedback analysis artifact for one AI-supported public.</a:t>
-            </a:r>
-            <a:endParaRPr lang="en-US" sz="1250" dirty="0"/>
-          </a:p>
-        </p:txBody>
-      </p:sp>
-      <p:sp>
-        <p:nvSpPr>
-          <p:cNvPr id="14" name="Shape 12"/>
+              <a:t>Create a practical public comment, social listening, and community feedback analysis artifact for one.</a:t>
+            </a:r>
+            <a:endParaRPr lang="en-US" sz="1550" dirty="0"/>
+          </a:p>
+        </p:txBody>
+      </p:sp>
+      <p:sp>
+        <p:nvSpPr>
+          <p:cNvPr id="15" name="Shape 13"/>
           <p:cNvSpPr/>
           <p:nvPr/>
         </p:nvSpPr>
@@ -6947,14 +7217,14 @@
       </p:sp>
       <p:sp>
         <p:nvSpPr>
-          <p:cNvPr id="15" name="Text 13"/>
+          <p:cNvPr id="16" name="Text 14"/>
           <p:cNvSpPr/>
           <p:nvPr/>
         </p:nvSpPr>
         <p:spPr>
           <a:xfrm>
             <a:off x="8074152" y="3666744"/>
-            <a:ext cx="2825496" cy="201168"/>
+            <a:ext cx="2825496" cy="256032"/>
           </a:xfrm>
           <a:prstGeom prst="rect">
             <a:avLst/>
@@ -6970,7 +7240,7 @@
               <a:buNone/>
             </a:pPr>
             <a:r>
-              <a:rPr lang="en-US" sz="950" b="1" dirty="0">
+              <a:rPr lang="en-US" sz="1300" b="1" dirty="0">
                 <a:solidFill>
                   <a:srgbClr val="0068B7"/>
                 </a:solidFill>
@@ -6980,20 +7250,20 @@
               </a:rPr>
               <a:t>Use this for</a:t>
             </a:r>
-            <a:endParaRPr lang="en-US" sz="950" dirty="0"/>
-          </a:p>
-        </p:txBody>
-      </p:sp>
-      <p:sp>
-        <p:nvSpPr>
-          <p:cNvPr id="16" name="Text 14"/>
-          <p:cNvSpPr/>
-          <p:nvPr/>
-        </p:nvSpPr>
-        <p:spPr>
-          <a:xfrm>
-            <a:off x="8074152" y="3959352"/>
-            <a:ext cx="2825496" cy="1170432"/>
+            <a:endParaRPr lang="en-US" sz="1300" dirty="0"/>
+          </a:p>
+        </p:txBody>
+      </p:sp>
+      <p:sp>
+        <p:nvSpPr>
+          <p:cNvPr id="17" name="Text 15"/>
+          <p:cNvSpPr/>
+          <p:nvPr/>
+        </p:nvSpPr>
+        <p:spPr>
+          <a:xfrm>
+            <a:off x="8074152" y="4023360"/>
+            <a:ext cx="2825496" cy="1097280"/>
           </a:xfrm>
           <a:prstGeom prst="rect">
             <a:avLst/>
@@ -7011,7 +7281,7 @@
               <a:buNone/>
             </a:pPr>
             <a:r>
-              <a:rPr lang="en-US" sz="1250" dirty="0">
+              <a:rPr lang="en-US" sz="1550" dirty="0">
                 <a:solidFill>
                   <a:srgbClr val="17364A"/>
                 </a:solidFill>
@@ -7021,7 +7291,7 @@
               </a:rPr>
               <a:t>Connect the concept to public health decisions, safeguards, documentation, or implementation work.</a:t>
             </a:r>
-            <a:endParaRPr lang="en-US" sz="1250" dirty="0"/>
+            <a:endParaRPr lang="en-US" sz="1550" dirty="0"/>
           </a:p>
         </p:txBody>
       </p:sp>
@@ -7218,7 +7488,7 @@
                 <a:ea typeface="Aptos" pitchFamily="34" charset="-122"/>
                 <a:cs typeface="Aptos" pitchFamily="34" charset="-120"/>
               </a:rPr>
-              <a:t>© Paula Soper</a:t>
+              <a:t>Â© Paula Soper</a:t>
             </a:r>
             <a:endParaRPr lang="en-US" sz="800" dirty="0"/>
           </a:p>
@@ -7226,7 +7496,46 @@
       </p:sp>
       <p:sp>
         <p:nvSpPr>
-          <p:cNvPr id="7" name="Shape 5"/>
+          <p:cNvPr id="7" name="Text 5"/>
+          <p:cNvSpPr/>
+          <p:nvPr/>
+        </p:nvSpPr>
+        <p:spPr>
+          <a:xfrm>
+            <a:off x="11137392" y="6510528"/>
+            <a:ext cx="411480" cy="201168"/>
+          </a:xfrm>
+          <a:prstGeom prst="rect">
+            <a:avLst/>
+          </a:prstGeom>
+          <a:noFill/>
+          <a:ln/>
+        </p:spPr>
+        <p:txBody>
+          <a:bodyPr wrap="square" lIns="0" tIns="0" rIns="0" bIns="0" rtlCol="0" anchor="ctr"/>
+          <a:lstStyle/>
+          <a:p>
+            <a:pPr algn="r" indent="0" marL="0">
+              <a:buNone/>
+            </a:pPr>
+            <a:r>
+              <a:rPr lang="en-US" sz="900" dirty="0">
+                <a:solidFill>
+                  <a:srgbClr val="5F7181"/>
+                </a:solidFill>
+                <a:latin typeface="Aptos" pitchFamily="34" charset="0"/>
+                <a:ea typeface="Aptos" pitchFamily="34" charset="-122"/>
+                <a:cs typeface="Aptos" pitchFamily="34" charset="-120"/>
+              </a:rPr>
+              <a:t>17</a:t>
+            </a:r>
+            <a:endParaRPr lang="en-US" sz="900" dirty="0"/>
+          </a:p>
+        </p:txBody>
+      </p:sp>
+      <p:sp>
+        <p:nvSpPr>
+          <p:cNvPr id="8" name="Shape 6"/>
           <p:cNvSpPr/>
           <p:nvPr/>
         </p:nvSpPr>
@@ -7251,7 +7560,7 @@
       </p:sp>
       <p:sp>
         <p:nvSpPr>
-          <p:cNvPr id="8" name="Text 6"/>
+          <p:cNvPr id="9" name="Text 7"/>
           <p:cNvSpPr/>
           <p:nvPr/>
         </p:nvSpPr>
@@ -7290,14 +7599,14 @@
       </p:sp>
       <p:sp>
         <p:nvSpPr>
-          <p:cNvPr id="9" name="Text 7"/>
+          <p:cNvPr id="10" name="Text 8"/>
           <p:cNvSpPr/>
           <p:nvPr/>
         </p:nvSpPr>
         <p:spPr>
           <a:xfrm>
             <a:off x="640080" y="621792"/>
-            <a:ext cx="10881360" cy="566928"/>
+            <a:ext cx="10881360" cy="713232"/>
           </a:xfrm>
           <a:prstGeom prst="rect">
             <a:avLst/>
@@ -7315,7 +7624,7 @@
               <a:buNone/>
             </a:pPr>
             <a:r>
-              <a:rPr lang="en-US" sz="2700" b="1" dirty="0">
+              <a:rPr lang="en-US" sz="3400" b="1" dirty="0">
                 <a:solidFill>
                   <a:srgbClr val="003A63"/>
                 </a:solidFill>
@@ -7325,20 +7634,20 @@
               </a:rPr>
               <a:t>Expected Artifact or Evidence</a:t>
             </a:r>
-            <a:endParaRPr lang="en-US" sz="2700" dirty="0"/>
-          </a:p>
-        </p:txBody>
-      </p:sp>
-      <p:sp>
-        <p:nvSpPr>
-          <p:cNvPr id="10" name="Text 8"/>
-          <p:cNvSpPr/>
-          <p:nvPr/>
-        </p:nvSpPr>
-        <p:spPr>
-          <a:xfrm>
-            <a:off x="868680" y="1417320"/>
-            <a:ext cx="6675120" cy="4434840"/>
+            <a:endParaRPr lang="en-US" sz="3400" dirty="0"/>
+          </a:p>
+        </p:txBody>
+      </p:sp>
+      <p:sp>
+        <p:nvSpPr>
+          <p:cNvPr id="11" name="Text 9"/>
+          <p:cNvSpPr/>
+          <p:nvPr/>
+        </p:nvSpPr>
+        <p:spPr>
+          <a:xfrm>
+            <a:off x="868680" y="1508760"/>
+            <a:ext cx="6537960" cy="4160520"/>
           </a:xfrm>
           <a:prstGeom prst="rect">
             <a:avLst/>
@@ -7353,7 +7662,7 @@
           <a:lstStyle/>
           <a:p>
             <a:r>
-              <a:rPr lang="en-US" sz="1700" dirty="0">
+              <a:rPr lang="en-US" sz="2100" dirty="0">
                 <a:solidFill>
                   <a:srgbClr val="17364A"/>
                 </a:solidFill>
@@ -7363,11 +7672,11 @@
               </a:rPr>
               <a:t>Public Comment, Social Listening, and Community Feedback Analysis artifact</a:t>
             </a:r>
-            <a:endParaRPr lang="en-US" sz="1700" dirty="0"/>
-          </a:p>
-          <a:p>
-            <a:r>
-              <a:rPr lang="en-US" sz="1700" dirty="0">
+            <a:endParaRPr lang="en-US" sz="2100" dirty="0"/>
+          </a:p>
+          <a:p>
+            <a:r>
+              <a:rPr lang="en-US" sz="2100" dirty="0">
                 <a:solidFill>
                   <a:srgbClr val="17364A"/>
                 </a:solidFill>
@@ -7377,11 +7686,11 @@
               </a:rPr>
               <a:t>Role and responsibility table</a:t>
             </a:r>
-            <a:endParaRPr lang="en-US" sz="1700" dirty="0"/>
-          </a:p>
-          <a:p>
-            <a:r>
-              <a:rPr lang="en-US" sz="1700" dirty="0">
+            <a:endParaRPr lang="en-US" sz="2100" dirty="0"/>
+          </a:p>
+          <a:p>
+            <a:r>
+              <a:rPr lang="en-US" sz="2100" dirty="0">
                 <a:solidFill>
                   <a:srgbClr val="17364A"/>
                 </a:solidFill>
@@ -7391,13 +7700,13 @@
               </a:rPr>
               <a:t>Risk and safeguard summary</a:t>
             </a:r>
-            <a:endParaRPr lang="en-US" sz="1700" dirty="0"/>
-          </a:p>
-        </p:txBody>
-      </p:sp>
-      <p:sp>
-        <p:nvSpPr>
-          <p:cNvPr id="11" name="Shape 9"/>
+            <a:endParaRPr lang="en-US" sz="2100" dirty="0"/>
+          </a:p>
+        </p:txBody>
+      </p:sp>
+      <p:sp>
+        <p:nvSpPr>
+          <p:cNvPr id="12" name="Shape 10"/>
           <p:cNvSpPr/>
           <p:nvPr/>
         </p:nvSpPr>
@@ -7424,14 +7733,14 @@
       </p:sp>
       <p:sp>
         <p:nvSpPr>
-          <p:cNvPr id="12" name="Text 10"/>
+          <p:cNvPr id="13" name="Text 11"/>
           <p:cNvSpPr/>
           <p:nvPr/>
         </p:nvSpPr>
         <p:spPr>
           <a:xfrm>
             <a:off x="8074152" y="1563624"/>
-            <a:ext cx="2825496" cy="201168"/>
+            <a:ext cx="2825496" cy="256032"/>
           </a:xfrm>
           <a:prstGeom prst="rect">
             <a:avLst/>
@@ -7447,7 +7756,7 @@
               <a:buNone/>
             </a:pPr>
             <a:r>
-              <a:rPr lang="en-US" sz="950" b="1" dirty="0">
+              <a:rPr lang="en-US" sz="1300" b="1" dirty="0">
                 <a:solidFill>
                   <a:srgbClr val="0068B7"/>
                 </a:solidFill>
@@ -7457,20 +7766,20 @@
               </a:rPr>
               <a:t>Key idea</a:t>
             </a:r>
-            <a:endParaRPr lang="en-US" sz="950" dirty="0"/>
-          </a:p>
-        </p:txBody>
-      </p:sp>
-      <p:sp>
-        <p:nvSpPr>
-          <p:cNvPr id="13" name="Text 11"/>
-          <p:cNvSpPr/>
-          <p:nvPr/>
-        </p:nvSpPr>
-        <p:spPr>
-          <a:xfrm>
-            <a:off x="8074152" y="1856232"/>
-            <a:ext cx="2825496" cy="1261872"/>
+            <a:endParaRPr lang="en-US" sz="1300" dirty="0"/>
+          </a:p>
+        </p:txBody>
+      </p:sp>
+      <p:sp>
+        <p:nvSpPr>
+          <p:cNvPr id="14" name="Text 12"/>
+          <p:cNvSpPr/>
+          <p:nvPr/>
+        </p:nvSpPr>
+        <p:spPr>
+          <a:xfrm>
+            <a:off x="8074152" y="1920240"/>
+            <a:ext cx="2825496" cy="1188720"/>
           </a:xfrm>
           <a:prstGeom prst="rect">
             <a:avLst/>
@@ -7488,7 +7797,7 @@
               <a:buNone/>
             </a:pPr>
             <a:r>
-              <a:rPr lang="en-US" sz="1250" dirty="0">
+              <a:rPr lang="en-US" sz="1550" dirty="0">
                 <a:solidFill>
                   <a:srgbClr val="17364A"/>
                 </a:solidFill>
@@ -7498,13 +7807,13 @@
               </a:rPr>
               <a:t>Public Comment, Social Listening, and Community Feedback Analysis artifact</a:t>
             </a:r>
-            <a:endParaRPr lang="en-US" sz="1250" dirty="0"/>
-          </a:p>
-        </p:txBody>
-      </p:sp>
-      <p:sp>
-        <p:nvSpPr>
-          <p:cNvPr id="14" name="Shape 12"/>
+            <a:endParaRPr lang="en-US" sz="1550" dirty="0"/>
+          </a:p>
+        </p:txBody>
+      </p:sp>
+      <p:sp>
+        <p:nvSpPr>
+          <p:cNvPr id="15" name="Shape 13"/>
           <p:cNvSpPr/>
           <p:nvPr/>
         </p:nvSpPr>
@@ -7531,14 +7840,14 @@
       </p:sp>
       <p:sp>
         <p:nvSpPr>
-          <p:cNvPr id="15" name="Text 13"/>
+          <p:cNvPr id="16" name="Text 14"/>
           <p:cNvSpPr/>
           <p:nvPr/>
         </p:nvSpPr>
         <p:spPr>
           <a:xfrm>
             <a:off x="8074152" y="3666744"/>
-            <a:ext cx="2825496" cy="201168"/>
+            <a:ext cx="2825496" cy="256032"/>
           </a:xfrm>
           <a:prstGeom prst="rect">
             <a:avLst/>
@@ -7554,7 +7863,7 @@
               <a:buNone/>
             </a:pPr>
             <a:r>
-              <a:rPr lang="en-US" sz="950" b="1" dirty="0">
+              <a:rPr lang="en-US" sz="1300" b="1" dirty="0">
                 <a:solidFill>
                   <a:srgbClr val="0068B7"/>
                 </a:solidFill>
@@ -7564,20 +7873,20 @@
               </a:rPr>
               <a:t>Use this for</a:t>
             </a:r>
-            <a:endParaRPr lang="en-US" sz="950" dirty="0"/>
-          </a:p>
-        </p:txBody>
-      </p:sp>
-      <p:sp>
-        <p:nvSpPr>
-          <p:cNvPr id="16" name="Text 14"/>
-          <p:cNvSpPr/>
-          <p:nvPr/>
-        </p:nvSpPr>
-        <p:spPr>
-          <a:xfrm>
-            <a:off x="8074152" y="3959352"/>
-            <a:ext cx="2825496" cy="1170432"/>
+            <a:endParaRPr lang="en-US" sz="1300" dirty="0"/>
+          </a:p>
+        </p:txBody>
+      </p:sp>
+      <p:sp>
+        <p:nvSpPr>
+          <p:cNvPr id="17" name="Text 15"/>
+          <p:cNvSpPr/>
+          <p:nvPr/>
+        </p:nvSpPr>
+        <p:spPr>
+          <a:xfrm>
+            <a:off x="8074152" y="4023360"/>
+            <a:ext cx="2825496" cy="1097280"/>
           </a:xfrm>
           <a:prstGeom prst="rect">
             <a:avLst/>
@@ -7595,7 +7904,7 @@
               <a:buNone/>
             </a:pPr>
             <a:r>
-              <a:rPr lang="en-US" sz="1250" dirty="0">
+              <a:rPr lang="en-US" sz="1550" dirty="0">
                 <a:solidFill>
                   <a:srgbClr val="17364A"/>
                 </a:solidFill>
@@ -7605,7 +7914,7 @@
               </a:rPr>
               <a:t>Connect the concept to public health decisions, safeguards, documentation, or implementation work.</a:t>
             </a:r>
-            <a:endParaRPr lang="en-US" sz="1250" dirty="0"/>
+            <a:endParaRPr lang="en-US" sz="1550" dirty="0"/>
           </a:p>
         </p:txBody>
       </p:sp>
@@ -7802,7 +8111,7 @@
                 <a:ea typeface="Aptos" pitchFamily="34" charset="-122"/>
                 <a:cs typeface="Aptos" pitchFamily="34" charset="-120"/>
               </a:rPr>
-              <a:t>© Paula Soper</a:t>
+              <a:t>Â© Paula Soper</a:t>
             </a:r>
             <a:endParaRPr lang="en-US" sz="800" dirty="0"/>
           </a:p>
@@ -7816,8 +8125,47 @@
         </p:nvSpPr>
         <p:spPr>
           <a:xfrm>
+            <a:off x="11137392" y="6510528"/>
+            <a:ext cx="411480" cy="201168"/>
+          </a:xfrm>
+          <a:prstGeom prst="rect">
+            <a:avLst/>
+          </a:prstGeom>
+          <a:noFill/>
+          <a:ln/>
+        </p:spPr>
+        <p:txBody>
+          <a:bodyPr wrap="square" lIns="0" tIns="0" rIns="0" bIns="0" rtlCol="0" anchor="ctr"/>
+          <a:lstStyle/>
+          <a:p>
+            <a:pPr algn="r" indent="0" marL="0">
+              <a:buNone/>
+            </a:pPr>
+            <a:r>
+              <a:rPr lang="en-US" sz="900" dirty="0">
+                <a:solidFill>
+                  <a:srgbClr val="5F7181"/>
+                </a:solidFill>
+                <a:latin typeface="Aptos" pitchFamily="34" charset="0"/>
+                <a:ea typeface="Aptos" pitchFamily="34" charset="-122"/>
+                <a:cs typeface="Aptos" pitchFamily="34" charset="-120"/>
+              </a:rPr>
+              <a:t>18</a:t>
+            </a:r>
+            <a:endParaRPr lang="en-US" sz="900" dirty="0"/>
+          </a:p>
+        </p:txBody>
+      </p:sp>
+      <p:sp>
+        <p:nvSpPr>
+          <p:cNvPr id="8" name="Text 6"/>
+          <p:cNvSpPr/>
+          <p:nvPr/>
+        </p:nvSpPr>
+        <p:spPr>
+          <a:xfrm>
             <a:off x="640080" y="658368"/>
-            <a:ext cx="10881360" cy="566928"/>
+            <a:ext cx="10881360" cy="713232"/>
           </a:xfrm>
           <a:prstGeom prst="rect">
             <a:avLst/>
@@ -7835,7 +8183,7 @@
               <a:buNone/>
             </a:pPr>
             <a:r>
-              <a:rPr lang="en-US" sz="2700" b="1" dirty="0">
+              <a:rPr lang="en-US" sz="3400" b="1" dirty="0">
                 <a:solidFill>
                   <a:srgbClr val="003A63"/>
                 </a:solidFill>
@@ -7845,20 +8193,20 @@
               </a:rPr>
               <a:t>Expected Artifact or Evidence Continued</a:t>
             </a:r>
-            <a:endParaRPr lang="en-US" sz="2700" dirty="0"/>
-          </a:p>
-        </p:txBody>
-      </p:sp>
-      <p:sp>
-        <p:nvSpPr>
-          <p:cNvPr id="8" name="Text 6"/>
-          <p:cNvSpPr/>
-          <p:nvPr/>
-        </p:nvSpPr>
-        <p:spPr>
-          <a:xfrm>
-            <a:off x="868680" y="1417320"/>
-            <a:ext cx="6675120" cy="4434840"/>
+            <a:endParaRPr lang="en-US" sz="3400" dirty="0"/>
+          </a:p>
+        </p:txBody>
+      </p:sp>
+      <p:sp>
+        <p:nvSpPr>
+          <p:cNvPr id="9" name="Text 7"/>
+          <p:cNvSpPr/>
+          <p:nvPr/>
+        </p:nvSpPr>
+        <p:spPr>
+          <a:xfrm>
+            <a:off x="868680" y="1508760"/>
+            <a:ext cx="6537960" cy="4160520"/>
           </a:xfrm>
           <a:prstGeom prst="rect">
             <a:avLst/>
@@ -7873,7 +8221,7 @@
           <a:lstStyle/>
           <a:p>
             <a:r>
-              <a:rPr lang="en-US" sz="1700" dirty="0">
+              <a:rPr lang="en-US" sz="2100" dirty="0">
                 <a:solidFill>
                   <a:srgbClr val="17364A"/>
                 </a:solidFill>
@@ -7883,11 +8231,11 @@
               </a:rPr>
               <a:t>Escalation and monitoring plan</a:t>
             </a:r>
-            <a:endParaRPr lang="en-US" sz="1700" dirty="0"/>
-          </a:p>
-          <a:p>
-            <a:r>
-              <a:rPr lang="en-US" sz="1700" dirty="0">
+            <a:endParaRPr lang="en-US" sz="2100" dirty="0"/>
+          </a:p>
+          <a:p>
+            <a:r>
+              <a:rPr lang="en-US" sz="2100" dirty="0">
                 <a:solidFill>
                   <a:srgbClr val="17364A"/>
                 </a:solidFill>
@@ -7897,13 +8245,13 @@
               </a:rPr>
               <a:t>Approval or review note</a:t>
             </a:r>
-            <a:endParaRPr lang="en-US" sz="1700" dirty="0"/>
-          </a:p>
-        </p:txBody>
-      </p:sp>
-      <p:sp>
-        <p:nvSpPr>
-          <p:cNvPr id="9" name="Shape 7"/>
+            <a:endParaRPr lang="en-US" sz="2100" dirty="0"/>
+          </a:p>
+        </p:txBody>
+      </p:sp>
+      <p:sp>
+        <p:nvSpPr>
+          <p:cNvPr id="10" name="Shape 8"/>
           <p:cNvSpPr/>
           <p:nvPr/>
         </p:nvSpPr>
@@ -7930,14 +8278,14 @@
       </p:sp>
       <p:sp>
         <p:nvSpPr>
-          <p:cNvPr id="10" name="Text 8"/>
+          <p:cNvPr id="11" name="Text 9"/>
           <p:cNvSpPr/>
           <p:nvPr/>
         </p:nvSpPr>
         <p:spPr>
           <a:xfrm>
             <a:off x="8074152" y="1563624"/>
-            <a:ext cx="2825496" cy="201168"/>
+            <a:ext cx="2825496" cy="256032"/>
           </a:xfrm>
           <a:prstGeom prst="rect">
             <a:avLst/>
@@ -7953,7 +8301,7 @@
               <a:buNone/>
             </a:pPr>
             <a:r>
-              <a:rPr lang="en-US" sz="950" b="1" dirty="0">
+              <a:rPr lang="en-US" sz="1300" b="1" dirty="0">
                 <a:solidFill>
                   <a:srgbClr val="0068B7"/>
                 </a:solidFill>
@@ -7963,20 +8311,20 @@
               </a:rPr>
               <a:t>Key idea</a:t>
             </a:r>
-            <a:endParaRPr lang="en-US" sz="950" dirty="0"/>
-          </a:p>
-        </p:txBody>
-      </p:sp>
-      <p:sp>
-        <p:nvSpPr>
-          <p:cNvPr id="11" name="Text 9"/>
-          <p:cNvSpPr/>
-          <p:nvPr/>
-        </p:nvSpPr>
-        <p:spPr>
-          <a:xfrm>
-            <a:off x="8074152" y="1856232"/>
-            <a:ext cx="2825496" cy="1261872"/>
+            <a:endParaRPr lang="en-US" sz="1300" dirty="0"/>
+          </a:p>
+        </p:txBody>
+      </p:sp>
+      <p:sp>
+        <p:nvSpPr>
+          <p:cNvPr id="12" name="Text 10"/>
+          <p:cNvSpPr/>
+          <p:nvPr/>
+        </p:nvSpPr>
+        <p:spPr>
+          <a:xfrm>
+            <a:off x="8074152" y="1920240"/>
+            <a:ext cx="2825496" cy="1188720"/>
           </a:xfrm>
           <a:prstGeom prst="rect">
             <a:avLst/>
@@ -7994,7 +8342,7 @@
               <a:buNone/>
             </a:pPr>
             <a:r>
-              <a:rPr lang="en-US" sz="1250" dirty="0">
+              <a:rPr lang="en-US" sz="1550" dirty="0">
                 <a:solidFill>
                   <a:srgbClr val="17364A"/>
                 </a:solidFill>
@@ -8004,13 +8352,13 @@
               </a:rPr>
               <a:t>Escalation and monitoring plan</a:t>
             </a:r>
-            <a:endParaRPr lang="en-US" sz="1250" dirty="0"/>
-          </a:p>
-        </p:txBody>
-      </p:sp>
-      <p:sp>
-        <p:nvSpPr>
-          <p:cNvPr id="12" name="Shape 10"/>
+            <a:endParaRPr lang="en-US" sz="1550" dirty="0"/>
+          </a:p>
+        </p:txBody>
+      </p:sp>
+      <p:sp>
+        <p:nvSpPr>
+          <p:cNvPr id="13" name="Shape 11"/>
           <p:cNvSpPr/>
           <p:nvPr/>
         </p:nvSpPr>
@@ -8037,14 +8385,14 @@
       </p:sp>
       <p:sp>
         <p:nvSpPr>
-          <p:cNvPr id="13" name="Text 11"/>
+          <p:cNvPr id="14" name="Text 12"/>
           <p:cNvSpPr/>
           <p:nvPr/>
         </p:nvSpPr>
         <p:spPr>
           <a:xfrm>
             <a:off x="8074152" y="3666744"/>
-            <a:ext cx="2825496" cy="201168"/>
+            <a:ext cx="2825496" cy="256032"/>
           </a:xfrm>
           <a:prstGeom prst="rect">
             <a:avLst/>
@@ -8060,7 +8408,7 @@
               <a:buNone/>
             </a:pPr>
             <a:r>
-              <a:rPr lang="en-US" sz="950" b="1" dirty="0">
+              <a:rPr lang="en-US" sz="1300" b="1" dirty="0">
                 <a:solidFill>
                   <a:srgbClr val="0068B7"/>
                 </a:solidFill>
@@ -8070,20 +8418,20 @@
               </a:rPr>
               <a:t>Use this for</a:t>
             </a:r>
-            <a:endParaRPr lang="en-US" sz="950" dirty="0"/>
-          </a:p>
-        </p:txBody>
-      </p:sp>
-      <p:sp>
-        <p:nvSpPr>
-          <p:cNvPr id="14" name="Text 12"/>
-          <p:cNvSpPr/>
-          <p:nvPr/>
-        </p:nvSpPr>
-        <p:spPr>
-          <a:xfrm>
-            <a:off x="8074152" y="3959352"/>
-            <a:ext cx="2825496" cy="1170432"/>
+            <a:endParaRPr lang="en-US" sz="1300" dirty="0"/>
+          </a:p>
+        </p:txBody>
+      </p:sp>
+      <p:sp>
+        <p:nvSpPr>
+          <p:cNvPr id="15" name="Text 13"/>
+          <p:cNvSpPr/>
+          <p:nvPr/>
+        </p:nvSpPr>
+        <p:spPr>
+          <a:xfrm>
+            <a:off x="8074152" y="4023360"/>
+            <a:ext cx="2825496" cy="1097280"/>
           </a:xfrm>
           <a:prstGeom prst="rect">
             <a:avLst/>
@@ -8101,7 +8449,7 @@
               <a:buNone/>
             </a:pPr>
             <a:r>
-              <a:rPr lang="en-US" sz="1250" dirty="0">
+              <a:rPr lang="en-US" sz="1550" dirty="0">
                 <a:solidFill>
                   <a:srgbClr val="17364A"/>
                 </a:solidFill>
@@ -8111,7 +8459,7 @@
               </a:rPr>
               <a:t>Connect the concept to public health decisions, safeguards, documentation, or implementation work.</a:t>
             </a:r>
-            <a:endParaRPr lang="en-US" sz="1250" dirty="0"/>
+            <a:endParaRPr lang="en-US" sz="1550" dirty="0"/>
           </a:p>
         </p:txBody>
       </p:sp>
@@ -8308,7 +8656,7 @@
                 <a:ea typeface="Aptos" pitchFamily="34" charset="-122"/>
                 <a:cs typeface="Aptos" pitchFamily="34" charset="-120"/>
               </a:rPr>
-              <a:t>© Paula Soper</a:t>
+              <a:t>Â© Paula Soper</a:t>
             </a:r>
             <a:endParaRPr lang="en-US" sz="800" dirty="0"/>
           </a:p>
@@ -8316,7 +8664,46 @@
       </p:sp>
       <p:sp>
         <p:nvSpPr>
-          <p:cNvPr id="7" name="Shape 5"/>
+          <p:cNvPr id="7" name="Text 5"/>
+          <p:cNvSpPr/>
+          <p:nvPr/>
+        </p:nvSpPr>
+        <p:spPr>
+          <a:xfrm>
+            <a:off x="11137392" y="6510528"/>
+            <a:ext cx="411480" cy="201168"/>
+          </a:xfrm>
+          <a:prstGeom prst="rect">
+            <a:avLst/>
+          </a:prstGeom>
+          <a:noFill/>
+          <a:ln/>
+        </p:spPr>
+        <p:txBody>
+          <a:bodyPr wrap="square" lIns="0" tIns="0" rIns="0" bIns="0" rtlCol="0" anchor="ctr"/>
+          <a:lstStyle/>
+          <a:p>
+            <a:pPr algn="r" indent="0" marL="0">
+              <a:buNone/>
+            </a:pPr>
+            <a:r>
+              <a:rPr lang="en-US" sz="900" dirty="0">
+                <a:solidFill>
+                  <a:srgbClr val="5F7181"/>
+                </a:solidFill>
+                <a:latin typeface="Aptos" pitchFamily="34" charset="0"/>
+                <a:ea typeface="Aptos" pitchFamily="34" charset="-122"/>
+                <a:cs typeface="Aptos" pitchFamily="34" charset="-120"/>
+              </a:rPr>
+              <a:t>19</a:t>
+            </a:r>
+            <a:endParaRPr lang="en-US" sz="900" dirty="0"/>
+          </a:p>
+        </p:txBody>
+      </p:sp>
+      <p:sp>
+        <p:nvSpPr>
+          <p:cNvPr id="8" name="Shape 6"/>
           <p:cNvSpPr/>
           <p:nvPr/>
         </p:nvSpPr>
@@ -8341,7 +8728,7 @@
       </p:sp>
       <p:sp>
         <p:nvSpPr>
-          <p:cNvPr id="8" name="Text 6"/>
+          <p:cNvPr id="9" name="Text 7"/>
           <p:cNvSpPr/>
           <p:nvPr/>
         </p:nvSpPr>
@@ -8380,14 +8767,14 @@
       </p:sp>
       <p:sp>
         <p:nvSpPr>
-          <p:cNvPr id="9" name="Text 7"/>
+          <p:cNvPr id="10" name="Text 8"/>
           <p:cNvSpPr/>
           <p:nvPr/>
         </p:nvSpPr>
         <p:spPr>
           <a:xfrm>
             <a:off x="640080" y="621792"/>
-            <a:ext cx="10881360" cy="566928"/>
+            <a:ext cx="10881360" cy="713232"/>
           </a:xfrm>
           <a:prstGeom prst="rect">
             <a:avLst/>
@@ -8405,7 +8792,7 @@
               <a:buNone/>
             </a:pPr>
             <a:r>
-              <a:rPr lang="en-US" sz="2700" b="1" dirty="0">
+              <a:rPr lang="en-US" sz="3400" b="1" dirty="0">
                 <a:solidFill>
                   <a:srgbClr val="003A63"/>
                 </a:solidFill>
@@ -8415,20 +8802,20 @@
               </a:rPr>
               <a:t>Expected Assignment</a:t>
             </a:r>
-            <a:endParaRPr lang="en-US" sz="2700" dirty="0"/>
-          </a:p>
-        </p:txBody>
-      </p:sp>
-      <p:sp>
-        <p:nvSpPr>
-          <p:cNvPr id="10" name="Text 8"/>
-          <p:cNvSpPr/>
-          <p:nvPr/>
-        </p:nvSpPr>
-        <p:spPr>
-          <a:xfrm>
-            <a:off x="868680" y="1417320"/>
-            <a:ext cx="6675120" cy="4434840"/>
+            <a:endParaRPr lang="en-US" sz="3400" dirty="0"/>
+          </a:p>
+        </p:txBody>
+      </p:sp>
+      <p:sp>
+        <p:nvSpPr>
+          <p:cNvPr id="11" name="Text 9"/>
+          <p:cNvSpPr/>
+          <p:nvPr/>
+        </p:nvSpPr>
+        <p:spPr>
+          <a:xfrm>
+            <a:off x="868680" y="1508760"/>
+            <a:ext cx="6537960" cy="4160520"/>
           </a:xfrm>
           <a:prstGeom prst="rect">
             <a:avLst/>
@@ -8443,7 +8830,7 @@
           <a:lstStyle/>
           <a:p>
             <a:r>
-              <a:rPr lang="en-US" sz="1700" dirty="0">
+              <a:rPr lang="en-US" sz="2100" dirty="0">
                 <a:solidFill>
                   <a:srgbClr val="17364A"/>
                 </a:solidFill>
@@ -8453,11 +8840,11 @@
               </a:rPr>
               <a:t>Public Comment, Social Listening, and Community Feedback Analysis artifact</a:t>
             </a:r>
-            <a:endParaRPr lang="en-US" sz="1700" dirty="0"/>
-          </a:p>
-          <a:p>
-            <a:r>
-              <a:rPr lang="en-US" sz="1700" dirty="0">
+            <a:endParaRPr lang="en-US" sz="2100" dirty="0"/>
+          </a:p>
+          <a:p>
+            <a:r>
+              <a:rPr lang="en-US" sz="2100" dirty="0">
                 <a:solidFill>
                   <a:srgbClr val="17364A"/>
                 </a:solidFill>
@@ -8467,11 +8854,11 @@
               </a:rPr>
               <a:t>Role and responsibility table</a:t>
             </a:r>
-            <a:endParaRPr lang="en-US" sz="1700" dirty="0"/>
-          </a:p>
-          <a:p>
-            <a:r>
-              <a:rPr lang="en-US" sz="1700" dirty="0">
+            <a:endParaRPr lang="en-US" sz="2100" dirty="0"/>
+          </a:p>
+          <a:p>
+            <a:r>
+              <a:rPr lang="en-US" sz="2100" dirty="0">
                 <a:solidFill>
                   <a:srgbClr val="17364A"/>
                 </a:solidFill>
@@ -8481,27 +8868,13 @@
               </a:rPr>
               <a:t>Risk and safeguard summary</a:t>
             </a:r>
-            <a:endParaRPr lang="en-US" sz="1700" dirty="0"/>
-          </a:p>
-          <a:p>
-            <a:r>
-              <a:rPr lang="en-US" sz="1700" dirty="0">
-                <a:solidFill>
-                  <a:srgbClr val="17364A"/>
-                </a:solidFill>
-                <a:latin typeface="Aptos" pitchFamily="34" charset="0"/>
-                <a:ea typeface="Aptos" pitchFamily="34" charset="-122"/>
-                <a:cs typeface="Aptos" pitchFamily="34" charset="-120"/>
-              </a:rPr>
-              <a:t>Escalation and monitoring plan</a:t>
-            </a:r>
-            <a:endParaRPr lang="en-US" sz="1700" dirty="0"/>
-          </a:p>
-        </p:txBody>
-      </p:sp>
-      <p:sp>
-        <p:nvSpPr>
-          <p:cNvPr id="11" name="Shape 9"/>
+            <a:endParaRPr lang="en-US" sz="2100" dirty="0"/>
+          </a:p>
+        </p:txBody>
+      </p:sp>
+      <p:sp>
+        <p:nvSpPr>
+          <p:cNvPr id="12" name="Shape 10"/>
           <p:cNvSpPr/>
           <p:nvPr/>
         </p:nvSpPr>
@@ -8528,14 +8901,14 @@
       </p:sp>
       <p:sp>
         <p:nvSpPr>
-          <p:cNvPr id="12" name="Text 10"/>
+          <p:cNvPr id="13" name="Text 11"/>
           <p:cNvSpPr/>
           <p:nvPr/>
         </p:nvSpPr>
         <p:spPr>
           <a:xfrm>
             <a:off x="8074152" y="1563624"/>
-            <a:ext cx="2825496" cy="201168"/>
+            <a:ext cx="2825496" cy="256032"/>
           </a:xfrm>
           <a:prstGeom prst="rect">
             <a:avLst/>
@@ -8551,7 +8924,7 @@
               <a:buNone/>
             </a:pPr>
             <a:r>
-              <a:rPr lang="en-US" sz="950" b="1" dirty="0">
+              <a:rPr lang="en-US" sz="1300" b="1" dirty="0">
                 <a:solidFill>
                   <a:srgbClr val="0068B7"/>
                 </a:solidFill>
@@ -8561,20 +8934,20 @@
               </a:rPr>
               <a:t>Key idea</a:t>
             </a:r>
-            <a:endParaRPr lang="en-US" sz="950" dirty="0"/>
-          </a:p>
-        </p:txBody>
-      </p:sp>
-      <p:sp>
-        <p:nvSpPr>
-          <p:cNvPr id="13" name="Text 11"/>
-          <p:cNvSpPr/>
-          <p:nvPr/>
-        </p:nvSpPr>
-        <p:spPr>
-          <a:xfrm>
-            <a:off x="8074152" y="1856232"/>
-            <a:ext cx="2825496" cy="1261872"/>
+            <a:endParaRPr lang="en-US" sz="1300" dirty="0"/>
+          </a:p>
+        </p:txBody>
+      </p:sp>
+      <p:sp>
+        <p:nvSpPr>
+          <p:cNvPr id="14" name="Text 12"/>
+          <p:cNvSpPr/>
+          <p:nvPr/>
+        </p:nvSpPr>
+        <p:spPr>
+          <a:xfrm>
+            <a:off x="8074152" y="1920240"/>
+            <a:ext cx="2825496" cy="1188720"/>
           </a:xfrm>
           <a:prstGeom prst="rect">
             <a:avLst/>
@@ -8592,7 +8965,7 @@
               <a:buNone/>
             </a:pPr>
             <a:r>
-              <a:rPr lang="en-US" sz="1250" dirty="0">
+              <a:rPr lang="en-US" sz="1550" dirty="0">
                 <a:solidFill>
                   <a:srgbClr val="17364A"/>
                 </a:solidFill>
@@ -8602,13 +8975,13 @@
               </a:rPr>
               <a:t>Public Comment, Social Listening, and Community Feedback Analysis artifact</a:t>
             </a:r>
-            <a:endParaRPr lang="en-US" sz="1250" dirty="0"/>
-          </a:p>
-        </p:txBody>
-      </p:sp>
-      <p:sp>
-        <p:nvSpPr>
-          <p:cNvPr id="14" name="Shape 12"/>
+            <a:endParaRPr lang="en-US" sz="1550" dirty="0"/>
+          </a:p>
+        </p:txBody>
+      </p:sp>
+      <p:sp>
+        <p:nvSpPr>
+          <p:cNvPr id="15" name="Shape 13"/>
           <p:cNvSpPr/>
           <p:nvPr/>
         </p:nvSpPr>
@@ -8635,14 +9008,14 @@
       </p:sp>
       <p:sp>
         <p:nvSpPr>
-          <p:cNvPr id="15" name="Text 13"/>
+          <p:cNvPr id="16" name="Text 14"/>
           <p:cNvSpPr/>
           <p:nvPr/>
         </p:nvSpPr>
         <p:spPr>
           <a:xfrm>
             <a:off x="8074152" y="3666744"/>
-            <a:ext cx="2825496" cy="201168"/>
+            <a:ext cx="2825496" cy="256032"/>
           </a:xfrm>
           <a:prstGeom prst="rect">
             <a:avLst/>
@@ -8658,7 +9031,7 @@
               <a:buNone/>
             </a:pPr>
             <a:r>
-              <a:rPr lang="en-US" sz="950" b="1" dirty="0">
+              <a:rPr lang="en-US" sz="1300" b="1" dirty="0">
                 <a:solidFill>
                   <a:srgbClr val="0068B7"/>
                 </a:solidFill>
@@ -8668,20 +9041,20 @@
               </a:rPr>
               <a:t>Use this for</a:t>
             </a:r>
-            <a:endParaRPr lang="en-US" sz="950" dirty="0"/>
-          </a:p>
-        </p:txBody>
-      </p:sp>
-      <p:sp>
-        <p:nvSpPr>
-          <p:cNvPr id="16" name="Text 14"/>
-          <p:cNvSpPr/>
-          <p:nvPr/>
-        </p:nvSpPr>
-        <p:spPr>
-          <a:xfrm>
-            <a:off x="8074152" y="3959352"/>
-            <a:ext cx="2825496" cy="1170432"/>
+            <a:endParaRPr lang="en-US" sz="1300" dirty="0"/>
+          </a:p>
+        </p:txBody>
+      </p:sp>
+      <p:sp>
+        <p:nvSpPr>
+          <p:cNvPr id="17" name="Text 15"/>
+          <p:cNvSpPr/>
+          <p:nvPr/>
+        </p:nvSpPr>
+        <p:spPr>
+          <a:xfrm>
+            <a:off x="8074152" y="4023360"/>
+            <a:ext cx="2825496" cy="1097280"/>
           </a:xfrm>
           <a:prstGeom prst="rect">
             <a:avLst/>
@@ -8699,7 +9072,7 @@
               <a:buNone/>
             </a:pPr>
             <a:r>
-              <a:rPr lang="en-US" sz="1250" dirty="0">
+              <a:rPr lang="en-US" sz="1550" dirty="0">
                 <a:solidFill>
                   <a:srgbClr val="17364A"/>
                 </a:solidFill>
@@ -8709,7 +9082,7 @@
               </a:rPr>
               <a:t>Connect the concept to public health decisions, safeguards, documentation, or implementation work.</a:t>
             </a:r>
-            <a:endParaRPr lang="en-US" sz="1250" dirty="0"/>
+            <a:endParaRPr lang="en-US" sz="1550" dirty="0"/>
           </a:p>
         </p:txBody>
       </p:sp>
@@ -8906,7 +9279,7 @@
                 <a:ea typeface="Aptos" pitchFamily="34" charset="-122"/>
                 <a:cs typeface="Aptos" pitchFamily="34" charset="-120"/>
               </a:rPr>
-              <a:t>© Paula Soper</a:t>
+              <a:t>Â© Paula Soper</a:t>
             </a:r>
             <a:endParaRPr lang="en-US" sz="800" dirty="0"/>
           </a:p>
@@ -8920,8 +9293,47 @@
         </p:nvSpPr>
         <p:spPr>
           <a:xfrm>
+            <a:off x="11137392" y="6510528"/>
+            <a:ext cx="411480" cy="201168"/>
+          </a:xfrm>
+          <a:prstGeom prst="rect">
+            <a:avLst/>
+          </a:prstGeom>
+          <a:noFill/>
+          <a:ln/>
+        </p:spPr>
+        <p:txBody>
+          <a:bodyPr wrap="square" lIns="0" tIns="0" rIns="0" bIns="0" rtlCol="0" anchor="ctr"/>
+          <a:lstStyle/>
+          <a:p>
+            <a:pPr algn="r" indent="0" marL="0">
+              <a:buNone/>
+            </a:pPr>
+            <a:r>
+              <a:rPr lang="en-US" sz="900" dirty="0">
+                <a:solidFill>
+                  <a:srgbClr val="5F7181"/>
+                </a:solidFill>
+                <a:latin typeface="Aptos" pitchFamily="34" charset="0"/>
+                <a:ea typeface="Aptos" pitchFamily="34" charset="-122"/>
+                <a:cs typeface="Aptos" pitchFamily="34" charset="-120"/>
+              </a:rPr>
+              <a:t>2</a:t>
+            </a:r>
+            <a:endParaRPr lang="en-US" sz="900" dirty="0"/>
+          </a:p>
+        </p:txBody>
+      </p:sp>
+      <p:sp>
+        <p:nvSpPr>
+          <p:cNvPr id="8" name="Text 6"/>
+          <p:cNvSpPr/>
+          <p:nvPr/>
+        </p:nvSpPr>
+        <p:spPr>
+          <a:xfrm>
             <a:off x="640080" y="658368"/>
-            <a:ext cx="10881360" cy="566928"/>
+            <a:ext cx="10881360" cy="713232"/>
           </a:xfrm>
           <a:prstGeom prst="rect">
             <a:avLst/>
@@ -8939,7 +9351,7 @@
               <a:buNone/>
             </a:pPr>
             <a:r>
-              <a:rPr lang="en-US" sz="2700" b="1" dirty="0">
+              <a:rPr lang="en-US" sz="3400" b="1" dirty="0">
                 <a:solidFill>
                   <a:srgbClr val="003A63"/>
                 </a:solidFill>
@@ -8949,20 +9361,20 @@
               </a:rPr>
               <a:t>What this module helps you do</a:t>
             </a:r>
-            <a:endParaRPr lang="en-US" sz="2700" dirty="0"/>
-          </a:p>
-        </p:txBody>
-      </p:sp>
-      <p:sp>
-        <p:nvSpPr>
-          <p:cNvPr id="8" name="Text 6"/>
-          <p:cNvSpPr/>
-          <p:nvPr/>
-        </p:nvSpPr>
-        <p:spPr>
-          <a:xfrm>
-            <a:off x="868680" y="1417320"/>
-            <a:ext cx="6675120" cy="3291840"/>
+            <a:endParaRPr lang="en-US" sz="3400" dirty="0"/>
+          </a:p>
+        </p:txBody>
+      </p:sp>
+      <p:sp>
+        <p:nvSpPr>
+          <p:cNvPr id="9" name="Text 7"/>
+          <p:cNvSpPr/>
+          <p:nvPr/>
+        </p:nvSpPr>
+        <p:spPr>
+          <a:xfrm>
+            <a:off x="868680" y="1508760"/>
+            <a:ext cx="6446520" cy="2926080"/>
           </a:xfrm>
           <a:prstGeom prst="rect">
             <a:avLst/>
@@ -8977,7 +9389,7 @@
           <a:lstStyle/>
           <a:p>
             <a:r>
-              <a:rPr lang="en-US" sz="1700" dirty="0">
+              <a:rPr lang="en-US" sz="2100" dirty="0">
                 <a:solidFill>
                   <a:srgbClr val="17364A"/>
                 </a:solidFill>
@@ -8987,11 +9399,11 @@
               </a:rPr>
               <a:t>This module focuses on ethical analysis of public comments, social listening data, and community feedback.</a:t>
             </a:r>
-            <a:endParaRPr lang="en-US" sz="1700" dirty="0"/>
-          </a:p>
-          <a:p>
-            <a:r>
-              <a:rPr lang="en-US" sz="1700" dirty="0">
+            <a:endParaRPr lang="en-US" sz="2100" dirty="0"/>
+          </a:p>
+          <a:p>
+            <a:r>
+              <a:rPr lang="en-US" sz="2100" dirty="0">
                 <a:solidFill>
                   <a:srgbClr val="17364A"/>
                 </a:solidFill>
@@ -8999,13 +9411,13 @@
                 <a:ea typeface="Aptos" pitchFamily="34" charset="-122"/>
                 <a:cs typeface="Aptos" pitchFamily="34" charset="-120"/>
               </a:rPr>
-              <a:t>It is designed for public health staff who must translate responsible AI principles into repeatable decisions, documents, workflows, and oversight.</a:t>
-            </a:r>
-            <a:endParaRPr lang="en-US" sz="1700" dirty="0"/>
-          </a:p>
-          <a:p>
-            <a:r>
-              <a:rPr lang="en-US" sz="1700" dirty="0">
+              <a:t>It is designed for public health staff who must translate responsible AI principles into repeatable decisions,.</a:t>
+            </a:r>
+            <a:endParaRPr lang="en-US" sz="2100" dirty="0"/>
+          </a:p>
+          <a:p>
+            <a:r>
+              <a:rPr lang="en-US" sz="2100" dirty="0">
                 <a:solidFill>
                   <a:srgbClr val="17364A"/>
                 </a:solidFill>
@@ -9013,29 +9425,15 @@
                 <a:ea typeface="Aptos" pitchFamily="34" charset="-122"/>
                 <a:cs typeface="Aptos" pitchFamily="34" charset="-120"/>
               </a:rPr>
-              <a:t>The module helps learners move beyond general awareness by producing a practical artifact that can be used in governance review, implementation.</a:t>
-            </a:r>
-            <a:endParaRPr lang="en-US" sz="1700" dirty="0"/>
-          </a:p>
-          <a:p>
-            <a:r>
-              <a:rPr lang="en-US" sz="1700" dirty="0">
-                <a:solidFill>
-                  <a:srgbClr val="17364A"/>
-                </a:solidFill>
-                <a:latin typeface="Aptos" pitchFamily="34" charset="0"/>
-                <a:ea typeface="Aptos" pitchFamily="34" charset="-122"/>
-                <a:cs typeface="Aptos" pitchFamily="34" charset="-120"/>
-              </a:rPr>
-              <a:t>It emphasizes paragraph-based reasoning, defined responsibilities, and documentation that can withstand public health, legal, privacy, equity, and.</a:t>
-            </a:r>
-            <a:endParaRPr lang="en-US" sz="1700" dirty="0"/>
-          </a:p>
-        </p:txBody>
-      </p:sp>
-      <p:sp>
-        <p:nvSpPr>
-          <p:cNvPr id="9" name="Shape 7"/>
+              <a:t>The module helps learners move beyond general awareness by producing a practical artifact that can be used in.</a:t>
+            </a:r>
+            <a:endParaRPr lang="en-US" sz="2100" dirty="0"/>
+          </a:p>
+        </p:txBody>
+      </p:sp>
+      <p:sp>
+        <p:nvSpPr>
+          <p:cNvPr id="10" name="Shape 8"/>
           <p:cNvSpPr/>
           <p:nvPr/>
         </p:nvSpPr>
@@ -9062,14 +9460,14 @@
       </p:sp>
       <p:sp>
         <p:nvSpPr>
-          <p:cNvPr id="10" name="Text 8"/>
+          <p:cNvPr id="11" name="Text 9"/>
           <p:cNvSpPr/>
           <p:nvPr/>
         </p:nvSpPr>
         <p:spPr>
           <a:xfrm>
             <a:off x="8074152" y="1563624"/>
-            <a:ext cx="2825496" cy="201168"/>
+            <a:ext cx="2825496" cy="256032"/>
           </a:xfrm>
           <a:prstGeom prst="rect">
             <a:avLst/>
@@ -9085,7 +9483,7 @@
               <a:buNone/>
             </a:pPr>
             <a:r>
-              <a:rPr lang="en-US" sz="950" b="1" dirty="0">
+              <a:rPr lang="en-US" sz="1300" b="1" dirty="0">
                 <a:solidFill>
                   <a:srgbClr val="0068B7"/>
                 </a:solidFill>
@@ -9095,20 +9493,20 @@
               </a:rPr>
               <a:t>Module details</a:t>
             </a:r>
-            <a:endParaRPr lang="en-US" sz="950" dirty="0"/>
-          </a:p>
-        </p:txBody>
-      </p:sp>
-      <p:sp>
-        <p:nvSpPr>
-          <p:cNvPr id="11" name="Text 9"/>
-          <p:cNvSpPr/>
-          <p:nvPr/>
-        </p:nvSpPr>
-        <p:spPr>
-          <a:xfrm>
-            <a:off x="8074152" y="1856232"/>
-            <a:ext cx="2825496" cy="1353312"/>
+            <a:endParaRPr lang="en-US" sz="1300" dirty="0"/>
+          </a:p>
+        </p:txBody>
+      </p:sp>
+      <p:sp>
+        <p:nvSpPr>
+          <p:cNvPr id="12" name="Text 10"/>
+          <p:cNvSpPr/>
+          <p:nvPr/>
+        </p:nvSpPr>
+        <p:spPr>
+          <a:xfrm>
+            <a:off x="8074152" y="1920240"/>
+            <a:ext cx="2825496" cy="1280160"/>
           </a:xfrm>
           <a:prstGeom prst="rect">
             <a:avLst/>
@@ -9126,7 +9524,7 @@
               <a:buNone/>
             </a:pPr>
             <a:r>
-              <a:rPr lang="en-US" sz="1250" dirty="0">
+              <a:rPr lang="en-US" sz="1550" dirty="0">
                 <a:solidFill>
                   <a:srgbClr val="17364A"/>
                 </a:solidFill>
@@ -9136,14 +9534,14 @@
               </a:rPr>
               <a:t>Level: applied/foundational</a:t>
             </a:r>
-            <a:endParaRPr lang="en-US" sz="1250" dirty="0"/>
+            <a:endParaRPr lang="en-US" sz="1550" dirty="0"/>
           </a:p>
           <a:p>
             <a:pPr indent="0" marL="0">
               <a:buNone/>
             </a:pPr>
             <a:r>
-              <a:rPr lang="en-US" sz="1250" dirty="0">
+              <a:rPr lang="en-US" sz="1550" dirty="0">
                 <a:solidFill>
                   <a:srgbClr val="17364A"/>
                 </a:solidFill>
@@ -9153,14 +9551,14 @@
               </a:rPr>
               <a:t>Primary track: Communications Role-Based Track</a:t>
             </a:r>
-            <a:endParaRPr lang="en-US" sz="1250" dirty="0"/>
+            <a:endParaRPr lang="en-US" sz="1550" dirty="0"/>
           </a:p>
           <a:p>
             <a:pPr indent="0" marL="0">
               <a:buNone/>
             </a:pPr>
             <a:r>
-              <a:rPr lang="en-US" sz="1250" dirty="0">
+              <a:rPr lang="en-US" sz="1550" dirty="0">
                 <a:solidFill>
                   <a:srgbClr val="17364A"/>
                 </a:solidFill>
@@ -9170,32 +9568,32 @@
               </a:rPr>
               <a:t>Appears in tracks: communications, policy, ai-for-social-good, governance-security</a:t>
             </a:r>
-            <a:endParaRPr lang="en-US" sz="1250" dirty="0"/>
-          </a:p>
-        </p:txBody>
-      </p:sp>
-      <p:sp>
-        <p:nvSpPr>
-          <p:cNvPr id="12" name="Shape 10"/>
-          <p:cNvSpPr/>
-          <p:nvPr/>
-        </p:nvSpPr>
-        <p:spPr>
-          <a:xfrm>
-            <a:off x="7909560" y="3611880"/>
-            <a:ext cx="3154680" cy="1783080"/>
+            <a:endParaRPr lang="en-US" sz="1550" dirty="0"/>
+          </a:p>
+        </p:txBody>
+      </p:sp>
+      <p:sp>
+        <p:nvSpPr>
+          <p:cNvPr id="13" name="Shape 11"/>
+          <p:cNvSpPr/>
+          <p:nvPr/>
+        </p:nvSpPr>
+        <p:spPr>
+          <a:xfrm>
+            <a:off x="7635240" y="3730752"/>
+            <a:ext cx="1033272" cy="749808"/>
           </a:xfrm>
           <a:prstGeom prst="roundRect">
             <a:avLst>
-              <a:gd name="adj" fmla="val 6154"/>
+              <a:gd name="adj" fmla="val 14634"/>
             </a:avLst>
           </a:prstGeom>
           <a:solidFill>
-            <a:srgbClr val="EEF8ED"/>
+            <a:srgbClr val="0068B7"/>
           </a:solidFill>
           <a:ln w="12700">
             <a:solidFill>
-              <a:srgbClr val="B9D7E6"/>
+              <a:srgbClr val="0068B7"/>
             </a:solidFill>
             <a:prstDash val="solid"/>
           </a:ln>
@@ -9203,81 +9601,256 @@
       </p:sp>
       <p:sp>
         <p:nvSpPr>
-          <p:cNvPr id="13" name="Text 11"/>
-          <p:cNvSpPr/>
-          <p:nvPr/>
-        </p:nvSpPr>
-        <p:spPr>
-          <a:xfrm>
-            <a:off x="8074152" y="3758184"/>
-            <a:ext cx="2825496" cy="201168"/>
-          </a:xfrm>
-          <a:prstGeom prst="rect">
-            <a:avLst/>
-          </a:prstGeom>
-          <a:noFill/>
-          <a:ln/>
-        </p:spPr>
-        <p:txBody>
-          <a:bodyPr wrap="square" lIns="0" tIns="0" rIns="0" bIns="0" rtlCol="0" anchor="ctr"/>
-          <a:lstStyle/>
-          <a:p>
-            <a:pPr indent="0" marL="0">
-              <a:buNone/>
-            </a:pPr>
-            <a:r>
-              <a:rPr lang="en-US" sz="950" b="1" dirty="0">
-                <a:solidFill>
-                  <a:srgbClr val="0068B7"/>
-                </a:solidFill>
-                <a:latin typeface="Aptos" pitchFamily="34" charset="0"/>
-                <a:ea typeface="Aptos" pitchFamily="34" charset="-122"/>
-                <a:cs typeface="Aptos" pitchFamily="34" charset="-120"/>
-              </a:rPr>
-              <a:t>Learning approach</a:t>
-            </a:r>
-            <a:endParaRPr lang="en-US" sz="950" dirty="0"/>
-          </a:p>
-        </p:txBody>
-      </p:sp>
-      <p:sp>
-        <p:nvSpPr>
           <p:cNvPr id="14" name="Text 12"/>
           <p:cNvSpPr/>
           <p:nvPr/>
         </p:nvSpPr>
         <p:spPr>
           <a:xfrm>
-            <a:off x="8074152" y="4050792"/>
-            <a:ext cx="2825496" cy="1216152"/>
-          </a:xfrm>
-          <a:prstGeom prst="rect">
-            <a:avLst/>
-          </a:prstGeom>
-          <a:noFill/>
-          <a:ln/>
-        </p:spPr>
-        <p:txBody>
-          <a:bodyPr wrap="square" lIns="0" tIns="0" rIns="0" bIns="0" rtlCol="0" anchor="t">
+            <a:off x="7708392" y="3922776"/>
+            <a:ext cx="886968" cy="310896"/>
+          </a:xfrm>
+          <a:prstGeom prst="rect">
+            <a:avLst/>
+          </a:prstGeom>
+          <a:noFill/>
+          <a:ln/>
+        </p:spPr>
+        <p:txBody>
+          <a:bodyPr wrap="square" lIns="0" tIns="0" rIns="0" bIns="0" rtlCol="0" anchor="ctr">
             <a:normAutofit/>
           </a:bodyPr>
           <a:lstStyle/>
           <a:p>
-            <a:pPr indent="0" marL="0">
-              <a:buNone/>
-            </a:pPr>
-            <a:r>
-              <a:rPr lang="en-US" sz="1250" dirty="0">
-                <a:solidFill>
-                  <a:srgbClr val="17364A"/>
-                </a:solidFill>
-                <a:latin typeface="Aptos" pitchFamily="34" charset="0"/>
-                <a:ea typeface="Aptos" pitchFamily="34" charset="-122"/>
-                <a:cs typeface="Aptos" pitchFamily="34" charset="-120"/>
-              </a:rPr>
-              <a:t>Review the core ideas, complete the practical exercise, check your understanding, and use the related plays and tools to apply the lesson.</a:t>
-            </a:r>
-            <a:endParaRPr lang="en-US" sz="1250" dirty="0"/>
+            <a:pPr algn="ctr" indent="0" marL="0">
+              <a:buNone/>
+            </a:pPr>
+            <a:r>
+              <a:rPr lang="en-US" sz="1500" b="1" dirty="0">
+                <a:solidFill>
+                  <a:srgbClr val="FFFFFF"/>
+                </a:solidFill>
+                <a:latin typeface="Aptos" pitchFamily="34" charset="0"/>
+                <a:ea typeface="Aptos" pitchFamily="34" charset="-122"/>
+                <a:cs typeface="Aptos" pitchFamily="34" charset="-120"/>
+              </a:rPr>
+              <a:t>Learn</a:t>
+            </a:r>
+            <a:endParaRPr lang="en-US" sz="1500" dirty="0"/>
+          </a:p>
+        </p:txBody>
+      </p:sp>
+      <p:sp>
+        <p:nvSpPr>
+          <p:cNvPr id="15" name="Text 13"/>
+          <p:cNvSpPr/>
+          <p:nvPr/>
+        </p:nvSpPr>
+        <p:spPr>
+          <a:xfrm>
+            <a:off x="8695944" y="3941064"/>
+            <a:ext cx="201168" cy="256032"/>
+          </a:xfrm>
+          <a:prstGeom prst="rect">
+            <a:avLst/>
+          </a:prstGeom>
+          <a:noFill/>
+          <a:ln/>
+        </p:spPr>
+        <p:txBody>
+          <a:bodyPr wrap="square" lIns="0" tIns="0" rIns="0" bIns="0" rtlCol="0" anchor="ctr"/>
+          <a:lstStyle/>
+          <a:p>
+            <a:pPr algn="ctr" indent="0" marL="0">
+              <a:buNone/>
+            </a:pPr>
+            <a:r>
+              <a:rPr lang="en-US" sz="1800" b="1" dirty="0">
+                <a:solidFill>
+                  <a:srgbClr val="0068B7"/>
+                </a:solidFill>
+                <a:latin typeface="Aptos" pitchFamily="34" charset="0"/>
+                <a:ea typeface="Aptos" pitchFamily="34" charset="-122"/>
+                <a:cs typeface="Aptos" pitchFamily="34" charset="-120"/>
+              </a:rPr>
+              <a:t>â†’</a:t>
+            </a:r>
+            <a:endParaRPr lang="en-US" sz="1800" dirty="0"/>
+          </a:p>
+        </p:txBody>
+      </p:sp>
+      <p:sp>
+        <p:nvSpPr>
+          <p:cNvPr id="16" name="Shape 14"/>
+          <p:cNvSpPr/>
+          <p:nvPr/>
+        </p:nvSpPr>
+        <p:spPr>
+          <a:xfrm>
+            <a:off x="8924544" y="3730752"/>
+            <a:ext cx="1033272" cy="749808"/>
+          </a:xfrm>
+          <a:prstGeom prst="roundRect">
+            <a:avLst>
+              <a:gd name="adj" fmla="val 14634"/>
+            </a:avLst>
+          </a:prstGeom>
+          <a:solidFill>
+            <a:srgbClr val="2F8A28"/>
+          </a:solidFill>
+          <a:ln w="12700">
+            <a:solidFill>
+              <a:srgbClr val="2F8A28"/>
+            </a:solidFill>
+            <a:prstDash val="solid"/>
+          </a:ln>
+        </p:spPr>
+      </p:sp>
+      <p:sp>
+        <p:nvSpPr>
+          <p:cNvPr id="17" name="Text 15"/>
+          <p:cNvSpPr/>
+          <p:nvPr/>
+        </p:nvSpPr>
+        <p:spPr>
+          <a:xfrm>
+            <a:off x="8997696" y="3922776"/>
+            <a:ext cx="886968" cy="310896"/>
+          </a:xfrm>
+          <a:prstGeom prst="rect">
+            <a:avLst/>
+          </a:prstGeom>
+          <a:noFill/>
+          <a:ln/>
+        </p:spPr>
+        <p:txBody>
+          <a:bodyPr wrap="square" lIns="0" tIns="0" rIns="0" bIns="0" rtlCol="0" anchor="ctr">
+            <a:normAutofit/>
+          </a:bodyPr>
+          <a:lstStyle/>
+          <a:p>
+            <a:pPr algn="ctr" indent="0" marL="0">
+              <a:buNone/>
+            </a:pPr>
+            <a:r>
+              <a:rPr lang="en-US" sz="1500" b="1" dirty="0">
+                <a:solidFill>
+                  <a:srgbClr val="FFFFFF"/>
+                </a:solidFill>
+                <a:latin typeface="Aptos" pitchFamily="34" charset="0"/>
+                <a:ea typeface="Aptos" pitchFamily="34" charset="-122"/>
+                <a:cs typeface="Aptos" pitchFamily="34" charset="-120"/>
+              </a:rPr>
+              <a:t>Apply</a:t>
+            </a:r>
+            <a:endParaRPr lang="en-US" sz="1500" dirty="0"/>
+          </a:p>
+        </p:txBody>
+      </p:sp>
+      <p:sp>
+        <p:nvSpPr>
+          <p:cNvPr id="18" name="Text 16"/>
+          <p:cNvSpPr/>
+          <p:nvPr/>
+        </p:nvSpPr>
+        <p:spPr>
+          <a:xfrm>
+            <a:off x="9985248" y="3941064"/>
+            <a:ext cx="201168" cy="256032"/>
+          </a:xfrm>
+          <a:prstGeom prst="rect">
+            <a:avLst/>
+          </a:prstGeom>
+          <a:noFill/>
+          <a:ln/>
+        </p:spPr>
+        <p:txBody>
+          <a:bodyPr wrap="square" lIns="0" tIns="0" rIns="0" bIns="0" rtlCol="0" anchor="ctr"/>
+          <a:lstStyle/>
+          <a:p>
+            <a:pPr algn="ctr" indent="0" marL="0">
+              <a:buNone/>
+            </a:pPr>
+            <a:r>
+              <a:rPr lang="en-US" sz="1800" b="1" dirty="0">
+                <a:solidFill>
+                  <a:srgbClr val="0068B7"/>
+                </a:solidFill>
+                <a:latin typeface="Aptos" pitchFamily="34" charset="0"/>
+                <a:ea typeface="Aptos" pitchFamily="34" charset="-122"/>
+                <a:cs typeface="Aptos" pitchFamily="34" charset="-120"/>
+              </a:rPr>
+              <a:t>â†’</a:t>
+            </a:r>
+            <a:endParaRPr lang="en-US" sz="1800" dirty="0"/>
+          </a:p>
+        </p:txBody>
+      </p:sp>
+      <p:sp>
+        <p:nvSpPr>
+          <p:cNvPr id="19" name="Shape 17"/>
+          <p:cNvSpPr/>
+          <p:nvPr/>
+        </p:nvSpPr>
+        <p:spPr>
+          <a:xfrm>
+            <a:off x="10213848" y="3730752"/>
+            <a:ext cx="1033272" cy="749808"/>
+          </a:xfrm>
+          <a:prstGeom prst="roundRect">
+            <a:avLst>
+              <a:gd name="adj" fmla="val 14634"/>
+            </a:avLst>
+          </a:prstGeom>
+          <a:solidFill>
+            <a:srgbClr val="6A4CA3"/>
+          </a:solidFill>
+          <a:ln w="12700">
+            <a:solidFill>
+              <a:srgbClr val="6A4CA3"/>
+            </a:solidFill>
+            <a:prstDash val="solid"/>
+          </a:ln>
+        </p:spPr>
+      </p:sp>
+      <p:sp>
+        <p:nvSpPr>
+          <p:cNvPr id="20" name="Text 18"/>
+          <p:cNvSpPr/>
+          <p:nvPr/>
+        </p:nvSpPr>
+        <p:spPr>
+          <a:xfrm>
+            <a:off x="10287000" y="3922776"/>
+            <a:ext cx="886968" cy="310896"/>
+          </a:xfrm>
+          <a:prstGeom prst="rect">
+            <a:avLst/>
+          </a:prstGeom>
+          <a:noFill/>
+          <a:ln/>
+        </p:spPr>
+        <p:txBody>
+          <a:bodyPr wrap="square" lIns="0" tIns="0" rIns="0" bIns="0" rtlCol="0" anchor="ctr">
+            <a:normAutofit/>
+          </a:bodyPr>
+          <a:lstStyle/>
+          <a:p>
+            <a:pPr algn="ctr" indent="0" marL="0">
+              <a:buNone/>
+            </a:pPr>
+            <a:r>
+              <a:rPr lang="en-US" sz="1500" b="1" dirty="0">
+                <a:solidFill>
+                  <a:srgbClr val="FFFFFF"/>
+                </a:solidFill>
+                <a:latin typeface="Aptos" pitchFamily="34" charset="0"/>
+                <a:ea typeface="Aptos" pitchFamily="34" charset="-122"/>
+                <a:cs typeface="Aptos" pitchFamily="34" charset="-120"/>
+              </a:rPr>
+              <a:t>Document</a:t>
+            </a:r>
+            <a:endParaRPr lang="en-US" sz="1500" dirty="0"/>
           </a:p>
         </p:txBody>
       </p:sp>
@@ -9474,7 +10047,7 @@
                 <a:ea typeface="Aptos" pitchFamily="34" charset="-122"/>
                 <a:cs typeface="Aptos" pitchFamily="34" charset="-120"/>
               </a:rPr>
-              <a:t>© Paula Soper</a:t>
+              <a:t>Â© Paula Soper</a:t>
             </a:r>
             <a:endParaRPr lang="en-US" sz="800" dirty="0"/>
           </a:p>
@@ -9482,7 +10055,46 @@
       </p:sp>
       <p:sp>
         <p:nvSpPr>
-          <p:cNvPr id="7" name="Shape 5"/>
+          <p:cNvPr id="7" name="Text 5"/>
+          <p:cNvSpPr/>
+          <p:nvPr/>
+        </p:nvSpPr>
+        <p:spPr>
+          <a:xfrm>
+            <a:off x="11137392" y="6510528"/>
+            <a:ext cx="411480" cy="201168"/>
+          </a:xfrm>
+          <a:prstGeom prst="rect">
+            <a:avLst/>
+          </a:prstGeom>
+          <a:noFill/>
+          <a:ln/>
+        </p:spPr>
+        <p:txBody>
+          <a:bodyPr wrap="square" lIns="0" tIns="0" rIns="0" bIns="0" rtlCol="0" anchor="ctr"/>
+          <a:lstStyle/>
+          <a:p>
+            <a:pPr algn="r" indent="0" marL="0">
+              <a:buNone/>
+            </a:pPr>
+            <a:r>
+              <a:rPr lang="en-US" sz="900" dirty="0">
+                <a:solidFill>
+                  <a:srgbClr val="5F7181"/>
+                </a:solidFill>
+                <a:latin typeface="Aptos" pitchFamily="34" charset="0"/>
+                <a:ea typeface="Aptos" pitchFamily="34" charset="-122"/>
+                <a:cs typeface="Aptos" pitchFamily="34" charset="-120"/>
+              </a:rPr>
+              <a:t>20</a:t>
+            </a:r>
+            <a:endParaRPr lang="en-US" sz="900" dirty="0"/>
+          </a:p>
+        </p:txBody>
+      </p:sp>
+      <p:sp>
+        <p:nvSpPr>
+          <p:cNvPr id="8" name="Shape 6"/>
           <p:cNvSpPr/>
           <p:nvPr/>
         </p:nvSpPr>
@@ -9507,7 +10119,7 @@
       </p:sp>
       <p:sp>
         <p:nvSpPr>
-          <p:cNvPr id="8" name="Text 6"/>
+          <p:cNvPr id="9" name="Text 7"/>
           <p:cNvSpPr/>
           <p:nvPr/>
         </p:nvSpPr>
@@ -9546,14 +10158,14 @@
       </p:sp>
       <p:sp>
         <p:nvSpPr>
-          <p:cNvPr id="9" name="Text 7"/>
+          <p:cNvPr id="10" name="Text 8"/>
           <p:cNvSpPr/>
           <p:nvPr/>
         </p:nvSpPr>
         <p:spPr>
           <a:xfrm>
             <a:off x="640080" y="621792"/>
-            <a:ext cx="10881360" cy="566928"/>
+            <a:ext cx="10881360" cy="713232"/>
           </a:xfrm>
           <a:prstGeom prst="rect">
             <a:avLst/>
@@ -9571,7 +10183,7 @@
               <a:buNone/>
             </a:pPr>
             <a:r>
-              <a:rPr lang="en-US" sz="2700" b="1" dirty="0">
+              <a:rPr lang="en-US" sz="3400" b="1" dirty="0">
                 <a:solidFill>
                   <a:srgbClr val="003A63"/>
                 </a:solidFill>
@@ -9581,20 +10193,20 @@
               </a:rPr>
               <a:t>Knowledge Check</a:t>
             </a:r>
-            <a:endParaRPr lang="en-US" sz="2700" dirty="0"/>
-          </a:p>
-        </p:txBody>
-      </p:sp>
-      <p:sp>
-        <p:nvSpPr>
-          <p:cNvPr id="10" name="Text 8"/>
-          <p:cNvSpPr/>
-          <p:nvPr/>
-        </p:nvSpPr>
-        <p:spPr>
-          <a:xfrm>
-            <a:off x="868680" y="1417320"/>
-            <a:ext cx="6675120" cy="4434840"/>
+            <a:endParaRPr lang="en-US" sz="3400" dirty="0"/>
+          </a:p>
+        </p:txBody>
+      </p:sp>
+      <p:sp>
+        <p:nvSpPr>
+          <p:cNvPr id="11" name="Text 9"/>
+          <p:cNvSpPr/>
+          <p:nvPr/>
+        </p:nvSpPr>
+        <p:spPr>
+          <a:xfrm>
+            <a:off x="868680" y="1508760"/>
+            <a:ext cx="6537960" cy="4160520"/>
           </a:xfrm>
           <a:prstGeom prst="rect">
             <a:avLst/>
@@ -9609,7 +10221,7 @@
           <a:lstStyle/>
           <a:p>
             <a:r>
-              <a:rPr lang="en-US" sz="1700" dirty="0">
+              <a:rPr lang="en-US" sz="2100" dirty="0">
                 <a:solidFill>
                   <a:srgbClr val="17364A"/>
                 </a:solidFill>
@@ -9617,13 +10229,13 @@
                 <a:ea typeface="Aptos" pitchFamily="34" charset="-122"/>
                 <a:cs typeface="Aptos" pitchFamily="34" charset="-120"/>
               </a:rPr>
-              <a:t>1. What is the strongest evidence that public comment, social listening, and community feedback analysis has been applied.</a:t>
-            </a:r>
-            <a:endParaRPr lang="en-US" sz="1700" dirty="0"/>
-          </a:p>
-          <a:p>
-            <a:r>
-              <a:rPr lang="en-US" sz="1700" dirty="0">
+              <a:t>1. What is the strongest evidence that public comment, social listening, and community feedback.</a:t>
+            </a:r>
+            <a:endParaRPr lang="en-US" sz="2100" dirty="0"/>
+          </a:p>
+          <a:p>
+            <a:r>
+              <a:rPr lang="en-US" sz="2100" dirty="0">
                 <a:solidFill>
                   <a:srgbClr val="17364A"/>
                 </a:solidFill>
@@ -9633,11 +10245,11 @@
               </a:rPr>
               <a:t>2. What is the best reason to assign an accountability owner?</a:t>
             </a:r>
-            <a:endParaRPr lang="en-US" sz="1700" dirty="0"/>
-          </a:p>
-          <a:p>
-            <a:r>
-              <a:rPr lang="en-US" sz="1700" dirty="0">
+            <a:endParaRPr lang="en-US" sz="2100" dirty="0"/>
+          </a:p>
+          <a:p>
+            <a:r>
+              <a:rPr lang="en-US" sz="2100" dirty="0">
                 <a:solidFill>
                   <a:srgbClr val="17364A"/>
                 </a:solidFill>
@@ -9647,27 +10259,13 @@
               </a:rPr>
               <a:t>3. When should an AI-supported workflow be escalated for review?</a:t>
             </a:r>
-            <a:endParaRPr lang="en-US" sz="1700" dirty="0"/>
-          </a:p>
-          <a:p>
-            <a:r>
-              <a:rPr lang="en-US" sz="1700" dirty="0">
-                <a:solidFill>
-                  <a:srgbClr val="17364A"/>
-                </a:solidFill>
-                <a:latin typeface="Aptos" pitchFamily="34" charset="0"/>
-                <a:ea typeface="Aptos" pitchFamily="34" charset="-122"/>
-                <a:cs typeface="Aptos" pitchFamily="34" charset="-120"/>
-              </a:rPr>
-              <a:t>4. Which practice best supports public accountability?</a:t>
-            </a:r>
-            <a:endParaRPr lang="en-US" sz="1700" dirty="0"/>
-          </a:p>
-        </p:txBody>
-      </p:sp>
-      <p:sp>
-        <p:nvSpPr>
-          <p:cNvPr id="11" name="Shape 9"/>
+            <a:endParaRPr lang="en-US" sz="2100" dirty="0"/>
+          </a:p>
+        </p:txBody>
+      </p:sp>
+      <p:sp>
+        <p:nvSpPr>
+          <p:cNvPr id="12" name="Shape 10"/>
           <p:cNvSpPr/>
           <p:nvPr/>
         </p:nvSpPr>
@@ -9694,14 +10292,14 @@
       </p:sp>
       <p:sp>
         <p:nvSpPr>
-          <p:cNvPr id="12" name="Text 10"/>
+          <p:cNvPr id="13" name="Text 11"/>
           <p:cNvSpPr/>
           <p:nvPr/>
         </p:nvSpPr>
         <p:spPr>
           <a:xfrm>
             <a:off x="8074152" y="1563624"/>
-            <a:ext cx="2825496" cy="201168"/>
+            <a:ext cx="2825496" cy="256032"/>
           </a:xfrm>
           <a:prstGeom prst="rect">
             <a:avLst/>
@@ -9717,7 +10315,7 @@
               <a:buNone/>
             </a:pPr>
             <a:r>
-              <a:rPr lang="en-US" sz="950" b="1" dirty="0">
+              <a:rPr lang="en-US" sz="1300" b="1" dirty="0">
                 <a:solidFill>
                   <a:srgbClr val="0068B7"/>
                 </a:solidFill>
@@ -9727,20 +10325,20 @@
               </a:rPr>
               <a:t>Key idea</a:t>
             </a:r>
-            <a:endParaRPr lang="en-US" sz="950" dirty="0"/>
-          </a:p>
-        </p:txBody>
-      </p:sp>
-      <p:sp>
-        <p:nvSpPr>
-          <p:cNvPr id="13" name="Text 11"/>
-          <p:cNvSpPr/>
-          <p:nvPr/>
-        </p:nvSpPr>
-        <p:spPr>
-          <a:xfrm>
-            <a:off x="8074152" y="1856232"/>
-            <a:ext cx="2825496" cy="1261872"/>
+            <a:endParaRPr lang="en-US" sz="1300" dirty="0"/>
+          </a:p>
+        </p:txBody>
+      </p:sp>
+      <p:sp>
+        <p:nvSpPr>
+          <p:cNvPr id="14" name="Text 12"/>
+          <p:cNvSpPr/>
+          <p:nvPr/>
+        </p:nvSpPr>
+        <p:spPr>
+          <a:xfrm>
+            <a:off x="8074152" y="1920240"/>
+            <a:ext cx="2825496" cy="1188720"/>
           </a:xfrm>
           <a:prstGeom prst="rect">
             <a:avLst/>
@@ -9758,7 +10356,7 @@
               <a:buNone/>
             </a:pPr>
             <a:r>
-              <a:rPr lang="en-US" sz="1250" dirty="0">
+              <a:rPr lang="en-US" sz="1550" dirty="0">
                 <a:solidFill>
                   <a:srgbClr val="17364A"/>
                 </a:solidFill>
@@ -9766,15 +10364,15 @@
                 <a:ea typeface="Aptos" pitchFamily="34" charset="-122"/>
                 <a:cs typeface="Aptos" pitchFamily="34" charset="-120"/>
               </a:rPr>
-              <a:t>1. What is the strongest evidence that public comment, social listening, and community feedback analysis has been applied.</a:t>
-            </a:r>
-            <a:endParaRPr lang="en-US" sz="1250" dirty="0"/>
-          </a:p>
-        </p:txBody>
-      </p:sp>
-      <p:sp>
-        <p:nvSpPr>
-          <p:cNvPr id="14" name="Shape 12"/>
+              <a:t>1. What is the strongest evidence that public comment, social listening, and community feedback.</a:t>
+            </a:r>
+            <a:endParaRPr lang="en-US" sz="1550" dirty="0"/>
+          </a:p>
+        </p:txBody>
+      </p:sp>
+      <p:sp>
+        <p:nvSpPr>
+          <p:cNvPr id="15" name="Shape 13"/>
           <p:cNvSpPr/>
           <p:nvPr/>
         </p:nvSpPr>
@@ -9801,14 +10399,14 @@
       </p:sp>
       <p:sp>
         <p:nvSpPr>
-          <p:cNvPr id="15" name="Text 13"/>
+          <p:cNvPr id="16" name="Text 14"/>
           <p:cNvSpPr/>
           <p:nvPr/>
         </p:nvSpPr>
         <p:spPr>
           <a:xfrm>
             <a:off x="8074152" y="3666744"/>
-            <a:ext cx="2825496" cy="201168"/>
+            <a:ext cx="2825496" cy="256032"/>
           </a:xfrm>
           <a:prstGeom prst="rect">
             <a:avLst/>
@@ -9824,7 +10422,7 @@
               <a:buNone/>
             </a:pPr>
             <a:r>
-              <a:rPr lang="en-US" sz="950" b="1" dirty="0">
+              <a:rPr lang="en-US" sz="1300" b="1" dirty="0">
                 <a:solidFill>
                   <a:srgbClr val="0068B7"/>
                 </a:solidFill>
@@ -9834,20 +10432,20 @@
               </a:rPr>
               <a:t>Use this for</a:t>
             </a:r>
-            <a:endParaRPr lang="en-US" sz="950" dirty="0"/>
-          </a:p>
-        </p:txBody>
-      </p:sp>
-      <p:sp>
-        <p:nvSpPr>
-          <p:cNvPr id="16" name="Text 14"/>
-          <p:cNvSpPr/>
-          <p:nvPr/>
-        </p:nvSpPr>
-        <p:spPr>
-          <a:xfrm>
-            <a:off x="8074152" y="3959352"/>
-            <a:ext cx="2825496" cy="1170432"/>
+            <a:endParaRPr lang="en-US" sz="1300" dirty="0"/>
+          </a:p>
+        </p:txBody>
+      </p:sp>
+      <p:sp>
+        <p:nvSpPr>
+          <p:cNvPr id="17" name="Text 15"/>
+          <p:cNvSpPr/>
+          <p:nvPr/>
+        </p:nvSpPr>
+        <p:spPr>
+          <a:xfrm>
+            <a:off x="8074152" y="4023360"/>
+            <a:ext cx="2825496" cy="1097280"/>
           </a:xfrm>
           <a:prstGeom prst="rect">
             <a:avLst/>
@@ -9865,7 +10463,7 @@
               <a:buNone/>
             </a:pPr>
             <a:r>
-              <a:rPr lang="en-US" sz="1250" dirty="0">
+              <a:rPr lang="en-US" sz="1550" dirty="0">
                 <a:solidFill>
                   <a:srgbClr val="17364A"/>
                 </a:solidFill>
@@ -9875,7 +10473,7 @@
               </a:rPr>
               <a:t>Connect the concept to public health decisions, safeguards, documentation, or implementation work.</a:t>
             </a:r>
-            <a:endParaRPr lang="en-US" sz="1250" dirty="0"/>
+            <a:endParaRPr lang="en-US" sz="1550" dirty="0"/>
           </a:p>
         </p:txBody>
       </p:sp>
@@ -10072,7 +10670,7 @@
                 <a:ea typeface="Aptos" pitchFamily="34" charset="-122"/>
                 <a:cs typeface="Aptos" pitchFamily="34" charset="-120"/>
               </a:rPr>
-              <a:t>© Paula Soper</a:t>
+              <a:t>Â© Paula Soper</a:t>
             </a:r>
             <a:endParaRPr lang="en-US" sz="800" dirty="0"/>
           </a:p>
@@ -10080,7 +10678,46 @@
       </p:sp>
       <p:sp>
         <p:nvSpPr>
-          <p:cNvPr id="7" name="Shape 5"/>
+          <p:cNvPr id="7" name="Text 5"/>
+          <p:cNvSpPr/>
+          <p:nvPr/>
+        </p:nvSpPr>
+        <p:spPr>
+          <a:xfrm>
+            <a:off x="11137392" y="6510528"/>
+            <a:ext cx="411480" cy="201168"/>
+          </a:xfrm>
+          <a:prstGeom prst="rect">
+            <a:avLst/>
+          </a:prstGeom>
+          <a:noFill/>
+          <a:ln/>
+        </p:spPr>
+        <p:txBody>
+          <a:bodyPr wrap="square" lIns="0" tIns="0" rIns="0" bIns="0" rtlCol="0" anchor="ctr"/>
+          <a:lstStyle/>
+          <a:p>
+            <a:pPr algn="r" indent="0" marL="0">
+              <a:buNone/>
+            </a:pPr>
+            <a:r>
+              <a:rPr lang="en-US" sz="900" dirty="0">
+                <a:solidFill>
+                  <a:srgbClr val="5F7181"/>
+                </a:solidFill>
+                <a:latin typeface="Aptos" pitchFamily="34" charset="0"/>
+                <a:ea typeface="Aptos" pitchFamily="34" charset="-122"/>
+                <a:cs typeface="Aptos" pitchFamily="34" charset="-120"/>
+              </a:rPr>
+              <a:t>21</a:t>
+            </a:r>
+            <a:endParaRPr lang="en-US" sz="900" dirty="0"/>
+          </a:p>
+        </p:txBody>
+      </p:sp>
+      <p:sp>
+        <p:nvSpPr>
+          <p:cNvPr id="8" name="Shape 6"/>
           <p:cNvSpPr/>
           <p:nvPr/>
         </p:nvSpPr>
@@ -10105,7 +10742,7 @@
       </p:sp>
       <p:sp>
         <p:nvSpPr>
-          <p:cNvPr id="8" name="Text 6"/>
+          <p:cNvPr id="9" name="Text 7"/>
           <p:cNvSpPr/>
           <p:nvPr/>
         </p:nvSpPr>
@@ -10144,14 +10781,14 @@
       </p:sp>
       <p:sp>
         <p:nvSpPr>
-          <p:cNvPr id="9" name="Text 7"/>
+          <p:cNvPr id="10" name="Text 8"/>
           <p:cNvSpPr/>
           <p:nvPr/>
         </p:nvSpPr>
         <p:spPr>
           <a:xfrm>
             <a:off x="640080" y="621792"/>
-            <a:ext cx="10881360" cy="566928"/>
+            <a:ext cx="10881360" cy="713232"/>
           </a:xfrm>
           <a:prstGeom prst="rect">
             <a:avLst/>
@@ -10169,7 +10806,7 @@
               <a:buNone/>
             </a:pPr>
             <a:r>
-              <a:rPr lang="en-US" sz="2700" b="1" dirty="0">
+              <a:rPr lang="en-US" sz="3400" b="1" dirty="0">
                 <a:solidFill>
                   <a:srgbClr val="003A63"/>
                 </a:solidFill>
@@ -10179,20 +10816,20 @@
               </a:rPr>
               <a:t>References and Resources</a:t>
             </a:r>
-            <a:endParaRPr lang="en-US" sz="2700" dirty="0"/>
-          </a:p>
-        </p:txBody>
-      </p:sp>
-      <p:sp>
-        <p:nvSpPr>
-          <p:cNvPr id="10" name="Text 8"/>
-          <p:cNvSpPr/>
-          <p:nvPr/>
-        </p:nvSpPr>
-        <p:spPr>
-          <a:xfrm>
-            <a:off x="868680" y="1417320"/>
-            <a:ext cx="6675120" cy="4434840"/>
+            <a:endParaRPr lang="en-US" sz="3400" dirty="0"/>
+          </a:p>
+        </p:txBody>
+      </p:sp>
+      <p:sp>
+        <p:nvSpPr>
+          <p:cNvPr id="11" name="Text 9"/>
+          <p:cNvSpPr/>
+          <p:nvPr/>
+        </p:nvSpPr>
+        <p:spPr>
+          <a:xfrm>
+            <a:off x="868680" y="1508760"/>
+            <a:ext cx="6537960" cy="4160520"/>
           </a:xfrm>
           <a:prstGeom prst="rect">
             <a:avLst/>
@@ -10207,7 +10844,7 @@
           <a:lstStyle/>
           <a:p>
             <a:r>
-              <a:rPr lang="en-US" sz="1700" dirty="0">
+              <a:rPr lang="en-US" sz="2100" dirty="0">
                 <a:solidFill>
                   <a:srgbClr val="17364A"/>
                 </a:solidFill>
@@ -10217,11 +10854,11 @@
               </a:rPr>
               <a:t>CDC Public Health Data Strategy and Data Modernization resources:.</a:t>
             </a:r>
-            <a:endParaRPr lang="en-US" sz="1700" dirty="0"/>
-          </a:p>
-          <a:p>
-            <a:r>
-              <a:rPr lang="en-US" sz="1700" dirty="0">
+            <a:endParaRPr lang="en-US" sz="2100" dirty="0"/>
+          </a:p>
+          <a:p>
+            <a:r>
+              <a:rPr lang="en-US" sz="2100" dirty="0">
                 <a:solidFill>
                   <a:srgbClr val="17364A"/>
                 </a:solidFill>
@@ -10231,11 +10868,11 @@
               </a:rPr>
               <a:t>NIST Artificial Intelligence Risk Management Framework and NIST Generative AI Profile:.</a:t>
             </a:r>
-            <a:endParaRPr lang="en-US" sz="1700" dirty="0"/>
-          </a:p>
-          <a:p>
-            <a:r>
-              <a:rPr lang="en-US" sz="1700" dirty="0">
+            <a:endParaRPr lang="en-US" sz="2100" dirty="0"/>
+          </a:p>
+          <a:p>
+            <a:r>
+              <a:rPr lang="en-US" sz="2100" dirty="0">
                 <a:solidFill>
                   <a:srgbClr val="17364A"/>
                 </a:solidFill>
@@ -10243,29 +10880,15 @@
                 <a:ea typeface="Aptos" pitchFamily="34" charset="-122"/>
                 <a:cs typeface="Aptos" pitchFamily="34" charset="-120"/>
               </a:rPr>
-              <a:t>WHO Ethics and Governance of Artificial Intelligence for Health guidance: https://www.who.int/publications/i/item/9789240029200</a:t>
-            </a:r>
-            <a:endParaRPr lang="en-US" sz="1700" dirty="0"/>
-          </a:p>
-          <a:p>
-            <a:r>
-              <a:rPr lang="en-US" sz="1700" dirty="0">
-                <a:solidFill>
-                  <a:srgbClr val="17364A"/>
-                </a:solidFill>
-                <a:latin typeface="Aptos" pitchFamily="34" charset="0"/>
-                <a:ea typeface="Aptos" pitchFamily="34" charset="-122"/>
-                <a:cs typeface="Aptos" pitchFamily="34" charset="-120"/>
-              </a:rPr>
-              <a:t>OWASP Top 10 for Large Language Model Applications: https://owasp.org/www-project-top-10-for-large-language-model-applications/</a:t>
-            </a:r>
-            <a:endParaRPr lang="en-US" sz="1700" dirty="0"/>
-          </a:p>
-        </p:txBody>
-      </p:sp>
-      <p:sp>
-        <p:nvSpPr>
-          <p:cNvPr id="11" name="Shape 9"/>
+              <a:t>WHO Ethics and Governance of Artificial Intelligence for Health guidance:.</a:t>
+            </a:r>
+            <a:endParaRPr lang="en-US" sz="2100" dirty="0"/>
+          </a:p>
+        </p:txBody>
+      </p:sp>
+      <p:sp>
+        <p:nvSpPr>
+          <p:cNvPr id="12" name="Shape 10"/>
           <p:cNvSpPr/>
           <p:nvPr/>
         </p:nvSpPr>
@@ -10292,14 +10915,14 @@
       </p:sp>
       <p:sp>
         <p:nvSpPr>
-          <p:cNvPr id="12" name="Text 10"/>
+          <p:cNvPr id="13" name="Text 11"/>
           <p:cNvSpPr/>
           <p:nvPr/>
         </p:nvSpPr>
         <p:spPr>
           <a:xfrm>
             <a:off x="8074152" y="1563624"/>
-            <a:ext cx="2825496" cy="201168"/>
+            <a:ext cx="2825496" cy="256032"/>
           </a:xfrm>
           <a:prstGeom prst="rect">
             <a:avLst/>
@@ -10315,7 +10938,7 @@
               <a:buNone/>
             </a:pPr>
             <a:r>
-              <a:rPr lang="en-US" sz="950" b="1" dirty="0">
+              <a:rPr lang="en-US" sz="1300" b="1" dirty="0">
                 <a:solidFill>
                   <a:srgbClr val="0068B7"/>
                 </a:solidFill>
@@ -10325,20 +10948,20 @@
               </a:rPr>
               <a:t>Key idea</a:t>
             </a:r>
-            <a:endParaRPr lang="en-US" sz="950" dirty="0"/>
-          </a:p>
-        </p:txBody>
-      </p:sp>
-      <p:sp>
-        <p:nvSpPr>
-          <p:cNvPr id="13" name="Text 11"/>
-          <p:cNvSpPr/>
-          <p:nvPr/>
-        </p:nvSpPr>
-        <p:spPr>
-          <a:xfrm>
-            <a:off x="8074152" y="1856232"/>
-            <a:ext cx="2825496" cy="1261872"/>
+            <a:endParaRPr lang="en-US" sz="1300" dirty="0"/>
+          </a:p>
+        </p:txBody>
+      </p:sp>
+      <p:sp>
+        <p:nvSpPr>
+          <p:cNvPr id="14" name="Text 12"/>
+          <p:cNvSpPr/>
+          <p:nvPr/>
+        </p:nvSpPr>
+        <p:spPr>
+          <a:xfrm>
+            <a:off x="8074152" y="1920240"/>
+            <a:ext cx="2825496" cy="1188720"/>
           </a:xfrm>
           <a:prstGeom prst="rect">
             <a:avLst/>
@@ -10356,7 +10979,7 @@
               <a:buNone/>
             </a:pPr>
             <a:r>
-              <a:rPr lang="en-US" sz="1250" dirty="0">
+              <a:rPr lang="en-US" sz="1550" dirty="0">
                 <a:solidFill>
                   <a:srgbClr val="17364A"/>
                 </a:solidFill>
@@ -10366,13 +10989,13 @@
               </a:rPr>
               <a:t>CDC Public Health Data Strategy and Data Modernization resources:.</a:t>
             </a:r>
-            <a:endParaRPr lang="en-US" sz="1250" dirty="0"/>
-          </a:p>
-        </p:txBody>
-      </p:sp>
-      <p:sp>
-        <p:nvSpPr>
-          <p:cNvPr id="14" name="Shape 12"/>
+            <a:endParaRPr lang="en-US" sz="1550" dirty="0"/>
+          </a:p>
+        </p:txBody>
+      </p:sp>
+      <p:sp>
+        <p:nvSpPr>
+          <p:cNvPr id="15" name="Shape 13"/>
           <p:cNvSpPr/>
           <p:nvPr/>
         </p:nvSpPr>
@@ -10399,14 +11022,14 @@
       </p:sp>
       <p:sp>
         <p:nvSpPr>
-          <p:cNvPr id="15" name="Text 13"/>
+          <p:cNvPr id="16" name="Text 14"/>
           <p:cNvSpPr/>
           <p:nvPr/>
         </p:nvSpPr>
         <p:spPr>
           <a:xfrm>
             <a:off x="8074152" y="3666744"/>
-            <a:ext cx="2825496" cy="201168"/>
+            <a:ext cx="2825496" cy="256032"/>
           </a:xfrm>
           <a:prstGeom prst="rect">
             <a:avLst/>
@@ -10422,7 +11045,7 @@
               <a:buNone/>
             </a:pPr>
             <a:r>
-              <a:rPr lang="en-US" sz="950" b="1" dirty="0">
+              <a:rPr lang="en-US" sz="1300" b="1" dirty="0">
                 <a:solidFill>
                   <a:srgbClr val="0068B7"/>
                 </a:solidFill>
@@ -10432,20 +11055,20 @@
               </a:rPr>
               <a:t>Use this for</a:t>
             </a:r>
-            <a:endParaRPr lang="en-US" sz="950" dirty="0"/>
-          </a:p>
-        </p:txBody>
-      </p:sp>
-      <p:sp>
-        <p:nvSpPr>
-          <p:cNvPr id="16" name="Text 14"/>
-          <p:cNvSpPr/>
-          <p:nvPr/>
-        </p:nvSpPr>
-        <p:spPr>
-          <a:xfrm>
-            <a:off x="8074152" y="3959352"/>
-            <a:ext cx="2825496" cy="1170432"/>
+            <a:endParaRPr lang="en-US" sz="1300" dirty="0"/>
+          </a:p>
+        </p:txBody>
+      </p:sp>
+      <p:sp>
+        <p:nvSpPr>
+          <p:cNvPr id="17" name="Text 15"/>
+          <p:cNvSpPr/>
+          <p:nvPr/>
+        </p:nvSpPr>
+        <p:spPr>
+          <a:xfrm>
+            <a:off x="8074152" y="4023360"/>
+            <a:ext cx="2825496" cy="1097280"/>
           </a:xfrm>
           <a:prstGeom prst="rect">
             <a:avLst/>
@@ -10463,7 +11086,7 @@
               <a:buNone/>
             </a:pPr>
             <a:r>
-              <a:rPr lang="en-US" sz="1250" dirty="0">
+              <a:rPr lang="en-US" sz="1550" dirty="0">
                 <a:solidFill>
                   <a:srgbClr val="17364A"/>
                 </a:solidFill>
@@ -10473,7 +11096,7 @@
               </a:rPr>
               <a:t>Connect the concept to public health decisions, safeguards, documentation, or implementation work.</a:t>
             </a:r>
-            <a:endParaRPr lang="en-US" sz="1250" dirty="0"/>
+            <a:endParaRPr lang="en-US" sz="1550" dirty="0"/>
           </a:p>
         </p:txBody>
       </p:sp>
@@ -10670,7 +11293,7 @@
                 <a:ea typeface="Aptos" pitchFamily="34" charset="-122"/>
                 <a:cs typeface="Aptos" pitchFamily="34" charset="-120"/>
               </a:rPr>
-              <a:t>© Paula Soper</a:t>
+              <a:t>Â© Paula Soper</a:t>
             </a:r>
             <a:endParaRPr lang="en-US" sz="800" dirty="0"/>
           </a:p>
@@ -10684,8 +11307,47 @@
         </p:nvSpPr>
         <p:spPr>
           <a:xfrm>
+            <a:off x="11137392" y="6510528"/>
+            <a:ext cx="411480" cy="201168"/>
+          </a:xfrm>
+          <a:prstGeom prst="rect">
+            <a:avLst/>
+          </a:prstGeom>
+          <a:noFill/>
+          <a:ln/>
+        </p:spPr>
+        <p:txBody>
+          <a:bodyPr wrap="square" lIns="0" tIns="0" rIns="0" bIns="0" rtlCol="0" anchor="ctr"/>
+          <a:lstStyle/>
+          <a:p>
+            <a:pPr algn="r" indent="0" marL="0">
+              <a:buNone/>
+            </a:pPr>
+            <a:r>
+              <a:rPr lang="en-US" sz="900" dirty="0">
+                <a:solidFill>
+                  <a:srgbClr val="5F7181"/>
+                </a:solidFill>
+                <a:latin typeface="Aptos" pitchFamily="34" charset="0"/>
+                <a:ea typeface="Aptos" pitchFamily="34" charset="-122"/>
+                <a:cs typeface="Aptos" pitchFamily="34" charset="-120"/>
+              </a:rPr>
+              <a:t>22</a:t>
+            </a:r>
+            <a:endParaRPr lang="en-US" sz="900" dirty="0"/>
+          </a:p>
+        </p:txBody>
+      </p:sp>
+      <p:sp>
+        <p:nvSpPr>
+          <p:cNvPr id="8" name="Text 6"/>
+          <p:cNvSpPr/>
+          <p:nvPr/>
+        </p:nvSpPr>
+        <p:spPr>
+          <a:xfrm>
             <a:off x="640080" y="658368"/>
-            <a:ext cx="10881360" cy="566928"/>
+            <a:ext cx="10881360" cy="713232"/>
           </a:xfrm>
           <a:prstGeom prst="rect">
             <a:avLst/>
@@ -10703,7 +11365,7 @@
               <a:buNone/>
             </a:pPr>
             <a:r>
-              <a:rPr lang="en-US" sz="2700" b="1" dirty="0">
+              <a:rPr lang="en-US" sz="3400" b="1" dirty="0">
                 <a:solidFill>
                   <a:srgbClr val="003A63"/>
                 </a:solidFill>
@@ -10713,20 +11375,20 @@
               </a:rPr>
               <a:t>References and Resources Continued</a:t>
             </a:r>
-            <a:endParaRPr lang="en-US" sz="2700" dirty="0"/>
-          </a:p>
-        </p:txBody>
-      </p:sp>
-      <p:sp>
-        <p:nvSpPr>
-          <p:cNvPr id="8" name="Text 6"/>
-          <p:cNvSpPr/>
-          <p:nvPr/>
-        </p:nvSpPr>
-        <p:spPr>
-          <a:xfrm>
-            <a:off x="868680" y="1417320"/>
-            <a:ext cx="6675120" cy="4434840"/>
+            <a:endParaRPr lang="en-US" sz="3400" dirty="0"/>
+          </a:p>
+        </p:txBody>
+      </p:sp>
+      <p:sp>
+        <p:nvSpPr>
+          <p:cNvPr id="9" name="Text 7"/>
+          <p:cNvSpPr/>
+          <p:nvPr/>
+        </p:nvSpPr>
+        <p:spPr>
+          <a:xfrm>
+            <a:off x="868680" y="1508760"/>
+            <a:ext cx="6537960" cy="4160520"/>
           </a:xfrm>
           <a:prstGeom prst="rect">
             <a:avLst/>
@@ -10741,7 +11403,7 @@
           <a:lstStyle/>
           <a:p>
             <a:r>
-              <a:rPr lang="en-US" sz="1700" dirty="0">
+              <a:rPr lang="en-US" sz="2100" dirty="0">
                 <a:solidFill>
                   <a:srgbClr val="17364A"/>
                 </a:solidFill>
@@ -10749,15 +11411,15 @@
                 <a:ea typeface="Aptos" pitchFamily="34" charset="-122"/>
                 <a:cs typeface="Aptos" pitchFamily="34" charset="-120"/>
               </a:rPr>
-              <a:t>Agency policies for privacy, public records, cybersecurity, procurement, civil rights, accessibility, language access, and.</a:t>
-            </a:r>
-            <a:endParaRPr lang="en-US" sz="1700" dirty="0"/>
-          </a:p>
-        </p:txBody>
-      </p:sp>
-      <p:sp>
-        <p:nvSpPr>
-          <p:cNvPr id="9" name="Shape 7"/>
+              <a:t>Agency policies for privacy, public records, cybersecurity, procurement, civil rights, accessibility,.</a:t>
+            </a:r>
+            <a:endParaRPr lang="en-US" sz="2100" dirty="0"/>
+          </a:p>
+        </p:txBody>
+      </p:sp>
+      <p:sp>
+        <p:nvSpPr>
+          <p:cNvPr id="10" name="Shape 8"/>
           <p:cNvSpPr/>
           <p:nvPr/>
         </p:nvSpPr>
@@ -10784,14 +11446,14 @@
       </p:sp>
       <p:sp>
         <p:nvSpPr>
-          <p:cNvPr id="10" name="Text 8"/>
+          <p:cNvPr id="11" name="Text 9"/>
           <p:cNvSpPr/>
           <p:nvPr/>
         </p:nvSpPr>
         <p:spPr>
           <a:xfrm>
             <a:off x="8074152" y="1563624"/>
-            <a:ext cx="2825496" cy="201168"/>
+            <a:ext cx="2825496" cy="256032"/>
           </a:xfrm>
           <a:prstGeom prst="rect">
             <a:avLst/>
@@ -10807,7 +11469,7 @@
               <a:buNone/>
             </a:pPr>
             <a:r>
-              <a:rPr lang="en-US" sz="950" b="1" dirty="0">
+              <a:rPr lang="en-US" sz="1300" b="1" dirty="0">
                 <a:solidFill>
                   <a:srgbClr val="0068B7"/>
                 </a:solidFill>
@@ -10817,20 +11479,20 @@
               </a:rPr>
               <a:t>Key idea</a:t>
             </a:r>
-            <a:endParaRPr lang="en-US" sz="950" dirty="0"/>
-          </a:p>
-        </p:txBody>
-      </p:sp>
-      <p:sp>
-        <p:nvSpPr>
-          <p:cNvPr id="11" name="Text 9"/>
-          <p:cNvSpPr/>
-          <p:nvPr/>
-        </p:nvSpPr>
-        <p:spPr>
-          <a:xfrm>
-            <a:off x="8074152" y="1856232"/>
-            <a:ext cx="2825496" cy="1261872"/>
+            <a:endParaRPr lang="en-US" sz="1300" dirty="0"/>
+          </a:p>
+        </p:txBody>
+      </p:sp>
+      <p:sp>
+        <p:nvSpPr>
+          <p:cNvPr id="12" name="Text 10"/>
+          <p:cNvSpPr/>
+          <p:nvPr/>
+        </p:nvSpPr>
+        <p:spPr>
+          <a:xfrm>
+            <a:off x="8074152" y="1920240"/>
+            <a:ext cx="2825496" cy="1188720"/>
           </a:xfrm>
           <a:prstGeom prst="rect">
             <a:avLst/>
@@ -10848,7 +11510,7 @@
               <a:buNone/>
             </a:pPr>
             <a:r>
-              <a:rPr lang="en-US" sz="1250" dirty="0">
+              <a:rPr lang="en-US" sz="1550" dirty="0">
                 <a:solidFill>
                   <a:srgbClr val="17364A"/>
                 </a:solidFill>
@@ -10856,15 +11518,15 @@
                 <a:ea typeface="Aptos" pitchFamily="34" charset="-122"/>
                 <a:cs typeface="Aptos" pitchFamily="34" charset="-120"/>
               </a:rPr>
-              <a:t>Agency policies for privacy, public records, cybersecurity, procurement, civil rights, accessibility, language access, and.</a:t>
-            </a:r>
-            <a:endParaRPr lang="en-US" sz="1250" dirty="0"/>
-          </a:p>
-        </p:txBody>
-      </p:sp>
-      <p:sp>
-        <p:nvSpPr>
-          <p:cNvPr id="12" name="Shape 10"/>
+              <a:t>Agency policies for privacy, public records, cybersecurity, procurement, civil rights, accessibility,.</a:t>
+            </a:r>
+            <a:endParaRPr lang="en-US" sz="1550" dirty="0"/>
+          </a:p>
+        </p:txBody>
+      </p:sp>
+      <p:sp>
+        <p:nvSpPr>
+          <p:cNvPr id="13" name="Shape 11"/>
           <p:cNvSpPr/>
           <p:nvPr/>
         </p:nvSpPr>
@@ -10891,14 +11553,14 @@
       </p:sp>
       <p:sp>
         <p:nvSpPr>
-          <p:cNvPr id="13" name="Text 11"/>
+          <p:cNvPr id="14" name="Text 12"/>
           <p:cNvSpPr/>
           <p:nvPr/>
         </p:nvSpPr>
         <p:spPr>
           <a:xfrm>
             <a:off x="8074152" y="3666744"/>
-            <a:ext cx="2825496" cy="201168"/>
+            <a:ext cx="2825496" cy="256032"/>
           </a:xfrm>
           <a:prstGeom prst="rect">
             <a:avLst/>
@@ -10914,7 +11576,7 @@
               <a:buNone/>
             </a:pPr>
             <a:r>
-              <a:rPr lang="en-US" sz="950" b="1" dirty="0">
+              <a:rPr lang="en-US" sz="1300" b="1" dirty="0">
                 <a:solidFill>
                   <a:srgbClr val="0068B7"/>
                 </a:solidFill>
@@ -10924,20 +11586,20 @@
               </a:rPr>
               <a:t>Use this for</a:t>
             </a:r>
-            <a:endParaRPr lang="en-US" sz="950" dirty="0"/>
-          </a:p>
-        </p:txBody>
-      </p:sp>
-      <p:sp>
-        <p:nvSpPr>
-          <p:cNvPr id="14" name="Text 12"/>
-          <p:cNvSpPr/>
-          <p:nvPr/>
-        </p:nvSpPr>
-        <p:spPr>
-          <a:xfrm>
-            <a:off x="8074152" y="3959352"/>
-            <a:ext cx="2825496" cy="1170432"/>
+            <a:endParaRPr lang="en-US" sz="1300" dirty="0"/>
+          </a:p>
+        </p:txBody>
+      </p:sp>
+      <p:sp>
+        <p:nvSpPr>
+          <p:cNvPr id="15" name="Text 13"/>
+          <p:cNvSpPr/>
+          <p:nvPr/>
+        </p:nvSpPr>
+        <p:spPr>
+          <a:xfrm>
+            <a:off x="8074152" y="4023360"/>
+            <a:ext cx="2825496" cy="1097280"/>
           </a:xfrm>
           <a:prstGeom prst="rect">
             <a:avLst/>
@@ -10955,7 +11617,7 @@
               <a:buNone/>
             </a:pPr>
             <a:r>
-              <a:rPr lang="en-US" sz="1250" dirty="0">
+              <a:rPr lang="en-US" sz="1550" dirty="0">
                 <a:solidFill>
                   <a:srgbClr val="17364A"/>
                 </a:solidFill>
@@ -10965,7 +11627,7 @@
               </a:rPr>
               <a:t>Connect the concept to public health decisions, safeguards, documentation, or implementation work.</a:t>
             </a:r>
-            <a:endParaRPr lang="en-US" sz="1250" dirty="0"/>
+            <a:endParaRPr lang="en-US" sz="1550" dirty="0"/>
           </a:p>
         </p:txBody>
       </p:sp>
@@ -11162,7 +11824,7 @@
                 <a:ea typeface="Aptos" pitchFamily="34" charset="-122"/>
                 <a:cs typeface="Aptos" pitchFamily="34" charset="-120"/>
               </a:rPr>
-              <a:t>© Paula Soper</a:t>
+              <a:t>Â© Paula Soper</a:t>
             </a:r>
             <a:endParaRPr lang="en-US" sz="800" dirty="0"/>
           </a:p>
@@ -11176,8 +11838,47 @@
         </p:nvSpPr>
         <p:spPr>
           <a:xfrm>
+            <a:off x="11137392" y="6510528"/>
+            <a:ext cx="411480" cy="201168"/>
+          </a:xfrm>
+          <a:prstGeom prst="rect">
+            <a:avLst/>
+          </a:prstGeom>
+          <a:noFill/>
+          <a:ln/>
+        </p:spPr>
+        <p:txBody>
+          <a:bodyPr wrap="square" lIns="0" tIns="0" rIns="0" bIns="0" rtlCol="0" anchor="ctr"/>
+          <a:lstStyle/>
+          <a:p>
+            <a:pPr algn="r" indent="0" marL="0">
+              <a:buNone/>
+            </a:pPr>
+            <a:r>
+              <a:rPr lang="en-US" sz="900" dirty="0">
+                <a:solidFill>
+                  <a:srgbClr val="5F7181"/>
+                </a:solidFill>
+                <a:latin typeface="Aptos" pitchFamily="34" charset="0"/>
+                <a:ea typeface="Aptos" pitchFamily="34" charset="-122"/>
+                <a:cs typeface="Aptos" pitchFamily="34" charset="-120"/>
+              </a:rPr>
+              <a:t>3</a:t>
+            </a:r>
+            <a:endParaRPr lang="en-US" sz="900" dirty="0"/>
+          </a:p>
+        </p:txBody>
+      </p:sp>
+      <p:sp>
+        <p:nvSpPr>
+          <p:cNvPr id="8" name="Text 6"/>
+          <p:cNvSpPr/>
+          <p:nvPr/>
+        </p:nvSpPr>
+        <p:spPr>
+          <a:xfrm>
             <a:off x="640080" y="658368"/>
-            <a:ext cx="10881360" cy="566928"/>
+            <a:ext cx="10881360" cy="713232"/>
           </a:xfrm>
           <a:prstGeom prst="rect">
             <a:avLst/>
@@ -11195,7 +11896,7 @@
               <a:buNone/>
             </a:pPr>
             <a:r>
-              <a:rPr lang="en-US" sz="2700" b="1" dirty="0">
+              <a:rPr lang="en-US" sz="3400" b="1" dirty="0">
                 <a:solidFill>
                   <a:srgbClr val="003A63"/>
                 </a:solidFill>
@@ -11205,20 +11906,20 @@
               </a:rPr>
               <a:t>How this module connects to the playbook</a:t>
             </a:r>
-            <a:endParaRPr lang="en-US" sz="2700" dirty="0"/>
-          </a:p>
-        </p:txBody>
-      </p:sp>
-      <p:sp>
-        <p:nvSpPr>
-          <p:cNvPr id="8" name="Text 6"/>
-          <p:cNvSpPr/>
-          <p:nvPr/>
-        </p:nvSpPr>
-        <p:spPr>
-          <a:xfrm>
-            <a:off x="868680" y="1417320"/>
-            <a:ext cx="6903720" cy="4480560"/>
+            <a:endParaRPr lang="en-US" sz="3400" dirty="0"/>
+          </a:p>
+        </p:txBody>
+      </p:sp>
+      <p:sp>
+        <p:nvSpPr>
+          <p:cNvPr id="9" name="Text 7"/>
+          <p:cNvSpPr/>
+          <p:nvPr/>
+        </p:nvSpPr>
+        <p:spPr>
+          <a:xfrm>
+            <a:off x="868680" y="1508760"/>
+            <a:ext cx="6812280" cy="3977640"/>
           </a:xfrm>
           <a:prstGeom prst="rect">
             <a:avLst/>
@@ -11233,7 +11934,7 @@
           <a:lstStyle/>
           <a:p>
             <a:r>
-              <a:rPr lang="en-US" sz="1540" dirty="0">
+              <a:rPr lang="en-US" sz="1900" dirty="0">
                 <a:solidFill>
                   <a:srgbClr val="17364A"/>
                 </a:solidFill>
@@ -11241,13 +11942,13 @@
                 <a:ea typeface="Aptos" pitchFamily="34" charset="-122"/>
                 <a:cs typeface="Aptos" pitchFamily="34" charset="-120"/>
               </a:rPr>
-              <a:t>Play 1: Vision &amp; Guardrails - This lesson informs Play 1 by helping learners connect the lesson topic to vision &amp; guardrails work in.</a:t>
-            </a:r>
-            <a:endParaRPr lang="en-US" sz="1540" dirty="0"/>
-          </a:p>
-          <a:p>
-            <a:r>
-              <a:rPr lang="en-US" sz="1540" dirty="0">
+              <a:t>Play 1: Vision &amp; Guardrails - This lesson informs Play 1 by helping learners connect the lesson topic to.</a:t>
+            </a:r>
+            <a:endParaRPr lang="en-US" sz="1900" dirty="0"/>
+          </a:p>
+          <a:p>
+            <a:r>
+              <a:rPr lang="en-US" sz="1900" dirty="0">
                 <a:solidFill>
                   <a:srgbClr val="17364A"/>
                 </a:solidFill>
@@ -11255,13 +11956,13 @@
                 <a:ea typeface="Aptos" pitchFamily="34" charset="-122"/>
                 <a:cs typeface="Aptos" pitchFamily="34" charset="-120"/>
               </a:rPr>
-              <a:t>Play 11: Build and Deploy AI Solutions - This lesson informs Play 11 by helping learners connect the lesson topic to build and deploy.</a:t>
-            </a:r>
-            <a:endParaRPr lang="en-US" sz="1540" dirty="0"/>
-          </a:p>
-          <a:p>
-            <a:r>
-              <a:rPr lang="en-US" sz="1540" dirty="0">
+              <a:t>Play 11: Build and Deploy AI Solutions - This lesson informs Play 11 by helping learners connect the lesson.</a:t>
+            </a:r>
+            <a:endParaRPr lang="en-US" sz="1900" dirty="0"/>
+          </a:p>
+          <a:p>
+            <a:r>
+              <a:rPr lang="en-US" sz="1900" dirty="0">
                 <a:solidFill>
                   <a:srgbClr val="17364A"/>
                 </a:solidFill>
@@ -11269,13 +11970,13 @@
                 <a:ea typeface="Aptos" pitchFamily="34" charset="-122"/>
                 <a:cs typeface="Aptos" pitchFamily="34" charset="-120"/>
               </a:rPr>
-              <a:t>Play 2: Readiness Assessment - This lesson informs Play 2 by helping learners connect the lesson topic to readiness assessment work.</a:t>
-            </a:r>
-            <a:endParaRPr lang="en-US" sz="1540" dirty="0"/>
-          </a:p>
-          <a:p>
-            <a:r>
-              <a:rPr lang="en-US" sz="1540" dirty="0">
+              <a:t>Play 2: Readiness Assessment - This lesson informs Play 2 by helping learners connect the lesson topic to.</a:t>
+            </a:r>
+            <a:endParaRPr lang="en-US" sz="1900" dirty="0"/>
+          </a:p>
+          <a:p>
+            <a:r>
+              <a:rPr lang="en-US" sz="1900" dirty="0">
                 <a:solidFill>
                   <a:srgbClr val="17364A"/>
                 </a:solidFill>
@@ -11283,15 +11984,15 @@
                 <a:ea typeface="Aptos" pitchFamily="34" charset="-122"/>
                 <a:cs typeface="Aptos" pitchFamily="34" charset="-120"/>
               </a:rPr>
-              <a:t>Play 3: Establish AI Governance - This lesson informs Play 3 by helping learners connect the lesson topic to establish ai governance.</a:t>
-            </a:r>
-            <a:endParaRPr lang="en-US" sz="1540" dirty="0"/>
-          </a:p>
-        </p:txBody>
-      </p:sp>
-      <p:sp>
-        <p:nvSpPr>
-          <p:cNvPr id="9" name="Shape 7"/>
+              <a:t>Play 3: Establish AI Governance - This lesson informs Play 3 by helping learners connect the lesson topic to.</a:t>
+            </a:r>
+            <a:endParaRPr lang="en-US" sz="1900" dirty="0"/>
+          </a:p>
+        </p:txBody>
+      </p:sp>
+      <p:sp>
+        <p:nvSpPr>
+          <p:cNvPr id="10" name="Shape 8"/>
           <p:cNvSpPr/>
           <p:nvPr/>
         </p:nvSpPr>
@@ -11318,14 +12019,14 @@
       </p:sp>
       <p:sp>
         <p:nvSpPr>
-          <p:cNvPr id="10" name="Text 8"/>
+          <p:cNvPr id="11" name="Text 9"/>
           <p:cNvSpPr/>
           <p:nvPr/>
         </p:nvSpPr>
         <p:spPr>
           <a:xfrm>
             <a:off x="8211312" y="1563624"/>
-            <a:ext cx="2734056" cy="201168"/>
+            <a:ext cx="2734056" cy="256032"/>
           </a:xfrm>
           <a:prstGeom prst="rect">
             <a:avLst/>
@@ -11341,7 +12042,7 @@
               <a:buNone/>
             </a:pPr>
             <a:r>
-              <a:rPr lang="en-US" sz="950" b="1" dirty="0">
+              <a:rPr lang="en-US" sz="1300" b="1" dirty="0">
                 <a:solidFill>
                   <a:srgbClr val="0068B7"/>
                 </a:solidFill>
@@ -11351,20 +12052,20 @@
               </a:rPr>
               <a:t>Apply the lesson</a:t>
             </a:r>
-            <a:endParaRPr lang="en-US" sz="950" dirty="0"/>
-          </a:p>
-        </p:txBody>
-      </p:sp>
-      <p:sp>
-        <p:nvSpPr>
-          <p:cNvPr id="11" name="Text 9"/>
-          <p:cNvSpPr/>
-          <p:nvPr/>
-        </p:nvSpPr>
-        <p:spPr>
-          <a:xfrm>
-            <a:off x="8211312" y="1856232"/>
-            <a:ext cx="2734056" cy="1536192"/>
+            <a:endParaRPr lang="en-US" sz="1300" dirty="0"/>
+          </a:p>
+        </p:txBody>
+      </p:sp>
+      <p:sp>
+        <p:nvSpPr>
+          <p:cNvPr id="12" name="Text 10"/>
+          <p:cNvSpPr/>
+          <p:nvPr/>
+        </p:nvSpPr>
+        <p:spPr>
+          <a:xfrm>
+            <a:off x="8211312" y="1920240"/>
+            <a:ext cx="2734056" cy="1463040"/>
           </a:xfrm>
           <a:prstGeom prst="rect">
             <a:avLst/>
@@ -11382,7 +12083,7 @@
               <a:buNone/>
             </a:pPr>
             <a:r>
-              <a:rPr lang="en-US" sz="1250" dirty="0">
+              <a:rPr lang="en-US" sz="1550" dirty="0">
                 <a:solidFill>
                   <a:srgbClr val="17364A"/>
                 </a:solidFill>
@@ -11392,32 +12093,32 @@
               </a:rPr>
               <a:t>Use the related plays to identify decisions, participants, timing, approvals, and documentation needed for responsible implementation.</a:t>
             </a:r>
-            <a:endParaRPr lang="en-US" sz="1250" dirty="0"/>
-          </a:p>
-        </p:txBody>
-      </p:sp>
-      <p:sp>
-        <p:nvSpPr>
-          <p:cNvPr id="12" name="Shape 10"/>
-          <p:cNvSpPr/>
-          <p:nvPr/>
-        </p:nvSpPr>
-        <p:spPr>
-          <a:xfrm>
-            <a:off x="8046720" y="3794760"/>
-            <a:ext cx="3063240" cy="1508760"/>
+            <a:endParaRPr lang="en-US" sz="1550" dirty="0"/>
+          </a:p>
+        </p:txBody>
+      </p:sp>
+      <p:sp>
+        <p:nvSpPr>
+          <p:cNvPr id="13" name="Shape 11"/>
+          <p:cNvSpPr/>
+          <p:nvPr/>
+        </p:nvSpPr>
+        <p:spPr>
+          <a:xfrm>
+            <a:off x="7818120" y="3977640"/>
+            <a:ext cx="972312" cy="749808"/>
           </a:xfrm>
           <a:prstGeom prst="roundRect">
             <a:avLst>
-              <a:gd name="adj" fmla="val 7273"/>
+              <a:gd name="adj" fmla="val 14634"/>
             </a:avLst>
           </a:prstGeom>
           <a:solidFill>
-            <a:srgbClr val="FFF4D9"/>
+            <a:srgbClr val="0068B7"/>
           </a:solidFill>
           <a:ln w="12700">
             <a:solidFill>
-              <a:srgbClr val="B9D7E6"/>
+              <a:srgbClr val="0068B7"/>
             </a:solidFill>
             <a:prstDash val="solid"/>
           </a:ln>
@@ -11425,81 +12126,256 @@
       </p:sp>
       <p:sp>
         <p:nvSpPr>
-          <p:cNvPr id="13" name="Text 11"/>
-          <p:cNvSpPr/>
-          <p:nvPr/>
-        </p:nvSpPr>
-        <p:spPr>
-          <a:xfrm>
-            <a:off x="8211312" y="3941064"/>
-            <a:ext cx="2734056" cy="201168"/>
-          </a:xfrm>
-          <a:prstGeom prst="rect">
-            <a:avLst/>
-          </a:prstGeom>
-          <a:noFill/>
-          <a:ln/>
-        </p:spPr>
-        <p:txBody>
-          <a:bodyPr wrap="square" lIns="0" tIns="0" rIns="0" bIns="0" rtlCol="0" anchor="ctr"/>
-          <a:lstStyle/>
-          <a:p>
-            <a:pPr indent="0" marL="0">
-              <a:buNone/>
-            </a:pPr>
-            <a:r>
-              <a:rPr lang="en-US" sz="950" b="1" dirty="0">
-                <a:solidFill>
-                  <a:srgbClr val="0068B7"/>
-                </a:solidFill>
-                <a:latin typeface="Aptos" pitchFamily="34" charset="0"/>
-                <a:ea typeface="Aptos" pitchFamily="34" charset="-122"/>
-                <a:cs typeface="Aptos" pitchFamily="34" charset="-120"/>
-              </a:rPr>
-              <a:t>Keep in mind</a:t>
-            </a:r>
-            <a:endParaRPr lang="en-US" sz="950" dirty="0"/>
-          </a:p>
-        </p:txBody>
-      </p:sp>
-      <p:sp>
-        <p:nvSpPr>
           <p:cNvPr id="14" name="Text 12"/>
           <p:cNvSpPr/>
           <p:nvPr/>
         </p:nvSpPr>
         <p:spPr>
           <a:xfrm>
-            <a:off x="8211312" y="4233672"/>
-            <a:ext cx="2734056" cy="941832"/>
-          </a:xfrm>
-          <a:prstGeom prst="rect">
-            <a:avLst/>
-          </a:prstGeom>
-          <a:noFill/>
-          <a:ln/>
-        </p:spPr>
-        <p:txBody>
-          <a:bodyPr wrap="square" lIns="0" tIns="0" rIns="0" bIns="0" rtlCol="0" anchor="t">
+            <a:off x="7891272" y="4169664"/>
+            <a:ext cx="826008" cy="310896"/>
+          </a:xfrm>
+          <a:prstGeom prst="rect">
+            <a:avLst/>
+          </a:prstGeom>
+          <a:noFill/>
+          <a:ln/>
+        </p:spPr>
+        <p:txBody>
+          <a:bodyPr wrap="square" lIns="0" tIns="0" rIns="0" bIns="0" rtlCol="0" anchor="ctr">
             <a:normAutofit/>
           </a:bodyPr>
           <a:lstStyle/>
           <a:p>
-            <a:pPr indent="0" marL="0">
-              <a:buNone/>
-            </a:pPr>
-            <a:r>
-              <a:rPr lang="en-US" sz="1250" dirty="0">
-                <a:solidFill>
-                  <a:srgbClr val="17364A"/>
-                </a:solidFill>
-                <a:latin typeface="Aptos" pitchFamily="34" charset="0"/>
-                <a:ea typeface="Aptos" pitchFamily="34" charset="-122"/>
-                <a:cs typeface="Aptos" pitchFamily="34" charset="-120"/>
-              </a:rPr>
-              <a:t>The playbook connection helps turn training into agency work, not just individual knowledge.</a:t>
-            </a:r>
-            <a:endParaRPr lang="en-US" sz="1250" dirty="0"/>
+            <a:pPr algn="ctr" indent="0" marL="0">
+              <a:buNone/>
+            </a:pPr>
+            <a:r>
+              <a:rPr lang="en-US" sz="1500" b="1" dirty="0">
+                <a:solidFill>
+                  <a:srgbClr val="FFFFFF"/>
+                </a:solidFill>
+                <a:latin typeface="Aptos" pitchFamily="34" charset="0"/>
+                <a:ea typeface="Aptos" pitchFamily="34" charset="-122"/>
+                <a:cs typeface="Aptos" pitchFamily="34" charset="-120"/>
+              </a:rPr>
+              <a:t>Lesson</a:t>
+            </a:r>
+            <a:endParaRPr lang="en-US" sz="1500" dirty="0"/>
+          </a:p>
+        </p:txBody>
+      </p:sp>
+      <p:sp>
+        <p:nvSpPr>
+          <p:cNvPr id="15" name="Text 13"/>
+          <p:cNvSpPr/>
+          <p:nvPr/>
+        </p:nvSpPr>
+        <p:spPr>
+          <a:xfrm>
+            <a:off x="8817864" y="4187952"/>
+            <a:ext cx="201168" cy="256032"/>
+          </a:xfrm>
+          <a:prstGeom prst="rect">
+            <a:avLst/>
+          </a:prstGeom>
+          <a:noFill/>
+          <a:ln/>
+        </p:spPr>
+        <p:txBody>
+          <a:bodyPr wrap="square" lIns="0" tIns="0" rIns="0" bIns="0" rtlCol="0" anchor="ctr"/>
+          <a:lstStyle/>
+          <a:p>
+            <a:pPr algn="ctr" indent="0" marL="0">
+              <a:buNone/>
+            </a:pPr>
+            <a:r>
+              <a:rPr lang="en-US" sz="1800" b="1" dirty="0">
+                <a:solidFill>
+                  <a:srgbClr val="0068B7"/>
+                </a:solidFill>
+                <a:latin typeface="Aptos" pitchFamily="34" charset="0"/>
+                <a:ea typeface="Aptos" pitchFamily="34" charset="-122"/>
+                <a:cs typeface="Aptos" pitchFamily="34" charset="-120"/>
+              </a:rPr>
+              <a:t>â†’</a:t>
+            </a:r>
+            <a:endParaRPr lang="en-US" sz="1800" dirty="0"/>
+          </a:p>
+        </p:txBody>
+      </p:sp>
+      <p:sp>
+        <p:nvSpPr>
+          <p:cNvPr id="16" name="Shape 14"/>
+          <p:cNvSpPr/>
+          <p:nvPr/>
+        </p:nvSpPr>
+        <p:spPr>
+          <a:xfrm>
+            <a:off x="9046464" y="3977640"/>
+            <a:ext cx="972312" cy="749808"/>
+          </a:xfrm>
+          <a:prstGeom prst="roundRect">
+            <a:avLst>
+              <a:gd name="adj" fmla="val 14634"/>
+            </a:avLst>
+          </a:prstGeom>
+          <a:solidFill>
+            <a:srgbClr val="2F8A28"/>
+          </a:solidFill>
+          <a:ln w="12700">
+            <a:solidFill>
+              <a:srgbClr val="2F8A28"/>
+            </a:solidFill>
+            <a:prstDash val="solid"/>
+          </a:ln>
+        </p:spPr>
+      </p:sp>
+      <p:sp>
+        <p:nvSpPr>
+          <p:cNvPr id="17" name="Text 15"/>
+          <p:cNvSpPr/>
+          <p:nvPr/>
+        </p:nvSpPr>
+        <p:spPr>
+          <a:xfrm>
+            <a:off x="9119616" y="4169664"/>
+            <a:ext cx="826008" cy="310896"/>
+          </a:xfrm>
+          <a:prstGeom prst="rect">
+            <a:avLst/>
+          </a:prstGeom>
+          <a:noFill/>
+          <a:ln/>
+        </p:spPr>
+        <p:txBody>
+          <a:bodyPr wrap="square" lIns="0" tIns="0" rIns="0" bIns="0" rtlCol="0" anchor="ctr">
+            <a:normAutofit/>
+          </a:bodyPr>
+          <a:lstStyle/>
+          <a:p>
+            <a:pPr algn="ctr" indent="0" marL="0">
+              <a:buNone/>
+            </a:pPr>
+            <a:r>
+              <a:rPr lang="en-US" sz="1500" b="1" dirty="0">
+                <a:solidFill>
+                  <a:srgbClr val="FFFFFF"/>
+                </a:solidFill>
+                <a:latin typeface="Aptos" pitchFamily="34" charset="0"/>
+                <a:ea typeface="Aptos" pitchFamily="34" charset="-122"/>
+                <a:cs typeface="Aptos" pitchFamily="34" charset="-120"/>
+              </a:rPr>
+              <a:t>Plays</a:t>
+            </a:r>
+            <a:endParaRPr lang="en-US" sz="1500" dirty="0"/>
+          </a:p>
+        </p:txBody>
+      </p:sp>
+      <p:sp>
+        <p:nvSpPr>
+          <p:cNvPr id="18" name="Text 16"/>
+          <p:cNvSpPr/>
+          <p:nvPr/>
+        </p:nvSpPr>
+        <p:spPr>
+          <a:xfrm>
+            <a:off x="10046208" y="4187952"/>
+            <a:ext cx="201168" cy="256032"/>
+          </a:xfrm>
+          <a:prstGeom prst="rect">
+            <a:avLst/>
+          </a:prstGeom>
+          <a:noFill/>
+          <a:ln/>
+        </p:spPr>
+        <p:txBody>
+          <a:bodyPr wrap="square" lIns="0" tIns="0" rIns="0" bIns="0" rtlCol="0" anchor="ctr"/>
+          <a:lstStyle/>
+          <a:p>
+            <a:pPr algn="ctr" indent="0" marL="0">
+              <a:buNone/>
+            </a:pPr>
+            <a:r>
+              <a:rPr lang="en-US" sz="1800" b="1" dirty="0">
+                <a:solidFill>
+                  <a:srgbClr val="0068B7"/>
+                </a:solidFill>
+                <a:latin typeface="Aptos" pitchFamily="34" charset="0"/>
+                <a:ea typeface="Aptos" pitchFamily="34" charset="-122"/>
+                <a:cs typeface="Aptos" pitchFamily="34" charset="-120"/>
+              </a:rPr>
+              <a:t>â†’</a:t>
+            </a:r>
+            <a:endParaRPr lang="en-US" sz="1800" dirty="0"/>
+          </a:p>
+        </p:txBody>
+      </p:sp>
+      <p:sp>
+        <p:nvSpPr>
+          <p:cNvPr id="19" name="Shape 17"/>
+          <p:cNvSpPr/>
+          <p:nvPr/>
+        </p:nvSpPr>
+        <p:spPr>
+          <a:xfrm>
+            <a:off x="10274808" y="3977640"/>
+            <a:ext cx="972312" cy="749808"/>
+          </a:xfrm>
+          <a:prstGeom prst="roundRect">
+            <a:avLst>
+              <a:gd name="adj" fmla="val 14634"/>
+            </a:avLst>
+          </a:prstGeom>
+          <a:solidFill>
+            <a:srgbClr val="6A4CA3"/>
+          </a:solidFill>
+          <a:ln w="12700">
+            <a:solidFill>
+              <a:srgbClr val="6A4CA3"/>
+            </a:solidFill>
+            <a:prstDash val="solid"/>
+          </a:ln>
+        </p:spPr>
+      </p:sp>
+      <p:sp>
+        <p:nvSpPr>
+          <p:cNvPr id="20" name="Text 18"/>
+          <p:cNvSpPr/>
+          <p:nvPr/>
+        </p:nvSpPr>
+        <p:spPr>
+          <a:xfrm>
+            <a:off x="10347960" y="4169664"/>
+            <a:ext cx="826008" cy="310896"/>
+          </a:xfrm>
+          <a:prstGeom prst="rect">
+            <a:avLst/>
+          </a:prstGeom>
+          <a:noFill/>
+          <a:ln/>
+        </p:spPr>
+        <p:txBody>
+          <a:bodyPr wrap="square" lIns="0" tIns="0" rIns="0" bIns="0" rtlCol="0" anchor="ctr">
+            <a:normAutofit/>
+          </a:bodyPr>
+          <a:lstStyle/>
+          <a:p>
+            <a:pPr algn="ctr" indent="0" marL="0">
+              <a:buNone/>
+            </a:pPr>
+            <a:r>
+              <a:rPr lang="en-US" sz="1500" b="1" dirty="0">
+                <a:solidFill>
+                  <a:srgbClr val="FFFFFF"/>
+                </a:solidFill>
+                <a:latin typeface="Aptos" pitchFamily="34" charset="0"/>
+                <a:ea typeface="Aptos" pitchFamily="34" charset="-122"/>
+                <a:cs typeface="Aptos" pitchFamily="34" charset="-120"/>
+              </a:rPr>
+              <a:t>Action</a:t>
+            </a:r>
+            <a:endParaRPr lang="en-US" sz="1500" dirty="0"/>
           </a:p>
         </p:txBody>
       </p:sp>
@@ -11696,7 +12572,7 @@
                 <a:ea typeface="Aptos" pitchFamily="34" charset="-122"/>
                 <a:cs typeface="Aptos" pitchFamily="34" charset="-120"/>
               </a:rPr>
-              <a:t>© Paula Soper</a:t>
+              <a:t>Â© Paula Soper</a:t>
             </a:r>
             <a:endParaRPr lang="en-US" sz="800" dirty="0"/>
           </a:p>
@@ -11710,8 +12586,47 @@
         </p:nvSpPr>
         <p:spPr>
           <a:xfrm>
+            <a:off x="11137392" y="6510528"/>
+            <a:ext cx="411480" cy="201168"/>
+          </a:xfrm>
+          <a:prstGeom prst="rect">
+            <a:avLst/>
+          </a:prstGeom>
+          <a:noFill/>
+          <a:ln/>
+        </p:spPr>
+        <p:txBody>
+          <a:bodyPr wrap="square" lIns="0" tIns="0" rIns="0" bIns="0" rtlCol="0" anchor="ctr"/>
+          <a:lstStyle/>
+          <a:p>
+            <a:pPr algn="r" indent="0" marL="0">
+              <a:buNone/>
+            </a:pPr>
+            <a:r>
+              <a:rPr lang="en-US" sz="900" dirty="0">
+                <a:solidFill>
+                  <a:srgbClr val="5F7181"/>
+                </a:solidFill>
+                <a:latin typeface="Aptos" pitchFamily="34" charset="0"/>
+                <a:ea typeface="Aptos" pitchFamily="34" charset="-122"/>
+                <a:cs typeface="Aptos" pitchFamily="34" charset="-120"/>
+              </a:rPr>
+              <a:t>4</a:t>
+            </a:r>
+            <a:endParaRPr lang="en-US" sz="900" dirty="0"/>
+          </a:p>
+        </p:txBody>
+      </p:sp>
+      <p:sp>
+        <p:nvSpPr>
+          <p:cNvPr id="8" name="Text 6"/>
+          <p:cNvSpPr/>
+          <p:nvPr/>
+        </p:nvSpPr>
+        <p:spPr>
+          <a:xfrm>
             <a:off x="640080" y="658368"/>
-            <a:ext cx="10881360" cy="566928"/>
+            <a:ext cx="10881360" cy="713232"/>
           </a:xfrm>
           <a:prstGeom prst="rect">
             <a:avLst/>
@@ -11729,7 +12644,7 @@
               <a:buNone/>
             </a:pPr>
             <a:r>
-              <a:rPr lang="en-US" sz="2700" b="1" dirty="0">
+              <a:rPr lang="en-US" sz="3400" b="1" dirty="0">
                 <a:solidFill>
                   <a:srgbClr val="003A63"/>
                 </a:solidFill>
@@ -11739,20 +12654,20 @@
               </a:rPr>
               <a:t>Related toolkit resources</a:t>
             </a:r>
-            <a:endParaRPr lang="en-US" sz="2700" dirty="0"/>
-          </a:p>
-        </p:txBody>
-      </p:sp>
-      <p:sp>
-        <p:nvSpPr>
-          <p:cNvPr id="8" name="Text 6"/>
-          <p:cNvSpPr/>
-          <p:nvPr/>
-        </p:nvSpPr>
-        <p:spPr>
-          <a:xfrm>
-            <a:off x="868680" y="1417320"/>
-            <a:ext cx="6903720" cy="4480560"/>
+            <a:endParaRPr lang="en-US" sz="3400" dirty="0"/>
+          </a:p>
+        </p:txBody>
+      </p:sp>
+      <p:sp>
+        <p:nvSpPr>
+          <p:cNvPr id="9" name="Text 7"/>
+          <p:cNvSpPr/>
+          <p:nvPr/>
+        </p:nvSpPr>
+        <p:spPr>
+          <a:xfrm>
+            <a:off x="868680" y="1508760"/>
+            <a:ext cx="6812280" cy="3977640"/>
           </a:xfrm>
           <a:prstGeom prst="rect">
             <a:avLst/>
@@ -11767,7 +12682,7 @@
           <a:lstStyle/>
           <a:p>
             <a:r>
-              <a:rPr lang="en-US" sz="1460" dirty="0">
+              <a:rPr lang="en-US" sz="1850" dirty="0">
                 <a:solidFill>
                   <a:srgbClr val="17364A"/>
                 </a:solidFill>
@@ -11775,13 +12690,13 @@
                 <a:ea typeface="Aptos" pitchFamily="34" charset="-122"/>
                 <a:cs typeface="Aptos" pitchFamily="34" charset="-120"/>
               </a:rPr>
-              <a:t>Tool 1: AI Vision &amp; Principles Workshop (Workshop) - Use AI Vision &amp; Principles Workshop to translate this lesson into a documented.</a:t>
-            </a:r>
-            <a:endParaRPr lang="en-US" sz="1460" dirty="0"/>
-          </a:p>
-          <a:p>
-            <a:r>
-              <a:rPr lang="en-US" sz="1460" dirty="0">
+              <a:t>Tool 1: AI Vision &amp; Principles Workshop (Workshop) - Use AI Vision &amp; Principles Workshop to translate this.</a:t>
+            </a:r>
+            <a:endParaRPr lang="en-US" sz="1850" dirty="0"/>
+          </a:p>
+          <a:p>
+            <a:r>
+              <a:rPr lang="en-US" sz="1850" dirty="0">
                 <a:solidFill>
                   <a:srgbClr val="17364A"/>
                 </a:solidFill>
@@ -11789,13 +12704,13 @@
                 <a:ea typeface="Aptos" pitchFamily="34" charset="-122"/>
                 <a:cs typeface="Aptos" pitchFamily="34" charset="-120"/>
               </a:rPr>
-              <a:t>Tool 4: AI Policy Landscape Scan (Worksheet) - Use AI Policy Landscape Scan to translate this lesson into a documented public health.</a:t>
-            </a:r>
-            <a:endParaRPr lang="en-US" sz="1460" dirty="0"/>
-          </a:p>
-          <a:p>
-            <a:r>
-              <a:rPr lang="en-US" sz="1460" dirty="0">
+              <a:t>Tool 4: AI Policy Landscape Scan (Worksheet) - Use AI Policy Landscape Scan to translate this lesson into a.</a:t>
+            </a:r>
+            <a:endParaRPr lang="en-US" sz="1850" dirty="0"/>
+          </a:p>
+          <a:p>
+            <a:r>
+              <a:rPr lang="en-US" sz="1850" dirty="0">
                 <a:solidFill>
                   <a:srgbClr val="17364A"/>
                 </a:solidFill>
@@ -11803,13 +12718,13 @@
                 <a:ea typeface="Aptos" pitchFamily="34" charset="-122"/>
                 <a:cs typeface="Aptos" pitchFamily="34" charset="-120"/>
               </a:rPr>
-              <a:t>Tool 5: AI Environmental and Resource Impact Review (Checklist) - Use AI Environmental and Resource Impact Review to translate this.</a:t>
-            </a:r>
-            <a:endParaRPr lang="en-US" sz="1460" dirty="0"/>
-          </a:p>
-          <a:p>
-            <a:r>
-              <a:rPr lang="en-US" sz="1460" dirty="0">
+              <a:t>Tool 5: AI Environmental and Resource Impact Review (Checklist) - Use AI Environmental and Resource Impact.</a:t>
+            </a:r>
+            <a:endParaRPr lang="en-US" sz="1850" dirty="0"/>
+          </a:p>
+          <a:p>
+            <a:r>
+              <a:rPr lang="en-US" sz="1850" dirty="0">
                 <a:solidFill>
                   <a:srgbClr val="17364A"/>
                 </a:solidFill>
@@ -11817,29 +12732,15 @@
                 <a:ea typeface="Aptos" pitchFamily="34" charset="-122"/>
                 <a:cs typeface="Aptos" pitchFamily="34" charset="-120"/>
               </a:rPr>
-              <a:t>Tool 6: Human-Centered AI Decision Rule Checklist (Checklist) - Use Human-Centered AI Decision Rule Checklist to translate this.</a:t>
-            </a:r>
-            <a:endParaRPr lang="en-US" sz="1460" dirty="0"/>
-          </a:p>
-          <a:p>
-            <a:r>
-              <a:rPr lang="en-US" sz="1460" dirty="0">
-                <a:solidFill>
-                  <a:srgbClr val="17364A"/>
-                </a:solidFill>
-                <a:latin typeface="Aptos" pitchFamily="34" charset="0"/>
-                <a:ea typeface="Aptos" pitchFamily="34" charset="-122"/>
-                <a:cs typeface="Aptos" pitchFamily="34" charset="-120"/>
-              </a:rPr>
-              <a:t>Tool 8: AI Project Charter (Planning) - Use AI Project Charter to translate this lesson into a documented public health AI planning,.</a:t>
-            </a:r>
-            <a:endParaRPr lang="en-US" sz="1460" dirty="0"/>
-          </a:p>
-        </p:txBody>
-      </p:sp>
-      <p:sp>
-        <p:nvSpPr>
-          <p:cNvPr id="9" name="Shape 7"/>
+              <a:t>Tool 6: Human-Centered AI Decision Rule Checklist (Checklist) - Use Human-Centered AI Decision Rule.</a:t>
+            </a:r>
+            <a:endParaRPr lang="en-US" sz="1850" dirty="0"/>
+          </a:p>
+        </p:txBody>
+      </p:sp>
+      <p:sp>
+        <p:nvSpPr>
+          <p:cNvPr id="10" name="Shape 8"/>
           <p:cNvSpPr/>
           <p:nvPr/>
         </p:nvSpPr>
@@ -11866,14 +12767,14 @@
       </p:sp>
       <p:sp>
         <p:nvSpPr>
-          <p:cNvPr id="10" name="Text 8"/>
+          <p:cNvPr id="11" name="Text 9"/>
           <p:cNvSpPr/>
           <p:nvPr/>
         </p:nvSpPr>
         <p:spPr>
           <a:xfrm>
             <a:off x="8211312" y="1563624"/>
-            <a:ext cx="2734056" cy="201168"/>
+            <a:ext cx="2734056" cy="256032"/>
           </a:xfrm>
           <a:prstGeom prst="rect">
             <a:avLst/>
@@ -11889,7 +12790,7 @@
               <a:buNone/>
             </a:pPr>
             <a:r>
-              <a:rPr lang="en-US" sz="950" b="1" dirty="0">
+              <a:rPr lang="en-US" sz="1300" b="1" dirty="0">
                 <a:solidFill>
                   <a:srgbClr val="0068B7"/>
                 </a:solidFill>
@@ -11899,20 +12800,20 @@
               </a:rPr>
               <a:t>Use the tools</a:t>
             </a:r>
-            <a:endParaRPr lang="en-US" sz="950" dirty="0"/>
-          </a:p>
-        </p:txBody>
-      </p:sp>
-      <p:sp>
-        <p:nvSpPr>
-          <p:cNvPr id="11" name="Text 9"/>
-          <p:cNvSpPr/>
-          <p:nvPr/>
-        </p:nvSpPr>
-        <p:spPr>
-          <a:xfrm>
-            <a:off x="8211312" y="1856232"/>
-            <a:ext cx="2734056" cy="1536192"/>
+            <a:endParaRPr lang="en-US" sz="1300" dirty="0"/>
+          </a:p>
+        </p:txBody>
+      </p:sp>
+      <p:sp>
+        <p:nvSpPr>
+          <p:cNvPr id="12" name="Text 10"/>
+          <p:cNvSpPr/>
+          <p:nvPr/>
+        </p:nvSpPr>
+        <p:spPr>
+          <a:xfrm>
+            <a:off x="8211312" y="1920240"/>
+            <a:ext cx="2734056" cy="1463040"/>
           </a:xfrm>
           <a:prstGeom prst="rect">
             <a:avLst/>
@@ -11930,7 +12831,7 @@
               <a:buNone/>
             </a:pPr>
             <a:r>
-              <a:rPr lang="en-US" sz="1250" dirty="0">
+              <a:rPr lang="en-US" sz="1550" dirty="0">
                 <a:solidFill>
                   <a:srgbClr val="17364A"/>
                 </a:solidFill>
@@ -11940,32 +12841,32 @@
               </a:rPr>
               <a:t>Use linked tools when your department needs a structured worksheet, template, checklist, review process, or documentation artifact.</a:t>
             </a:r>
-            <a:endParaRPr lang="en-US" sz="1250" dirty="0"/>
-          </a:p>
-        </p:txBody>
-      </p:sp>
-      <p:sp>
-        <p:nvSpPr>
-          <p:cNvPr id="12" name="Shape 10"/>
-          <p:cNvSpPr/>
-          <p:nvPr/>
-        </p:nvSpPr>
-        <p:spPr>
-          <a:xfrm>
-            <a:off x="8046720" y="3794760"/>
-            <a:ext cx="3063240" cy="1508760"/>
+            <a:endParaRPr lang="en-US" sz="1550" dirty="0"/>
+          </a:p>
+        </p:txBody>
+      </p:sp>
+      <p:sp>
+        <p:nvSpPr>
+          <p:cNvPr id="13" name="Shape 11"/>
+          <p:cNvSpPr/>
+          <p:nvPr/>
+        </p:nvSpPr>
+        <p:spPr>
+          <a:xfrm>
+            <a:off x="7818120" y="3977640"/>
+            <a:ext cx="972312" cy="749808"/>
           </a:xfrm>
           <a:prstGeom prst="roundRect">
             <a:avLst>
-              <a:gd name="adj" fmla="val 7273"/>
+              <a:gd name="adj" fmla="val 14634"/>
             </a:avLst>
           </a:prstGeom>
           <a:solidFill>
-            <a:srgbClr val="EEF8ED"/>
+            <a:srgbClr val="0068B7"/>
           </a:solidFill>
           <a:ln w="12700">
             <a:solidFill>
-              <a:srgbClr val="B9D7E6"/>
+              <a:srgbClr val="0068B7"/>
             </a:solidFill>
             <a:prstDash val="solid"/>
           </a:ln>
@@ -11973,81 +12874,256 @@
       </p:sp>
       <p:sp>
         <p:nvSpPr>
-          <p:cNvPr id="13" name="Text 11"/>
-          <p:cNvSpPr/>
-          <p:nvPr/>
-        </p:nvSpPr>
-        <p:spPr>
-          <a:xfrm>
-            <a:off x="8211312" y="3941064"/>
-            <a:ext cx="2734056" cy="201168"/>
-          </a:xfrm>
-          <a:prstGeom prst="rect">
-            <a:avLst/>
-          </a:prstGeom>
-          <a:noFill/>
-          <a:ln/>
-        </p:spPr>
-        <p:txBody>
-          <a:bodyPr wrap="square" lIns="0" tIns="0" rIns="0" bIns="0" rtlCol="0" anchor="ctr"/>
-          <a:lstStyle/>
-          <a:p>
-            <a:pPr indent="0" marL="0">
-              <a:buNone/>
-            </a:pPr>
-            <a:r>
-              <a:rPr lang="en-US" sz="950" b="1" dirty="0">
-                <a:solidFill>
-                  <a:srgbClr val="0068B7"/>
-                </a:solidFill>
-                <a:latin typeface="Aptos" pitchFamily="34" charset="0"/>
-                <a:ea typeface="Aptos" pitchFamily="34" charset="-122"/>
-                <a:cs typeface="Aptos" pitchFamily="34" charset="-120"/>
-              </a:rPr>
-              <a:t>Avoid duplication</a:t>
-            </a:r>
-            <a:endParaRPr lang="en-US" sz="950" dirty="0"/>
-          </a:p>
-        </p:txBody>
-      </p:sp>
-      <p:sp>
-        <p:nvSpPr>
           <p:cNvPr id="14" name="Text 12"/>
           <p:cNvSpPr/>
           <p:nvPr/>
         </p:nvSpPr>
         <p:spPr>
           <a:xfrm>
-            <a:off x="8211312" y="4233672"/>
-            <a:ext cx="2734056" cy="941832"/>
-          </a:xfrm>
-          <a:prstGeom prst="rect">
-            <a:avLst/>
-          </a:prstGeom>
-          <a:noFill/>
-          <a:ln/>
-        </p:spPr>
-        <p:txBody>
-          <a:bodyPr wrap="square" lIns="0" tIns="0" rIns="0" bIns="0" rtlCol="0" anchor="t">
+            <a:off x="7891272" y="4169664"/>
+            <a:ext cx="826008" cy="310896"/>
+          </a:xfrm>
+          <a:prstGeom prst="rect">
+            <a:avLst/>
+          </a:prstGeom>
+          <a:noFill/>
+          <a:ln/>
+        </p:spPr>
+        <p:txBody>
+          <a:bodyPr wrap="square" lIns="0" tIns="0" rIns="0" bIns="0" rtlCol="0" anchor="ctr">
             <a:normAutofit/>
           </a:bodyPr>
           <a:lstStyle/>
           <a:p>
-            <a:pPr indent="0" marL="0">
-              <a:buNone/>
-            </a:pPr>
-            <a:r>
-              <a:rPr lang="en-US" sz="1250" dirty="0">
-                <a:solidFill>
-                  <a:srgbClr val="17364A"/>
-                </a:solidFill>
-                <a:latin typeface="Aptos" pitchFamily="34" charset="0"/>
-                <a:ea typeface="Aptos" pitchFamily="34" charset="-122"/>
-                <a:cs typeface="Aptos" pitchFamily="34" charset="-120"/>
-              </a:rPr>
-              <a:t>If your department already has a strong equivalent tool, adapt or use the existing process instead of recreating it.</a:t>
-            </a:r>
-            <a:endParaRPr lang="en-US" sz="1250" dirty="0"/>
+            <a:pPr algn="ctr" indent="0" marL="0">
+              <a:buNone/>
+            </a:pPr>
+            <a:r>
+              <a:rPr lang="en-US" sz="1500" b="1" dirty="0">
+                <a:solidFill>
+                  <a:srgbClr val="FFFFFF"/>
+                </a:solidFill>
+                <a:latin typeface="Aptos" pitchFamily="34" charset="0"/>
+                <a:ea typeface="Aptos" pitchFamily="34" charset="-122"/>
+                <a:cs typeface="Aptos" pitchFamily="34" charset="-120"/>
+              </a:rPr>
+              <a:t>Concept</a:t>
+            </a:r>
+            <a:endParaRPr lang="en-US" sz="1500" dirty="0"/>
+          </a:p>
+        </p:txBody>
+      </p:sp>
+      <p:sp>
+        <p:nvSpPr>
+          <p:cNvPr id="15" name="Text 13"/>
+          <p:cNvSpPr/>
+          <p:nvPr/>
+        </p:nvSpPr>
+        <p:spPr>
+          <a:xfrm>
+            <a:off x="8817864" y="4187952"/>
+            <a:ext cx="201168" cy="256032"/>
+          </a:xfrm>
+          <a:prstGeom prst="rect">
+            <a:avLst/>
+          </a:prstGeom>
+          <a:noFill/>
+          <a:ln/>
+        </p:spPr>
+        <p:txBody>
+          <a:bodyPr wrap="square" lIns="0" tIns="0" rIns="0" bIns="0" rtlCol="0" anchor="ctr"/>
+          <a:lstStyle/>
+          <a:p>
+            <a:pPr algn="ctr" indent="0" marL="0">
+              <a:buNone/>
+            </a:pPr>
+            <a:r>
+              <a:rPr lang="en-US" sz="1800" b="1" dirty="0">
+                <a:solidFill>
+                  <a:srgbClr val="0068B7"/>
+                </a:solidFill>
+                <a:latin typeface="Aptos" pitchFamily="34" charset="0"/>
+                <a:ea typeface="Aptos" pitchFamily="34" charset="-122"/>
+                <a:cs typeface="Aptos" pitchFamily="34" charset="-120"/>
+              </a:rPr>
+              <a:t>â†’</a:t>
+            </a:r>
+            <a:endParaRPr lang="en-US" sz="1800" dirty="0"/>
+          </a:p>
+        </p:txBody>
+      </p:sp>
+      <p:sp>
+        <p:nvSpPr>
+          <p:cNvPr id="16" name="Shape 14"/>
+          <p:cNvSpPr/>
+          <p:nvPr/>
+        </p:nvSpPr>
+        <p:spPr>
+          <a:xfrm>
+            <a:off x="9046464" y="3977640"/>
+            <a:ext cx="972312" cy="749808"/>
+          </a:xfrm>
+          <a:prstGeom prst="roundRect">
+            <a:avLst>
+              <a:gd name="adj" fmla="val 14634"/>
+            </a:avLst>
+          </a:prstGeom>
+          <a:solidFill>
+            <a:srgbClr val="2F8A28"/>
+          </a:solidFill>
+          <a:ln w="12700">
+            <a:solidFill>
+              <a:srgbClr val="2F8A28"/>
+            </a:solidFill>
+            <a:prstDash val="solid"/>
+          </a:ln>
+        </p:spPr>
+      </p:sp>
+      <p:sp>
+        <p:nvSpPr>
+          <p:cNvPr id="17" name="Text 15"/>
+          <p:cNvSpPr/>
+          <p:nvPr/>
+        </p:nvSpPr>
+        <p:spPr>
+          <a:xfrm>
+            <a:off x="9119616" y="4169664"/>
+            <a:ext cx="826008" cy="310896"/>
+          </a:xfrm>
+          <a:prstGeom prst="rect">
+            <a:avLst/>
+          </a:prstGeom>
+          <a:noFill/>
+          <a:ln/>
+        </p:spPr>
+        <p:txBody>
+          <a:bodyPr wrap="square" lIns="0" tIns="0" rIns="0" bIns="0" rtlCol="0" anchor="ctr">
+            <a:normAutofit/>
+          </a:bodyPr>
+          <a:lstStyle/>
+          <a:p>
+            <a:pPr algn="ctr" indent="0" marL="0">
+              <a:buNone/>
+            </a:pPr>
+            <a:r>
+              <a:rPr lang="en-US" sz="1500" b="1" dirty="0">
+                <a:solidFill>
+                  <a:srgbClr val="FFFFFF"/>
+                </a:solidFill>
+                <a:latin typeface="Aptos" pitchFamily="34" charset="0"/>
+                <a:ea typeface="Aptos" pitchFamily="34" charset="-122"/>
+                <a:cs typeface="Aptos" pitchFamily="34" charset="-120"/>
+              </a:rPr>
+              <a:t>Tool</a:t>
+            </a:r>
+            <a:endParaRPr lang="en-US" sz="1500" dirty="0"/>
+          </a:p>
+        </p:txBody>
+      </p:sp>
+      <p:sp>
+        <p:nvSpPr>
+          <p:cNvPr id="18" name="Text 16"/>
+          <p:cNvSpPr/>
+          <p:nvPr/>
+        </p:nvSpPr>
+        <p:spPr>
+          <a:xfrm>
+            <a:off x="10046208" y="4187952"/>
+            <a:ext cx="201168" cy="256032"/>
+          </a:xfrm>
+          <a:prstGeom prst="rect">
+            <a:avLst/>
+          </a:prstGeom>
+          <a:noFill/>
+          <a:ln/>
+        </p:spPr>
+        <p:txBody>
+          <a:bodyPr wrap="square" lIns="0" tIns="0" rIns="0" bIns="0" rtlCol="0" anchor="ctr"/>
+          <a:lstStyle/>
+          <a:p>
+            <a:pPr algn="ctr" indent="0" marL="0">
+              <a:buNone/>
+            </a:pPr>
+            <a:r>
+              <a:rPr lang="en-US" sz="1800" b="1" dirty="0">
+                <a:solidFill>
+                  <a:srgbClr val="0068B7"/>
+                </a:solidFill>
+                <a:latin typeface="Aptos" pitchFamily="34" charset="0"/>
+                <a:ea typeface="Aptos" pitchFamily="34" charset="-122"/>
+                <a:cs typeface="Aptos" pitchFamily="34" charset="-120"/>
+              </a:rPr>
+              <a:t>â†’</a:t>
+            </a:r>
+            <a:endParaRPr lang="en-US" sz="1800" dirty="0"/>
+          </a:p>
+        </p:txBody>
+      </p:sp>
+      <p:sp>
+        <p:nvSpPr>
+          <p:cNvPr id="19" name="Shape 17"/>
+          <p:cNvSpPr/>
+          <p:nvPr/>
+        </p:nvSpPr>
+        <p:spPr>
+          <a:xfrm>
+            <a:off x="10274808" y="3977640"/>
+            <a:ext cx="972312" cy="749808"/>
+          </a:xfrm>
+          <a:prstGeom prst="roundRect">
+            <a:avLst>
+              <a:gd name="adj" fmla="val 14634"/>
+            </a:avLst>
+          </a:prstGeom>
+          <a:solidFill>
+            <a:srgbClr val="D69A2D"/>
+          </a:solidFill>
+          <a:ln w="12700">
+            <a:solidFill>
+              <a:srgbClr val="D69A2D"/>
+            </a:solidFill>
+            <a:prstDash val="solid"/>
+          </a:ln>
+        </p:spPr>
+      </p:sp>
+      <p:sp>
+        <p:nvSpPr>
+          <p:cNvPr id="20" name="Text 18"/>
+          <p:cNvSpPr/>
+          <p:nvPr/>
+        </p:nvSpPr>
+        <p:spPr>
+          <a:xfrm>
+            <a:off x="10347960" y="4169664"/>
+            <a:ext cx="826008" cy="310896"/>
+          </a:xfrm>
+          <a:prstGeom prst="rect">
+            <a:avLst/>
+          </a:prstGeom>
+          <a:noFill/>
+          <a:ln/>
+        </p:spPr>
+        <p:txBody>
+          <a:bodyPr wrap="square" lIns="0" tIns="0" rIns="0" bIns="0" rtlCol="0" anchor="ctr">
+            <a:normAutofit/>
+          </a:bodyPr>
+          <a:lstStyle/>
+          <a:p>
+            <a:pPr algn="ctr" indent="0" marL="0">
+              <a:buNone/>
+            </a:pPr>
+            <a:r>
+              <a:rPr lang="en-US" sz="1500" b="1" dirty="0">
+                <a:solidFill>
+                  <a:srgbClr val="FFFFFF"/>
+                </a:solidFill>
+                <a:latin typeface="Aptos" pitchFamily="34" charset="0"/>
+                <a:ea typeface="Aptos" pitchFamily="34" charset="-122"/>
+                <a:cs typeface="Aptos" pitchFamily="34" charset="-120"/>
+              </a:rPr>
+              <a:t>Artifact</a:t>
+            </a:r>
+            <a:endParaRPr lang="en-US" sz="1500" dirty="0"/>
           </a:p>
         </p:txBody>
       </p:sp>
@@ -12244,7 +13320,7 @@
                 <a:ea typeface="Aptos" pitchFamily="34" charset="-122"/>
                 <a:cs typeface="Aptos" pitchFamily="34" charset="-120"/>
               </a:rPr>
-              <a:t>© Paula Soper</a:t>
+              <a:t>Â© Paula Soper</a:t>
             </a:r>
             <a:endParaRPr lang="en-US" sz="800" dirty="0"/>
           </a:p>
@@ -12252,7 +13328,46 @@
       </p:sp>
       <p:sp>
         <p:nvSpPr>
-          <p:cNvPr id="7" name="Shape 5"/>
+          <p:cNvPr id="7" name="Text 5"/>
+          <p:cNvSpPr/>
+          <p:nvPr/>
+        </p:nvSpPr>
+        <p:spPr>
+          <a:xfrm>
+            <a:off x="11137392" y="6510528"/>
+            <a:ext cx="411480" cy="201168"/>
+          </a:xfrm>
+          <a:prstGeom prst="rect">
+            <a:avLst/>
+          </a:prstGeom>
+          <a:noFill/>
+          <a:ln/>
+        </p:spPr>
+        <p:txBody>
+          <a:bodyPr wrap="square" lIns="0" tIns="0" rIns="0" bIns="0" rtlCol="0" anchor="ctr"/>
+          <a:lstStyle/>
+          <a:p>
+            <a:pPr algn="r" indent="0" marL="0">
+              <a:buNone/>
+            </a:pPr>
+            <a:r>
+              <a:rPr lang="en-US" sz="900" dirty="0">
+                <a:solidFill>
+                  <a:srgbClr val="5F7181"/>
+                </a:solidFill>
+                <a:latin typeface="Aptos" pitchFamily="34" charset="0"/>
+                <a:ea typeface="Aptos" pitchFamily="34" charset="-122"/>
+                <a:cs typeface="Aptos" pitchFamily="34" charset="-120"/>
+              </a:rPr>
+              <a:t>5</a:t>
+            </a:r>
+            <a:endParaRPr lang="en-US" sz="900" dirty="0"/>
+          </a:p>
+        </p:txBody>
+      </p:sp>
+      <p:sp>
+        <p:nvSpPr>
+          <p:cNvPr id="8" name="Shape 6"/>
           <p:cNvSpPr/>
           <p:nvPr/>
         </p:nvSpPr>
@@ -12277,7 +13392,7 @@
       </p:sp>
       <p:sp>
         <p:nvSpPr>
-          <p:cNvPr id="8" name="Text 6"/>
+          <p:cNvPr id="9" name="Text 7"/>
           <p:cNvSpPr/>
           <p:nvPr/>
         </p:nvSpPr>
@@ -12316,14 +13431,14 @@
       </p:sp>
       <p:sp>
         <p:nvSpPr>
-          <p:cNvPr id="9" name="Text 7"/>
+          <p:cNvPr id="10" name="Text 8"/>
           <p:cNvSpPr/>
           <p:nvPr/>
         </p:nvSpPr>
         <p:spPr>
           <a:xfrm>
             <a:off x="640080" y="621792"/>
-            <a:ext cx="10881360" cy="566928"/>
+            <a:ext cx="10881360" cy="713232"/>
           </a:xfrm>
           <a:prstGeom prst="rect">
             <a:avLst/>
@@ -12341,7 +13456,7 @@
               <a:buNone/>
             </a:pPr>
             <a:r>
-              <a:rPr lang="en-US" sz="2700" b="1" dirty="0">
+              <a:rPr lang="en-US" sz="3400" b="1" dirty="0">
                 <a:solidFill>
                   <a:srgbClr val="003A63"/>
                 </a:solidFill>
@@ -12351,20 +13466,20 @@
               </a:rPr>
               <a:t>Learning Objectives</a:t>
             </a:r>
-            <a:endParaRPr lang="en-US" sz="2700" dirty="0"/>
-          </a:p>
-        </p:txBody>
-      </p:sp>
-      <p:sp>
-        <p:nvSpPr>
-          <p:cNvPr id="10" name="Text 8"/>
-          <p:cNvSpPr/>
-          <p:nvPr/>
-        </p:nvSpPr>
-        <p:spPr>
-          <a:xfrm>
-            <a:off x="868680" y="1417320"/>
-            <a:ext cx="6675120" cy="4434840"/>
+            <a:endParaRPr lang="en-US" sz="3400" dirty="0"/>
+          </a:p>
+        </p:txBody>
+      </p:sp>
+      <p:sp>
+        <p:nvSpPr>
+          <p:cNvPr id="11" name="Text 9"/>
+          <p:cNvSpPr/>
+          <p:nvPr/>
+        </p:nvSpPr>
+        <p:spPr>
+          <a:xfrm>
+            <a:off x="868680" y="1508760"/>
+            <a:ext cx="6537960" cy="4160520"/>
           </a:xfrm>
           <a:prstGeom prst="rect">
             <a:avLst/>
@@ -12379,7 +13494,7 @@
           <a:lstStyle/>
           <a:p>
             <a:r>
-              <a:rPr lang="en-US" sz="1700" dirty="0">
+              <a:rPr lang="en-US" sz="2100" dirty="0">
                 <a:solidFill>
                   <a:srgbClr val="17364A"/>
                 </a:solidFill>
@@ -12387,13 +13502,13 @@
                 <a:ea typeface="Aptos" pitchFamily="34" charset="-122"/>
                 <a:cs typeface="Aptos" pitchFamily="34" charset="-120"/>
               </a:rPr>
-              <a:t>Explain the purpose of public comment, social listening, and community feedback analysis in public health AI.</a:t>
-            </a:r>
-            <a:endParaRPr lang="en-US" sz="1700" dirty="0"/>
-          </a:p>
-          <a:p>
-            <a:r>
-              <a:rPr lang="en-US" sz="1700" dirty="0">
+              <a:t>Explain the purpose of public comment, social listening, and community feedback analysis in public.</a:t>
+            </a:r>
+            <a:endParaRPr lang="en-US" sz="2100" dirty="0"/>
+          </a:p>
+          <a:p>
+            <a:r>
+              <a:rPr lang="en-US" sz="2100" dirty="0">
                 <a:solidFill>
                   <a:srgbClr val="17364A"/>
                 </a:solidFill>
@@ -12403,11 +13518,11 @@
               </a:rPr>
               <a:t>Identify the roles, decisions, risks, and documentation needed for the topic.</a:t>
             </a:r>
-            <a:endParaRPr lang="en-US" sz="1700" dirty="0"/>
-          </a:p>
-          <a:p>
-            <a:r>
-              <a:rPr lang="en-US" sz="1700" dirty="0">
+            <a:endParaRPr lang="en-US" sz="2100" dirty="0"/>
+          </a:p>
+          <a:p>
+            <a:r>
+              <a:rPr lang="en-US" sz="2100" dirty="0">
                 <a:solidFill>
                   <a:srgbClr val="17364A"/>
                 </a:solidFill>
@@ -12417,27 +13532,13 @@
               </a:rPr>
               <a:t>Apply the topic to a real or realistic public health workflow or decision.</a:t>
             </a:r>
-            <a:endParaRPr lang="en-US" sz="1700" dirty="0"/>
-          </a:p>
-          <a:p>
-            <a:r>
-              <a:rPr lang="en-US" sz="1700" dirty="0">
-                <a:solidFill>
-                  <a:srgbClr val="17364A"/>
-                </a:solidFill>
-                <a:latin typeface="Aptos" pitchFamily="34" charset="0"/>
-                <a:ea typeface="Aptos" pitchFamily="34" charset="-122"/>
-                <a:cs typeface="Aptos" pitchFamily="34" charset="-120"/>
-              </a:rPr>
-              <a:t>Recognize equity, privacy, security, legal, operational, and public trust implications.</a:t>
-            </a:r>
-            <a:endParaRPr lang="en-US" sz="1700" dirty="0"/>
-          </a:p>
-        </p:txBody>
-      </p:sp>
-      <p:sp>
-        <p:nvSpPr>
-          <p:cNvPr id="11" name="Shape 9"/>
+            <a:endParaRPr lang="en-US" sz="2100" dirty="0"/>
+          </a:p>
+        </p:txBody>
+      </p:sp>
+      <p:sp>
+        <p:nvSpPr>
+          <p:cNvPr id="12" name="Shape 10"/>
           <p:cNvSpPr/>
           <p:nvPr/>
         </p:nvSpPr>
@@ -12464,14 +13565,14 @@
       </p:sp>
       <p:sp>
         <p:nvSpPr>
-          <p:cNvPr id="12" name="Text 10"/>
+          <p:cNvPr id="13" name="Text 11"/>
           <p:cNvSpPr/>
           <p:nvPr/>
         </p:nvSpPr>
         <p:spPr>
           <a:xfrm>
             <a:off x="8074152" y="1563624"/>
-            <a:ext cx="2825496" cy="201168"/>
+            <a:ext cx="2825496" cy="256032"/>
           </a:xfrm>
           <a:prstGeom prst="rect">
             <a:avLst/>
@@ -12487,7 +13588,7 @@
               <a:buNone/>
             </a:pPr>
             <a:r>
-              <a:rPr lang="en-US" sz="950" b="1" dirty="0">
+              <a:rPr lang="en-US" sz="1300" b="1" dirty="0">
                 <a:solidFill>
                   <a:srgbClr val="0068B7"/>
                 </a:solidFill>
@@ -12497,20 +13598,20 @@
               </a:rPr>
               <a:t>Key idea</a:t>
             </a:r>
-            <a:endParaRPr lang="en-US" sz="950" dirty="0"/>
-          </a:p>
-        </p:txBody>
-      </p:sp>
-      <p:sp>
-        <p:nvSpPr>
-          <p:cNvPr id="13" name="Text 11"/>
-          <p:cNvSpPr/>
-          <p:nvPr/>
-        </p:nvSpPr>
-        <p:spPr>
-          <a:xfrm>
-            <a:off x="8074152" y="1856232"/>
-            <a:ext cx="2825496" cy="1261872"/>
+            <a:endParaRPr lang="en-US" sz="1300" dirty="0"/>
+          </a:p>
+        </p:txBody>
+      </p:sp>
+      <p:sp>
+        <p:nvSpPr>
+          <p:cNvPr id="14" name="Text 12"/>
+          <p:cNvSpPr/>
+          <p:nvPr/>
+        </p:nvSpPr>
+        <p:spPr>
+          <a:xfrm>
+            <a:off x="8074152" y="1920240"/>
+            <a:ext cx="2825496" cy="1188720"/>
           </a:xfrm>
           <a:prstGeom prst="rect">
             <a:avLst/>
@@ -12528,7 +13629,7 @@
               <a:buNone/>
             </a:pPr>
             <a:r>
-              <a:rPr lang="en-US" sz="1250" dirty="0">
+              <a:rPr lang="en-US" sz="1550" dirty="0">
                 <a:solidFill>
                   <a:srgbClr val="17364A"/>
                 </a:solidFill>
@@ -12536,15 +13637,15 @@
                 <a:ea typeface="Aptos" pitchFamily="34" charset="-122"/>
                 <a:cs typeface="Aptos" pitchFamily="34" charset="-120"/>
               </a:rPr>
-              <a:t>Explain the purpose of public comment, social listening, and community feedback analysis in public health AI.</a:t>
-            </a:r>
-            <a:endParaRPr lang="en-US" sz="1250" dirty="0"/>
-          </a:p>
-        </p:txBody>
-      </p:sp>
-      <p:sp>
-        <p:nvSpPr>
-          <p:cNvPr id="14" name="Shape 12"/>
+              <a:t>Explain the purpose of public comment, social listening, and community feedback analysis in public.</a:t>
+            </a:r>
+            <a:endParaRPr lang="en-US" sz="1550" dirty="0"/>
+          </a:p>
+        </p:txBody>
+      </p:sp>
+      <p:sp>
+        <p:nvSpPr>
+          <p:cNvPr id="15" name="Shape 13"/>
           <p:cNvSpPr/>
           <p:nvPr/>
         </p:nvSpPr>
@@ -12571,14 +13672,14 @@
       </p:sp>
       <p:sp>
         <p:nvSpPr>
-          <p:cNvPr id="15" name="Text 13"/>
+          <p:cNvPr id="16" name="Text 14"/>
           <p:cNvSpPr/>
           <p:nvPr/>
         </p:nvSpPr>
         <p:spPr>
           <a:xfrm>
             <a:off x="8074152" y="3666744"/>
-            <a:ext cx="2825496" cy="201168"/>
+            <a:ext cx="2825496" cy="256032"/>
           </a:xfrm>
           <a:prstGeom prst="rect">
             <a:avLst/>
@@ -12594,7 +13695,7 @@
               <a:buNone/>
             </a:pPr>
             <a:r>
-              <a:rPr lang="en-US" sz="950" b="1" dirty="0">
+              <a:rPr lang="en-US" sz="1300" b="1" dirty="0">
                 <a:solidFill>
                   <a:srgbClr val="0068B7"/>
                 </a:solidFill>
@@ -12604,20 +13705,20 @@
               </a:rPr>
               <a:t>Use this for</a:t>
             </a:r>
-            <a:endParaRPr lang="en-US" sz="950" dirty="0"/>
-          </a:p>
-        </p:txBody>
-      </p:sp>
-      <p:sp>
-        <p:nvSpPr>
-          <p:cNvPr id="16" name="Text 14"/>
-          <p:cNvSpPr/>
-          <p:nvPr/>
-        </p:nvSpPr>
-        <p:spPr>
-          <a:xfrm>
-            <a:off x="8074152" y="3959352"/>
-            <a:ext cx="2825496" cy="1170432"/>
+            <a:endParaRPr lang="en-US" sz="1300" dirty="0"/>
+          </a:p>
+        </p:txBody>
+      </p:sp>
+      <p:sp>
+        <p:nvSpPr>
+          <p:cNvPr id="17" name="Text 15"/>
+          <p:cNvSpPr/>
+          <p:nvPr/>
+        </p:nvSpPr>
+        <p:spPr>
+          <a:xfrm>
+            <a:off x="8074152" y="4023360"/>
+            <a:ext cx="2825496" cy="1097280"/>
           </a:xfrm>
           <a:prstGeom prst="rect">
             <a:avLst/>
@@ -12635,7 +13736,7 @@
               <a:buNone/>
             </a:pPr>
             <a:r>
-              <a:rPr lang="en-US" sz="1250" dirty="0">
+              <a:rPr lang="en-US" sz="1550" dirty="0">
                 <a:solidFill>
                   <a:srgbClr val="17364A"/>
                 </a:solidFill>
@@ -12645,7 +13746,7 @@
               </a:rPr>
               <a:t>Connect the concept to public health decisions, safeguards, documentation, or implementation work.</a:t>
             </a:r>
-            <a:endParaRPr lang="en-US" sz="1250" dirty="0"/>
+            <a:endParaRPr lang="en-US" sz="1550" dirty="0"/>
           </a:p>
         </p:txBody>
       </p:sp>
@@ -12842,7 +13943,7 @@
                 <a:ea typeface="Aptos" pitchFamily="34" charset="-122"/>
                 <a:cs typeface="Aptos" pitchFamily="34" charset="-120"/>
               </a:rPr>
-              <a:t>© Paula Soper</a:t>
+              <a:t>Â© Paula Soper</a:t>
             </a:r>
             <a:endParaRPr lang="en-US" sz="800" dirty="0"/>
           </a:p>
@@ -12850,7 +13951,46 @@
       </p:sp>
       <p:sp>
         <p:nvSpPr>
-          <p:cNvPr id="7" name="Shape 5"/>
+          <p:cNvPr id="7" name="Text 5"/>
+          <p:cNvSpPr/>
+          <p:nvPr/>
+        </p:nvSpPr>
+        <p:spPr>
+          <a:xfrm>
+            <a:off x="11137392" y="6510528"/>
+            <a:ext cx="411480" cy="201168"/>
+          </a:xfrm>
+          <a:prstGeom prst="rect">
+            <a:avLst/>
+          </a:prstGeom>
+          <a:noFill/>
+          <a:ln/>
+        </p:spPr>
+        <p:txBody>
+          <a:bodyPr wrap="square" lIns="0" tIns="0" rIns="0" bIns="0" rtlCol="0" anchor="ctr"/>
+          <a:lstStyle/>
+          <a:p>
+            <a:pPr algn="r" indent="0" marL="0">
+              <a:buNone/>
+            </a:pPr>
+            <a:r>
+              <a:rPr lang="en-US" sz="900" dirty="0">
+                <a:solidFill>
+                  <a:srgbClr val="5F7181"/>
+                </a:solidFill>
+                <a:latin typeface="Aptos" pitchFamily="34" charset="0"/>
+                <a:ea typeface="Aptos" pitchFamily="34" charset="-122"/>
+                <a:cs typeface="Aptos" pitchFamily="34" charset="-120"/>
+              </a:rPr>
+              <a:t>6</a:t>
+            </a:r>
+            <a:endParaRPr lang="en-US" sz="900" dirty="0"/>
+          </a:p>
+        </p:txBody>
+      </p:sp>
+      <p:sp>
+        <p:nvSpPr>
+          <p:cNvPr id="8" name="Shape 6"/>
           <p:cNvSpPr/>
           <p:nvPr/>
         </p:nvSpPr>
@@ -12875,7 +14015,7 @@
       </p:sp>
       <p:sp>
         <p:nvSpPr>
-          <p:cNvPr id="8" name="Text 6"/>
+          <p:cNvPr id="9" name="Text 7"/>
           <p:cNvSpPr/>
           <p:nvPr/>
         </p:nvSpPr>
@@ -12914,14 +14054,14 @@
       </p:sp>
       <p:sp>
         <p:nvSpPr>
-          <p:cNvPr id="9" name="Text 7"/>
+          <p:cNvPr id="10" name="Text 8"/>
           <p:cNvSpPr/>
           <p:nvPr/>
         </p:nvSpPr>
         <p:spPr>
           <a:xfrm>
             <a:off x="640080" y="621792"/>
-            <a:ext cx="10881360" cy="566928"/>
+            <a:ext cx="10881360" cy="713232"/>
           </a:xfrm>
           <a:prstGeom prst="rect">
             <a:avLst/>
@@ -12939,7 +14079,7 @@
               <a:buNone/>
             </a:pPr>
             <a:r>
-              <a:rPr lang="en-US" sz="2700" b="1" dirty="0">
+              <a:rPr lang="en-US" sz="3400" b="1" dirty="0">
                 <a:solidFill>
                   <a:srgbClr val="003A63"/>
                 </a:solidFill>
@@ -12949,20 +14089,20 @@
               </a:rPr>
               <a:t>Module Overview</a:t>
             </a:r>
-            <a:endParaRPr lang="en-US" sz="2700" dirty="0"/>
-          </a:p>
-        </p:txBody>
-      </p:sp>
-      <p:sp>
-        <p:nvSpPr>
-          <p:cNvPr id="10" name="Text 8"/>
-          <p:cNvSpPr/>
-          <p:nvPr/>
-        </p:nvSpPr>
-        <p:spPr>
-          <a:xfrm>
-            <a:off x="868680" y="1417320"/>
-            <a:ext cx="6675120" cy="4434840"/>
+            <a:endParaRPr lang="en-US" sz="3400" dirty="0"/>
+          </a:p>
+        </p:txBody>
+      </p:sp>
+      <p:sp>
+        <p:nvSpPr>
+          <p:cNvPr id="11" name="Text 9"/>
+          <p:cNvSpPr/>
+          <p:nvPr/>
+        </p:nvSpPr>
+        <p:spPr>
+          <a:xfrm>
+            <a:off x="868680" y="1508760"/>
+            <a:ext cx="6537960" cy="4160520"/>
           </a:xfrm>
           <a:prstGeom prst="rect">
             <a:avLst/>
@@ -12977,7 +14117,7 @@
           <a:lstStyle/>
           <a:p>
             <a:r>
-              <a:rPr lang="en-US" sz="1700" dirty="0">
+              <a:rPr lang="en-US" sz="2100" dirty="0">
                 <a:solidFill>
                   <a:srgbClr val="17364A"/>
                 </a:solidFill>
@@ -12985,13 +14125,13 @@
                 <a:ea typeface="Aptos" pitchFamily="34" charset="-122"/>
                 <a:cs typeface="Aptos" pitchFamily="34" charset="-120"/>
               </a:rPr>
-              <a:t>This module focuses on ethical analysis of public comments, social listening data, and community feedback.</a:t>
-            </a:r>
-            <a:endParaRPr lang="en-US" sz="1700" dirty="0"/>
-          </a:p>
-          <a:p>
-            <a:r>
-              <a:rPr lang="en-US" sz="1700" dirty="0">
+              <a:t>This module focuses on ethical analysis of public comments, social listening data, and community.</a:t>
+            </a:r>
+            <a:endParaRPr lang="en-US" sz="2100" dirty="0"/>
+          </a:p>
+          <a:p>
+            <a:r>
+              <a:rPr lang="en-US" sz="2100" dirty="0">
                 <a:solidFill>
                   <a:srgbClr val="17364A"/>
                 </a:solidFill>
@@ -12999,13 +14139,13 @@
                 <a:ea typeface="Aptos" pitchFamily="34" charset="-122"/>
                 <a:cs typeface="Aptos" pitchFamily="34" charset="-120"/>
               </a:rPr>
-              <a:t>It is designed for public health staff who must translate responsible AI principles into repeatable decisions, documents,.</a:t>
-            </a:r>
-            <a:endParaRPr lang="en-US" sz="1700" dirty="0"/>
-          </a:p>
-          <a:p>
-            <a:r>
-              <a:rPr lang="en-US" sz="1700" dirty="0">
+              <a:t>It is designed for public health staff who must translate responsible AI principles into repeatable.</a:t>
+            </a:r>
+            <a:endParaRPr lang="en-US" sz="2100" dirty="0"/>
+          </a:p>
+          <a:p>
+            <a:r>
+              <a:rPr lang="en-US" sz="2100" dirty="0">
                 <a:solidFill>
                   <a:srgbClr val="17364A"/>
                 </a:solidFill>
@@ -13013,29 +14153,15 @@
                 <a:ea typeface="Aptos" pitchFamily="34" charset="-122"/>
                 <a:cs typeface="Aptos" pitchFamily="34" charset="-120"/>
               </a:rPr>
-              <a:t>The module helps learners move beyond general awareness by producing a practical artifact that can be used in governance.</a:t>
-            </a:r>
-            <a:endParaRPr lang="en-US" sz="1700" dirty="0"/>
-          </a:p>
-          <a:p>
-            <a:r>
-              <a:rPr lang="en-US" sz="1700" dirty="0">
-                <a:solidFill>
-                  <a:srgbClr val="17364A"/>
-                </a:solidFill>
-                <a:latin typeface="Aptos" pitchFamily="34" charset="0"/>
-                <a:ea typeface="Aptos" pitchFamily="34" charset="-122"/>
-                <a:cs typeface="Aptos" pitchFamily="34" charset="-120"/>
-              </a:rPr>
-              <a:t>It emphasizes paragraph-based reasoning, defined responsibilities, and documentation that can withstand public health,.</a:t>
-            </a:r>
-            <a:endParaRPr lang="en-US" sz="1700" dirty="0"/>
-          </a:p>
-        </p:txBody>
-      </p:sp>
-      <p:sp>
-        <p:nvSpPr>
-          <p:cNvPr id="11" name="Shape 9"/>
+              <a:t>The module helps learners move beyond general awareness by producing a practical artifact that can be.</a:t>
+            </a:r>
+            <a:endParaRPr lang="en-US" sz="2100" dirty="0"/>
+          </a:p>
+        </p:txBody>
+      </p:sp>
+      <p:sp>
+        <p:nvSpPr>
+          <p:cNvPr id="12" name="Shape 10"/>
           <p:cNvSpPr/>
           <p:nvPr/>
         </p:nvSpPr>
@@ -13062,14 +14188,14 @@
       </p:sp>
       <p:sp>
         <p:nvSpPr>
-          <p:cNvPr id="12" name="Text 10"/>
+          <p:cNvPr id="13" name="Text 11"/>
           <p:cNvSpPr/>
           <p:nvPr/>
         </p:nvSpPr>
         <p:spPr>
           <a:xfrm>
             <a:off x="8074152" y="1563624"/>
-            <a:ext cx="2825496" cy="201168"/>
+            <a:ext cx="2825496" cy="256032"/>
           </a:xfrm>
           <a:prstGeom prst="rect">
             <a:avLst/>
@@ -13085,7 +14211,7 @@
               <a:buNone/>
             </a:pPr>
             <a:r>
-              <a:rPr lang="en-US" sz="950" b="1" dirty="0">
+              <a:rPr lang="en-US" sz="1300" b="1" dirty="0">
                 <a:solidFill>
                   <a:srgbClr val="0068B7"/>
                 </a:solidFill>
@@ -13095,20 +14221,20 @@
               </a:rPr>
               <a:t>Key idea</a:t>
             </a:r>
-            <a:endParaRPr lang="en-US" sz="950" dirty="0"/>
-          </a:p>
-        </p:txBody>
-      </p:sp>
-      <p:sp>
-        <p:nvSpPr>
-          <p:cNvPr id="13" name="Text 11"/>
-          <p:cNvSpPr/>
-          <p:nvPr/>
-        </p:nvSpPr>
-        <p:spPr>
-          <a:xfrm>
-            <a:off x="8074152" y="1856232"/>
-            <a:ext cx="2825496" cy="1261872"/>
+            <a:endParaRPr lang="en-US" sz="1300" dirty="0"/>
+          </a:p>
+        </p:txBody>
+      </p:sp>
+      <p:sp>
+        <p:nvSpPr>
+          <p:cNvPr id="14" name="Text 12"/>
+          <p:cNvSpPr/>
+          <p:nvPr/>
+        </p:nvSpPr>
+        <p:spPr>
+          <a:xfrm>
+            <a:off x="8074152" y="1920240"/>
+            <a:ext cx="2825496" cy="1188720"/>
           </a:xfrm>
           <a:prstGeom prst="rect">
             <a:avLst/>
@@ -13126,7 +14252,7 @@
               <a:buNone/>
             </a:pPr>
             <a:r>
-              <a:rPr lang="en-US" sz="1250" dirty="0">
+              <a:rPr lang="en-US" sz="1550" dirty="0">
                 <a:solidFill>
                   <a:srgbClr val="17364A"/>
                 </a:solidFill>
@@ -13134,15 +14260,15 @@
                 <a:ea typeface="Aptos" pitchFamily="34" charset="-122"/>
                 <a:cs typeface="Aptos" pitchFamily="34" charset="-120"/>
               </a:rPr>
-              <a:t>This module focuses on ethical analysis of public comments, social listening data, and community feedback.</a:t>
-            </a:r>
-            <a:endParaRPr lang="en-US" sz="1250" dirty="0"/>
-          </a:p>
-        </p:txBody>
-      </p:sp>
-      <p:sp>
-        <p:nvSpPr>
-          <p:cNvPr id="14" name="Shape 12"/>
+              <a:t>This module focuses on ethical analysis of public comments, social listening data, and community.</a:t>
+            </a:r>
+            <a:endParaRPr lang="en-US" sz="1550" dirty="0"/>
+          </a:p>
+        </p:txBody>
+      </p:sp>
+      <p:sp>
+        <p:nvSpPr>
+          <p:cNvPr id="15" name="Shape 13"/>
           <p:cNvSpPr/>
           <p:nvPr/>
         </p:nvSpPr>
@@ -13169,14 +14295,14 @@
       </p:sp>
       <p:sp>
         <p:nvSpPr>
-          <p:cNvPr id="15" name="Text 13"/>
+          <p:cNvPr id="16" name="Text 14"/>
           <p:cNvSpPr/>
           <p:nvPr/>
         </p:nvSpPr>
         <p:spPr>
           <a:xfrm>
             <a:off x="8074152" y="3666744"/>
-            <a:ext cx="2825496" cy="201168"/>
+            <a:ext cx="2825496" cy="256032"/>
           </a:xfrm>
           <a:prstGeom prst="rect">
             <a:avLst/>
@@ -13192,7 +14318,7 @@
               <a:buNone/>
             </a:pPr>
             <a:r>
-              <a:rPr lang="en-US" sz="950" b="1" dirty="0">
+              <a:rPr lang="en-US" sz="1300" b="1" dirty="0">
                 <a:solidFill>
                   <a:srgbClr val="0068B7"/>
                 </a:solidFill>
@@ -13202,20 +14328,20 @@
               </a:rPr>
               <a:t>Use this for</a:t>
             </a:r>
-            <a:endParaRPr lang="en-US" sz="950" dirty="0"/>
-          </a:p>
-        </p:txBody>
-      </p:sp>
-      <p:sp>
-        <p:nvSpPr>
-          <p:cNvPr id="16" name="Text 14"/>
-          <p:cNvSpPr/>
-          <p:nvPr/>
-        </p:nvSpPr>
-        <p:spPr>
-          <a:xfrm>
-            <a:off x="8074152" y="3959352"/>
-            <a:ext cx="2825496" cy="1170432"/>
+            <a:endParaRPr lang="en-US" sz="1300" dirty="0"/>
+          </a:p>
+        </p:txBody>
+      </p:sp>
+      <p:sp>
+        <p:nvSpPr>
+          <p:cNvPr id="17" name="Text 15"/>
+          <p:cNvSpPr/>
+          <p:nvPr/>
+        </p:nvSpPr>
+        <p:spPr>
+          <a:xfrm>
+            <a:off x="8074152" y="4023360"/>
+            <a:ext cx="2825496" cy="1097280"/>
           </a:xfrm>
           <a:prstGeom prst="rect">
             <a:avLst/>
@@ -13233,7 +14359,7 @@
               <a:buNone/>
             </a:pPr>
             <a:r>
-              <a:rPr lang="en-US" sz="1250" dirty="0">
+              <a:rPr lang="en-US" sz="1550" dirty="0">
                 <a:solidFill>
                   <a:srgbClr val="17364A"/>
                 </a:solidFill>
@@ -13243,7 +14369,7 @@
               </a:rPr>
               <a:t>Connect the concept to public health decisions, safeguards, documentation, or implementation work.</a:t>
             </a:r>
-            <a:endParaRPr lang="en-US" sz="1250" dirty="0"/>
+            <a:endParaRPr lang="en-US" sz="1550" dirty="0"/>
           </a:p>
         </p:txBody>
       </p:sp>
@@ -13440,7 +14566,7 @@
                 <a:ea typeface="Aptos" pitchFamily="34" charset="-122"/>
                 <a:cs typeface="Aptos" pitchFamily="34" charset="-120"/>
               </a:rPr>
-              <a:t>© Paula Soper</a:t>
+              <a:t>Â© Paula Soper</a:t>
             </a:r>
             <a:endParaRPr lang="en-US" sz="800" dirty="0"/>
           </a:p>
@@ -13448,7 +14574,46 @@
       </p:sp>
       <p:sp>
         <p:nvSpPr>
-          <p:cNvPr id="7" name="Shape 5"/>
+          <p:cNvPr id="7" name="Text 5"/>
+          <p:cNvSpPr/>
+          <p:nvPr/>
+        </p:nvSpPr>
+        <p:spPr>
+          <a:xfrm>
+            <a:off x="11137392" y="6510528"/>
+            <a:ext cx="411480" cy="201168"/>
+          </a:xfrm>
+          <a:prstGeom prst="rect">
+            <a:avLst/>
+          </a:prstGeom>
+          <a:noFill/>
+          <a:ln/>
+        </p:spPr>
+        <p:txBody>
+          <a:bodyPr wrap="square" lIns="0" tIns="0" rIns="0" bIns="0" rtlCol="0" anchor="ctr"/>
+          <a:lstStyle/>
+          <a:p>
+            <a:pPr algn="r" indent="0" marL="0">
+              <a:buNone/>
+            </a:pPr>
+            <a:r>
+              <a:rPr lang="en-US" sz="900" dirty="0">
+                <a:solidFill>
+                  <a:srgbClr val="5F7181"/>
+                </a:solidFill>
+                <a:latin typeface="Aptos" pitchFamily="34" charset="0"/>
+                <a:ea typeface="Aptos" pitchFamily="34" charset="-122"/>
+                <a:cs typeface="Aptos" pitchFamily="34" charset="-120"/>
+              </a:rPr>
+              <a:t>7</a:t>
+            </a:r>
+            <a:endParaRPr lang="en-US" sz="900" dirty="0"/>
+          </a:p>
+        </p:txBody>
+      </p:sp>
+      <p:sp>
+        <p:nvSpPr>
+          <p:cNvPr id="8" name="Shape 6"/>
           <p:cNvSpPr/>
           <p:nvPr/>
         </p:nvSpPr>
@@ -13473,7 +14638,7 @@
       </p:sp>
       <p:sp>
         <p:nvSpPr>
-          <p:cNvPr id="8" name="Text 6"/>
+          <p:cNvPr id="9" name="Text 7"/>
           <p:cNvSpPr/>
           <p:nvPr/>
         </p:nvSpPr>
@@ -13512,14 +14677,14 @@
       </p:sp>
       <p:sp>
         <p:nvSpPr>
-          <p:cNvPr id="9" name="Text 7"/>
+          <p:cNvPr id="10" name="Text 8"/>
           <p:cNvSpPr/>
           <p:nvPr/>
         </p:nvSpPr>
         <p:spPr>
           <a:xfrm>
             <a:off x="640080" y="621792"/>
-            <a:ext cx="10881360" cy="566928"/>
+            <a:ext cx="10881360" cy="713232"/>
           </a:xfrm>
           <a:prstGeom prst="rect">
             <a:avLst/>
@@ -13537,7 +14702,7 @@
               <a:buNone/>
             </a:pPr>
             <a:r>
-              <a:rPr lang="en-US" sz="2700" b="1" dirty="0">
+              <a:rPr lang="en-US" sz="3400" b="1" dirty="0">
                 <a:solidFill>
                   <a:srgbClr val="003A63"/>
                 </a:solidFill>
@@ -13547,20 +14712,20 @@
               </a:rPr>
               <a:t>Definitions</a:t>
             </a:r>
-            <a:endParaRPr lang="en-US" sz="2700" dirty="0"/>
-          </a:p>
-        </p:txBody>
-      </p:sp>
-      <p:sp>
-        <p:nvSpPr>
-          <p:cNvPr id="10" name="Text 8"/>
-          <p:cNvSpPr/>
-          <p:nvPr/>
-        </p:nvSpPr>
-        <p:spPr>
-          <a:xfrm>
-            <a:off x="868680" y="1417320"/>
-            <a:ext cx="6675120" cy="4434840"/>
+            <a:endParaRPr lang="en-US" sz="3400" dirty="0"/>
+          </a:p>
+        </p:txBody>
+      </p:sp>
+      <p:sp>
+        <p:nvSpPr>
+          <p:cNvPr id="11" name="Text 9"/>
+          <p:cNvSpPr/>
+          <p:nvPr/>
+        </p:nvSpPr>
+        <p:spPr>
+          <a:xfrm>
+            <a:off x="868680" y="1508760"/>
+            <a:ext cx="6537960" cy="4160520"/>
           </a:xfrm>
           <a:prstGeom prst="rect">
             <a:avLst/>
@@ -13575,7 +14740,7 @@
           <a:lstStyle/>
           <a:p>
             <a:r>
-              <a:rPr lang="en-US" sz="1700" dirty="0">
+              <a:rPr lang="en-US" sz="2100" dirty="0">
                 <a:solidFill>
                   <a:srgbClr val="17364A"/>
                 </a:solidFill>
@@ -13583,13 +14748,13 @@
                 <a:ea typeface="Aptos" pitchFamily="34" charset="-122"/>
                 <a:cs typeface="Aptos" pitchFamily="34" charset="-120"/>
               </a:rPr>
-              <a:t>Decision right: The authority to approve, deny, modify, pause, or escalate an AI use case or operational decision.</a:t>
-            </a:r>
-            <a:endParaRPr lang="en-US" sz="1700" dirty="0"/>
-          </a:p>
-          <a:p>
-            <a:r>
-              <a:rPr lang="en-US" sz="1700" dirty="0">
+              <a:t>Decision right: The authority to approve, deny, modify, pause, or escalate an AI use case or.</a:t>
+            </a:r>
+            <a:endParaRPr lang="en-US" sz="2100" dirty="0"/>
+          </a:p>
+          <a:p>
+            <a:r>
+              <a:rPr lang="en-US" sz="2100" dirty="0">
                 <a:solidFill>
                   <a:srgbClr val="17364A"/>
                 </a:solidFill>
@@ -13597,13 +14762,13 @@
                 <a:ea typeface="Aptos" pitchFamily="34" charset="-122"/>
                 <a:cs typeface="Aptos" pitchFamily="34" charset="-120"/>
               </a:rPr>
-              <a:t>Evidence artifact: A document, log, checklist, test result, approval record, or review note that demonstrates responsible AI.</a:t>
-            </a:r>
-            <a:endParaRPr lang="en-US" sz="1700" dirty="0"/>
-          </a:p>
-          <a:p>
-            <a:r>
-              <a:rPr lang="en-US" sz="1700" dirty="0">
+              <a:t>Evidence artifact: A document, log, checklist, test result, approval record, or review note that.</a:t>
+            </a:r>
+            <a:endParaRPr lang="en-US" sz="2100" dirty="0"/>
+          </a:p>
+          <a:p>
+            <a:r>
+              <a:rPr lang="en-US" sz="2100" dirty="0">
                 <a:solidFill>
                   <a:srgbClr val="17364A"/>
                 </a:solidFill>
@@ -13613,27 +14778,13 @@
               </a:rPr>
               <a:t>Escalation pathway: A defined route for raising concerns to the appropriate reviewer or decision-maker.</a:t>
             </a:r>
-            <a:endParaRPr lang="en-US" sz="1700" dirty="0"/>
-          </a:p>
-          <a:p>
-            <a:r>
-              <a:rPr lang="en-US" sz="1700" dirty="0">
-                <a:solidFill>
-                  <a:srgbClr val="17364A"/>
-                </a:solidFill>
-                <a:latin typeface="Aptos" pitchFamily="34" charset="0"/>
-                <a:ea typeface="Aptos" pitchFamily="34" charset="-122"/>
-                <a:cs typeface="Aptos" pitchFamily="34" charset="-120"/>
-              </a:rPr>
-              <a:t>Accountability owner: The person or role responsible for ensuring that an AI use case is governed, monitored, and corrected.</a:t>
-            </a:r>
-            <a:endParaRPr lang="en-US" sz="1700" dirty="0"/>
-          </a:p>
-        </p:txBody>
-      </p:sp>
-      <p:sp>
-        <p:nvSpPr>
-          <p:cNvPr id="11" name="Shape 9"/>
+            <a:endParaRPr lang="en-US" sz="2100" dirty="0"/>
+          </a:p>
+        </p:txBody>
+      </p:sp>
+      <p:sp>
+        <p:nvSpPr>
+          <p:cNvPr id="12" name="Shape 10"/>
           <p:cNvSpPr/>
           <p:nvPr/>
         </p:nvSpPr>
@@ -13660,14 +14811,14 @@
       </p:sp>
       <p:sp>
         <p:nvSpPr>
-          <p:cNvPr id="12" name="Text 10"/>
+          <p:cNvPr id="13" name="Text 11"/>
           <p:cNvSpPr/>
           <p:nvPr/>
         </p:nvSpPr>
         <p:spPr>
           <a:xfrm>
             <a:off x="8074152" y="1563624"/>
-            <a:ext cx="2825496" cy="201168"/>
+            <a:ext cx="2825496" cy="256032"/>
           </a:xfrm>
           <a:prstGeom prst="rect">
             <a:avLst/>
@@ -13683,7 +14834,7 @@
               <a:buNone/>
             </a:pPr>
             <a:r>
-              <a:rPr lang="en-US" sz="950" b="1" dirty="0">
+              <a:rPr lang="en-US" sz="1300" b="1" dirty="0">
                 <a:solidFill>
                   <a:srgbClr val="0068B7"/>
                 </a:solidFill>
@@ -13693,20 +14844,20 @@
               </a:rPr>
               <a:t>Key idea</a:t>
             </a:r>
-            <a:endParaRPr lang="en-US" sz="950" dirty="0"/>
-          </a:p>
-        </p:txBody>
-      </p:sp>
-      <p:sp>
-        <p:nvSpPr>
-          <p:cNvPr id="13" name="Text 11"/>
-          <p:cNvSpPr/>
-          <p:nvPr/>
-        </p:nvSpPr>
-        <p:spPr>
-          <a:xfrm>
-            <a:off x="8074152" y="1856232"/>
-            <a:ext cx="2825496" cy="1261872"/>
+            <a:endParaRPr lang="en-US" sz="1300" dirty="0"/>
+          </a:p>
+        </p:txBody>
+      </p:sp>
+      <p:sp>
+        <p:nvSpPr>
+          <p:cNvPr id="14" name="Text 12"/>
+          <p:cNvSpPr/>
+          <p:nvPr/>
+        </p:nvSpPr>
+        <p:spPr>
+          <a:xfrm>
+            <a:off x="8074152" y="1920240"/>
+            <a:ext cx="2825496" cy="1188720"/>
           </a:xfrm>
           <a:prstGeom prst="rect">
             <a:avLst/>
@@ -13724,7 +14875,7 @@
               <a:buNone/>
             </a:pPr>
             <a:r>
-              <a:rPr lang="en-US" sz="1250" dirty="0">
+              <a:rPr lang="en-US" sz="1550" dirty="0">
                 <a:solidFill>
                   <a:srgbClr val="17364A"/>
                 </a:solidFill>
@@ -13732,15 +14883,15 @@
                 <a:ea typeface="Aptos" pitchFamily="34" charset="-122"/>
                 <a:cs typeface="Aptos" pitchFamily="34" charset="-120"/>
               </a:rPr>
-              <a:t>Decision right: The authority to approve, deny, modify, pause, or escalate an AI use case or operational decision.</a:t>
-            </a:r>
-            <a:endParaRPr lang="en-US" sz="1250" dirty="0"/>
-          </a:p>
-        </p:txBody>
-      </p:sp>
-      <p:sp>
-        <p:nvSpPr>
-          <p:cNvPr id="14" name="Shape 12"/>
+              <a:t>Decision right: The authority to approve, deny, modify, pause, or escalate an AI use case or.</a:t>
+            </a:r>
+            <a:endParaRPr lang="en-US" sz="1550" dirty="0"/>
+          </a:p>
+        </p:txBody>
+      </p:sp>
+      <p:sp>
+        <p:nvSpPr>
+          <p:cNvPr id="15" name="Shape 13"/>
           <p:cNvSpPr/>
           <p:nvPr/>
         </p:nvSpPr>
@@ -13767,14 +14918,14 @@
       </p:sp>
       <p:sp>
         <p:nvSpPr>
-          <p:cNvPr id="15" name="Text 13"/>
+          <p:cNvPr id="16" name="Text 14"/>
           <p:cNvSpPr/>
           <p:nvPr/>
         </p:nvSpPr>
         <p:spPr>
           <a:xfrm>
             <a:off x="8074152" y="3666744"/>
-            <a:ext cx="2825496" cy="201168"/>
+            <a:ext cx="2825496" cy="256032"/>
           </a:xfrm>
           <a:prstGeom prst="rect">
             <a:avLst/>
@@ -13790,7 +14941,7 @@
               <a:buNone/>
             </a:pPr>
             <a:r>
-              <a:rPr lang="en-US" sz="950" b="1" dirty="0">
+              <a:rPr lang="en-US" sz="1300" b="1" dirty="0">
                 <a:solidFill>
                   <a:srgbClr val="0068B7"/>
                 </a:solidFill>
@@ -13800,20 +14951,20 @@
               </a:rPr>
               <a:t>Use this for</a:t>
             </a:r>
-            <a:endParaRPr lang="en-US" sz="950" dirty="0"/>
-          </a:p>
-        </p:txBody>
-      </p:sp>
-      <p:sp>
-        <p:nvSpPr>
-          <p:cNvPr id="16" name="Text 14"/>
-          <p:cNvSpPr/>
-          <p:nvPr/>
-        </p:nvSpPr>
-        <p:spPr>
-          <a:xfrm>
-            <a:off x="8074152" y="3959352"/>
-            <a:ext cx="2825496" cy="1170432"/>
+            <a:endParaRPr lang="en-US" sz="1300" dirty="0"/>
+          </a:p>
+        </p:txBody>
+      </p:sp>
+      <p:sp>
+        <p:nvSpPr>
+          <p:cNvPr id="17" name="Text 15"/>
+          <p:cNvSpPr/>
+          <p:nvPr/>
+        </p:nvSpPr>
+        <p:spPr>
+          <a:xfrm>
+            <a:off x="8074152" y="4023360"/>
+            <a:ext cx="2825496" cy="1097280"/>
           </a:xfrm>
           <a:prstGeom prst="rect">
             <a:avLst/>
@@ -13831,7 +14982,7 @@
               <a:buNone/>
             </a:pPr>
             <a:r>
-              <a:rPr lang="en-US" sz="1250" dirty="0">
+              <a:rPr lang="en-US" sz="1550" dirty="0">
                 <a:solidFill>
                   <a:srgbClr val="17364A"/>
                 </a:solidFill>
@@ -13841,7 +14992,7 @@
               </a:rPr>
               <a:t>Connect the concept to public health decisions, safeguards, documentation, or implementation work.</a:t>
             </a:r>
-            <a:endParaRPr lang="en-US" sz="1250" dirty="0"/>
+            <a:endParaRPr lang="en-US" sz="1550" dirty="0"/>
           </a:p>
         </p:txBody>
       </p:sp>
@@ -14038,7 +15189,7 @@
                 <a:ea typeface="Aptos" pitchFamily="34" charset="-122"/>
                 <a:cs typeface="Aptos" pitchFamily="34" charset="-120"/>
               </a:rPr>
-              <a:t>© Paula Soper</a:t>
+              <a:t>Â© Paula Soper</a:t>
             </a:r>
             <a:endParaRPr lang="en-US" sz="800" dirty="0"/>
           </a:p>
@@ -14046,7 +15197,46 @@
       </p:sp>
       <p:sp>
         <p:nvSpPr>
-          <p:cNvPr id="7" name="Shape 5"/>
+          <p:cNvPr id="7" name="Text 5"/>
+          <p:cNvSpPr/>
+          <p:nvPr/>
+        </p:nvSpPr>
+        <p:spPr>
+          <a:xfrm>
+            <a:off x="11137392" y="6510528"/>
+            <a:ext cx="411480" cy="201168"/>
+          </a:xfrm>
+          <a:prstGeom prst="rect">
+            <a:avLst/>
+          </a:prstGeom>
+          <a:noFill/>
+          <a:ln/>
+        </p:spPr>
+        <p:txBody>
+          <a:bodyPr wrap="square" lIns="0" tIns="0" rIns="0" bIns="0" rtlCol="0" anchor="ctr"/>
+          <a:lstStyle/>
+          <a:p>
+            <a:pPr algn="r" indent="0" marL="0">
+              <a:buNone/>
+            </a:pPr>
+            <a:r>
+              <a:rPr lang="en-US" sz="900" dirty="0">
+                <a:solidFill>
+                  <a:srgbClr val="5F7181"/>
+                </a:solidFill>
+                <a:latin typeface="Aptos" pitchFamily="34" charset="0"/>
+                <a:ea typeface="Aptos" pitchFamily="34" charset="-122"/>
+                <a:cs typeface="Aptos" pitchFamily="34" charset="-120"/>
+              </a:rPr>
+              <a:t>8</a:t>
+            </a:r>
+            <a:endParaRPr lang="en-US" sz="900" dirty="0"/>
+          </a:p>
+        </p:txBody>
+      </p:sp>
+      <p:sp>
+        <p:nvSpPr>
+          <p:cNvPr id="8" name="Shape 6"/>
           <p:cNvSpPr/>
           <p:nvPr/>
         </p:nvSpPr>
@@ -14071,7 +15261,7 @@
       </p:sp>
       <p:sp>
         <p:nvSpPr>
-          <p:cNvPr id="8" name="Text 6"/>
+          <p:cNvPr id="9" name="Text 7"/>
           <p:cNvSpPr/>
           <p:nvPr/>
         </p:nvSpPr>
@@ -14110,14 +15300,14 @@
       </p:sp>
       <p:sp>
         <p:nvSpPr>
-          <p:cNvPr id="9" name="Text 7"/>
+          <p:cNvPr id="10" name="Text 8"/>
           <p:cNvSpPr/>
           <p:nvPr/>
         </p:nvSpPr>
         <p:spPr>
           <a:xfrm>
             <a:off x="640080" y="621792"/>
-            <a:ext cx="10881360" cy="566928"/>
+            <a:ext cx="10881360" cy="713232"/>
           </a:xfrm>
           <a:prstGeom prst="rect">
             <a:avLst/>
@@ -14135,7 +15325,7 @@
               <a:buNone/>
             </a:pPr>
             <a:r>
-              <a:rPr lang="en-US" sz="2700" b="1" dirty="0">
+              <a:rPr lang="en-US" sz="3400" b="1" dirty="0">
                 <a:solidFill>
                   <a:srgbClr val="003A63"/>
                 </a:solidFill>
@@ -14145,20 +15335,20 @@
               </a:rPr>
               <a:t>Jurisdiction and Agency Policy Note</a:t>
             </a:r>
-            <a:endParaRPr lang="en-US" sz="2700" dirty="0"/>
-          </a:p>
-        </p:txBody>
-      </p:sp>
-      <p:sp>
-        <p:nvSpPr>
-          <p:cNvPr id="10" name="Text 8"/>
-          <p:cNvSpPr/>
-          <p:nvPr/>
-        </p:nvSpPr>
-        <p:spPr>
-          <a:xfrm>
-            <a:off x="868680" y="1417320"/>
-            <a:ext cx="6675120" cy="4434840"/>
+            <a:endParaRPr lang="en-US" sz="3400" dirty="0"/>
+          </a:p>
+        </p:txBody>
+      </p:sp>
+      <p:sp>
+        <p:nvSpPr>
+          <p:cNvPr id="11" name="Text 9"/>
+          <p:cNvSpPr/>
+          <p:nvPr/>
+        </p:nvSpPr>
+        <p:spPr>
+          <a:xfrm>
+            <a:off x="868680" y="1508760"/>
+            <a:ext cx="6537960" cy="4160520"/>
           </a:xfrm>
           <a:prstGeom prst="rect">
             <a:avLst/>
@@ -14173,7 +15363,7 @@
           <a:lstStyle/>
           <a:p>
             <a:r>
-              <a:rPr lang="en-US" sz="1700" dirty="0">
+              <a:rPr lang="en-US" sz="2100" dirty="0">
                 <a:solidFill>
                   <a:srgbClr val="17364A"/>
                 </a:solidFill>
@@ -14183,11 +15373,11 @@
               </a:rPr>
               <a:t>This module provides national-level training guidance for public health agencies and partners.</a:t>
             </a:r>
-            <a:endParaRPr lang="en-US" sz="1700" dirty="0"/>
-          </a:p>
-          <a:p>
-            <a:r>
-              <a:rPr lang="en-US" sz="1700" dirty="0">
+            <a:endParaRPr lang="en-US" sz="2100" dirty="0"/>
+          </a:p>
+          <a:p>
+            <a:r>
+              <a:rPr lang="en-US" sz="2100" dirty="0">
                 <a:solidFill>
                   <a:srgbClr val="17364A"/>
                 </a:solidFill>
@@ -14195,13 +15385,13 @@
                 <a:ea typeface="Aptos" pitchFamily="34" charset="-122"/>
                 <a:cs typeface="Aptos" pitchFamily="34" charset="-120"/>
               </a:rPr>
-              <a:t>It is not legal advice and does not replace review by agency legal counsel, privacy officers, procurement officials, civil.</a:t>
-            </a:r>
-            <a:endParaRPr lang="en-US" sz="1700" dirty="0"/>
-          </a:p>
-          <a:p>
-            <a:r>
-              <a:rPr lang="en-US" sz="1700" dirty="0">
+              <a:t>It is not legal advice and does not replace review by agency legal counsel, privacy officers,.</a:t>
+            </a:r>
+            <a:endParaRPr lang="en-US" sz="2100" dirty="0"/>
+          </a:p>
+          <a:p>
+            <a:r>
+              <a:rPr lang="en-US" sz="2100" dirty="0">
                 <a:solidFill>
                   <a:srgbClr val="17364A"/>
                 </a:solidFill>
@@ -14209,29 +15399,15 @@
                 <a:ea typeface="Aptos" pitchFamily="34" charset="-122"/>
                 <a:cs typeface="Aptos" pitchFamily="34" charset="-120"/>
               </a:rPr>
-              <a:t>Requirements may vary by state, locality, territory, Tribe, agency, funding source, data-sharing agreement, emergency.</a:t>
-            </a:r>
-            <a:endParaRPr lang="en-US" sz="1700" dirty="0"/>
-          </a:p>
-          <a:p>
-            <a:r>
-              <a:rPr lang="en-US" sz="1700" dirty="0">
-                <a:solidFill>
-                  <a:srgbClr val="17364A"/>
-                </a:solidFill>
-                <a:latin typeface="Aptos" pitchFamily="34" charset="0"/>
-                <a:ea typeface="Aptos" pitchFamily="34" charset="-122"/>
-                <a:cs typeface="Aptos" pitchFamily="34" charset="-120"/>
-              </a:rPr>
-              <a:t>Learners should use this module to identify the issues that require review and should confirm applicable requirements.</a:t>
-            </a:r>
-            <a:endParaRPr lang="en-US" sz="1700" dirty="0"/>
-          </a:p>
-        </p:txBody>
-      </p:sp>
-      <p:sp>
-        <p:nvSpPr>
-          <p:cNvPr id="11" name="Shape 9"/>
+              <a:t>Requirements may vary by state, locality, territory, Tribe, agency, funding source, data-sharing.</a:t>
+            </a:r>
+            <a:endParaRPr lang="en-US" sz="2100" dirty="0"/>
+          </a:p>
+        </p:txBody>
+      </p:sp>
+      <p:sp>
+        <p:nvSpPr>
+          <p:cNvPr id="12" name="Shape 10"/>
           <p:cNvSpPr/>
           <p:nvPr/>
         </p:nvSpPr>
@@ -14258,14 +15434,14 @@
       </p:sp>
       <p:sp>
         <p:nvSpPr>
-          <p:cNvPr id="12" name="Text 10"/>
+          <p:cNvPr id="13" name="Text 11"/>
           <p:cNvSpPr/>
           <p:nvPr/>
         </p:nvSpPr>
         <p:spPr>
           <a:xfrm>
             <a:off x="8074152" y="1563624"/>
-            <a:ext cx="2825496" cy="201168"/>
+            <a:ext cx="2825496" cy="256032"/>
           </a:xfrm>
           <a:prstGeom prst="rect">
             <a:avLst/>
@@ -14281,7 +15457,7 @@
               <a:buNone/>
             </a:pPr>
             <a:r>
-              <a:rPr lang="en-US" sz="950" b="1" dirty="0">
+              <a:rPr lang="en-US" sz="1300" b="1" dirty="0">
                 <a:solidFill>
                   <a:srgbClr val="0068B7"/>
                 </a:solidFill>
@@ -14291,20 +15467,20 @@
               </a:rPr>
               <a:t>Key idea</a:t>
             </a:r>
-            <a:endParaRPr lang="en-US" sz="950" dirty="0"/>
-          </a:p>
-        </p:txBody>
-      </p:sp>
-      <p:sp>
-        <p:nvSpPr>
-          <p:cNvPr id="13" name="Text 11"/>
-          <p:cNvSpPr/>
-          <p:nvPr/>
-        </p:nvSpPr>
-        <p:spPr>
-          <a:xfrm>
-            <a:off x="8074152" y="1856232"/>
-            <a:ext cx="2825496" cy="1261872"/>
+            <a:endParaRPr lang="en-US" sz="1300" dirty="0"/>
+          </a:p>
+        </p:txBody>
+      </p:sp>
+      <p:sp>
+        <p:nvSpPr>
+          <p:cNvPr id="14" name="Text 12"/>
+          <p:cNvSpPr/>
+          <p:nvPr/>
+        </p:nvSpPr>
+        <p:spPr>
+          <a:xfrm>
+            <a:off x="8074152" y="1920240"/>
+            <a:ext cx="2825496" cy="1188720"/>
           </a:xfrm>
           <a:prstGeom prst="rect">
             <a:avLst/>
@@ -14322,7 +15498,7 @@
               <a:buNone/>
             </a:pPr>
             <a:r>
-              <a:rPr lang="en-US" sz="1250" dirty="0">
+              <a:rPr lang="en-US" sz="1550" dirty="0">
                 <a:solidFill>
                   <a:srgbClr val="17364A"/>
                 </a:solidFill>
@@ -14332,13 +15508,13 @@
               </a:rPr>
               <a:t>This module provides national-level training guidance for public health agencies and partners.</a:t>
             </a:r>
-            <a:endParaRPr lang="en-US" sz="1250" dirty="0"/>
-          </a:p>
-        </p:txBody>
-      </p:sp>
-      <p:sp>
-        <p:nvSpPr>
-          <p:cNvPr id="14" name="Shape 12"/>
+            <a:endParaRPr lang="en-US" sz="1550" dirty="0"/>
+          </a:p>
+        </p:txBody>
+      </p:sp>
+      <p:sp>
+        <p:nvSpPr>
+          <p:cNvPr id="15" name="Shape 13"/>
           <p:cNvSpPr/>
           <p:nvPr/>
         </p:nvSpPr>
@@ -14365,14 +15541,14 @@
       </p:sp>
       <p:sp>
         <p:nvSpPr>
-          <p:cNvPr id="15" name="Text 13"/>
+          <p:cNvPr id="16" name="Text 14"/>
           <p:cNvSpPr/>
           <p:nvPr/>
         </p:nvSpPr>
         <p:spPr>
           <a:xfrm>
             <a:off x="8074152" y="3666744"/>
-            <a:ext cx="2825496" cy="201168"/>
+            <a:ext cx="2825496" cy="256032"/>
           </a:xfrm>
           <a:prstGeom prst="rect">
             <a:avLst/>
@@ -14388,7 +15564,7 @@
               <a:buNone/>
             </a:pPr>
             <a:r>
-              <a:rPr lang="en-US" sz="950" b="1" dirty="0">
+              <a:rPr lang="en-US" sz="1300" b="1" dirty="0">
                 <a:solidFill>
                   <a:srgbClr val="0068B7"/>
                 </a:solidFill>
@@ -14398,20 +15574,20 @@
               </a:rPr>
               <a:t>Use this for</a:t>
             </a:r>
-            <a:endParaRPr lang="en-US" sz="950" dirty="0"/>
-          </a:p>
-        </p:txBody>
-      </p:sp>
-      <p:sp>
-        <p:nvSpPr>
-          <p:cNvPr id="16" name="Text 14"/>
-          <p:cNvSpPr/>
-          <p:nvPr/>
-        </p:nvSpPr>
-        <p:spPr>
-          <a:xfrm>
-            <a:off x="8074152" y="3959352"/>
-            <a:ext cx="2825496" cy="1170432"/>
+            <a:endParaRPr lang="en-US" sz="1300" dirty="0"/>
+          </a:p>
+        </p:txBody>
+      </p:sp>
+      <p:sp>
+        <p:nvSpPr>
+          <p:cNvPr id="17" name="Text 15"/>
+          <p:cNvSpPr/>
+          <p:nvPr/>
+        </p:nvSpPr>
+        <p:spPr>
+          <a:xfrm>
+            <a:off x="8074152" y="4023360"/>
+            <a:ext cx="2825496" cy="1097280"/>
           </a:xfrm>
           <a:prstGeom prst="rect">
             <a:avLst/>
@@ -14429,7 +15605,7 @@
               <a:buNone/>
             </a:pPr>
             <a:r>
-              <a:rPr lang="en-US" sz="1250" dirty="0">
+              <a:rPr lang="en-US" sz="1550" dirty="0">
                 <a:solidFill>
                   <a:srgbClr val="17364A"/>
                 </a:solidFill>
@@ -14439,7 +15615,7 @@
               </a:rPr>
               <a:t>Connect the concept to public health decisions, safeguards, documentation, or implementation work.</a:t>
             </a:r>
-            <a:endParaRPr lang="en-US" sz="1250" dirty="0"/>
+            <a:endParaRPr lang="en-US" sz="1550" dirty="0"/>
           </a:p>
         </p:txBody>
       </p:sp>
@@ -14636,7 +15812,7 @@
                 <a:ea typeface="Aptos" pitchFamily="34" charset="-122"/>
                 <a:cs typeface="Aptos" pitchFamily="34" charset="-120"/>
               </a:rPr>
-              <a:t>© Paula Soper</a:t>
+              <a:t>Â© Paula Soper</a:t>
             </a:r>
             <a:endParaRPr lang="en-US" sz="800" dirty="0"/>
           </a:p>
@@ -14644,7 +15820,46 @@
       </p:sp>
       <p:sp>
         <p:nvSpPr>
-          <p:cNvPr id="7" name="Shape 5"/>
+          <p:cNvPr id="7" name="Text 5"/>
+          <p:cNvSpPr/>
+          <p:nvPr/>
+        </p:nvSpPr>
+        <p:spPr>
+          <a:xfrm>
+            <a:off x="11137392" y="6510528"/>
+            <a:ext cx="411480" cy="201168"/>
+          </a:xfrm>
+          <a:prstGeom prst="rect">
+            <a:avLst/>
+          </a:prstGeom>
+          <a:noFill/>
+          <a:ln/>
+        </p:spPr>
+        <p:txBody>
+          <a:bodyPr wrap="square" lIns="0" tIns="0" rIns="0" bIns="0" rtlCol="0" anchor="ctr"/>
+          <a:lstStyle/>
+          <a:p>
+            <a:pPr algn="r" indent="0" marL="0">
+              <a:buNone/>
+            </a:pPr>
+            <a:r>
+              <a:rPr lang="en-US" sz="900" dirty="0">
+                <a:solidFill>
+                  <a:srgbClr val="5F7181"/>
+                </a:solidFill>
+                <a:latin typeface="Aptos" pitchFamily="34" charset="0"/>
+                <a:ea typeface="Aptos" pitchFamily="34" charset="-122"/>
+                <a:cs typeface="Aptos" pitchFamily="34" charset="-120"/>
+              </a:rPr>
+              <a:t>9</a:t>
+            </a:r>
+            <a:endParaRPr lang="en-US" sz="900" dirty="0"/>
+          </a:p>
+        </p:txBody>
+      </p:sp>
+      <p:sp>
+        <p:nvSpPr>
+          <p:cNvPr id="8" name="Shape 6"/>
           <p:cNvSpPr/>
           <p:nvPr/>
         </p:nvSpPr>
@@ -14669,7 +15884,7 @@
       </p:sp>
       <p:sp>
         <p:nvSpPr>
-          <p:cNvPr id="8" name="Text 6"/>
+          <p:cNvPr id="9" name="Text 7"/>
           <p:cNvSpPr/>
           <p:nvPr/>
         </p:nvSpPr>
@@ -14708,14 +15923,14 @@
       </p:sp>
       <p:sp>
         <p:nvSpPr>
-          <p:cNvPr id="9" name="Text 7"/>
+          <p:cNvPr id="10" name="Text 8"/>
           <p:cNvSpPr/>
           <p:nvPr/>
         </p:nvSpPr>
         <p:spPr>
           <a:xfrm>
             <a:off x="640080" y="621792"/>
-            <a:ext cx="10881360" cy="566928"/>
+            <a:ext cx="10881360" cy="713232"/>
           </a:xfrm>
           <a:prstGeom prst="rect">
             <a:avLst/>
@@ -14733,7 +15948,7 @@
               <a:buNone/>
             </a:pPr>
             <a:r>
-              <a:rPr lang="en-US" sz="2700" b="1" dirty="0">
+              <a:rPr lang="en-US" sz="3400" b="1" dirty="0">
                 <a:solidFill>
                   <a:srgbClr val="003A63"/>
                 </a:solidFill>
@@ -14743,20 +15958,20 @@
               </a:rPr>
               <a:t>Why This Topic Matters for Public Health AI</a:t>
             </a:r>
-            <a:endParaRPr lang="en-US" sz="2700" dirty="0"/>
-          </a:p>
-        </p:txBody>
-      </p:sp>
-      <p:sp>
-        <p:nvSpPr>
-          <p:cNvPr id="10" name="Text 8"/>
-          <p:cNvSpPr/>
-          <p:nvPr/>
-        </p:nvSpPr>
-        <p:spPr>
-          <a:xfrm>
-            <a:off x="868680" y="1417320"/>
-            <a:ext cx="6675120" cy="4434840"/>
+            <a:endParaRPr lang="en-US" sz="3400" dirty="0"/>
+          </a:p>
+        </p:txBody>
+      </p:sp>
+      <p:sp>
+        <p:nvSpPr>
+          <p:cNvPr id="11" name="Text 9"/>
+          <p:cNvSpPr/>
+          <p:nvPr/>
+        </p:nvSpPr>
+        <p:spPr>
+          <a:xfrm>
+            <a:off x="868680" y="1508760"/>
+            <a:ext cx="6537960" cy="4160520"/>
           </a:xfrm>
           <a:prstGeom prst="rect">
             <a:avLst/>
@@ -14771,7 +15986,7 @@
           <a:lstStyle/>
           <a:p>
             <a:r>
-              <a:rPr lang="en-US" sz="1700" dirty="0">
+              <a:rPr lang="en-US" sz="2100" dirty="0">
                 <a:solidFill>
                   <a:srgbClr val="17364A"/>
                 </a:solidFill>
@@ -14779,13 +15994,13 @@
                 <a:ea typeface="Aptos" pitchFamily="34" charset="-122"/>
                 <a:cs typeface="Aptos" pitchFamily="34" charset="-120"/>
               </a:rPr>
-              <a:t>Public Comment, Social Listening, and Community Feedback Analysis matters because AI adoption changes how public health.</a:t>
-            </a:r>
-            <a:endParaRPr lang="en-US" sz="1700" dirty="0"/>
-          </a:p>
-          <a:p>
-            <a:r>
-              <a:rPr lang="en-US" sz="1700" dirty="0">
+              <a:t>Public Comment, Social Listening, and Community Feedback Analysis matters because AI adoption changes.</a:t>
+            </a:r>
+            <a:endParaRPr lang="en-US" sz="2100" dirty="0"/>
+          </a:p>
+          <a:p>
+            <a:r>
+              <a:rPr lang="en-US" sz="2100" dirty="0">
                 <a:solidFill>
                   <a:srgbClr val="17364A"/>
                 </a:solidFill>
@@ -14793,13 +16008,13 @@
                 <a:ea typeface="Aptos" pitchFamily="34" charset="-122"/>
                 <a:cs typeface="Aptos" pitchFamily="34" charset="-120"/>
               </a:rPr>
-              <a:t>Without a structured approach, staff may rely on informal practices, vendor assurances, or one-time approvals that do not.</a:t>
-            </a:r>
-            <a:endParaRPr lang="en-US" sz="1700" dirty="0"/>
-          </a:p>
-          <a:p>
-            <a:r>
-              <a:rPr lang="en-US" sz="1700" dirty="0">
+              <a:t>Without a structured approach, staff may rely on informal practices, vendor assurances, or one-time.</a:t>
+            </a:r>
+            <a:endParaRPr lang="en-US" sz="2100" dirty="0"/>
+          </a:p>
+          <a:p>
+            <a:r>
+              <a:rPr lang="en-US" sz="2100" dirty="0">
                 <a:solidFill>
                   <a:srgbClr val="17364A"/>
                 </a:solidFill>
@@ -14807,29 +16022,15 @@
                 <a:ea typeface="Aptos" pitchFamily="34" charset="-122"/>
                 <a:cs typeface="Aptos" pitchFamily="34" charset="-120"/>
               </a:rPr>
-              <a:t>Public health agencies operate under legal authorities, public accountability, resource constraints, and community trust.</a:t>
-            </a:r>
-            <a:endParaRPr lang="en-US" sz="1700" dirty="0"/>
-          </a:p>
-          <a:p>
-            <a:r>
-              <a:rPr lang="en-US" sz="1700" dirty="0">
-                <a:solidFill>
-                  <a:srgbClr val="17364A"/>
-                </a:solidFill>
-                <a:latin typeface="Aptos" pitchFamily="34" charset="0"/>
-                <a:ea typeface="Aptos" pitchFamily="34" charset="-122"/>
-                <a:cs typeface="Aptos" pitchFamily="34" charset="-120"/>
-              </a:rPr>
-              <a:t>A module on this topic helps agencies define repeatable expectations before urgent situations arise.</a:t>
-            </a:r>
-            <a:endParaRPr lang="en-US" sz="1700" dirty="0"/>
-          </a:p>
-        </p:txBody>
-      </p:sp>
-      <p:sp>
-        <p:nvSpPr>
-          <p:cNvPr id="11" name="Shape 9"/>
+              <a:t>Public health agencies operate under legal authorities, public accountability, resource constraints,.</a:t>
+            </a:r>
+            <a:endParaRPr lang="en-US" sz="2100" dirty="0"/>
+          </a:p>
+        </p:txBody>
+      </p:sp>
+      <p:sp>
+        <p:nvSpPr>
+          <p:cNvPr id="12" name="Shape 10"/>
           <p:cNvSpPr/>
           <p:nvPr/>
         </p:nvSpPr>
@@ -14856,14 +16057,14 @@
       </p:sp>
       <p:sp>
         <p:nvSpPr>
-          <p:cNvPr id="12" name="Text 10"/>
+          <p:cNvPr id="13" name="Text 11"/>
           <p:cNvSpPr/>
           <p:nvPr/>
         </p:nvSpPr>
         <p:spPr>
           <a:xfrm>
             <a:off x="8074152" y="1563624"/>
-            <a:ext cx="2825496" cy="201168"/>
+            <a:ext cx="2825496" cy="256032"/>
           </a:xfrm>
           <a:prstGeom prst="rect">
             <a:avLst/>
@@ -14879,7 +16080,7 @@
               <a:buNone/>
             </a:pPr>
             <a:r>
-              <a:rPr lang="en-US" sz="950" b="1" dirty="0">
+              <a:rPr lang="en-US" sz="1300" b="1" dirty="0">
                 <a:solidFill>
                   <a:srgbClr val="0068B7"/>
                 </a:solidFill>
@@ -14889,20 +16090,20 @@
               </a:rPr>
               <a:t>Key idea</a:t>
             </a:r>
-            <a:endParaRPr lang="en-US" sz="950" dirty="0"/>
-          </a:p>
-        </p:txBody>
-      </p:sp>
-      <p:sp>
-        <p:nvSpPr>
-          <p:cNvPr id="13" name="Text 11"/>
-          <p:cNvSpPr/>
-          <p:nvPr/>
-        </p:nvSpPr>
-        <p:spPr>
-          <a:xfrm>
-            <a:off x="8074152" y="1856232"/>
-            <a:ext cx="2825496" cy="1261872"/>
+            <a:endParaRPr lang="en-US" sz="1300" dirty="0"/>
+          </a:p>
+        </p:txBody>
+      </p:sp>
+      <p:sp>
+        <p:nvSpPr>
+          <p:cNvPr id="14" name="Text 12"/>
+          <p:cNvSpPr/>
+          <p:nvPr/>
+        </p:nvSpPr>
+        <p:spPr>
+          <a:xfrm>
+            <a:off x="8074152" y="1920240"/>
+            <a:ext cx="2825496" cy="1188720"/>
           </a:xfrm>
           <a:prstGeom prst="rect">
             <a:avLst/>
@@ -14920,7 +16121,7 @@
               <a:buNone/>
             </a:pPr>
             <a:r>
-              <a:rPr lang="en-US" sz="1250" dirty="0">
+              <a:rPr lang="en-US" sz="1550" dirty="0">
                 <a:solidFill>
                   <a:srgbClr val="17364A"/>
                 </a:solidFill>
@@ -14928,15 +16129,15 @@
                 <a:ea typeface="Aptos" pitchFamily="34" charset="-122"/>
                 <a:cs typeface="Aptos" pitchFamily="34" charset="-120"/>
               </a:rPr>
-              <a:t>Public Comment, Social Listening, and Community Feedback Analysis matters because AI adoption changes how public health.</a:t>
-            </a:r>
-            <a:endParaRPr lang="en-US" sz="1250" dirty="0"/>
-          </a:p>
-        </p:txBody>
-      </p:sp>
-      <p:sp>
-        <p:nvSpPr>
-          <p:cNvPr id="14" name="Shape 12"/>
+              <a:t>Public Comment, Social Listening, and Community Feedback Analysis matters because AI adoption changes.</a:t>
+            </a:r>
+            <a:endParaRPr lang="en-US" sz="1550" dirty="0"/>
+          </a:p>
+        </p:txBody>
+      </p:sp>
+      <p:sp>
+        <p:nvSpPr>
+          <p:cNvPr id="15" name="Shape 13"/>
           <p:cNvSpPr/>
           <p:nvPr/>
         </p:nvSpPr>
@@ -14963,14 +16164,14 @@
       </p:sp>
       <p:sp>
         <p:nvSpPr>
-          <p:cNvPr id="15" name="Text 13"/>
+          <p:cNvPr id="16" name="Text 14"/>
           <p:cNvSpPr/>
           <p:nvPr/>
         </p:nvSpPr>
         <p:spPr>
           <a:xfrm>
             <a:off x="8074152" y="3666744"/>
-            <a:ext cx="2825496" cy="201168"/>
+            <a:ext cx="2825496" cy="256032"/>
           </a:xfrm>
           <a:prstGeom prst="rect">
             <a:avLst/>
@@ -14986,7 +16187,7 @@
               <a:buNone/>
             </a:pPr>
             <a:r>
-              <a:rPr lang="en-US" sz="950" b="1" dirty="0">
+              <a:rPr lang="en-US" sz="1300" b="1" dirty="0">
                 <a:solidFill>
                   <a:srgbClr val="0068B7"/>
                 </a:solidFill>
@@ -14996,20 +16197,20 @@
               </a:rPr>
               <a:t>Use this for</a:t>
             </a:r>
-            <a:endParaRPr lang="en-US" sz="950" dirty="0"/>
-          </a:p>
-        </p:txBody>
-      </p:sp>
-      <p:sp>
-        <p:nvSpPr>
-          <p:cNvPr id="16" name="Text 14"/>
-          <p:cNvSpPr/>
-          <p:nvPr/>
-        </p:nvSpPr>
-        <p:spPr>
-          <a:xfrm>
-            <a:off x="8074152" y="3959352"/>
-            <a:ext cx="2825496" cy="1170432"/>
+            <a:endParaRPr lang="en-US" sz="1300" dirty="0"/>
+          </a:p>
+        </p:txBody>
+      </p:sp>
+      <p:sp>
+        <p:nvSpPr>
+          <p:cNvPr id="17" name="Text 15"/>
+          <p:cNvSpPr/>
+          <p:nvPr/>
+        </p:nvSpPr>
+        <p:spPr>
+          <a:xfrm>
+            <a:off x="8074152" y="4023360"/>
+            <a:ext cx="2825496" cy="1097280"/>
           </a:xfrm>
           <a:prstGeom prst="rect">
             <a:avLst/>
@@ -15027,7 +16228,7 @@
               <a:buNone/>
             </a:pPr>
             <a:r>
-              <a:rPr lang="en-US" sz="1250" dirty="0">
+              <a:rPr lang="en-US" sz="1550" dirty="0">
                 <a:solidFill>
                   <a:srgbClr val="17364A"/>
                 </a:solidFill>
@@ -15037,7 +16238,7 @@
               </a:rPr>
               <a:t>Connect the concept to public health decisions, safeguards, documentation, or implementation work.</a:t>
             </a:r>
-            <a:endParaRPr lang="en-US" sz="1250" dirty="0"/>
+            <a:endParaRPr lang="en-US" sz="1550" dirty="0"/>
           </a:p>
         </p:txBody>
       </p:sp>
